--- a/output/wordlabs-prove-3day.pptx
+++ b/output/wordlabs-prove-3day.pptx
@@ -4240,7 +4240,7 @@
                 <a:ea typeface="Calibri" pitchFamily="34" charset="-122"/>
                 <a:cs typeface="Calibri" pitchFamily="34" charset="-120"/>
               </a:rPr>
-              <a:t>"to show something is true"</a:t>
+              <a:t>"to test or show truth"</a:t>
             </a:r>
             <a:endParaRPr lang="en-US" sz="2200" dirty="0"/>
           </a:p>
@@ -5288,7 +5288,7 @@
                 <a:ea typeface="Calibri" pitchFamily="34" charset="-122"/>
                 <a:cs typeface="Calibri" pitchFamily="34" charset="-120"/>
               </a:rPr>
-              <a:t>Word Labs  •  wordlabs.app  •  Root: 'prove' = to show something is true</a:t>
+              <a:t>Word Labs  •  wordlabs.app  •  Root: 'prove' = to test or show truth</a:t>
             </a:r>
             <a:endParaRPr lang="en-US" sz="800" dirty="0"/>
           </a:p>
@@ -5928,7 +5928,7 @@
                 <a:ea typeface="Calibri" pitchFamily="34" charset="-122"/>
                 <a:cs typeface="Calibri" pitchFamily="34" charset="-120"/>
               </a:rPr>
-              <a:t>Word Labs  •  wordlabs.app  •  Root: 'prove' = to show something is true</a:t>
+              <a:t>Word Labs  •  wordlabs.app  •  Root: 'prove' = to test or show truth</a:t>
             </a:r>
             <a:endParaRPr lang="en-US" sz="800" dirty="0"/>
           </a:p>
@@ -6057,7 +6057,7 @@
                 <a:ea typeface="Calibri" pitchFamily="34" charset="-122"/>
                 <a:cs typeface="Calibri" pitchFamily="34" charset="-120"/>
               </a:rPr>
-              <a:t>improve</a:t>
+              <a:t>prove</a:t>
             </a:r>
             <a:pPr algn="l" indent="0" marL="0">
               <a:buNone/>
@@ -6071,7 +6071,7 @@
                 <a:ea typeface="Calibri" pitchFamily="34" charset="-122"/>
                 <a:cs typeface="Calibri" pitchFamily="34" charset="-120"/>
               </a:rPr>
-              <a:t> your work and </a:t>
+              <a:t> that your method will </a:t>
             </a:r>
             <a:pPr algn="l" indent="0" marL="0">
               <a:buNone/>
@@ -6088,7 +6088,7 @@
                 <a:ea typeface="Calibri" pitchFamily="34" charset="-122"/>
                 <a:cs typeface="Calibri" pitchFamily="34" charset="-120"/>
               </a:rPr>
-              <a:t>prove</a:t>
+              <a:t>improve</a:t>
             </a:r>
             <a:pPr algn="l" indent="0" marL="0">
               <a:buNone/>
@@ -6102,7 +6102,7 @@
                 <a:ea typeface="Calibri" pitchFamily="34" charset="-122"/>
                 <a:cs typeface="Calibri" pitchFamily="34" charset="-120"/>
               </a:rPr>
-              <a:t> that you understand the task?</a:t>
+              <a:t> the results of our experiment?</a:t>
             </a:r>
             <a:endParaRPr lang="en-US" sz="1800" dirty="0"/>
           </a:p>
@@ -6257,7 +6257,7 @@
                 <a:ea typeface="Trebuchet MS" pitchFamily="34" charset="-122"/>
                 <a:cs typeface="Trebuchet MS" pitchFamily="34" charset="-120"/>
               </a:rPr>
-              <a:t>improve</a:t>
+              <a:t>prove</a:t>
             </a:r>
             <a:endParaRPr lang="en-US" sz="1400" dirty="0"/>
           </a:p>
@@ -6385,7 +6385,7 @@
                 <a:ea typeface="Trebuchet MS" pitchFamily="34" charset="-122"/>
                 <a:cs typeface="Trebuchet MS" pitchFamily="34" charset="-120"/>
               </a:rPr>
-              <a:t>prove</a:t>
+              <a:t>improve</a:t>
             </a:r>
             <a:endParaRPr lang="en-US" sz="1400" dirty="0"/>
           </a:p>
@@ -6716,7 +6716,7 @@
                 <a:ea typeface="Calibri" pitchFamily="34" charset="-122"/>
                 <a:cs typeface="Calibri" pitchFamily="34" charset="-120"/>
               </a:rPr>
-              <a:t>Word Labs  •  wordlabs.app  •  Root: 'prove' = to show something is true</a:t>
+              <a:t>Word Labs  •  wordlabs.app  •  Root: 'prove' = to test or show truth</a:t>
             </a:r>
             <a:endParaRPr lang="en-US" sz="800" dirty="0"/>
           </a:p>
@@ -6855,7 +6855,7 @@
                 <a:ea typeface="Trebuchet MS" pitchFamily="34" charset="-122"/>
                 <a:cs typeface="Trebuchet MS" pitchFamily="34" charset="-120"/>
               </a:rPr>
-              <a:t>improve</a:t>
+              <a:t>prove</a:t>
             </a:r>
             <a:endParaRPr lang="en-US" sz="2800" dirty="0"/>
           </a:p>
@@ -7543,7 +7543,7 @@
                 <a:ea typeface="Calibri" pitchFamily="34" charset="-122"/>
                 <a:cs typeface="Calibri" pitchFamily="34" charset="-120"/>
               </a:rPr>
-              <a:t>Word Labs  •  wordlabs.app  •  Root: 'prove' = to show something is true</a:t>
+              <a:t>Word Labs  •  wordlabs.app  •  Root: 'prove' = to test or show truth</a:t>
             </a:r>
             <a:endParaRPr lang="en-US" sz="800" dirty="0"/>
           </a:p>
@@ -7682,7 +7682,7 @@
                 <a:ea typeface="Trebuchet MS" pitchFamily="34" charset="-122"/>
                 <a:cs typeface="Trebuchet MS" pitchFamily="34" charset="-120"/>
               </a:rPr>
-              <a:t>improve</a:t>
+              <a:t>prove</a:t>
             </a:r>
             <a:endParaRPr lang="en-US" sz="2800" dirty="0"/>
           </a:p>
@@ -7762,7 +7762,7 @@
         </p:nvSpPr>
         <p:spPr>
           <a:xfrm>
-            <a:off x="2938272" y="2258568"/>
+            <a:off x="4370832" y="2258568"/>
             <a:ext cx="1828800" cy="292608"/>
           </a:xfrm>
           <a:prstGeom prst="rect">
@@ -7771,11 +7771,11 @@
             </a:avLst>
           </a:prstGeom>
           <a:solidFill>
-            <a:srgbClr val="DDD6FE"/>
+            <a:srgbClr val="CCFBF1"/>
           </a:solidFill>
           <a:ln w="19050">
             <a:solidFill>
-              <a:srgbClr val="7C3AED"/>
+              <a:srgbClr val="0D9488"/>
             </a:solidFill>
             <a:prstDash val="solid"/>
           </a:ln>
@@ -7796,7 +7796,7 @@
         </p:nvSpPr>
         <p:spPr>
           <a:xfrm>
-            <a:off x="2938272" y="2258568"/>
+            <a:off x="4370832" y="2258568"/>
             <a:ext cx="1828800" cy="292608"/>
           </a:xfrm>
           <a:prstGeom prst="rect">
@@ -7815,13 +7815,13 @@
             <a:r>
               <a:rPr lang="en-US" sz="1300" b="1" dirty="0">
                 <a:solidFill>
-                  <a:srgbClr val="4C1D95"/>
+                  <a:srgbClr val="0F766E"/>
                 </a:solidFill>
                 <a:latin typeface="Trebuchet MS" pitchFamily="34" charset="0"/>
                 <a:ea typeface="Trebuchet MS" pitchFamily="34" charset="-122"/>
                 <a:cs typeface="Trebuchet MS" pitchFamily="34" charset="-120"/>
               </a:rPr>
-              <a:t>im</a:t>
+              <a:t>prove</a:t>
             </a:r>
             <a:endParaRPr lang="en-US" sz="1300" dirty="0"/>
           </a:p>
@@ -7835,7 +7835,7 @@
         </p:nvSpPr>
         <p:spPr>
           <a:xfrm>
-            <a:off x="2938272" y="2569464"/>
+            <a:off x="4370832" y="2569464"/>
             <a:ext cx="1828800" cy="201168"/>
           </a:xfrm>
           <a:prstGeom prst="rect">
@@ -7860,7 +7860,7 @@
                 <a:ea typeface="Calibri" pitchFamily="34" charset="-122"/>
                 <a:cs typeface="Calibri" pitchFamily="34" charset="-120"/>
               </a:rPr>
-              <a:t>into, towards</a:t>
+              <a:t>to test or show truth</a:t>
             </a:r>
             <a:endParaRPr lang="en-US" sz="850" dirty="0"/>
           </a:p>
@@ -7874,30 +7874,23 @@
         </p:nvSpPr>
         <p:spPr>
           <a:xfrm>
-            <a:off x="5803392" y="2258568"/>
-            <a:ext cx="1828800" cy="292608"/>
+            <a:off x="365760" y="3273552"/>
+            <a:ext cx="1371600" cy="658368"/>
           </a:xfrm>
           <a:prstGeom prst="rect">
             <a:avLst>
-              <a:gd name="adj" fmla="val 25000"/>
+              <a:gd name="adj" fmla="val 8333"/>
             </a:avLst>
           </a:prstGeom>
           <a:solidFill>
-            <a:srgbClr val="CCFBF1"/>
-          </a:solidFill>
-          <a:ln w="19050">
-            <a:solidFill>
-              <a:srgbClr val="0D9488"/>
-            </a:solidFill>
-            <a:prstDash val="solid"/>
-          </a:ln>
-          <a:effectLst>
-            <a:outerShdw sx="100000" sy="100000" kx="0" ky="0" algn="bl" rotWithShape="0" blurRad="101600" dist="38100" dir="8100000">
-              <a:srgbClr val="000000">
-                <a:alpha val="12000"/>
-              </a:srgbClr>
-            </a:outerShdw>
-          </a:effectLst>
+            <a:srgbClr val="E2E8F0"/>
+          </a:solidFill>
+          <a:ln w="12700">
+            <a:solidFill>
+              <a:srgbClr val="E2E8F0"/>
+            </a:solidFill>
+            <a:prstDash val="solid"/>
+          </a:ln>
         </p:spPr>
       </p:sp>
       <p:sp>
@@ -7908,8 +7901,8 @@
         </p:nvSpPr>
         <p:spPr>
           <a:xfrm>
-            <a:off x="5803392" y="2258568"/>
-            <a:ext cx="1828800" cy="292608"/>
+            <a:off x="365760" y="3273552"/>
+            <a:ext cx="1371600" cy="658368"/>
           </a:xfrm>
           <a:prstGeom prst="rect">
             <a:avLst/>
@@ -7925,73 +7918,100 @@
               <a:buNone/>
             </a:pPr>
             <a:r>
-              <a:rPr lang="en-US" sz="1300" b="1" dirty="0">
-                <a:solidFill>
-                  <a:srgbClr val="0F766E"/>
+              <a:rPr lang="en-US" sz="1100" b="1" dirty="0">
+                <a:solidFill>
+                  <a:srgbClr val="475569"/>
                 </a:solidFill>
                 <a:latin typeface="Trebuchet MS" pitchFamily="34" charset="0"/>
                 <a:ea typeface="Trebuchet MS" pitchFamily="34" charset="-122"/>
                 <a:cs typeface="Trebuchet MS" pitchFamily="34" charset="-120"/>
               </a:rPr>
-              <a:t>prove</a:t>
-            </a:r>
-            <a:endParaRPr lang="en-US" sz="1300" dirty="0"/>
-          </a:p>
-        </p:txBody>
-      </p:sp>
-      <p:sp>
-        <p:nvSpPr>
-          <p:cNvPr id="21" name="Text 19"/>
-          <p:cNvSpPr/>
-          <p:nvPr/>
-        </p:nvSpPr>
-        <p:spPr>
-          <a:xfrm>
-            <a:off x="5803392" y="2569464"/>
-            <a:ext cx="1828800" cy="201168"/>
-          </a:xfrm>
-          <a:prstGeom prst="rect">
-            <a:avLst/>
-          </a:prstGeom>
-          <a:noFill/>
-          <a:ln/>
-        </p:spPr>
-        <p:txBody>
-          <a:bodyPr wrap="square" lIns="0" tIns="0" rIns="0" bIns="0" rtlCol="0" anchor="t"/>
-          <a:lstStyle/>
-          <a:p>
-            <a:pPr algn="ctr" indent="0" marL="0">
-              <a:buNone/>
-            </a:pPr>
-            <a:r>
-              <a:rPr lang="en-US" sz="850" dirty="0">
-                <a:solidFill>
-                  <a:srgbClr val="475569"/>
+              <a:t>Syllables</a:t>
+            </a:r>
+            <a:endParaRPr lang="en-US" sz="1100" dirty="0"/>
+          </a:p>
+        </p:txBody>
+      </p:sp>
+      <p:sp>
+        <p:nvSpPr>
+          <p:cNvPr id="21" name="Shape 19"/>
+          <p:cNvSpPr/>
+          <p:nvPr/>
+        </p:nvSpPr>
+        <p:spPr>
+          <a:xfrm>
+            <a:off x="1874520" y="3273552"/>
+            <a:ext cx="6903720" cy="658368"/>
+          </a:xfrm>
+          <a:prstGeom prst="rect">
+            <a:avLst>
+              <a:gd name="adj" fmla="val 8333"/>
+            </a:avLst>
+          </a:prstGeom>
+          <a:solidFill>
+            <a:srgbClr val="F8FAFC"/>
+          </a:solidFill>
+          <a:ln w="12700">
+            <a:solidFill>
+              <a:srgbClr val="E2E8F0"/>
+            </a:solidFill>
+            <a:prstDash val="dash"/>
+          </a:ln>
+        </p:spPr>
+      </p:sp>
+      <p:sp>
+        <p:nvSpPr>
+          <p:cNvPr id="22" name="Text 20"/>
+          <p:cNvSpPr/>
+          <p:nvPr/>
+        </p:nvSpPr>
+        <p:spPr>
+          <a:xfrm>
+            <a:off x="1874520" y="3273552"/>
+            <a:ext cx="6903720" cy="658368"/>
+          </a:xfrm>
+          <a:prstGeom prst="rect">
+            <a:avLst/>
+          </a:prstGeom>
+          <a:noFill/>
+          <a:ln/>
+        </p:spPr>
+        <p:txBody>
+          <a:bodyPr wrap="square" rtlCol="0" anchor="ctr"/>
+          <a:lstStyle/>
+          <a:p>
+            <a:pPr algn="ctr" indent="0" marL="0">
+              <a:buNone/>
+            </a:pPr>
+            <a:r>
+              <a:rPr lang="en-US" sz="1100" i="1" dirty="0">
+                <a:solidFill>
+                  <a:srgbClr val="CBD5E1"/>
                 </a:solidFill>
                 <a:latin typeface="Calibri" pitchFamily="34" charset="0"/>
                 <a:ea typeface="Calibri" pitchFamily="34" charset="-122"/>
                 <a:cs typeface="Calibri" pitchFamily="34" charset="-120"/>
               </a:rPr>
-              <a:t>to show is true</a:t>
-            </a:r>
-            <a:endParaRPr lang="en-US" sz="850" dirty="0"/>
-          </a:p>
-        </p:txBody>
-      </p:sp>
-      <p:sp>
-        <p:nvSpPr>
-          <p:cNvPr id="22" name="Shape 20"/>
-          <p:cNvSpPr/>
-          <p:nvPr/>
-        </p:nvSpPr>
-        <p:spPr>
-          <a:xfrm>
-            <a:off x="365760" y="3273552"/>
-            <a:ext cx="1371600" cy="658368"/>
+              <a:t>Write here...</a:t>
+            </a:r>
+            <a:endParaRPr lang="en-US" sz="1100" dirty="0"/>
+          </a:p>
+        </p:txBody>
+      </p:sp>
+      <p:sp>
+        <p:nvSpPr>
+          <p:cNvPr id="23" name="Shape 21"/>
+          <p:cNvSpPr/>
+          <p:nvPr/>
+        </p:nvSpPr>
+        <p:spPr>
+          <a:xfrm>
+            <a:off x="365760" y="4096512"/>
+            <a:ext cx="1371600" cy="804672"/>
           </a:xfrm>
           <a:prstGeom prst="rect">
             <a:avLst>
-              <a:gd name="adj" fmla="val 8333"/>
+              <a:gd name="adj" fmla="val 6818"/>
             </a:avLst>
           </a:prstGeom>
           <a:solidFill>
@@ -8007,14 +8027,14 @@
       </p:sp>
       <p:sp>
         <p:nvSpPr>
-          <p:cNvPr id="23" name="Text 21"/>
-          <p:cNvSpPr/>
-          <p:nvPr/>
-        </p:nvSpPr>
-        <p:spPr>
-          <a:xfrm>
-            <a:off x="365760" y="3273552"/>
-            <a:ext cx="1371600" cy="658368"/>
+          <p:cNvPr id="24" name="Text 22"/>
+          <p:cNvSpPr/>
+          <p:nvPr/>
+        </p:nvSpPr>
+        <p:spPr>
+          <a:xfrm>
+            <a:off x="365760" y="4096512"/>
+            <a:ext cx="1371600" cy="804672"/>
           </a:xfrm>
           <a:prstGeom prst="rect">
             <a:avLst/>
@@ -8038,7 +8058,7 @@
                 <a:ea typeface="Trebuchet MS" pitchFamily="34" charset="-122"/>
                 <a:cs typeface="Trebuchet MS" pitchFamily="34" charset="-120"/>
               </a:rPr>
-              <a:t>Syllables</a:t>
+              <a:t>Phonemes</a:t>
             </a:r>
             <a:endParaRPr lang="en-US" sz="1100" dirty="0"/>
           </a:p>
@@ -8046,80 +8066,14 @@
       </p:sp>
       <p:sp>
         <p:nvSpPr>
-          <p:cNvPr id="24" name="Shape 22"/>
-          <p:cNvSpPr/>
-          <p:nvPr/>
-        </p:nvSpPr>
-        <p:spPr>
-          <a:xfrm>
-            <a:off x="1874520" y="3273552"/>
-            <a:ext cx="6903720" cy="658368"/>
-          </a:xfrm>
-          <a:prstGeom prst="rect">
-            <a:avLst>
-              <a:gd name="adj" fmla="val 8333"/>
-            </a:avLst>
-          </a:prstGeom>
-          <a:solidFill>
-            <a:srgbClr val="F8FAFC"/>
-          </a:solidFill>
-          <a:ln w="12700">
-            <a:solidFill>
-              <a:srgbClr val="E2E8F0"/>
-            </a:solidFill>
-            <a:prstDash val="dash"/>
-          </a:ln>
-        </p:spPr>
-      </p:sp>
-      <p:sp>
-        <p:nvSpPr>
-          <p:cNvPr id="25" name="Text 23"/>
-          <p:cNvSpPr/>
-          <p:nvPr/>
-        </p:nvSpPr>
-        <p:spPr>
-          <a:xfrm>
-            <a:off x="1874520" y="3273552"/>
-            <a:ext cx="6903720" cy="658368"/>
-          </a:xfrm>
-          <a:prstGeom prst="rect">
-            <a:avLst/>
-          </a:prstGeom>
-          <a:noFill/>
-          <a:ln/>
-        </p:spPr>
-        <p:txBody>
-          <a:bodyPr wrap="square" rtlCol="0" anchor="ctr"/>
-          <a:lstStyle/>
-          <a:p>
-            <a:pPr algn="ctr" indent="0" marL="0">
-              <a:buNone/>
-            </a:pPr>
-            <a:r>
-              <a:rPr lang="en-US" sz="1100" i="1" dirty="0">
-                <a:solidFill>
-                  <a:srgbClr val="CBD5E1"/>
-                </a:solidFill>
-                <a:latin typeface="Calibri" pitchFamily="34" charset="0"/>
-                <a:ea typeface="Calibri" pitchFamily="34" charset="-122"/>
-                <a:cs typeface="Calibri" pitchFamily="34" charset="-120"/>
-              </a:rPr>
-              <a:t>Write here...</a:t>
-            </a:r>
-            <a:endParaRPr lang="en-US" sz="1100" dirty="0"/>
-          </a:p>
-        </p:txBody>
-      </p:sp>
-      <p:sp>
-        <p:nvSpPr>
-          <p:cNvPr id="26" name="Shape 24"/>
-          <p:cNvSpPr/>
-          <p:nvPr/>
-        </p:nvSpPr>
-        <p:spPr>
-          <a:xfrm>
-            <a:off x="365760" y="4096512"/>
-            <a:ext cx="1371600" cy="804672"/>
+          <p:cNvPr id="25" name="Shape 23"/>
+          <p:cNvSpPr/>
+          <p:nvPr/>
+        </p:nvSpPr>
+        <p:spPr>
+          <a:xfrm>
+            <a:off x="1874520" y="4096512"/>
+            <a:ext cx="6903720" cy="804672"/>
           </a:xfrm>
           <a:prstGeom prst="rect">
             <a:avLst>
@@ -8127,85 +8081,19 @@
             </a:avLst>
           </a:prstGeom>
           <a:solidFill>
-            <a:srgbClr val="E2E8F0"/>
+            <a:srgbClr val="F8FAFC"/>
           </a:solidFill>
           <a:ln w="12700">
             <a:solidFill>
               <a:srgbClr val="E2E8F0"/>
             </a:solidFill>
-            <a:prstDash val="solid"/>
-          </a:ln>
-        </p:spPr>
-      </p:sp>
-      <p:sp>
-        <p:nvSpPr>
-          <p:cNvPr id="27" name="Text 25"/>
-          <p:cNvSpPr/>
-          <p:nvPr/>
-        </p:nvSpPr>
-        <p:spPr>
-          <a:xfrm>
-            <a:off x="365760" y="4096512"/>
-            <a:ext cx="1371600" cy="804672"/>
-          </a:xfrm>
-          <a:prstGeom prst="rect">
-            <a:avLst/>
-          </a:prstGeom>
-          <a:noFill/>
-          <a:ln/>
-        </p:spPr>
-        <p:txBody>
-          <a:bodyPr wrap="square" lIns="0" tIns="0" rIns="0" bIns="0" rtlCol="0" anchor="ctr"/>
-          <a:lstStyle/>
-          <a:p>
-            <a:pPr algn="ctr" indent="0" marL="0">
-              <a:buNone/>
-            </a:pPr>
-            <a:r>
-              <a:rPr lang="en-US" sz="1100" b="1" dirty="0">
-                <a:solidFill>
-                  <a:srgbClr val="475569"/>
-                </a:solidFill>
-                <a:latin typeface="Trebuchet MS" pitchFamily="34" charset="0"/>
-                <a:ea typeface="Trebuchet MS" pitchFamily="34" charset="-122"/>
-                <a:cs typeface="Trebuchet MS" pitchFamily="34" charset="-120"/>
-              </a:rPr>
-              <a:t>Phonemes</a:t>
-            </a:r>
-            <a:endParaRPr lang="en-US" sz="1100" dirty="0"/>
-          </a:p>
-        </p:txBody>
-      </p:sp>
-      <p:sp>
-        <p:nvSpPr>
-          <p:cNvPr id="28" name="Shape 26"/>
-          <p:cNvSpPr/>
-          <p:nvPr/>
-        </p:nvSpPr>
-        <p:spPr>
-          <a:xfrm>
-            <a:off x="1874520" y="4096512"/>
-            <a:ext cx="6903720" cy="804672"/>
-          </a:xfrm>
-          <a:prstGeom prst="rect">
-            <a:avLst>
-              <a:gd name="adj" fmla="val 6818"/>
-            </a:avLst>
-          </a:prstGeom>
-          <a:solidFill>
-            <a:srgbClr val="F8FAFC"/>
-          </a:solidFill>
-          <a:ln w="12700">
-            <a:solidFill>
-              <a:srgbClr val="E2E8F0"/>
-            </a:solidFill>
             <a:prstDash val="dash"/>
           </a:ln>
         </p:spPr>
       </p:sp>
       <p:sp>
         <p:nvSpPr>
-          <p:cNvPr id="29" name="Text 27"/>
+          <p:cNvPr id="26" name="Text 24"/>
           <p:cNvSpPr/>
           <p:nvPr/>
         </p:nvSpPr>
@@ -8528,7 +8416,7 @@
                 <a:ea typeface="Calibri" pitchFamily="34" charset="-122"/>
                 <a:cs typeface="Calibri" pitchFamily="34" charset="-120"/>
               </a:rPr>
-              <a:t>Word Labs  •  wordlabs.app  •  Root: 'prove' = to show something is true</a:t>
+              <a:t>Word Labs  •  wordlabs.app  •  Root: 'prove' = to test or show truth</a:t>
             </a:r>
             <a:endParaRPr lang="en-US" sz="800" dirty="0"/>
           </a:p>
@@ -8667,7 +8555,7 @@
                 <a:ea typeface="Trebuchet MS" pitchFamily="34" charset="-122"/>
                 <a:cs typeface="Trebuchet MS" pitchFamily="34" charset="-120"/>
               </a:rPr>
-              <a:t>improve</a:t>
+              <a:t>prove</a:t>
             </a:r>
             <a:endParaRPr lang="en-US" sz="2800" dirty="0"/>
           </a:p>
@@ -8747,7 +8635,7 @@
         </p:nvSpPr>
         <p:spPr>
           <a:xfrm>
-            <a:off x="2938272" y="2258568"/>
+            <a:off x="4370832" y="2258568"/>
             <a:ext cx="1828800" cy="292608"/>
           </a:xfrm>
           <a:prstGeom prst="rect">
@@ -8756,11 +8644,11 @@
             </a:avLst>
           </a:prstGeom>
           <a:solidFill>
-            <a:srgbClr val="DDD6FE"/>
+            <a:srgbClr val="CCFBF1"/>
           </a:solidFill>
           <a:ln w="19050">
             <a:solidFill>
-              <a:srgbClr val="7C3AED"/>
+              <a:srgbClr val="0D9488"/>
             </a:solidFill>
             <a:prstDash val="solid"/>
           </a:ln>
@@ -8781,7 +8669,7 @@
         </p:nvSpPr>
         <p:spPr>
           <a:xfrm>
-            <a:off x="2938272" y="2258568"/>
+            <a:off x="4370832" y="2258568"/>
             <a:ext cx="1828800" cy="292608"/>
           </a:xfrm>
           <a:prstGeom prst="rect">
@@ -8800,13 +8688,13 @@
             <a:r>
               <a:rPr lang="en-US" sz="1300" b="1" dirty="0">
                 <a:solidFill>
-                  <a:srgbClr val="4C1D95"/>
+                  <a:srgbClr val="0F766E"/>
                 </a:solidFill>
                 <a:latin typeface="Trebuchet MS" pitchFamily="34" charset="0"/>
                 <a:ea typeface="Trebuchet MS" pitchFamily="34" charset="-122"/>
                 <a:cs typeface="Trebuchet MS" pitchFamily="34" charset="-120"/>
               </a:rPr>
-              <a:t>im</a:t>
+              <a:t>prove</a:t>
             </a:r>
             <a:endParaRPr lang="en-US" sz="1300" dirty="0"/>
           </a:p>
@@ -8820,7 +8708,7 @@
         </p:nvSpPr>
         <p:spPr>
           <a:xfrm>
-            <a:off x="2938272" y="2569464"/>
+            <a:off x="4370832" y="2569464"/>
             <a:ext cx="1828800" cy="201168"/>
           </a:xfrm>
           <a:prstGeom prst="rect">
@@ -8845,7 +8733,7 @@
                 <a:ea typeface="Calibri" pitchFamily="34" charset="-122"/>
                 <a:cs typeface="Calibri" pitchFamily="34" charset="-120"/>
               </a:rPr>
-              <a:t>into, towards</a:t>
+              <a:t>to test or show truth</a:t>
             </a:r>
             <a:endParaRPr lang="en-US" sz="850" dirty="0"/>
           </a:p>
@@ -8859,30 +8747,23 @@
         </p:nvSpPr>
         <p:spPr>
           <a:xfrm>
-            <a:off x="5803392" y="2258568"/>
-            <a:ext cx="1828800" cy="292608"/>
+            <a:off x="365760" y="3273552"/>
+            <a:ext cx="1371600" cy="658368"/>
           </a:xfrm>
           <a:prstGeom prst="rect">
             <a:avLst>
-              <a:gd name="adj" fmla="val 25000"/>
+              <a:gd name="adj" fmla="val 8333"/>
             </a:avLst>
           </a:prstGeom>
           <a:solidFill>
-            <a:srgbClr val="CCFBF1"/>
-          </a:solidFill>
-          <a:ln w="19050">
-            <a:solidFill>
-              <a:srgbClr val="0D9488"/>
-            </a:solidFill>
-            <a:prstDash val="solid"/>
-          </a:ln>
-          <a:effectLst>
-            <a:outerShdw sx="100000" sy="100000" kx="0" ky="0" algn="bl" rotWithShape="0" blurRad="101600" dist="38100" dir="8100000">
-              <a:srgbClr val="000000">
-                <a:alpha val="12000"/>
-              </a:srgbClr>
-            </a:outerShdw>
-          </a:effectLst>
+            <a:srgbClr val="E2E8F0"/>
+          </a:solidFill>
+          <a:ln w="12700">
+            <a:solidFill>
+              <a:srgbClr val="E2E8F0"/>
+            </a:solidFill>
+            <a:prstDash val="solid"/>
+          </a:ln>
         </p:spPr>
       </p:sp>
       <p:sp>
@@ -8893,8 +8774,8 @@
         </p:nvSpPr>
         <p:spPr>
           <a:xfrm>
-            <a:off x="5803392" y="2258568"/>
-            <a:ext cx="1828800" cy="292608"/>
+            <a:off x="365760" y="3273552"/>
+            <a:ext cx="1371600" cy="658368"/>
           </a:xfrm>
           <a:prstGeom prst="rect">
             <a:avLst/>
@@ -8910,69 +8791,30 @@
               <a:buNone/>
             </a:pPr>
             <a:r>
-              <a:rPr lang="en-US" sz="1300" b="1" dirty="0">
-                <a:solidFill>
-                  <a:srgbClr val="0F766E"/>
+              <a:rPr lang="en-US" sz="1100" b="1" dirty="0">
+                <a:solidFill>
+                  <a:srgbClr val="475569"/>
                 </a:solidFill>
                 <a:latin typeface="Trebuchet MS" pitchFamily="34" charset="0"/>
                 <a:ea typeface="Trebuchet MS" pitchFamily="34" charset="-122"/>
                 <a:cs typeface="Trebuchet MS" pitchFamily="34" charset="-120"/>
               </a:rPr>
-              <a:t>prove</a:t>
-            </a:r>
-            <a:endParaRPr lang="en-US" sz="1300" dirty="0"/>
-          </a:p>
-        </p:txBody>
-      </p:sp>
-      <p:sp>
-        <p:nvSpPr>
-          <p:cNvPr id="21" name="Text 19"/>
-          <p:cNvSpPr/>
-          <p:nvPr/>
-        </p:nvSpPr>
-        <p:spPr>
-          <a:xfrm>
-            <a:off x="5803392" y="2569464"/>
-            <a:ext cx="1828800" cy="201168"/>
-          </a:xfrm>
-          <a:prstGeom prst="rect">
-            <a:avLst/>
-          </a:prstGeom>
-          <a:noFill/>
-          <a:ln/>
-        </p:spPr>
-        <p:txBody>
-          <a:bodyPr wrap="square" lIns="0" tIns="0" rIns="0" bIns="0" rtlCol="0" anchor="t"/>
-          <a:lstStyle/>
-          <a:p>
-            <a:pPr algn="ctr" indent="0" marL="0">
-              <a:buNone/>
-            </a:pPr>
-            <a:r>
-              <a:rPr lang="en-US" sz="850" dirty="0">
-                <a:solidFill>
-                  <a:srgbClr val="475569"/>
-                </a:solidFill>
-                <a:latin typeface="Calibri" pitchFamily="34" charset="0"/>
-                <a:ea typeface="Calibri" pitchFamily="34" charset="-122"/>
-                <a:cs typeface="Calibri" pitchFamily="34" charset="-120"/>
-              </a:rPr>
-              <a:t>to show is true</a:t>
-            </a:r>
-            <a:endParaRPr lang="en-US" sz="850" dirty="0"/>
-          </a:p>
-        </p:txBody>
-      </p:sp>
-      <p:sp>
-        <p:nvSpPr>
-          <p:cNvPr id="22" name="Shape 20"/>
-          <p:cNvSpPr/>
-          <p:nvPr/>
-        </p:nvSpPr>
-        <p:spPr>
-          <a:xfrm>
-            <a:off x="365760" y="3273552"/>
-            <a:ext cx="1371600" cy="658368"/>
+              <a:t>Syllables</a:t>
+            </a:r>
+            <a:endParaRPr lang="en-US" sz="1100" dirty="0"/>
+          </a:p>
+        </p:txBody>
+      </p:sp>
+      <p:sp>
+        <p:nvSpPr>
+          <p:cNvPr id="21" name="Shape 19"/>
+          <p:cNvSpPr/>
+          <p:nvPr/>
+        </p:nvSpPr>
+        <p:spPr>
+          <a:xfrm>
+            <a:off x="1874520" y="3273552"/>
+            <a:ext cx="6903720" cy="658368"/>
           </a:xfrm>
           <a:prstGeom prst="rect">
             <a:avLst>
@@ -8980,11 +8822,38 @@
             </a:avLst>
           </a:prstGeom>
           <a:solidFill>
-            <a:srgbClr val="E2E8F0"/>
-          </a:solidFill>
-          <a:ln w="12700">
-            <a:solidFill>
-              <a:srgbClr val="E2E8F0"/>
+            <a:srgbClr val="CCFBF1"/>
+          </a:solidFill>
+          <a:ln w="12700">
+            <a:solidFill>
+              <a:srgbClr val="0D9488"/>
+            </a:solidFill>
+            <a:prstDash val="solid"/>
+          </a:ln>
+        </p:spPr>
+      </p:sp>
+      <p:sp>
+        <p:nvSpPr>
+          <p:cNvPr id="22" name="Shape 20"/>
+          <p:cNvSpPr/>
+          <p:nvPr/>
+        </p:nvSpPr>
+        <p:spPr>
+          <a:xfrm>
+            <a:off x="4370832" y="3364992"/>
+            <a:ext cx="1645920" cy="475488"/>
+          </a:xfrm>
+          <a:prstGeom prst="rect">
+            <a:avLst>
+              <a:gd name="adj" fmla="val 9615"/>
+            </a:avLst>
+          </a:prstGeom>
+          <a:solidFill>
+            <a:srgbClr val="FFFFFF"/>
+          </a:solidFill>
+          <a:ln w="12700">
+            <a:solidFill>
+              <a:srgbClr val="0D9488"/>
             </a:solidFill>
             <a:prstDash val="solid"/>
           </a:ln>
@@ -8998,8 +8867,8 @@
         </p:nvSpPr>
         <p:spPr>
           <a:xfrm>
-            <a:off x="365760" y="3273552"/>
-            <a:ext cx="1371600" cy="658368"/>
+            <a:off x="4370832" y="3364992"/>
+            <a:ext cx="1645920" cy="475488"/>
           </a:xfrm>
           <a:prstGeom prst="rect">
             <a:avLst/>
@@ -9015,17 +8884,17 @@
               <a:buNone/>
             </a:pPr>
             <a:r>
-              <a:rPr lang="en-US" sz="1100" b="1" dirty="0">
-                <a:solidFill>
-                  <a:srgbClr val="475569"/>
+              <a:rPr lang="en-US" sz="1400" b="1" dirty="0">
+                <a:solidFill>
+                  <a:srgbClr val="0D9488"/>
                 </a:solidFill>
                 <a:latin typeface="Trebuchet MS" pitchFamily="34" charset="0"/>
                 <a:ea typeface="Trebuchet MS" pitchFamily="34" charset="-122"/>
                 <a:cs typeface="Trebuchet MS" pitchFamily="34" charset="-120"/>
               </a:rPr>
-              <a:t>Syllables</a:t>
-            </a:r>
-            <a:endParaRPr lang="en-US" sz="1100" dirty="0"/>
+              <a:t>prove</a:t>
+            </a:r>
+            <a:endParaRPr lang="en-US" sz="1400" dirty="0"/>
           </a:p>
         </p:txBody>
       </p:sp>
@@ -9037,62 +8906,35 @@
         </p:nvSpPr>
         <p:spPr>
           <a:xfrm>
-            <a:off x="1874520" y="3273552"/>
-            <a:ext cx="6903720" cy="658368"/>
+            <a:off x="365760" y="4096512"/>
+            <a:ext cx="1371600" cy="804672"/>
           </a:xfrm>
           <a:prstGeom prst="rect">
             <a:avLst>
-              <a:gd name="adj" fmla="val 8333"/>
+              <a:gd name="adj" fmla="val 6818"/>
             </a:avLst>
           </a:prstGeom>
           <a:solidFill>
-            <a:srgbClr val="CCFBF1"/>
-          </a:solidFill>
-          <a:ln w="12700">
-            <a:solidFill>
-              <a:srgbClr val="0D9488"/>
-            </a:solidFill>
-            <a:prstDash val="solid"/>
-          </a:ln>
-        </p:spPr>
-      </p:sp>
-      <p:sp>
-        <p:nvSpPr>
-          <p:cNvPr id="25" name="Shape 23"/>
-          <p:cNvSpPr/>
-          <p:nvPr/>
-        </p:nvSpPr>
-        <p:spPr>
-          <a:xfrm>
-            <a:off x="2999232" y="3364992"/>
-            <a:ext cx="1645920" cy="475488"/>
-          </a:xfrm>
-          <a:prstGeom prst="rect">
-            <a:avLst>
-              <a:gd name="adj" fmla="val 9615"/>
-            </a:avLst>
-          </a:prstGeom>
-          <a:solidFill>
-            <a:srgbClr val="FFFFFF"/>
-          </a:solidFill>
-          <a:ln w="12700">
-            <a:solidFill>
-              <a:srgbClr val="0D9488"/>
-            </a:solidFill>
-            <a:prstDash val="solid"/>
-          </a:ln>
-        </p:spPr>
-      </p:sp>
-      <p:sp>
-        <p:nvSpPr>
-          <p:cNvPr id="26" name="Text 24"/>
-          <p:cNvSpPr/>
-          <p:nvPr/>
-        </p:nvSpPr>
-        <p:spPr>
-          <a:xfrm>
-            <a:off x="2999232" y="3364992"/>
-            <a:ext cx="1645920" cy="475488"/>
+            <a:srgbClr val="E2E8F0"/>
+          </a:solidFill>
+          <a:ln w="12700">
+            <a:solidFill>
+              <a:srgbClr val="E2E8F0"/>
+            </a:solidFill>
+            <a:prstDash val="solid"/>
+          </a:ln>
+        </p:spPr>
+      </p:sp>
+      <p:sp>
+        <p:nvSpPr>
+          <p:cNvPr id="25" name="Text 23"/>
+          <p:cNvSpPr/>
+          <p:nvPr/>
+        </p:nvSpPr>
+        <p:spPr>
+          <a:xfrm>
+            <a:off x="365760" y="4096512"/>
+            <a:ext cx="1371600" cy="804672"/>
           </a:xfrm>
           <a:prstGeom prst="rect">
             <a:avLst/>
@@ -9108,135 +8950,30 @@
               <a:buNone/>
             </a:pPr>
             <a:r>
-              <a:rPr lang="en-US" sz="1400" b="1" dirty="0">
-                <a:solidFill>
-                  <a:srgbClr val="0D9488"/>
+              <a:rPr lang="en-US" sz="1100" b="1" dirty="0">
+                <a:solidFill>
+                  <a:srgbClr val="475569"/>
                 </a:solidFill>
                 <a:latin typeface="Trebuchet MS" pitchFamily="34" charset="0"/>
                 <a:ea typeface="Trebuchet MS" pitchFamily="34" charset="-122"/>
                 <a:cs typeface="Trebuchet MS" pitchFamily="34" charset="-120"/>
               </a:rPr>
-              <a:t>im</a:t>
-            </a:r>
-            <a:endParaRPr lang="en-US" sz="1400" dirty="0"/>
-          </a:p>
-        </p:txBody>
-      </p:sp>
-      <p:sp>
-        <p:nvSpPr>
-          <p:cNvPr id="27" name="Text 25"/>
-          <p:cNvSpPr/>
-          <p:nvPr/>
-        </p:nvSpPr>
-        <p:spPr>
-          <a:xfrm>
-            <a:off x="4645152" y="3364992"/>
-            <a:ext cx="1097280" cy="475488"/>
-          </a:xfrm>
-          <a:prstGeom prst="rect">
-            <a:avLst/>
-          </a:prstGeom>
-          <a:noFill/>
-          <a:ln/>
-        </p:spPr>
-        <p:txBody>
-          <a:bodyPr wrap="square" lIns="0" tIns="0" rIns="0" bIns="0" rtlCol="0" anchor="ctr"/>
-          <a:lstStyle/>
-          <a:p>
-            <a:pPr algn="ctr" indent="0" marL="0">
-              <a:buNone/>
-            </a:pPr>
-            <a:r>
-              <a:rPr lang="en-US" sz="1600" b="1" dirty="0">
-                <a:solidFill>
-                  <a:srgbClr val="0D9488"/>
-                </a:solidFill>
-                <a:latin typeface="Trebuchet MS" pitchFamily="34" charset="0"/>
-                <a:ea typeface="Trebuchet MS" pitchFamily="34" charset="-122"/>
-                <a:cs typeface="Trebuchet MS" pitchFamily="34" charset="-120"/>
-              </a:rPr>
-              <a:t>·</a:t>
-            </a:r>
-            <a:endParaRPr lang="en-US" sz="1600" dirty="0"/>
-          </a:p>
-        </p:txBody>
-      </p:sp>
-      <p:sp>
-        <p:nvSpPr>
-          <p:cNvPr id="28" name="Shape 26"/>
-          <p:cNvSpPr/>
-          <p:nvPr/>
-        </p:nvSpPr>
-        <p:spPr>
-          <a:xfrm>
-            <a:off x="5742432" y="3364992"/>
-            <a:ext cx="1645920" cy="475488"/>
-          </a:xfrm>
-          <a:prstGeom prst="rect">
-            <a:avLst>
-              <a:gd name="adj" fmla="val 9615"/>
-            </a:avLst>
-          </a:prstGeom>
-          <a:solidFill>
-            <a:srgbClr val="FFFFFF"/>
-          </a:solidFill>
-          <a:ln w="12700">
-            <a:solidFill>
-              <a:srgbClr val="0D9488"/>
-            </a:solidFill>
-            <a:prstDash val="solid"/>
-          </a:ln>
-        </p:spPr>
-      </p:sp>
-      <p:sp>
-        <p:nvSpPr>
-          <p:cNvPr id="29" name="Text 27"/>
-          <p:cNvSpPr/>
-          <p:nvPr/>
-        </p:nvSpPr>
-        <p:spPr>
-          <a:xfrm>
-            <a:off x="5742432" y="3364992"/>
-            <a:ext cx="1645920" cy="475488"/>
-          </a:xfrm>
-          <a:prstGeom prst="rect">
-            <a:avLst/>
-          </a:prstGeom>
-          <a:noFill/>
-          <a:ln/>
-        </p:spPr>
-        <p:txBody>
-          <a:bodyPr wrap="square" lIns="0" tIns="0" rIns="0" bIns="0" rtlCol="0" anchor="ctr"/>
-          <a:lstStyle/>
-          <a:p>
-            <a:pPr algn="ctr" indent="0" marL="0">
-              <a:buNone/>
-            </a:pPr>
-            <a:r>
-              <a:rPr lang="en-US" sz="1400" b="1" dirty="0">
-                <a:solidFill>
-                  <a:srgbClr val="0D9488"/>
-                </a:solidFill>
-                <a:latin typeface="Trebuchet MS" pitchFamily="34" charset="0"/>
-                <a:ea typeface="Trebuchet MS" pitchFamily="34" charset="-122"/>
-                <a:cs typeface="Trebuchet MS" pitchFamily="34" charset="-120"/>
-              </a:rPr>
-              <a:t>prove</a:t>
-            </a:r>
-            <a:endParaRPr lang="en-US" sz="1400" dirty="0"/>
-          </a:p>
-        </p:txBody>
-      </p:sp>
-      <p:sp>
-        <p:nvSpPr>
-          <p:cNvPr id="30" name="Shape 28"/>
-          <p:cNvSpPr/>
-          <p:nvPr/>
-        </p:nvSpPr>
-        <p:spPr>
-          <a:xfrm>
-            <a:off x="365760" y="4096512"/>
-            <a:ext cx="1371600" cy="804672"/>
+              <a:t>Phonemes</a:t>
+            </a:r>
+            <a:endParaRPr lang="en-US" sz="1100" dirty="0"/>
+          </a:p>
+        </p:txBody>
+      </p:sp>
+      <p:sp>
+        <p:nvSpPr>
+          <p:cNvPr id="26" name="Shape 24"/>
+          <p:cNvSpPr/>
+          <p:nvPr/>
+        </p:nvSpPr>
+        <p:spPr>
+          <a:xfrm>
+            <a:off x="1874520" y="4096512"/>
+            <a:ext cx="6903720" cy="804672"/>
           </a:xfrm>
           <a:prstGeom prst="rect">
             <a:avLst>
@@ -9244,85 +8981,19 @@
             </a:avLst>
           </a:prstGeom>
           <a:solidFill>
-            <a:srgbClr val="E2E8F0"/>
+            <a:srgbClr val="F8FAFC"/>
           </a:solidFill>
           <a:ln w="12700">
             <a:solidFill>
               <a:srgbClr val="E2E8F0"/>
             </a:solidFill>
-            <a:prstDash val="solid"/>
-          </a:ln>
-        </p:spPr>
-      </p:sp>
-      <p:sp>
-        <p:nvSpPr>
-          <p:cNvPr id="31" name="Text 29"/>
-          <p:cNvSpPr/>
-          <p:nvPr/>
-        </p:nvSpPr>
-        <p:spPr>
-          <a:xfrm>
-            <a:off x="365760" y="4096512"/>
-            <a:ext cx="1371600" cy="804672"/>
-          </a:xfrm>
-          <a:prstGeom prst="rect">
-            <a:avLst/>
-          </a:prstGeom>
-          <a:noFill/>
-          <a:ln/>
-        </p:spPr>
-        <p:txBody>
-          <a:bodyPr wrap="square" lIns="0" tIns="0" rIns="0" bIns="0" rtlCol="0" anchor="ctr"/>
-          <a:lstStyle/>
-          <a:p>
-            <a:pPr algn="ctr" indent="0" marL="0">
-              <a:buNone/>
-            </a:pPr>
-            <a:r>
-              <a:rPr lang="en-US" sz="1100" b="1" dirty="0">
-                <a:solidFill>
-                  <a:srgbClr val="475569"/>
-                </a:solidFill>
-                <a:latin typeface="Trebuchet MS" pitchFamily="34" charset="0"/>
-                <a:ea typeface="Trebuchet MS" pitchFamily="34" charset="-122"/>
-                <a:cs typeface="Trebuchet MS" pitchFamily="34" charset="-120"/>
-              </a:rPr>
-              <a:t>Phonemes</a:t>
-            </a:r>
-            <a:endParaRPr lang="en-US" sz="1100" dirty="0"/>
-          </a:p>
-        </p:txBody>
-      </p:sp>
-      <p:sp>
-        <p:nvSpPr>
-          <p:cNvPr id="32" name="Shape 30"/>
-          <p:cNvSpPr/>
-          <p:nvPr/>
-        </p:nvSpPr>
-        <p:spPr>
-          <a:xfrm>
-            <a:off x="1874520" y="4096512"/>
-            <a:ext cx="6903720" cy="804672"/>
-          </a:xfrm>
-          <a:prstGeom prst="rect">
-            <a:avLst>
-              <a:gd name="adj" fmla="val 6818"/>
-            </a:avLst>
-          </a:prstGeom>
-          <a:solidFill>
-            <a:srgbClr val="F8FAFC"/>
-          </a:solidFill>
-          <a:ln w="12700">
-            <a:solidFill>
-              <a:srgbClr val="E2E8F0"/>
-            </a:solidFill>
             <a:prstDash val="dash"/>
           </a:ln>
         </p:spPr>
       </p:sp>
       <p:sp>
         <p:nvSpPr>
-          <p:cNvPr id="33" name="Text 31"/>
+          <p:cNvPr id="27" name="Text 25"/>
           <p:cNvSpPr/>
           <p:nvPr/>
         </p:nvSpPr>
@@ -9645,7 +9316,7 @@
                 <a:ea typeface="Calibri" pitchFamily="34" charset="-122"/>
                 <a:cs typeface="Calibri" pitchFamily="34" charset="-120"/>
               </a:rPr>
-              <a:t>Word Labs  •  wordlabs.app  •  Root: 'prove' = to show something is true</a:t>
+              <a:t>Word Labs  •  wordlabs.app  •  Root: 'prove' = to test or show truth</a:t>
             </a:r>
             <a:endParaRPr lang="en-US" sz="800" dirty="0"/>
           </a:p>
@@ -9784,7 +9455,7 @@
                 <a:ea typeface="Trebuchet MS" pitchFamily="34" charset="-122"/>
                 <a:cs typeface="Trebuchet MS" pitchFamily="34" charset="-120"/>
               </a:rPr>
-              <a:t>improve</a:t>
+              <a:t>prove</a:t>
             </a:r>
             <a:endParaRPr lang="en-US" sz="2800" dirty="0"/>
           </a:p>
@@ -9864,7 +9535,7 @@
         </p:nvSpPr>
         <p:spPr>
           <a:xfrm>
-            <a:off x="2938272" y="2258568"/>
+            <a:off x="4370832" y="2258568"/>
             <a:ext cx="1828800" cy="292608"/>
           </a:xfrm>
           <a:prstGeom prst="rect">
@@ -9873,11 +9544,11 @@
             </a:avLst>
           </a:prstGeom>
           <a:solidFill>
-            <a:srgbClr val="DDD6FE"/>
+            <a:srgbClr val="CCFBF1"/>
           </a:solidFill>
           <a:ln w="19050">
             <a:solidFill>
-              <a:srgbClr val="7C3AED"/>
+              <a:srgbClr val="0D9488"/>
             </a:solidFill>
             <a:prstDash val="solid"/>
           </a:ln>
@@ -9898,7 +9569,7 @@
         </p:nvSpPr>
         <p:spPr>
           <a:xfrm>
-            <a:off x="2938272" y="2258568"/>
+            <a:off x="4370832" y="2258568"/>
             <a:ext cx="1828800" cy="292608"/>
           </a:xfrm>
           <a:prstGeom prst="rect">
@@ -9917,13 +9588,13 @@
             <a:r>
               <a:rPr lang="en-US" sz="1300" b="1" dirty="0">
                 <a:solidFill>
-                  <a:srgbClr val="4C1D95"/>
+                  <a:srgbClr val="0F766E"/>
                 </a:solidFill>
                 <a:latin typeface="Trebuchet MS" pitchFamily="34" charset="0"/>
                 <a:ea typeface="Trebuchet MS" pitchFamily="34" charset="-122"/>
                 <a:cs typeface="Trebuchet MS" pitchFamily="34" charset="-120"/>
               </a:rPr>
-              <a:t>im</a:t>
+              <a:t>prove</a:t>
             </a:r>
             <a:endParaRPr lang="en-US" sz="1300" dirty="0"/>
           </a:p>
@@ -9937,7 +9608,7 @@
         </p:nvSpPr>
         <p:spPr>
           <a:xfrm>
-            <a:off x="2938272" y="2569464"/>
+            <a:off x="4370832" y="2569464"/>
             <a:ext cx="1828800" cy="201168"/>
           </a:xfrm>
           <a:prstGeom prst="rect">
@@ -9962,7 +9633,7 @@
                 <a:ea typeface="Calibri" pitchFamily="34" charset="-122"/>
                 <a:cs typeface="Calibri" pitchFamily="34" charset="-120"/>
               </a:rPr>
-              <a:t>into, towards</a:t>
+              <a:t>to test or show truth</a:t>
             </a:r>
             <a:endParaRPr lang="en-US" sz="850" dirty="0"/>
           </a:p>
@@ -9976,30 +9647,23 @@
         </p:nvSpPr>
         <p:spPr>
           <a:xfrm>
-            <a:off x="5803392" y="2258568"/>
-            <a:ext cx="1828800" cy="292608"/>
+            <a:off x="365760" y="3273552"/>
+            <a:ext cx="1371600" cy="658368"/>
           </a:xfrm>
           <a:prstGeom prst="rect">
             <a:avLst>
-              <a:gd name="adj" fmla="val 25000"/>
+              <a:gd name="adj" fmla="val 8333"/>
             </a:avLst>
           </a:prstGeom>
           <a:solidFill>
-            <a:srgbClr val="CCFBF1"/>
-          </a:solidFill>
-          <a:ln w="19050">
-            <a:solidFill>
-              <a:srgbClr val="0D9488"/>
-            </a:solidFill>
-            <a:prstDash val="solid"/>
-          </a:ln>
-          <a:effectLst>
-            <a:outerShdw sx="100000" sy="100000" kx="0" ky="0" algn="bl" rotWithShape="0" blurRad="101600" dist="38100" dir="8100000">
-              <a:srgbClr val="000000">
-                <a:alpha val="12000"/>
-              </a:srgbClr>
-            </a:outerShdw>
-          </a:effectLst>
+            <a:srgbClr val="E2E8F0"/>
+          </a:solidFill>
+          <a:ln w="12700">
+            <a:solidFill>
+              <a:srgbClr val="E2E8F0"/>
+            </a:solidFill>
+            <a:prstDash val="solid"/>
+          </a:ln>
         </p:spPr>
       </p:sp>
       <p:sp>
@@ -10010,8 +9674,8 @@
         </p:nvSpPr>
         <p:spPr>
           <a:xfrm>
-            <a:off x="5803392" y="2258568"/>
-            <a:ext cx="1828800" cy="292608"/>
+            <a:off x="365760" y="3273552"/>
+            <a:ext cx="1371600" cy="658368"/>
           </a:xfrm>
           <a:prstGeom prst="rect">
             <a:avLst/>
@@ -10027,69 +9691,30 @@
               <a:buNone/>
             </a:pPr>
             <a:r>
-              <a:rPr lang="en-US" sz="1300" b="1" dirty="0">
-                <a:solidFill>
-                  <a:srgbClr val="0F766E"/>
+              <a:rPr lang="en-US" sz="1100" b="1" dirty="0">
+                <a:solidFill>
+                  <a:srgbClr val="475569"/>
                 </a:solidFill>
                 <a:latin typeface="Trebuchet MS" pitchFamily="34" charset="0"/>
                 <a:ea typeface="Trebuchet MS" pitchFamily="34" charset="-122"/>
                 <a:cs typeface="Trebuchet MS" pitchFamily="34" charset="-120"/>
               </a:rPr>
-              <a:t>prove</a:t>
-            </a:r>
-            <a:endParaRPr lang="en-US" sz="1300" dirty="0"/>
-          </a:p>
-        </p:txBody>
-      </p:sp>
-      <p:sp>
-        <p:nvSpPr>
-          <p:cNvPr id="21" name="Text 19"/>
-          <p:cNvSpPr/>
-          <p:nvPr/>
-        </p:nvSpPr>
-        <p:spPr>
-          <a:xfrm>
-            <a:off x="5803392" y="2569464"/>
-            <a:ext cx="1828800" cy="201168"/>
-          </a:xfrm>
-          <a:prstGeom prst="rect">
-            <a:avLst/>
-          </a:prstGeom>
-          <a:noFill/>
-          <a:ln/>
-        </p:spPr>
-        <p:txBody>
-          <a:bodyPr wrap="square" lIns="0" tIns="0" rIns="0" bIns="0" rtlCol="0" anchor="t"/>
-          <a:lstStyle/>
-          <a:p>
-            <a:pPr algn="ctr" indent="0" marL="0">
-              <a:buNone/>
-            </a:pPr>
-            <a:r>
-              <a:rPr lang="en-US" sz="850" dirty="0">
-                <a:solidFill>
-                  <a:srgbClr val="475569"/>
-                </a:solidFill>
-                <a:latin typeface="Calibri" pitchFamily="34" charset="0"/>
-                <a:ea typeface="Calibri" pitchFamily="34" charset="-122"/>
-                <a:cs typeface="Calibri" pitchFamily="34" charset="-120"/>
-              </a:rPr>
-              <a:t>to show is true</a:t>
-            </a:r>
-            <a:endParaRPr lang="en-US" sz="850" dirty="0"/>
-          </a:p>
-        </p:txBody>
-      </p:sp>
-      <p:sp>
-        <p:nvSpPr>
-          <p:cNvPr id="22" name="Shape 20"/>
-          <p:cNvSpPr/>
-          <p:nvPr/>
-        </p:nvSpPr>
-        <p:spPr>
-          <a:xfrm>
-            <a:off x="365760" y="3273552"/>
-            <a:ext cx="1371600" cy="658368"/>
+              <a:t>Syllables</a:t>
+            </a:r>
+            <a:endParaRPr lang="en-US" sz="1100" dirty="0"/>
+          </a:p>
+        </p:txBody>
+      </p:sp>
+      <p:sp>
+        <p:nvSpPr>
+          <p:cNvPr id="21" name="Shape 19"/>
+          <p:cNvSpPr/>
+          <p:nvPr/>
+        </p:nvSpPr>
+        <p:spPr>
+          <a:xfrm>
+            <a:off x="1874520" y="3273552"/>
+            <a:ext cx="6903720" cy="658368"/>
           </a:xfrm>
           <a:prstGeom prst="rect">
             <a:avLst>
@@ -10097,11 +9722,38 @@
             </a:avLst>
           </a:prstGeom>
           <a:solidFill>
-            <a:srgbClr val="E2E8F0"/>
-          </a:solidFill>
-          <a:ln w="12700">
-            <a:solidFill>
-              <a:srgbClr val="E2E8F0"/>
+            <a:srgbClr val="CCFBF1"/>
+          </a:solidFill>
+          <a:ln w="12700">
+            <a:solidFill>
+              <a:srgbClr val="0D9488"/>
+            </a:solidFill>
+            <a:prstDash val="solid"/>
+          </a:ln>
+        </p:spPr>
+      </p:sp>
+      <p:sp>
+        <p:nvSpPr>
+          <p:cNvPr id="22" name="Shape 20"/>
+          <p:cNvSpPr/>
+          <p:nvPr/>
+        </p:nvSpPr>
+        <p:spPr>
+          <a:xfrm>
+            <a:off x="4370832" y="3364992"/>
+            <a:ext cx="1645920" cy="475488"/>
+          </a:xfrm>
+          <a:prstGeom prst="rect">
+            <a:avLst>
+              <a:gd name="adj" fmla="val 9615"/>
+            </a:avLst>
+          </a:prstGeom>
+          <a:solidFill>
+            <a:srgbClr val="FFFFFF"/>
+          </a:solidFill>
+          <a:ln w="12700">
+            <a:solidFill>
+              <a:srgbClr val="0D9488"/>
             </a:solidFill>
             <a:prstDash val="solid"/>
           </a:ln>
@@ -10115,8 +9767,8 @@
         </p:nvSpPr>
         <p:spPr>
           <a:xfrm>
-            <a:off x="365760" y="3273552"/>
-            <a:ext cx="1371600" cy="658368"/>
+            <a:off x="4370832" y="3364992"/>
+            <a:ext cx="1645920" cy="475488"/>
           </a:xfrm>
           <a:prstGeom prst="rect">
             <a:avLst/>
@@ -10132,17 +9784,17 @@
               <a:buNone/>
             </a:pPr>
             <a:r>
-              <a:rPr lang="en-US" sz="1100" b="1" dirty="0">
-                <a:solidFill>
-                  <a:srgbClr val="475569"/>
+              <a:rPr lang="en-US" sz="1400" b="1" dirty="0">
+                <a:solidFill>
+                  <a:srgbClr val="0D9488"/>
                 </a:solidFill>
                 <a:latin typeface="Trebuchet MS" pitchFamily="34" charset="0"/>
                 <a:ea typeface="Trebuchet MS" pitchFamily="34" charset="-122"/>
                 <a:cs typeface="Trebuchet MS" pitchFamily="34" charset="-120"/>
               </a:rPr>
-              <a:t>Syllables</a:t>
-            </a:r>
-            <a:endParaRPr lang="en-US" sz="1100" dirty="0"/>
+              <a:t>prove</a:t>
+            </a:r>
+            <a:endParaRPr lang="en-US" sz="1400" dirty="0"/>
           </a:p>
         </p:txBody>
       </p:sp>
@@ -10154,62 +9806,35 @@
         </p:nvSpPr>
         <p:spPr>
           <a:xfrm>
-            <a:off x="1874520" y="3273552"/>
-            <a:ext cx="6903720" cy="658368"/>
+            <a:off x="365760" y="4096512"/>
+            <a:ext cx="1371600" cy="804672"/>
           </a:xfrm>
           <a:prstGeom prst="rect">
             <a:avLst>
-              <a:gd name="adj" fmla="val 8333"/>
+              <a:gd name="adj" fmla="val 6818"/>
             </a:avLst>
           </a:prstGeom>
           <a:solidFill>
-            <a:srgbClr val="CCFBF1"/>
-          </a:solidFill>
-          <a:ln w="12700">
-            <a:solidFill>
-              <a:srgbClr val="0D9488"/>
-            </a:solidFill>
-            <a:prstDash val="solid"/>
-          </a:ln>
-        </p:spPr>
-      </p:sp>
-      <p:sp>
-        <p:nvSpPr>
-          <p:cNvPr id="25" name="Shape 23"/>
-          <p:cNvSpPr/>
-          <p:nvPr/>
-        </p:nvSpPr>
-        <p:spPr>
-          <a:xfrm>
-            <a:off x="2999232" y="3364992"/>
-            <a:ext cx="1645920" cy="475488"/>
-          </a:xfrm>
-          <a:prstGeom prst="rect">
-            <a:avLst>
-              <a:gd name="adj" fmla="val 9615"/>
-            </a:avLst>
-          </a:prstGeom>
-          <a:solidFill>
-            <a:srgbClr val="FFFFFF"/>
-          </a:solidFill>
-          <a:ln w="12700">
-            <a:solidFill>
-              <a:srgbClr val="0D9488"/>
-            </a:solidFill>
-            <a:prstDash val="solid"/>
-          </a:ln>
-        </p:spPr>
-      </p:sp>
-      <p:sp>
-        <p:nvSpPr>
-          <p:cNvPr id="26" name="Text 24"/>
-          <p:cNvSpPr/>
-          <p:nvPr/>
-        </p:nvSpPr>
-        <p:spPr>
-          <a:xfrm>
-            <a:off x="2999232" y="3364992"/>
-            <a:ext cx="1645920" cy="475488"/>
+            <a:srgbClr val="E2E8F0"/>
+          </a:solidFill>
+          <a:ln w="12700">
+            <a:solidFill>
+              <a:srgbClr val="E2E8F0"/>
+            </a:solidFill>
+            <a:prstDash val="solid"/>
+          </a:ln>
+        </p:spPr>
+      </p:sp>
+      <p:sp>
+        <p:nvSpPr>
+          <p:cNvPr id="25" name="Text 23"/>
+          <p:cNvSpPr/>
+          <p:nvPr/>
+        </p:nvSpPr>
+        <p:spPr>
+          <a:xfrm>
+            <a:off x="365760" y="4096512"/>
+            <a:ext cx="1371600" cy="804672"/>
           </a:xfrm>
           <a:prstGeom prst="rect">
             <a:avLst/>
@@ -10225,30 +9850,84 @@
               <a:buNone/>
             </a:pPr>
             <a:r>
-              <a:rPr lang="en-US" sz="1400" b="1" dirty="0">
-                <a:solidFill>
-                  <a:srgbClr val="0D9488"/>
+              <a:rPr lang="en-US" sz="1100" b="1" dirty="0">
+                <a:solidFill>
+                  <a:srgbClr val="475569"/>
                 </a:solidFill>
                 <a:latin typeface="Trebuchet MS" pitchFamily="34" charset="0"/>
                 <a:ea typeface="Trebuchet MS" pitchFamily="34" charset="-122"/>
                 <a:cs typeface="Trebuchet MS" pitchFamily="34" charset="-120"/>
               </a:rPr>
-              <a:t>im</a:t>
-            </a:r>
-            <a:endParaRPr lang="en-US" sz="1400" dirty="0"/>
-          </a:p>
-        </p:txBody>
-      </p:sp>
-      <p:sp>
-        <p:nvSpPr>
-          <p:cNvPr id="27" name="Text 25"/>
-          <p:cNvSpPr/>
-          <p:nvPr/>
-        </p:nvSpPr>
-        <p:spPr>
-          <a:xfrm>
-            <a:off x="4645152" y="3364992"/>
-            <a:ext cx="1097280" cy="475488"/>
+              <a:t>Phonemes</a:t>
+            </a:r>
+            <a:endParaRPr lang="en-US" sz="1100" dirty="0"/>
+          </a:p>
+        </p:txBody>
+      </p:sp>
+      <p:sp>
+        <p:nvSpPr>
+          <p:cNvPr id="26" name="Shape 24"/>
+          <p:cNvSpPr/>
+          <p:nvPr/>
+        </p:nvSpPr>
+        <p:spPr>
+          <a:xfrm>
+            <a:off x="1874520" y="4096512"/>
+            <a:ext cx="6903720" cy="804672"/>
+          </a:xfrm>
+          <a:prstGeom prst="rect">
+            <a:avLst>
+              <a:gd name="adj" fmla="val 6818"/>
+            </a:avLst>
+          </a:prstGeom>
+          <a:solidFill>
+            <a:srgbClr val="FCE7F3"/>
+          </a:solidFill>
+          <a:ln w="12700">
+            <a:solidFill>
+              <a:srgbClr val="DB2777"/>
+            </a:solidFill>
+            <a:prstDash val="solid"/>
+          </a:ln>
+        </p:spPr>
+      </p:sp>
+      <p:sp>
+        <p:nvSpPr>
+          <p:cNvPr id="27" name="Shape 25"/>
+          <p:cNvSpPr/>
+          <p:nvPr/>
+        </p:nvSpPr>
+        <p:spPr>
+          <a:xfrm>
+            <a:off x="3033522" y="4169664"/>
+            <a:ext cx="685800" cy="384048"/>
+          </a:xfrm>
+          <a:prstGeom prst="rect">
+            <a:avLst>
+              <a:gd name="adj" fmla="val 9524"/>
+            </a:avLst>
+          </a:prstGeom>
+          <a:solidFill>
+            <a:srgbClr val="FFFFFF"/>
+          </a:solidFill>
+          <a:ln w="12700">
+            <a:solidFill>
+              <a:srgbClr val="DB2777"/>
+            </a:solidFill>
+            <a:prstDash val="solid"/>
+          </a:ln>
+        </p:spPr>
+      </p:sp>
+      <p:sp>
+        <p:nvSpPr>
+          <p:cNvPr id="28" name="Text 26"/>
+          <p:cNvSpPr/>
+          <p:nvPr/>
+        </p:nvSpPr>
+        <p:spPr>
+          <a:xfrm>
+            <a:off x="3033522" y="4169664"/>
+            <a:ext cx="685800" cy="384048"/>
           </a:xfrm>
           <a:prstGeom prst="rect">
             <a:avLst/>
@@ -10264,34 +9943,34 @@
               <a:buNone/>
             </a:pPr>
             <a:r>
-              <a:rPr lang="en-US" sz="1600" b="1" dirty="0">
-                <a:solidFill>
-                  <a:srgbClr val="0D9488"/>
+              <a:rPr lang="en-US" sz="1000" b="1" dirty="0">
+                <a:solidFill>
+                  <a:srgbClr val="9D174D"/>
                 </a:solidFill>
                 <a:latin typeface="Trebuchet MS" pitchFamily="34" charset="0"/>
                 <a:ea typeface="Trebuchet MS" pitchFamily="34" charset="-122"/>
                 <a:cs typeface="Trebuchet MS" pitchFamily="34" charset="-120"/>
               </a:rPr>
-              <a:t>·</a:t>
-            </a:r>
-            <a:endParaRPr lang="en-US" sz="1600" dirty="0"/>
-          </a:p>
-        </p:txBody>
-      </p:sp>
-      <p:sp>
-        <p:nvSpPr>
-          <p:cNvPr id="28" name="Shape 26"/>
-          <p:cNvSpPr/>
-          <p:nvPr/>
-        </p:nvSpPr>
-        <p:spPr>
-          <a:xfrm>
-            <a:off x="5742432" y="3364992"/>
-            <a:ext cx="1645920" cy="475488"/>
+              <a:t>pr</a:t>
+            </a:r>
+            <a:endParaRPr lang="en-US" sz="1000" dirty="0"/>
+          </a:p>
+        </p:txBody>
+      </p:sp>
+      <p:sp>
+        <p:nvSpPr>
+          <p:cNvPr id="29" name="Shape 27"/>
+          <p:cNvSpPr/>
+          <p:nvPr/>
+        </p:nvSpPr>
+        <p:spPr>
+          <a:xfrm>
+            <a:off x="4850892" y="4169664"/>
+            <a:ext cx="685800" cy="384048"/>
           </a:xfrm>
           <a:prstGeom prst="rect">
             <a:avLst>
-              <a:gd name="adj" fmla="val 9615"/>
+              <a:gd name="adj" fmla="val 9524"/>
             </a:avLst>
           </a:prstGeom>
           <a:solidFill>
@@ -10299,22 +9978,22 @@
           </a:solidFill>
           <a:ln w="12700">
             <a:solidFill>
-              <a:srgbClr val="0D9488"/>
-            </a:solidFill>
-            <a:prstDash val="solid"/>
-          </a:ln>
-        </p:spPr>
-      </p:sp>
-      <p:sp>
-        <p:nvSpPr>
-          <p:cNvPr id="29" name="Text 27"/>
-          <p:cNvSpPr/>
-          <p:nvPr/>
-        </p:nvSpPr>
-        <p:spPr>
-          <a:xfrm>
-            <a:off x="5742432" y="3364992"/>
-            <a:ext cx="1645920" cy="475488"/>
+              <a:srgbClr val="DB2777"/>
+            </a:solidFill>
+            <a:prstDash val="solid"/>
+          </a:ln>
+        </p:spPr>
+      </p:sp>
+      <p:sp>
+        <p:nvSpPr>
+          <p:cNvPr id="30" name="Text 28"/>
+          <p:cNvSpPr/>
+          <p:nvPr/>
+        </p:nvSpPr>
+        <p:spPr>
+          <a:xfrm>
+            <a:off x="4850892" y="4169664"/>
+            <a:ext cx="685800" cy="384048"/>
           </a:xfrm>
           <a:prstGeom prst="rect">
             <a:avLst/>
@@ -10330,57 +10009,57 @@
               <a:buNone/>
             </a:pPr>
             <a:r>
-              <a:rPr lang="en-US" sz="1400" b="1" dirty="0">
-                <a:solidFill>
-                  <a:srgbClr val="0D9488"/>
+              <a:rPr lang="en-US" sz="1000" b="1" dirty="0">
+                <a:solidFill>
+                  <a:srgbClr val="9D174D"/>
                 </a:solidFill>
                 <a:latin typeface="Trebuchet MS" pitchFamily="34" charset="0"/>
                 <a:ea typeface="Trebuchet MS" pitchFamily="34" charset="-122"/>
                 <a:cs typeface="Trebuchet MS" pitchFamily="34" charset="-120"/>
               </a:rPr>
-              <a:t>prove</a:t>
-            </a:r>
-            <a:endParaRPr lang="en-US" sz="1400" dirty="0"/>
-          </a:p>
-        </p:txBody>
-      </p:sp>
-      <p:sp>
-        <p:nvSpPr>
-          <p:cNvPr id="30" name="Shape 28"/>
-          <p:cNvSpPr/>
-          <p:nvPr/>
-        </p:nvSpPr>
-        <p:spPr>
-          <a:xfrm>
-            <a:off x="365760" y="4096512"/>
-            <a:ext cx="1371600" cy="804672"/>
+              <a:t>o</a:t>
+            </a:r>
+            <a:endParaRPr lang="en-US" sz="1000" dirty="0"/>
+          </a:p>
+        </p:txBody>
+      </p:sp>
+      <p:sp>
+        <p:nvSpPr>
+          <p:cNvPr id="31" name="Shape 29"/>
+          <p:cNvSpPr/>
+          <p:nvPr/>
+        </p:nvSpPr>
+        <p:spPr>
+          <a:xfrm>
+            <a:off x="6668262" y="4169664"/>
+            <a:ext cx="685800" cy="384048"/>
           </a:xfrm>
           <a:prstGeom prst="rect">
             <a:avLst>
-              <a:gd name="adj" fmla="val 6818"/>
+              <a:gd name="adj" fmla="val 9524"/>
             </a:avLst>
           </a:prstGeom>
           <a:solidFill>
-            <a:srgbClr val="E2E8F0"/>
-          </a:solidFill>
-          <a:ln w="12700">
-            <a:solidFill>
-              <a:srgbClr val="E2E8F0"/>
-            </a:solidFill>
-            <a:prstDash val="solid"/>
-          </a:ln>
-        </p:spPr>
-      </p:sp>
-      <p:sp>
-        <p:nvSpPr>
-          <p:cNvPr id="31" name="Text 29"/>
-          <p:cNvSpPr/>
-          <p:nvPr/>
-        </p:nvSpPr>
-        <p:spPr>
-          <a:xfrm>
-            <a:off x="365760" y="4096512"/>
-            <a:ext cx="1371600" cy="804672"/>
+            <a:srgbClr val="FFFFFF"/>
+          </a:solidFill>
+          <a:ln w="12700">
+            <a:solidFill>
+              <a:srgbClr val="DB2777"/>
+            </a:solidFill>
+            <a:prstDash val="solid"/>
+          </a:ln>
+        </p:spPr>
+      </p:sp>
+      <p:sp>
+        <p:nvSpPr>
+          <p:cNvPr id="32" name="Text 30"/>
+          <p:cNvSpPr/>
+          <p:nvPr/>
+        </p:nvSpPr>
+        <p:spPr>
+          <a:xfrm>
+            <a:off x="6668262" y="4169664"/>
+            <a:ext cx="685800" cy="384048"/>
           </a:xfrm>
           <a:prstGeom prst="rect">
             <a:avLst/>
@@ -10396,491 +10075,29 @@
               <a:buNone/>
             </a:pPr>
             <a:r>
-              <a:rPr lang="en-US" sz="1100" b="1" dirty="0">
-                <a:solidFill>
-                  <a:srgbClr val="475569"/>
+              <a:rPr lang="en-US" sz="1000" b="1" dirty="0">
+                <a:solidFill>
+                  <a:srgbClr val="9D174D"/>
                 </a:solidFill>
                 <a:latin typeface="Trebuchet MS" pitchFamily="34" charset="0"/>
                 <a:ea typeface="Trebuchet MS" pitchFamily="34" charset="-122"/>
                 <a:cs typeface="Trebuchet MS" pitchFamily="34" charset="-120"/>
               </a:rPr>
-              <a:t>Phonemes</a:t>
-            </a:r>
-            <a:endParaRPr lang="en-US" sz="1100" dirty="0"/>
-          </a:p>
-        </p:txBody>
-      </p:sp>
-      <p:sp>
-        <p:nvSpPr>
-          <p:cNvPr id="32" name="Shape 30"/>
-          <p:cNvSpPr/>
-          <p:nvPr/>
-        </p:nvSpPr>
-        <p:spPr>
-          <a:xfrm>
-            <a:off x="1874520" y="4096512"/>
-            <a:ext cx="6903720" cy="804672"/>
-          </a:xfrm>
-          <a:prstGeom prst="rect">
-            <a:avLst>
-              <a:gd name="adj" fmla="val 6818"/>
-            </a:avLst>
-          </a:prstGeom>
-          <a:solidFill>
-            <a:srgbClr val="FCE7F3"/>
-          </a:solidFill>
-          <a:ln w="12700">
-            <a:solidFill>
-              <a:srgbClr val="DB2777"/>
-            </a:solidFill>
-            <a:prstDash val="solid"/>
-          </a:ln>
-        </p:spPr>
-      </p:sp>
-      <p:sp>
-        <p:nvSpPr>
-          <p:cNvPr id="33" name="Shape 31"/>
-          <p:cNvSpPr/>
-          <p:nvPr/>
-        </p:nvSpPr>
-        <p:spPr>
-          <a:xfrm>
-            <a:off x="2254649" y="4169664"/>
-            <a:ext cx="685800" cy="384048"/>
-          </a:xfrm>
-          <a:prstGeom prst="rect">
-            <a:avLst>
-              <a:gd name="adj" fmla="val 9524"/>
-            </a:avLst>
-          </a:prstGeom>
-          <a:solidFill>
-            <a:srgbClr val="FFFFFF"/>
-          </a:solidFill>
-          <a:ln w="12700">
-            <a:solidFill>
-              <a:srgbClr val="DB2777"/>
-            </a:solidFill>
-            <a:prstDash val="solid"/>
-          </a:ln>
-        </p:spPr>
-      </p:sp>
-      <p:sp>
-        <p:nvSpPr>
-          <p:cNvPr id="34" name="Text 32"/>
-          <p:cNvSpPr/>
-          <p:nvPr/>
-        </p:nvSpPr>
-        <p:spPr>
-          <a:xfrm>
-            <a:off x="2254649" y="4169664"/>
-            <a:ext cx="685800" cy="384048"/>
-          </a:xfrm>
-          <a:prstGeom prst="rect">
-            <a:avLst/>
-          </a:prstGeom>
-          <a:noFill/>
-          <a:ln/>
-        </p:spPr>
-        <p:txBody>
-          <a:bodyPr wrap="square" lIns="0" tIns="0" rIns="0" bIns="0" rtlCol="0" anchor="ctr"/>
-          <a:lstStyle/>
-          <a:p>
-            <a:pPr algn="ctr" indent="0" marL="0">
-              <a:buNone/>
-            </a:pPr>
-            <a:r>
-              <a:rPr lang="en-US" sz="900" b="1" dirty="0">
-                <a:solidFill>
-                  <a:srgbClr val="9D174D"/>
-                </a:solidFill>
-                <a:latin typeface="Trebuchet MS" pitchFamily="34" charset="0"/>
-                <a:ea typeface="Trebuchet MS" pitchFamily="34" charset="-122"/>
-                <a:cs typeface="Trebuchet MS" pitchFamily="34" charset="-120"/>
-              </a:rPr>
-              <a:t>i</a:t>
-            </a:r>
-            <a:endParaRPr lang="en-US" sz="900" dirty="0"/>
-          </a:p>
-        </p:txBody>
-      </p:sp>
-      <p:sp>
-        <p:nvSpPr>
-          <p:cNvPr id="35" name="Shape 33"/>
-          <p:cNvSpPr/>
-          <p:nvPr/>
-        </p:nvSpPr>
-        <p:spPr>
-          <a:xfrm>
-            <a:off x="3293146" y="4169664"/>
-            <a:ext cx="685800" cy="384048"/>
-          </a:xfrm>
-          <a:prstGeom prst="rect">
-            <a:avLst>
-              <a:gd name="adj" fmla="val 9524"/>
-            </a:avLst>
-          </a:prstGeom>
-          <a:solidFill>
-            <a:srgbClr val="FFFFFF"/>
-          </a:solidFill>
-          <a:ln w="12700">
-            <a:solidFill>
-              <a:srgbClr val="DB2777"/>
-            </a:solidFill>
-            <a:prstDash val="solid"/>
-          </a:ln>
-        </p:spPr>
-      </p:sp>
-      <p:sp>
-        <p:nvSpPr>
-          <p:cNvPr id="36" name="Text 34"/>
-          <p:cNvSpPr/>
-          <p:nvPr/>
-        </p:nvSpPr>
-        <p:spPr>
-          <a:xfrm>
-            <a:off x="3293146" y="4169664"/>
-            <a:ext cx="685800" cy="384048"/>
-          </a:xfrm>
-          <a:prstGeom prst="rect">
-            <a:avLst/>
-          </a:prstGeom>
-          <a:noFill/>
-          <a:ln/>
-        </p:spPr>
-        <p:txBody>
-          <a:bodyPr wrap="square" lIns="0" tIns="0" rIns="0" bIns="0" rtlCol="0" anchor="ctr"/>
-          <a:lstStyle/>
-          <a:p>
-            <a:pPr algn="ctr" indent="0" marL="0">
-              <a:buNone/>
-            </a:pPr>
-            <a:r>
-              <a:rPr lang="en-US" sz="900" b="1" dirty="0">
-                <a:solidFill>
-                  <a:srgbClr val="9D174D"/>
-                </a:solidFill>
-                <a:latin typeface="Trebuchet MS" pitchFamily="34" charset="0"/>
-                <a:ea typeface="Trebuchet MS" pitchFamily="34" charset="-122"/>
-                <a:cs typeface="Trebuchet MS" pitchFamily="34" charset="-120"/>
-              </a:rPr>
-              <a:t>m</a:t>
-            </a:r>
-            <a:endParaRPr lang="en-US" sz="900" dirty="0"/>
-          </a:p>
-        </p:txBody>
-      </p:sp>
-      <p:sp>
-        <p:nvSpPr>
-          <p:cNvPr id="37" name="Shape 35"/>
-          <p:cNvSpPr/>
-          <p:nvPr/>
-        </p:nvSpPr>
-        <p:spPr>
-          <a:xfrm>
-            <a:off x="4331643" y="4169664"/>
-            <a:ext cx="685800" cy="384048"/>
-          </a:xfrm>
-          <a:prstGeom prst="rect">
-            <a:avLst>
-              <a:gd name="adj" fmla="val 9524"/>
-            </a:avLst>
-          </a:prstGeom>
-          <a:solidFill>
-            <a:srgbClr val="FFFFFF"/>
-          </a:solidFill>
-          <a:ln w="12700">
-            <a:solidFill>
-              <a:srgbClr val="DB2777"/>
-            </a:solidFill>
-            <a:prstDash val="solid"/>
-          </a:ln>
-        </p:spPr>
-      </p:sp>
-      <p:sp>
-        <p:nvSpPr>
-          <p:cNvPr id="38" name="Text 36"/>
-          <p:cNvSpPr/>
-          <p:nvPr/>
-        </p:nvSpPr>
-        <p:spPr>
-          <a:xfrm>
-            <a:off x="4331643" y="4169664"/>
-            <a:ext cx="685800" cy="384048"/>
-          </a:xfrm>
-          <a:prstGeom prst="rect">
-            <a:avLst/>
-          </a:prstGeom>
-          <a:noFill/>
-          <a:ln/>
-        </p:spPr>
-        <p:txBody>
-          <a:bodyPr wrap="square" lIns="0" tIns="0" rIns="0" bIns="0" rtlCol="0" anchor="ctr"/>
-          <a:lstStyle/>
-          <a:p>
-            <a:pPr algn="ctr" indent="0" marL="0">
-              <a:buNone/>
-            </a:pPr>
-            <a:r>
-              <a:rPr lang="en-US" sz="900" b="1" dirty="0">
-                <a:solidFill>
-                  <a:srgbClr val="9D174D"/>
-                </a:solidFill>
-                <a:latin typeface="Trebuchet MS" pitchFamily="34" charset="0"/>
-                <a:ea typeface="Trebuchet MS" pitchFamily="34" charset="-122"/>
-                <a:cs typeface="Trebuchet MS" pitchFamily="34" charset="-120"/>
-              </a:rPr>
-              <a:t>p</a:t>
-            </a:r>
-            <a:endParaRPr lang="en-US" sz="900" dirty="0"/>
-          </a:p>
-        </p:txBody>
-      </p:sp>
-      <p:sp>
-        <p:nvSpPr>
-          <p:cNvPr id="39" name="Shape 37"/>
-          <p:cNvSpPr/>
-          <p:nvPr/>
-        </p:nvSpPr>
-        <p:spPr>
-          <a:xfrm>
-            <a:off x="5370141" y="4169664"/>
-            <a:ext cx="685800" cy="384048"/>
-          </a:xfrm>
-          <a:prstGeom prst="rect">
-            <a:avLst>
-              <a:gd name="adj" fmla="val 9524"/>
-            </a:avLst>
-          </a:prstGeom>
-          <a:solidFill>
-            <a:srgbClr val="FFFFFF"/>
-          </a:solidFill>
-          <a:ln w="12700">
-            <a:solidFill>
-              <a:srgbClr val="DB2777"/>
-            </a:solidFill>
-            <a:prstDash val="solid"/>
-          </a:ln>
-        </p:spPr>
-      </p:sp>
-      <p:sp>
-        <p:nvSpPr>
-          <p:cNvPr id="40" name="Text 38"/>
-          <p:cNvSpPr/>
-          <p:nvPr/>
-        </p:nvSpPr>
-        <p:spPr>
-          <a:xfrm>
-            <a:off x="5370141" y="4169664"/>
-            <a:ext cx="685800" cy="384048"/>
-          </a:xfrm>
-          <a:prstGeom prst="rect">
-            <a:avLst/>
-          </a:prstGeom>
-          <a:noFill/>
-          <a:ln/>
-        </p:spPr>
-        <p:txBody>
-          <a:bodyPr wrap="square" lIns="0" tIns="0" rIns="0" bIns="0" rtlCol="0" anchor="ctr"/>
-          <a:lstStyle/>
-          <a:p>
-            <a:pPr algn="ctr" indent="0" marL="0">
-              <a:buNone/>
-            </a:pPr>
-            <a:r>
-              <a:rPr lang="en-US" sz="900" b="1" dirty="0">
-                <a:solidFill>
-                  <a:srgbClr val="9D174D"/>
-                </a:solidFill>
-                <a:latin typeface="Trebuchet MS" pitchFamily="34" charset="0"/>
-                <a:ea typeface="Trebuchet MS" pitchFamily="34" charset="-122"/>
-                <a:cs typeface="Trebuchet MS" pitchFamily="34" charset="-120"/>
-              </a:rPr>
-              <a:t>r</a:t>
-            </a:r>
-            <a:endParaRPr lang="en-US" sz="900" dirty="0"/>
-          </a:p>
-        </p:txBody>
-      </p:sp>
-      <p:sp>
-        <p:nvSpPr>
-          <p:cNvPr id="41" name="Shape 39"/>
-          <p:cNvSpPr/>
-          <p:nvPr/>
-        </p:nvSpPr>
-        <p:spPr>
-          <a:xfrm>
-            <a:off x="6408638" y="4169664"/>
-            <a:ext cx="685800" cy="384048"/>
-          </a:xfrm>
-          <a:prstGeom prst="rect">
-            <a:avLst>
-              <a:gd name="adj" fmla="val 9524"/>
-            </a:avLst>
-          </a:prstGeom>
-          <a:solidFill>
-            <a:srgbClr val="FFFFFF"/>
-          </a:solidFill>
-          <a:ln w="12700">
-            <a:solidFill>
-              <a:srgbClr val="DB2777"/>
-            </a:solidFill>
-            <a:prstDash val="solid"/>
-          </a:ln>
-        </p:spPr>
-      </p:sp>
-      <p:sp>
-        <p:nvSpPr>
-          <p:cNvPr id="42" name="Text 40"/>
-          <p:cNvSpPr/>
-          <p:nvPr/>
-        </p:nvSpPr>
-        <p:spPr>
-          <a:xfrm>
-            <a:off x="6408638" y="4169664"/>
-            <a:ext cx="685800" cy="384048"/>
-          </a:xfrm>
-          <a:prstGeom prst="rect">
-            <a:avLst/>
-          </a:prstGeom>
-          <a:noFill/>
-          <a:ln/>
-        </p:spPr>
-        <p:txBody>
-          <a:bodyPr wrap="square" lIns="0" tIns="0" rIns="0" bIns="0" rtlCol="0" anchor="ctr"/>
-          <a:lstStyle/>
-          <a:p>
-            <a:pPr algn="ctr" indent="0" marL="0">
-              <a:buNone/>
-            </a:pPr>
-            <a:r>
-              <a:rPr lang="en-US" sz="900" b="1" dirty="0">
-                <a:solidFill>
-                  <a:srgbClr val="9D174D"/>
-                </a:solidFill>
-                <a:latin typeface="Trebuchet MS" pitchFamily="34" charset="0"/>
-                <a:ea typeface="Trebuchet MS" pitchFamily="34" charset="-122"/>
-                <a:cs typeface="Trebuchet MS" pitchFamily="34" charset="-120"/>
-              </a:rPr>
-              <a:t>oo</a:t>
-            </a:r>
-            <a:endParaRPr lang="en-US" sz="900" dirty="0"/>
-          </a:p>
-        </p:txBody>
-      </p:sp>
-      <p:sp>
-        <p:nvSpPr>
-          <p:cNvPr id="43" name="Text 41"/>
-          <p:cNvSpPr/>
-          <p:nvPr/>
-        </p:nvSpPr>
-        <p:spPr>
-          <a:xfrm>
-            <a:off x="6408638" y="4572000"/>
-            <a:ext cx="685800" cy="219456"/>
-          </a:xfrm>
-          <a:prstGeom prst="rect">
-            <a:avLst/>
-          </a:prstGeom>
-          <a:noFill/>
-          <a:ln/>
-        </p:spPr>
-        <p:txBody>
-          <a:bodyPr wrap="square" lIns="0" tIns="0" rIns="0" bIns="0" rtlCol="0" anchor="t"/>
-          <a:lstStyle/>
-          <a:p>
-            <a:pPr algn="ctr" indent="0" marL="0">
-              <a:buNone/>
-            </a:pPr>
-            <a:r>
-              <a:rPr lang="en-US" sz="750" i="1" dirty="0">
-                <a:solidFill>
-                  <a:srgbClr val="94A3B8"/>
-                </a:solidFill>
-                <a:latin typeface="Calibri" pitchFamily="34" charset="0"/>
-                <a:ea typeface="Calibri" pitchFamily="34" charset="-122"/>
-                <a:cs typeface="Calibri" pitchFamily="34" charset="-120"/>
-              </a:rPr>
-              <a:t>/oo/</a:t>
-            </a:r>
-            <a:endParaRPr lang="en-US" sz="750" dirty="0"/>
-          </a:p>
-        </p:txBody>
-      </p:sp>
-      <p:sp>
-        <p:nvSpPr>
-          <p:cNvPr id="44" name="Shape 42"/>
-          <p:cNvSpPr/>
-          <p:nvPr/>
-        </p:nvSpPr>
-        <p:spPr>
-          <a:xfrm>
-            <a:off x="7447135" y="4169664"/>
-            <a:ext cx="685800" cy="384048"/>
-          </a:xfrm>
-          <a:prstGeom prst="rect">
-            <a:avLst>
-              <a:gd name="adj" fmla="val 9524"/>
-            </a:avLst>
-          </a:prstGeom>
-          <a:solidFill>
-            <a:srgbClr val="FFFFFF"/>
-          </a:solidFill>
-          <a:ln w="12700">
-            <a:solidFill>
-              <a:srgbClr val="DB2777"/>
-            </a:solidFill>
-            <a:prstDash val="solid"/>
-          </a:ln>
-        </p:spPr>
-      </p:sp>
-      <p:sp>
-        <p:nvSpPr>
-          <p:cNvPr id="45" name="Text 43"/>
-          <p:cNvSpPr/>
-          <p:nvPr/>
-        </p:nvSpPr>
-        <p:spPr>
-          <a:xfrm>
-            <a:off x="7447135" y="4169664"/>
-            <a:ext cx="685800" cy="384048"/>
-          </a:xfrm>
-          <a:prstGeom prst="rect">
-            <a:avLst/>
-          </a:prstGeom>
-          <a:noFill/>
-          <a:ln/>
-        </p:spPr>
-        <p:txBody>
-          <a:bodyPr wrap="square" lIns="0" tIns="0" rIns="0" bIns="0" rtlCol="0" anchor="ctr"/>
-          <a:lstStyle/>
-          <a:p>
-            <a:pPr algn="ctr" indent="0" marL="0">
-              <a:buNone/>
-            </a:pPr>
-            <a:r>
-              <a:rPr lang="en-US" sz="900" b="1" dirty="0">
-                <a:solidFill>
-                  <a:srgbClr val="9D174D"/>
-                </a:solidFill>
-                <a:latin typeface="Trebuchet MS" pitchFamily="34" charset="0"/>
-                <a:ea typeface="Trebuchet MS" pitchFamily="34" charset="-122"/>
-                <a:cs typeface="Trebuchet MS" pitchFamily="34" charset="-120"/>
-              </a:rPr>
               <a:t>ve</a:t>
             </a:r>
-            <a:endParaRPr lang="en-US" sz="900" dirty="0"/>
-          </a:p>
-        </p:txBody>
-      </p:sp>
-      <p:sp>
-        <p:nvSpPr>
-          <p:cNvPr id="46" name="Text 44"/>
-          <p:cNvSpPr/>
-          <p:nvPr/>
-        </p:nvSpPr>
-        <p:spPr>
-          <a:xfrm>
-            <a:off x="7447135" y="4572000"/>
+            <a:endParaRPr lang="en-US" sz="1000" dirty="0"/>
+          </a:p>
+        </p:txBody>
+      </p:sp>
+      <p:sp>
+        <p:nvSpPr>
+          <p:cNvPr id="33" name="Text 31"/>
+          <p:cNvSpPr/>
+          <p:nvPr/>
+        </p:nvSpPr>
+        <p:spPr>
+          <a:xfrm>
+            <a:off x="6668262" y="4572000"/>
             <a:ext cx="685800" cy="219456"/>
           </a:xfrm>
           <a:prstGeom prst="rect">
@@ -11197,7 +10414,7 @@
                 <a:ea typeface="Calibri" pitchFamily="34" charset="-122"/>
                 <a:cs typeface="Calibri" pitchFamily="34" charset="-120"/>
               </a:rPr>
-              <a:t>Word Labs  •  wordlabs.app  •  Root: 'prove' = to show something is true</a:t>
+              <a:t>Word Labs  •  wordlabs.app  •  Root: 'prove' = to test or show truth</a:t>
             </a:r>
             <a:endParaRPr lang="en-US" sz="800" dirty="0"/>
           </a:p>
@@ -11336,7 +10553,7 @@
                 <a:ea typeface="Trebuchet MS" pitchFamily="34" charset="-122"/>
                 <a:cs typeface="Trebuchet MS" pitchFamily="34" charset="-120"/>
               </a:rPr>
-              <a:t>prove</a:t>
+              <a:t>improve</a:t>
             </a:r>
             <a:endParaRPr lang="en-US" sz="2800" dirty="0"/>
           </a:p>
@@ -12024,7 +11241,7 @@
                 <a:ea typeface="Calibri" pitchFamily="34" charset="-122"/>
                 <a:cs typeface="Calibri" pitchFamily="34" charset="-120"/>
               </a:rPr>
-              <a:t>Word Labs  •  wordlabs.app  •  Root: 'prove' = to show something is true</a:t>
+              <a:t>Word Labs  •  wordlabs.app  •  Root: 'prove' = to test or show truth</a:t>
             </a:r>
             <a:endParaRPr lang="en-US" sz="800" dirty="0"/>
           </a:p>
@@ -12163,7 +11380,7 @@
                 <a:ea typeface="Trebuchet MS" pitchFamily="34" charset="-122"/>
                 <a:cs typeface="Trebuchet MS" pitchFamily="34" charset="-120"/>
               </a:rPr>
-              <a:t>prove</a:t>
+              <a:t>improve</a:t>
             </a:r>
             <a:endParaRPr lang="en-US" sz="2800" dirty="0"/>
           </a:p>
@@ -12243,7 +11460,7 @@
         </p:nvSpPr>
         <p:spPr>
           <a:xfrm>
-            <a:off x="4370832" y="2258568"/>
+            <a:off x="2938272" y="2258568"/>
             <a:ext cx="1828800" cy="292608"/>
           </a:xfrm>
           <a:prstGeom prst="rect">
@@ -12252,11 +11469,11 @@
             </a:avLst>
           </a:prstGeom>
           <a:solidFill>
-            <a:srgbClr val="CCFBF1"/>
+            <a:srgbClr val="DDD6FE"/>
           </a:solidFill>
           <a:ln w="19050">
             <a:solidFill>
-              <a:srgbClr val="0D9488"/>
+              <a:srgbClr val="7C3AED"/>
             </a:solidFill>
             <a:prstDash val="solid"/>
           </a:ln>
@@ -12277,7 +11494,7 @@
         </p:nvSpPr>
         <p:spPr>
           <a:xfrm>
-            <a:off x="4370832" y="2258568"/>
+            <a:off x="2938272" y="2258568"/>
             <a:ext cx="1828800" cy="292608"/>
           </a:xfrm>
           <a:prstGeom prst="rect">
@@ -12296,13 +11513,13 @@
             <a:r>
               <a:rPr lang="en-US" sz="1300" b="1" dirty="0">
                 <a:solidFill>
-                  <a:srgbClr val="0F766E"/>
+                  <a:srgbClr val="4C1D95"/>
                 </a:solidFill>
                 <a:latin typeface="Trebuchet MS" pitchFamily="34" charset="0"/>
                 <a:ea typeface="Trebuchet MS" pitchFamily="34" charset="-122"/>
                 <a:cs typeface="Trebuchet MS" pitchFamily="34" charset="-120"/>
               </a:rPr>
-              <a:t>prove</a:t>
+              <a:t>im</a:t>
             </a:r>
             <a:endParaRPr lang="en-US" sz="1300" dirty="0"/>
           </a:p>
@@ -12316,7 +11533,7 @@
         </p:nvSpPr>
         <p:spPr>
           <a:xfrm>
-            <a:off x="4370832" y="2569464"/>
+            <a:off x="2938272" y="2569464"/>
             <a:ext cx="1828800" cy="201168"/>
           </a:xfrm>
           <a:prstGeom prst="rect">
@@ -12341,7 +11558,7 @@
                 <a:ea typeface="Calibri" pitchFamily="34" charset="-122"/>
                 <a:cs typeface="Calibri" pitchFamily="34" charset="-120"/>
               </a:rPr>
-              <a:t>to show is true</a:t>
+              <a:t>into or towards</a:t>
             </a:r>
             <a:endParaRPr lang="en-US" sz="850" dirty="0"/>
           </a:p>
@@ -12350,6 +11567,118 @@
       <p:sp>
         <p:nvSpPr>
           <p:cNvPr id="19" name="Shape 17"/>
+          <p:cNvSpPr/>
+          <p:nvPr/>
+        </p:nvSpPr>
+        <p:spPr>
+          <a:xfrm>
+            <a:off x="5803392" y="2258568"/>
+            <a:ext cx="1828800" cy="292608"/>
+          </a:xfrm>
+          <a:prstGeom prst="rect">
+            <a:avLst>
+              <a:gd name="adj" fmla="val 25000"/>
+            </a:avLst>
+          </a:prstGeom>
+          <a:solidFill>
+            <a:srgbClr val="CCFBF1"/>
+          </a:solidFill>
+          <a:ln w="19050">
+            <a:solidFill>
+              <a:srgbClr val="0D9488"/>
+            </a:solidFill>
+            <a:prstDash val="solid"/>
+          </a:ln>
+          <a:effectLst>
+            <a:outerShdw sx="100000" sy="100000" kx="0" ky="0" algn="bl" rotWithShape="0" blurRad="101600" dist="38100" dir="8100000">
+              <a:srgbClr val="000000">
+                <a:alpha val="12000"/>
+              </a:srgbClr>
+            </a:outerShdw>
+          </a:effectLst>
+        </p:spPr>
+      </p:sp>
+      <p:sp>
+        <p:nvSpPr>
+          <p:cNvPr id="20" name="Text 18"/>
+          <p:cNvSpPr/>
+          <p:nvPr/>
+        </p:nvSpPr>
+        <p:spPr>
+          <a:xfrm>
+            <a:off x="5803392" y="2258568"/>
+            <a:ext cx="1828800" cy="292608"/>
+          </a:xfrm>
+          <a:prstGeom prst="rect">
+            <a:avLst/>
+          </a:prstGeom>
+          <a:noFill/>
+          <a:ln/>
+        </p:spPr>
+        <p:txBody>
+          <a:bodyPr wrap="square" lIns="0" tIns="0" rIns="0" bIns="0" rtlCol="0" anchor="ctr"/>
+          <a:lstStyle/>
+          <a:p>
+            <a:pPr algn="ctr" indent="0" marL="0">
+              <a:buNone/>
+            </a:pPr>
+            <a:r>
+              <a:rPr lang="en-US" sz="1300" b="1" dirty="0">
+                <a:solidFill>
+                  <a:srgbClr val="0F766E"/>
+                </a:solidFill>
+                <a:latin typeface="Trebuchet MS" pitchFamily="34" charset="0"/>
+                <a:ea typeface="Trebuchet MS" pitchFamily="34" charset="-122"/>
+                <a:cs typeface="Trebuchet MS" pitchFamily="34" charset="-120"/>
+              </a:rPr>
+              <a:t>prove</a:t>
+            </a:r>
+            <a:endParaRPr lang="en-US" sz="1300" dirty="0"/>
+          </a:p>
+        </p:txBody>
+      </p:sp>
+      <p:sp>
+        <p:nvSpPr>
+          <p:cNvPr id="21" name="Text 19"/>
+          <p:cNvSpPr/>
+          <p:nvPr/>
+        </p:nvSpPr>
+        <p:spPr>
+          <a:xfrm>
+            <a:off x="5803392" y="2569464"/>
+            <a:ext cx="1828800" cy="201168"/>
+          </a:xfrm>
+          <a:prstGeom prst="rect">
+            <a:avLst/>
+          </a:prstGeom>
+          <a:noFill/>
+          <a:ln/>
+        </p:spPr>
+        <p:txBody>
+          <a:bodyPr wrap="square" lIns="0" tIns="0" rIns="0" bIns="0" rtlCol="0" anchor="t"/>
+          <a:lstStyle/>
+          <a:p>
+            <a:pPr algn="ctr" indent="0" marL="0">
+              <a:buNone/>
+            </a:pPr>
+            <a:r>
+              <a:rPr lang="en-US" sz="850" dirty="0">
+                <a:solidFill>
+                  <a:srgbClr val="475569"/>
+                </a:solidFill>
+                <a:latin typeface="Calibri" pitchFamily="34" charset="0"/>
+                <a:ea typeface="Calibri" pitchFamily="34" charset="-122"/>
+                <a:cs typeface="Calibri" pitchFamily="34" charset="-120"/>
+              </a:rPr>
+              <a:t>to test or show truth</a:t>
+            </a:r>
+            <a:endParaRPr lang="en-US" sz="850" dirty="0"/>
+          </a:p>
+        </p:txBody>
+      </p:sp>
+      <p:sp>
+        <p:nvSpPr>
+          <p:cNvPr id="22" name="Shape 20"/>
           <p:cNvSpPr/>
           <p:nvPr/>
         </p:nvSpPr>
@@ -12376,7 +11705,7 @@
       </p:sp>
       <p:sp>
         <p:nvSpPr>
-          <p:cNvPr id="20" name="Text 18"/>
+          <p:cNvPr id="23" name="Text 21"/>
           <p:cNvSpPr/>
           <p:nvPr/>
         </p:nvSpPr>
@@ -12415,7 +11744,7 @@
       </p:sp>
       <p:sp>
         <p:nvSpPr>
-          <p:cNvPr id="21" name="Shape 19"/>
+          <p:cNvPr id="24" name="Shape 22"/>
           <p:cNvSpPr/>
           <p:nvPr/>
         </p:nvSpPr>
@@ -12442,7 +11771,7 @@
       </p:sp>
       <p:sp>
         <p:nvSpPr>
-          <p:cNvPr id="22" name="Text 20"/>
+          <p:cNvPr id="25" name="Text 23"/>
           <p:cNvSpPr/>
           <p:nvPr/>
         </p:nvSpPr>
@@ -12481,7 +11810,7 @@
       </p:sp>
       <p:sp>
         <p:nvSpPr>
-          <p:cNvPr id="23" name="Shape 21"/>
+          <p:cNvPr id="26" name="Shape 24"/>
           <p:cNvSpPr/>
           <p:nvPr/>
         </p:nvSpPr>
@@ -12508,7 +11837,7 @@
       </p:sp>
       <p:sp>
         <p:nvSpPr>
-          <p:cNvPr id="24" name="Text 22"/>
+          <p:cNvPr id="27" name="Text 25"/>
           <p:cNvSpPr/>
           <p:nvPr/>
         </p:nvSpPr>
@@ -12547,7 +11876,7 @@
       </p:sp>
       <p:sp>
         <p:nvSpPr>
-          <p:cNvPr id="25" name="Shape 23"/>
+          <p:cNvPr id="28" name="Shape 26"/>
           <p:cNvSpPr/>
           <p:nvPr/>
         </p:nvSpPr>
@@ -12574,7 +11903,7 @@
       </p:sp>
       <p:sp>
         <p:nvSpPr>
-          <p:cNvPr id="26" name="Text 24"/>
+          <p:cNvPr id="29" name="Text 27"/>
           <p:cNvSpPr/>
           <p:nvPr/>
         </p:nvSpPr>
@@ -12897,7 +12226,7 @@
                 <a:ea typeface="Calibri" pitchFamily="34" charset="-122"/>
                 <a:cs typeface="Calibri" pitchFamily="34" charset="-120"/>
               </a:rPr>
-              <a:t>Word Labs  •  wordlabs.app  •  Root: 'prove' = to show something is true</a:t>
+              <a:t>Word Labs  •  wordlabs.app  •  Root: 'prove' = to test or show truth</a:t>
             </a:r>
             <a:endParaRPr lang="en-US" sz="800" dirty="0"/>
           </a:p>
@@ -13036,7 +12365,7 @@
                 <a:ea typeface="Trebuchet MS" pitchFamily="34" charset="-122"/>
                 <a:cs typeface="Trebuchet MS" pitchFamily="34" charset="-120"/>
               </a:rPr>
-              <a:t>prove</a:t>
+              <a:t>improve</a:t>
             </a:r>
             <a:endParaRPr lang="en-US" sz="2800" dirty="0"/>
           </a:p>
@@ -13116,7 +12445,7 @@
         </p:nvSpPr>
         <p:spPr>
           <a:xfrm>
-            <a:off x="4370832" y="2258568"/>
+            <a:off x="2938272" y="2258568"/>
             <a:ext cx="1828800" cy="292608"/>
           </a:xfrm>
           <a:prstGeom prst="rect">
@@ -13125,11 +12454,11 @@
             </a:avLst>
           </a:prstGeom>
           <a:solidFill>
-            <a:srgbClr val="CCFBF1"/>
+            <a:srgbClr val="DDD6FE"/>
           </a:solidFill>
           <a:ln w="19050">
             <a:solidFill>
-              <a:srgbClr val="0D9488"/>
+              <a:srgbClr val="7C3AED"/>
             </a:solidFill>
             <a:prstDash val="solid"/>
           </a:ln>
@@ -13150,7 +12479,7 @@
         </p:nvSpPr>
         <p:spPr>
           <a:xfrm>
-            <a:off x="4370832" y="2258568"/>
+            <a:off x="2938272" y="2258568"/>
             <a:ext cx="1828800" cy="292608"/>
           </a:xfrm>
           <a:prstGeom prst="rect">
@@ -13169,13 +12498,13 @@
             <a:r>
               <a:rPr lang="en-US" sz="1300" b="1" dirty="0">
                 <a:solidFill>
-                  <a:srgbClr val="0F766E"/>
+                  <a:srgbClr val="4C1D95"/>
                 </a:solidFill>
                 <a:latin typeface="Trebuchet MS" pitchFamily="34" charset="0"/>
                 <a:ea typeface="Trebuchet MS" pitchFamily="34" charset="-122"/>
                 <a:cs typeface="Trebuchet MS" pitchFamily="34" charset="-120"/>
               </a:rPr>
-              <a:t>prove</a:t>
+              <a:t>im</a:t>
             </a:r>
             <a:endParaRPr lang="en-US" sz="1300" dirty="0"/>
           </a:p>
@@ -13189,7 +12518,7 @@
         </p:nvSpPr>
         <p:spPr>
           <a:xfrm>
-            <a:off x="4370832" y="2569464"/>
+            <a:off x="2938272" y="2569464"/>
             <a:ext cx="1828800" cy="201168"/>
           </a:xfrm>
           <a:prstGeom prst="rect">
@@ -13214,7 +12543,7 @@
                 <a:ea typeface="Calibri" pitchFamily="34" charset="-122"/>
                 <a:cs typeface="Calibri" pitchFamily="34" charset="-120"/>
               </a:rPr>
-              <a:t>to show is true</a:t>
+              <a:t>into or towards</a:t>
             </a:r>
             <a:endParaRPr lang="en-US" sz="850" dirty="0"/>
           </a:p>
@@ -13223,6 +12552,118 @@
       <p:sp>
         <p:nvSpPr>
           <p:cNvPr id="19" name="Shape 17"/>
+          <p:cNvSpPr/>
+          <p:nvPr/>
+        </p:nvSpPr>
+        <p:spPr>
+          <a:xfrm>
+            <a:off x="5803392" y="2258568"/>
+            <a:ext cx="1828800" cy="292608"/>
+          </a:xfrm>
+          <a:prstGeom prst="rect">
+            <a:avLst>
+              <a:gd name="adj" fmla="val 25000"/>
+            </a:avLst>
+          </a:prstGeom>
+          <a:solidFill>
+            <a:srgbClr val="CCFBF1"/>
+          </a:solidFill>
+          <a:ln w="19050">
+            <a:solidFill>
+              <a:srgbClr val="0D9488"/>
+            </a:solidFill>
+            <a:prstDash val="solid"/>
+          </a:ln>
+          <a:effectLst>
+            <a:outerShdw sx="100000" sy="100000" kx="0" ky="0" algn="bl" rotWithShape="0" blurRad="101600" dist="38100" dir="8100000">
+              <a:srgbClr val="000000">
+                <a:alpha val="12000"/>
+              </a:srgbClr>
+            </a:outerShdw>
+          </a:effectLst>
+        </p:spPr>
+      </p:sp>
+      <p:sp>
+        <p:nvSpPr>
+          <p:cNvPr id="20" name="Text 18"/>
+          <p:cNvSpPr/>
+          <p:nvPr/>
+        </p:nvSpPr>
+        <p:spPr>
+          <a:xfrm>
+            <a:off x="5803392" y="2258568"/>
+            <a:ext cx="1828800" cy="292608"/>
+          </a:xfrm>
+          <a:prstGeom prst="rect">
+            <a:avLst/>
+          </a:prstGeom>
+          <a:noFill/>
+          <a:ln/>
+        </p:spPr>
+        <p:txBody>
+          <a:bodyPr wrap="square" lIns="0" tIns="0" rIns="0" bIns="0" rtlCol="0" anchor="ctr"/>
+          <a:lstStyle/>
+          <a:p>
+            <a:pPr algn="ctr" indent="0" marL="0">
+              <a:buNone/>
+            </a:pPr>
+            <a:r>
+              <a:rPr lang="en-US" sz="1300" b="1" dirty="0">
+                <a:solidFill>
+                  <a:srgbClr val="0F766E"/>
+                </a:solidFill>
+                <a:latin typeface="Trebuchet MS" pitchFamily="34" charset="0"/>
+                <a:ea typeface="Trebuchet MS" pitchFamily="34" charset="-122"/>
+                <a:cs typeface="Trebuchet MS" pitchFamily="34" charset="-120"/>
+              </a:rPr>
+              <a:t>prove</a:t>
+            </a:r>
+            <a:endParaRPr lang="en-US" sz="1300" dirty="0"/>
+          </a:p>
+        </p:txBody>
+      </p:sp>
+      <p:sp>
+        <p:nvSpPr>
+          <p:cNvPr id="21" name="Text 19"/>
+          <p:cNvSpPr/>
+          <p:nvPr/>
+        </p:nvSpPr>
+        <p:spPr>
+          <a:xfrm>
+            <a:off x="5803392" y="2569464"/>
+            <a:ext cx="1828800" cy="201168"/>
+          </a:xfrm>
+          <a:prstGeom prst="rect">
+            <a:avLst/>
+          </a:prstGeom>
+          <a:noFill/>
+          <a:ln/>
+        </p:spPr>
+        <p:txBody>
+          <a:bodyPr wrap="square" lIns="0" tIns="0" rIns="0" bIns="0" rtlCol="0" anchor="t"/>
+          <a:lstStyle/>
+          <a:p>
+            <a:pPr algn="ctr" indent="0" marL="0">
+              <a:buNone/>
+            </a:pPr>
+            <a:r>
+              <a:rPr lang="en-US" sz="850" dirty="0">
+                <a:solidFill>
+                  <a:srgbClr val="475569"/>
+                </a:solidFill>
+                <a:latin typeface="Calibri" pitchFamily="34" charset="0"/>
+                <a:ea typeface="Calibri" pitchFamily="34" charset="-122"/>
+                <a:cs typeface="Calibri" pitchFamily="34" charset="-120"/>
+              </a:rPr>
+              <a:t>to test or show truth</a:t>
+            </a:r>
+            <a:endParaRPr lang="en-US" sz="850" dirty="0"/>
+          </a:p>
+        </p:txBody>
+      </p:sp>
+      <p:sp>
+        <p:nvSpPr>
+          <p:cNvPr id="22" name="Shape 20"/>
           <p:cNvSpPr/>
           <p:nvPr/>
         </p:nvSpPr>
@@ -13249,7 +12690,7 @@
       </p:sp>
       <p:sp>
         <p:nvSpPr>
-          <p:cNvPr id="20" name="Text 18"/>
+          <p:cNvPr id="23" name="Text 21"/>
           <p:cNvSpPr/>
           <p:nvPr/>
         </p:nvSpPr>
@@ -13288,7 +12729,7 @@
       </p:sp>
       <p:sp>
         <p:nvSpPr>
-          <p:cNvPr id="21" name="Shape 19"/>
+          <p:cNvPr id="24" name="Shape 22"/>
           <p:cNvSpPr/>
           <p:nvPr/>
         </p:nvSpPr>
@@ -13315,13 +12756,13 @@
       </p:sp>
       <p:sp>
         <p:nvSpPr>
-          <p:cNvPr id="22" name="Shape 20"/>
-          <p:cNvSpPr/>
-          <p:nvPr/>
-        </p:nvSpPr>
-        <p:spPr>
-          <a:xfrm>
-            <a:off x="4370832" y="3364992"/>
+          <p:cNvPr id="25" name="Shape 23"/>
+          <p:cNvSpPr/>
+          <p:nvPr/>
+        </p:nvSpPr>
+        <p:spPr>
+          <a:xfrm>
+            <a:off x="2999232" y="3364992"/>
             <a:ext cx="1645920" cy="475488"/>
           </a:xfrm>
           <a:prstGeom prst="rect">
@@ -13342,13 +12783,13 @@
       </p:sp>
       <p:sp>
         <p:nvSpPr>
-          <p:cNvPr id="23" name="Text 21"/>
-          <p:cNvSpPr/>
-          <p:nvPr/>
-        </p:nvSpPr>
-        <p:spPr>
-          <a:xfrm>
-            <a:off x="4370832" y="3364992"/>
+          <p:cNvPr id="26" name="Text 24"/>
+          <p:cNvSpPr/>
+          <p:nvPr/>
+        </p:nvSpPr>
+        <p:spPr>
+          <a:xfrm>
+            <a:off x="2999232" y="3364992"/>
             <a:ext cx="1645920" cy="475488"/>
           </a:xfrm>
           <a:prstGeom prst="rect">
@@ -13373,6 +12814,111 @@
                 <a:ea typeface="Trebuchet MS" pitchFamily="34" charset="-122"/>
                 <a:cs typeface="Trebuchet MS" pitchFamily="34" charset="-120"/>
               </a:rPr>
+              <a:t>im</a:t>
+            </a:r>
+            <a:endParaRPr lang="en-US" sz="1400" dirty="0"/>
+          </a:p>
+        </p:txBody>
+      </p:sp>
+      <p:sp>
+        <p:nvSpPr>
+          <p:cNvPr id="27" name="Text 25"/>
+          <p:cNvSpPr/>
+          <p:nvPr/>
+        </p:nvSpPr>
+        <p:spPr>
+          <a:xfrm>
+            <a:off x="4645152" y="3364992"/>
+            <a:ext cx="1097280" cy="475488"/>
+          </a:xfrm>
+          <a:prstGeom prst="rect">
+            <a:avLst/>
+          </a:prstGeom>
+          <a:noFill/>
+          <a:ln/>
+        </p:spPr>
+        <p:txBody>
+          <a:bodyPr wrap="square" lIns="0" tIns="0" rIns="0" bIns="0" rtlCol="0" anchor="ctr"/>
+          <a:lstStyle/>
+          <a:p>
+            <a:pPr algn="ctr" indent="0" marL="0">
+              <a:buNone/>
+            </a:pPr>
+            <a:r>
+              <a:rPr lang="en-US" sz="1600" b="1" dirty="0">
+                <a:solidFill>
+                  <a:srgbClr val="0D9488"/>
+                </a:solidFill>
+                <a:latin typeface="Trebuchet MS" pitchFamily="34" charset="0"/>
+                <a:ea typeface="Trebuchet MS" pitchFamily="34" charset="-122"/>
+                <a:cs typeface="Trebuchet MS" pitchFamily="34" charset="-120"/>
+              </a:rPr>
+              <a:t>·</a:t>
+            </a:r>
+            <a:endParaRPr lang="en-US" sz="1600" dirty="0"/>
+          </a:p>
+        </p:txBody>
+      </p:sp>
+      <p:sp>
+        <p:nvSpPr>
+          <p:cNvPr id="28" name="Shape 26"/>
+          <p:cNvSpPr/>
+          <p:nvPr/>
+        </p:nvSpPr>
+        <p:spPr>
+          <a:xfrm>
+            <a:off x="5742432" y="3364992"/>
+            <a:ext cx="1645920" cy="475488"/>
+          </a:xfrm>
+          <a:prstGeom prst="rect">
+            <a:avLst>
+              <a:gd name="adj" fmla="val 9615"/>
+            </a:avLst>
+          </a:prstGeom>
+          <a:solidFill>
+            <a:srgbClr val="FFFFFF"/>
+          </a:solidFill>
+          <a:ln w="12700">
+            <a:solidFill>
+              <a:srgbClr val="0D9488"/>
+            </a:solidFill>
+            <a:prstDash val="solid"/>
+          </a:ln>
+        </p:spPr>
+      </p:sp>
+      <p:sp>
+        <p:nvSpPr>
+          <p:cNvPr id="29" name="Text 27"/>
+          <p:cNvSpPr/>
+          <p:nvPr/>
+        </p:nvSpPr>
+        <p:spPr>
+          <a:xfrm>
+            <a:off x="5742432" y="3364992"/>
+            <a:ext cx="1645920" cy="475488"/>
+          </a:xfrm>
+          <a:prstGeom prst="rect">
+            <a:avLst/>
+          </a:prstGeom>
+          <a:noFill/>
+          <a:ln/>
+        </p:spPr>
+        <p:txBody>
+          <a:bodyPr wrap="square" lIns="0" tIns="0" rIns="0" bIns="0" rtlCol="0" anchor="ctr"/>
+          <a:lstStyle/>
+          <a:p>
+            <a:pPr algn="ctr" indent="0" marL="0">
+              <a:buNone/>
+            </a:pPr>
+            <a:r>
+              <a:rPr lang="en-US" sz="1400" b="1" dirty="0">
+                <a:solidFill>
+                  <a:srgbClr val="0D9488"/>
+                </a:solidFill>
+                <a:latin typeface="Trebuchet MS" pitchFamily="34" charset="0"/>
+                <a:ea typeface="Trebuchet MS" pitchFamily="34" charset="-122"/>
+                <a:cs typeface="Trebuchet MS" pitchFamily="34" charset="-120"/>
+              </a:rPr>
               <a:t>prove</a:t>
             </a:r>
             <a:endParaRPr lang="en-US" sz="1400" dirty="0"/>
@@ -13381,7 +12927,7 @@
       </p:sp>
       <p:sp>
         <p:nvSpPr>
-          <p:cNvPr id="24" name="Shape 22"/>
+          <p:cNvPr id="30" name="Shape 28"/>
           <p:cNvSpPr/>
           <p:nvPr/>
         </p:nvSpPr>
@@ -13408,7 +12954,7 @@
       </p:sp>
       <p:sp>
         <p:nvSpPr>
-          <p:cNvPr id="25" name="Text 23"/>
+          <p:cNvPr id="31" name="Text 29"/>
           <p:cNvSpPr/>
           <p:nvPr/>
         </p:nvSpPr>
@@ -13447,7 +12993,7 @@
       </p:sp>
       <p:sp>
         <p:nvSpPr>
-          <p:cNvPr id="26" name="Shape 24"/>
+          <p:cNvPr id="32" name="Shape 30"/>
           <p:cNvSpPr/>
           <p:nvPr/>
         </p:nvSpPr>
@@ -13474,7 +13020,7 @@
       </p:sp>
       <p:sp>
         <p:nvSpPr>
-          <p:cNvPr id="27" name="Text 25"/>
+          <p:cNvPr id="33" name="Text 31"/>
           <p:cNvSpPr/>
           <p:nvPr/>
         </p:nvSpPr>
@@ -13706,7 +13252,7 @@
                 <a:ea typeface="Calibri" pitchFamily="34" charset="-122"/>
                 <a:cs typeface="Calibri" pitchFamily="34" charset="-120"/>
               </a:rPr>
-              <a:t>Root 'prove' — to show something is true</a:t>
+              <a:t>Root 'prove' — to test or show truth</a:t>
             </a:r>
             <a:endParaRPr lang="en-US" sz="1600" dirty="0"/>
           </a:p>
@@ -14062,7 +13608,7 @@
                 <a:ea typeface="Calibri" pitchFamily="34" charset="-122"/>
                 <a:cs typeface="Calibri" pitchFamily="34" charset="-120"/>
               </a:rPr>
-              <a:t>Word Labs  •  wordlabs.app  •  Root: 'prove' = to show something is true</a:t>
+              <a:t>Word Labs  •  wordlabs.app  •  Root: 'prove' = to test or show truth</a:t>
             </a:r>
             <a:endParaRPr lang="en-US" sz="800" dirty="0"/>
           </a:p>
@@ -14201,7 +13747,7 @@
                 <a:ea typeface="Trebuchet MS" pitchFamily="34" charset="-122"/>
                 <a:cs typeface="Trebuchet MS" pitchFamily="34" charset="-120"/>
               </a:rPr>
-              <a:t>prove</a:t>
+              <a:t>improve</a:t>
             </a:r>
             <a:endParaRPr lang="en-US" sz="2800" dirty="0"/>
           </a:p>
@@ -14281,7 +13827,7 @@
         </p:nvSpPr>
         <p:spPr>
           <a:xfrm>
-            <a:off x="4370832" y="2258568"/>
+            <a:off x="2938272" y="2258568"/>
             <a:ext cx="1828800" cy="292608"/>
           </a:xfrm>
           <a:prstGeom prst="rect">
@@ -14290,11 +13836,11 @@
             </a:avLst>
           </a:prstGeom>
           <a:solidFill>
-            <a:srgbClr val="CCFBF1"/>
+            <a:srgbClr val="DDD6FE"/>
           </a:solidFill>
           <a:ln w="19050">
             <a:solidFill>
-              <a:srgbClr val="0D9488"/>
+              <a:srgbClr val="7C3AED"/>
             </a:solidFill>
             <a:prstDash val="solid"/>
           </a:ln>
@@ -14315,7 +13861,7 @@
         </p:nvSpPr>
         <p:spPr>
           <a:xfrm>
-            <a:off x="4370832" y="2258568"/>
+            <a:off x="2938272" y="2258568"/>
             <a:ext cx="1828800" cy="292608"/>
           </a:xfrm>
           <a:prstGeom prst="rect">
@@ -14334,13 +13880,13 @@
             <a:r>
               <a:rPr lang="en-US" sz="1300" b="1" dirty="0">
                 <a:solidFill>
-                  <a:srgbClr val="0F766E"/>
+                  <a:srgbClr val="4C1D95"/>
                 </a:solidFill>
                 <a:latin typeface="Trebuchet MS" pitchFamily="34" charset="0"/>
                 <a:ea typeface="Trebuchet MS" pitchFamily="34" charset="-122"/>
                 <a:cs typeface="Trebuchet MS" pitchFamily="34" charset="-120"/>
               </a:rPr>
-              <a:t>prove</a:t>
+              <a:t>im</a:t>
             </a:r>
             <a:endParaRPr lang="en-US" sz="1300" dirty="0"/>
           </a:p>
@@ -14354,7 +13900,7 @@
         </p:nvSpPr>
         <p:spPr>
           <a:xfrm>
-            <a:off x="4370832" y="2569464"/>
+            <a:off x="2938272" y="2569464"/>
             <a:ext cx="1828800" cy="201168"/>
           </a:xfrm>
           <a:prstGeom prst="rect">
@@ -14379,7 +13925,7 @@
                 <a:ea typeface="Calibri" pitchFamily="34" charset="-122"/>
                 <a:cs typeface="Calibri" pitchFamily="34" charset="-120"/>
               </a:rPr>
-              <a:t>to show is true</a:t>
+              <a:t>into or towards</a:t>
             </a:r>
             <a:endParaRPr lang="en-US" sz="850" dirty="0"/>
           </a:p>
@@ -14388,6 +13934,118 @@
       <p:sp>
         <p:nvSpPr>
           <p:cNvPr id="19" name="Shape 17"/>
+          <p:cNvSpPr/>
+          <p:nvPr/>
+        </p:nvSpPr>
+        <p:spPr>
+          <a:xfrm>
+            <a:off x="5803392" y="2258568"/>
+            <a:ext cx="1828800" cy="292608"/>
+          </a:xfrm>
+          <a:prstGeom prst="rect">
+            <a:avLst>
+              <a:gd name="adj" fmla="val 25000"/>
+            </a:avLst>
+          </a:prstGeom>
+          <a:solidFill>
+            <a:srgbClr val="CCFBF1"/>
+          </a:solidFill>
+          <a:ln w="19050">
+            <a:solidFill>
+              <a:srgbClr val="0D9488"/>
+            </a:solidFill>
+            <a:prstDash val="solid"/>
+          </a:ln>
+          <a:effectLst>
+            <a:outerShdw sx="100000" sy="100000" kx="0" ky="0" algn="bl" rotWithShape="0" blurRad="101600" dist="38100" dir="8100000">
+              <a:srgbClr val="000000">
+                <a:alpha val="12000"/>
+              </a:srgbClr>
+            </a:outerShdw>
+          </a:effectLst>
+        </p:spPr>
+      </p:sp>
+      <p:sp>
+        <p:nvSpPr>
+          <p:cNvPr id="20" name="Text 18"/>
+          <p:cNvSpPr/>
+          <p:nvPr/>
+        </p:nvSpPr>
+        <p:spPr>
+          <a:xfrm>
+            <a:off x="5803392" y="2258568"/>
+            <a:ext cx="1828800" cy="292608"/>
+          </a:xfrm>
+          <a:prstGeom prst="rect">
+            <a:avLst/>
+          </a:prstGeom>
+          <a:noFill/>
+          <a:ln/>
+        </p:spPr>
+        <p:txBody>
+          <a:bodyPr wrap="square" lIns="0" tIns="0" rIns="0" bIns="0" rtlCol="0" anchor="ctr"/>
+          <a:lstStyle/>
+          <a:p>
+            <a:pPr algn="ctr" indent="0" marL="0">
+              <a:buNone/>
+            </a:pPr>
+            <a:r>
+              <a:rPr lang="en-US" sz="1300" b="1" dirty="0">
+                <a:solidFill>
+                  <a:srgbClr val="0F766E"/>
+                </a:solidFill>
+                <a:latin typeface="Trebuchet MS" pitchFamily="34" charset="0"/>
+                <a:ea typeface="Trebuchet MS" pitchFamily="34" charset="-122"/>
+                <a:cs typeface="Trebuchet MS" pitchFamily="34" charset="-120"/>
+              </a:rPr>
+              <a:t>prove</a:t>
+            </a:r>
+            <a:endParaRPr lang="en-US" sz="1300" dirty="0"/>
+          </a:p>
+        </p:txBody>
+      </p:sp>
+      <p:sp>
+        <p:nvSpPr>
+          <p:cNvPr id="21" name="Text 19"/>
+          <p:cNvSpPr/>
+          <p:nvPr/>
+        </p:nvSpPr>
+        <p:spPr>
+          <a:xfrm>
+            <a:off x="5803392" y="2569464"/>
+            <a:ext cx="1828800" cy="201168"/>
+          </a:xfrm>
+          <a:prstGeom prst="rect">
+            <a:avLst/>
+          </a:prstGeom>
+          <a:noFill/>
+          <a:ln/>
+        </p:spPr>
+        <p:txBody>
+          <a:bodyPr wrap="square" lIns="0" tIns="0" rIns="0" bIns="0" rtlCol="0" anchor="t"/>
+          <a:lstStyle/>
+          <a:p>
+            <a:pPr algn="ctr" indent="0" marL="0">
+              <a:buNone/>
+            </a:pPr>
+            <a:r>
+              <a:rPr lang="en-US" sz="850" dirty="0">
+                <a:solidFill>
+                  <a:srgbClr val="475569"/>
+                </a:solidFill>
+                <a:latin typeface="Calibri" pitchFamily="34" charset="0"/>
+                <a:ea typeface="Calibri" pitchFamily="34" charset="-122"/>
+                <a:cs typeface="Calibri" pitchFamily="34" charset="-120"/>
+              </a:rPr>
+              <a:t>to test or show truth</a:t>
+            </a:r>
+            <a:endParaRPr lang="en-US" sz="850" dirty="0"/>
+          </a:p>
+        </p:txBody>
+      </p:sp>
+      <p:sp>
+        <p:nvSpPr>
+          <p:cNvPr id="22" name="Shape 20"/>
           <p:cNvSpPr/>
           <p:nvPr/>
         </p:nvSpPr>
@@ -14414,7 +14072,7 @@
       </p:sp>
       <p:sp>
         <p:nvSpPr>
-          <p:cNvPr id="20" name="Text 18"/>
+          <p:cNvPr id="23" name="Text 21"/>
           <p:cNvSpPr/>
           <p:nvPr/>
         </p:nvSpPr>
@@ -14453,7 +14111,7 @@
       </p:sp>
       <p:sp>
         <p:nvSpPr>
-          <p:cNvPr id="21" name="Shape 19"/>
+          <p:cNvPr id="24" name="Shape 22"/>
           <p:cNvSpPr/>
           <p:nvPr/>
         </p:nvSpPr>
@@ -14480,13 +14138,13 @@
       </p:sp>
       <p:sp>
         <p:nvSpPr>
-          <p:cNvPr id="22" name="Shape 20"/>
-          <p:cNvSpPr/>
-          <p:nvPr/>
-        </p:nvSpPr>
-        <p:spPr>
-          <a:xfrm>
-            <a:off x="4370832" y="3364992"/>
+          <p:cNvPr id="25" name="Shape 23"/>
+          <p:cNvSpPr/>
+          <p:nvPr/>
+        </p:nvSpPr>
+        <p:spPr>
+          <a:xfrm>
+            <a:off x="2999232" y="3364992"/>
             <a:ext cx="1645920" cy="475488"/>
           </a:xfrm>
           <a:prstGeom prst="rect">
@@ -14507,13 +14165,13 @@
       </p:sp>
       <p:sp>
         <p:nvSpPr>
-          <p:cNvPr id="23" name="Text 21"/>
-          <p:cNvSpPr/>
-          <p:nvPr/>
-        </p:nvSpPr>
-        <p:spPr>
-          <a:xfrm>
-            <a:off x="4370832" y="3364992"/>
+          <p:cNvPr id="26" name="Text 24"/>
+          <p:cNvSpPr/>
+          <p:nvPr/>
+        </p:nvSpPr>
+        <p:spPr>
+          <a:xfrm>
+            <a:off x="2999232" y="3364992"/>
             <a:ext cx="1645920" cy="475488"/>
           </a:xfrm>
           <a:prstGeom prst="rect">
@@ -14538,6 +14196,111 @@
                 <a:ea typeface="Trebuchet MS" pitchFamily="34" charset="-122"/>
                 <a:cs typeface="Trebuchet MS" pitchFamily="34" charset="-120"/>
               </a:rPr>
+              <a:t>im</a:t>
+            </a:r>
+            <a:endParaRPr lang="en-US" sz="1400" dirty="0"/>
+          </a:p>
+        </p:txBody>
+      </p:sp>
+      <p:sp>
+        <p:nvSpPr>
+          <p:cNvPr id="27" name="Text 25"/>
+          <p:cNvSpPr/>
+          <p:nvPr/>
+        </p:nvSpPr>
+        <p:spPr>
+          <a:xfrm>
+            <a:off x="4645152" y="3364992"/>
+            <a:ext cx="1097280" cy="475488"/>
+          </a:xfrm>
+          <a:prstGeom prst="rect">
+            <a:avLst/>
+          </a:prstGeom>
+          <a:noFill/>
+          <a:ln/>
+        </p:spPr>
+        <p:txBody>
+          <a:bodyPr wrap="square" lIns="0" tIns="0" rIns="0" bIns="0" rtlCol="0" anchor="ctr"/>
+          <a:lstStyle/>
+          <a:p>
+            <a:pPr algn="ctr" indent="0" marL="0">
+              <a:buNone/>
+            </a:pPr>
+            <a:r>
+              <a:rPr lang="en-US" sz="1600" b="1" dirty="0">
+                <a:solidFill>
+                  <a:srgbClr val="0D9488"/>
+                </a:solidFill>
+                <a:latin typeface="Trebuchet MS" pitchFamily="34" charset="0"/>
+                <a:ea typeface="Trebuchet MS" pitchFamily="34" charset="-122"/>
+                <a:cs typeface="Trebuchet MS" pitchFamily="34" charset="-120"/>
+              </a:rPr>
+              <a:t>·</a:t>
+            </a:r>
+            <a:endParaRPr lang="en-US" sz="1600" dirty="0"/>
+          </a:p>
+        </p:txBody>
+      </p:sp>
+      <p:sp>
+        <p:nvSpPr>
+          <p:cNvPr id="28" name="Shape 26"/>
+          <p:cNvSpPr/>
+          <p:nvPr/>
+        </p:nvSpPr>
+        <p:spPr>
+          <a:xfrm>
+            <a:off x="5742432" y="3364992"/>
+            <a:ext cx="1645920" cy="475488"/>
+          </a:xfrm>
+          <a:prstGeom prst="rect">
+            <a:avLst>
+              <a:gd name="adj" fmla="val 9615"/>
+            </a:avLst>
+          </a:prstGeom>
+          <a:solidFill>
+            <a:srgbClr val="FFFFFF"/>
+          </a:solidFill>
+          <a:ln w="12700">
+            <a:solidFill>
+              <a:srgbClr val="0D9488"/>
+            </a:solidFill>
+            <a:prstDash val="solid"/>
+          </a:ln>
+        </p:spPr>
+      </p:sp>
+      <p:sp>
+        <p:nvSpPr>
+          <p:cNvPr id="29" name="Text 27"/>
+          <p:cNvSpPr/>
+          <p:nvPr/>
+        </p:nvSpPr>
+        <p:spPr>
+          <a:xfrm>
+            <a:off x="5742432" y="3364992"/>
+            <a:ext cx="1645920" cy="475488"/>
+          </a:xfrm>
+          <a:prstGeom prst="rect">
+            <a:avLst/>
+          </a:prstGeom>
+          <a:noFill/>
+          <a:ln/>
+        </p:spPr>
+        <p:txBody>
+          <a:bodyPr wrap="square" lIns="0" tIns="0" rIns="0" bIns="0" rtlCol="0" anchor="ctr"/>
+          <a:lstStyle/>
+          <a:p>
+            <a:pPr algn="ctr" indent="0" marL="0">
+              <a:buNone/>
+            </a:pPr>
+            <a:r>
+              <a:rPr lang="en-US" sz="1400" b="1" dirty="0">
+                <a:solidFill>
+                  <a:srgbClr val="0D9488"/>
+                </a:solidFill>
+                <a:latin typeface="Trebuchet MS" pitchFamily="34" charset="0"/>
+                <a:ea typeface="Trebuchet MS" pitchFamily="34" charset="-122"/>
+                <a:cs typeface="Trebuchet MS" pitchFamily="34" charset="-120"/>
+              </a:rPr>
               <a:t>prove</a:t>
             </a:r>
             <a:endParaRPr lang="en-US" sz="1400" dirty="0"/>
@@ -14546,7 +14309,7 @@
       </p:sp>
       <p:sp>
         <p:nvSpPr>
-          <p:cNvPr id="24" name="Shape 22"/>
+          <p:cNvPr id="30" name="Shape 28"/>
           <p:cNvSpPr/>
           <p:nvPr/>
         </p:nvSpPr>
@@ -14573,7 +14336,7 @@
       </p:sp>
       <p:sp>
         <p:nvSpPr>
-          <p:cNvPr id="25" name="Text 23"/>
+          <p:cNvPr id="31" name="Text 29"/>
           <p:cNvSpPr/>
           <p:nvPr/>
         </p:nvSpPr>
@@ -14612,7 +14375,7 @@
       </p:sp>
       <p:sp>
         <p:nvSpPr>
-          <p:cNvPr id="26" name="Shape 24"/>
+          <p:cNvPr id="32" name="Shape 30"/>
           <p:cNvSpPr/>
           <p:nvPr/>
         </p:nvSpPr>
@@ -14639,13 +14402,13 @@
       </p:sp>
       <p:sp>
         <p:nvSpPr>
-          <p:cNvPr id="27" name="Shape 25"/>
-          <p:cNvSpPr/>
-          <p:nvPr/>
-        </p:nvSpPr>
-        <p:spPr>
-          <a:xfrm>
-            <a:off x="2670048" y="4169664"/>
+          <p:cNvPr id="33" name="Shape 31"/>
+          <p:cNvSpPr/>
+          <p:nvPr/>
+        </p:nvSpPr>
+        <p:spPr>
+          <a:xfrm>
+            <a:off x="2427732" y="4169664"/>
             <a:ext cx="685800" cy="384048"/>
           </a:xfrm>
           <a:prstGeom prst="rect">
@@ -14666,13 +14429,13 @@
       </p:sp>
       <p:sp>
         <p:nvSpPr>
-          <p:cNvPr id="28" name="Text 26"/>
-          <p:cNvSpPr/>
-          <p:nvPr/>
-        </p:nvSpPr>
-        <p:spPr>
-          <a:xfrm>
-            <a:off x="2670048" y="4169664"/>
+          <p:cNvPr id="34" name="Text 32"/>
+          <p:cNvSpPr/>
+          <p:nvPr/>
+        </p:nvSpPr>
+        <p:spPr>
+          <a:xfrm>
+            <a:off x="2427732" y="4169664"/>
             <a:ext cx="685800" cy="384048"/>
           </a:xfrm>
           <a:prstGeom prst="rect">
@@ -14697,7 +14460,7 @@
                 <a:ea typeface="Trebuchet MS" pitchFamily="34" charset="-122"/>
                 <a:cs typeface="Trebuchet MS" pitchFamily="34" charset="-120"/>
               </a:rPr>
-              <a:t>p</a:t>
+              <a:t>i</a:t>
             </a:r>
             <a:endParaRPr lang="en-US" sz="900" dirty="0"/>
           </a:p>
@@ -14705,13 +14468,13 @@
       </p:sp>
       <p:sp>
         <p:nvSpPr>
-          <p:cNvPr id="29" name="Shape 27"/>
-          <p:cNvSpPr/>
-          <p:nvPr/>
-        </p:nvSpPr>
-        <p:spPr>
-          <a:xfrm>
-            <a:off x="4123944" y="4169664"/>
+          <p:cNvPr id="35" name="Shape 33"/>
+          <p:cNvSpPr/>
+          <p:nvPr/>
+        </p:nvSpPr>
+        <p:spPr>
+          <a:xfrm>
+            <a:off x="3639312" y="4169664"/>
             <a:ext cx="685800" cy="384048"/>
           </a:xfrm>
           <a:prstGeom prst="rect">
@@ -14732,13 +14495,13 @@
       </p:sp>
       <p:sp>
         <p:nvSpPr>
-          <p:cNvPr id="30" name="Text 28"/>
-          <p:cNvSpPr/>
-          <p:nvPr/>
-        </p:nvSpPr>
-        <p:spPr>
-          <a:xfrm>
-            <a:off x="4123944" y="4169664"/>
+          <p:cNvPr id="36" name="Text 34"/>
+          <p:cNvSpPr/>
+          <p:nvPr/>
+        </p:nvSpPr>
+        <p:spPr>
+          <a:xfrm>
+            <a:off x="3639312" y="4169664"/>
             <a:ext cx="685800" cy="384048"/>
           </a:xfrm>
           <a:prstGeom prst="rect">
@@ -14763,7 +14526,7 @@
                 <a:ea typeface="Trebuchet MS" pitchFamily="34" charset="-122"/>
                 <a:cs typeface="Trebuchet MS" pitchFamily="34" charset="-120"/>
               </a:rPr>
-              <a:t>r</a:t>
+              <a:t>m</a:t>
             </a:r>
             <a:endParaRPr lang="en-US" sz="900" dirty="0"/>
           </a:p>
@@ -14771,13 +14534,13 @@
       </p:sp>
       <p:sp>
         <p:nvSpPr>
-          <p:cNvPr id="31" name="Shape 29"/>
-          <p:cNvSpPr/>
-          <p:nvPr/>
-        </p:nvSpPr>
-        <p:spPr>
-          <a:xfrm>
-            <a:off x="5577840" y="4169664"/>
+          <p:cNvPr id="37" name="Shape 35"/>
+          <p:cNvSpPr/>
+          <p:nvPr/>
+        </p:nvSpPr>
+        <p:spPr>
+          <a:xfrm>
+            <a:off x="4850892" y="4169664"/>
             <a:ext cx="685800" cy="384048"/>
           </a:xfrm>
           <a:prstGeom prst="rect">
@@ -14798,13 +14561,13 @@
       </p:sp>
       <p:sp>
         <p:nvSpPr>
-          <p:cNvPr id="32" name="Text 30"/>
-          <p:cNvSpPr/>
-          <p:nvPr/>
-        </p:nvSpPr>
-        <p:spPr>
-          <a:xfrm>
-            <a:off x="5577840" y="4169664"/>
+          <p:cNvPr id="38" name="Text 36"/>
+          <p:cNvSpPr/>
+          <p:nvPr/>
+        </p:nvSpPr>
+        <p:spPr>
+          <a:xfrm>
+            <a:off x="4850892" y="4169664"/>
             <a:ext cx="685800" cy="384048"/>
           </a:xfrm>
           <a:prstGeom prst="rect">
@@ -14829,6 +14592,72 @@
                 <a:ea typeface="Trebuchet MS" pitchFamily="34" charset="-122"/>
                 <a:cs typeface="Trebuchet MS" pitchFamily="34" charset="-120"/>
               </a:rPr>
+              <a:t>pr</a:t>
+            </a:r>
+            <a:endParaRPr lang="en-US" sz="900" dirty="0"/>
+          </a:p>
+        </p:txBody>
+      </p:sp>
+      <p:sp>
+        <p:nvSpPr>
+          <p:cNvPr id="39" name="Shape 37"/>
+          <p:cNvSpPr/>
+          <p:nvPr/>
+        </p:nvSpPr>
+        <p:spPr>
+          <a:xfrm>
+            <a:off x="6062472" y="4169664"/>
+            <a:ext cx="685800" cy="384048"/>
+          </a:xfrm>
+          <a:prstGeom prst="rect">
+            <a:avLst>
+              <a:gd name="adj" fmla="val 9524"/>
+            </a:avLst>
+          </a:prstGeom>
+          <a:solidFill>
+            <a:srgbClr val="FFFFFF"/>
+          </a:solidFill>
+          <a:ln w="12700">
+            <a:solidFill>
+              <a:srgbClr val="DB2777"/>
+            </a:solidFill>
+            <a:prstDash val="solid"/>
+          </a:ln>
+        </p:spPr>
+      </p:sp>
+      <p:sp>
+        <p:nvSpPr>
+          <p:cNvPr id="40" name="Text 38"/>
+          <p:cNvSpPr/>
+          <p:nvPr/>
+        </p:nvSpPr>
+        <p:spPr>
+          <a:xfrm>
+            <a:off x="6062472" y="4169664"/>
+            <a:ext cx="685800" cy="384048"/>
+          </a:xfrm>
+          <a:prstGeom prst="rect">
+            <a:avLst/>
+          </a:prstGeom>
+          <a:noFill/>
+          <a:ln/>
+        </p:spPr>
+        <p:txBody>
+          <a:bodyPr wrap="square" lIns="0" tIns="0" rIns="0" bIns="0" rtlCol="0" anchor="ctr"/>
+          <a:lstStyle/>
+          <a:p>
+            <a:pPr algn="ctr" indent="0" marL="0">
+              <a:buNone/>
+            </a:pPr>
+            <a:r>
+              <a:rPr lang="en-US" sz="900" b="1" dirty="0">
+                <a:solidFill>
+                  <a:srgbClr val="9D174D"/>
+                </a:solidFill>
+                <a:latin typeface="Trebuchet MS" pitchFamily="34" charset="0"/>
+                <a:ea typeface="Trebuchet MS" pitchFamily="34" charset="-122"/>
+                <a:cs typeface="Trebuchet MS" pitchFamily="34" charset="-120"/>
+              </a:rPr>
               <a:t>oo</a:t>
             </a:r>
             <a:endParaRPr lang="en-US" sz="900" dirty="0"/>
@@ -14837,13 +14666,13 @@
       </p:sp>
       <p:sp>
         <p:nvSpPr>
-          <p:cNvPr id="33" name="Text 31"/>
-          <p:cNvSpPr/>
-          <p:nvPr/>
-        </p:nvSpPr>
-        <p:spPr>
-          <a:xfrm>
-            <a:off x="5577840" y="4572000"/>
+          <p:cNvPr id="41" name="Text 39"/>
+          <p:cNvSpPr/>
+          <p:nvPr/>
+        </p:nvSpPr>
+        <p:spPr>
+          <a:xfrm>
+            <a:off x="6062472" y="4572000"/>
             <a:ext cx="685800" cy="219456"/>
           </a:xfrm>
           <a:prstGeom prst="rect">
@@ -14876,13 +14705,13 @@
       </p:sp>
       <p:sp>
         <p:nvSpPr>
-          <p:cNvPr id="34" name="Shape 32"/>
-          <p:cNvSpPr/>
-          <p:nvPr/>
-        </p:nvSpPr>
-        <p:spPr>
-          <a:xfrm>
-            <a:off x="7031736" y="4169664"/>
+          <p:cNvPr id="42" name="Shape 40"/>
+          <p:cNvSpPr/>
+          <p:nvPr/>
+        </p:nvSpPr>
+        <p:spPr>
+          <a:xfrm>
+            <a:off x="7274052" y="4169664"/>
             <a:ext cx="685800" cy="384048"/>
           </a:xfrm>
           <a:prstGeom prst="rect">
@@ -14903,13 +14732,13 @@
       </p:sp>
       <p:sp>
         <p:nvSpPr>
-          <p:cNvPr id="35" name="Text 33"/>
-          <p:cNvSpPr/>
-          <p:nvPr/>
-        </p:nvSpPr>
-        <p:spPr>
-          <a:xfrm>
-            <a:off x="7031736" y="4169664"/>
+          <p:cNvPr id="43" name="Text 41"/>
+          <p:cNvSpPr/>
+          <p:nvPr/>
+        </p:nvSpPr>
+        <p:spPr>
+          <a:xfrm>
+            <a:off x="7274052" y="4169664"/>
             <a:ext cx="685800" cy="384048"/>
           </a:xfrm>
           <a:prstGeom prst="rect">
@@ -14942,13 +14771,13 @@
       </p:sp>
       <p:sp>
         <p:nvSpPr>
-          <p:cNvPr id="36" name="Text 34"/>
-          <p:cNvSpPr/>
-          <p:nvPr/>
-        </p:nvSpPr>
-        <p:spPr>
-          <a:xfrm>
-            <a:off x="7031736" y="4572000"/>
+          <p:cNvPr id="44" name="Text 42"/>
+          <p:cNvSpPr/>
+          <p:nvPr/>
+        </p:nvSpPr>
+        <p:spPr>
+          <a:xfrm>
+            <a:off x="7274052" y="4572000"/>
             <a:ext cx="685800" cy="219456"/>
           </a:xfrm>
           <a:prstGeom prst="rect">
@@ -15547,7 +15376,7 @@
                 <a:ea typeface="Calibri" pitchFamily="34" charset="-122"/>
                 <a:cs typeface="Calibri" pitchFamily="34" charset="-120"/>
               </a:rPr>
-              <a:t>Word Labs  •  wordlabs.app  •  Root: 'prove' = to show something is true</a:t>
+              <a:t>Word Labs  •  wordlabs.app  •  Root: 'prove' = to test or show truth</a:t>
             </a:r>
             <a:endParaRPr lang="en-US" sz="800" dirty="0"/>
           </a:p>
@@ -15881,7 +15710,7 @@
                 <a:ea typeface="Trebuchet MS" pitchFamily="34" charset="-122"/>
                 <a:cs typeface="Trebuchet MS" pitchFamily="34" charset="-120"/>
               </a:rPr>
-              <a:t>2</a:t>
+              <a:t>1</a:t>
             </a:r>
             <a:pPr algn="ctr" indent="0" marL="0">
               <a:buNone/>
@@ -15895,7 +15724,7 @@
                 <a:ea typeface="Trebuchet MS" pitchFamily="34" charset="-122"/>
                 <a:cs typeface="Trebuchet MS" pitchFamily="34" charset="-120"/>
               </a:rPr>
-              <a:t>  punctuation marks</a:t>
+              <a:t>  punctuation mark</a:t>
             </a:r>
             <a:endParaRPr lang="en-US" sz="2800" dirty="0"/>
           </a:p>
@@ -16187,7 +16016,7 @@
                 <a:ea typeface="Calibri" pitchFamily="34" charset="-122"/>
                 <a:cs typeface="Calibri" pitchFamily="34" charset="-120"/>
               </a:rPr>
-              <a:t>Word Labs  •  wordlabs.app  •  Root: 'prove' = to show something is true</a:t>
+              <a:t>Word Labs  •  wordlabs.app  •  Root: 'prove' = to test or show truth</a:t>
             </a:r>
             <a:endParaRPr lang="en-US" sz="800" dirty="0"/>
           </a:p>
@@ -16299,7 +16128,7 @@
                 <a:ea typeface="Calibri" pitchFamily="34" charset="-122"/>
                 <a:cs typeface="Calibri" pitchFamily="34" charset="-120"/>
               </a:rPr>
-              <a:t>She wanted to </a:t>
+              <a:t>The </a:t>
             </a:r>
             <a:pPr algn="l" indent="0" marL="0">
               <a:buNone/>
@@ -16316,7 +16145,7 @@
                 <a:ea typeface="Calibri" pitchFamily="34" charset="-122"/>
                 <a:cs typeface="Calibri" pitchFamily="34" charset="-120"/>
               </a:rPr>
-              <a:t>disprove</a:t>
+              <a:t>approved</a:t>
             </a:r>
             <a:pPr algn="l" indent="0" marL="0">
               <a:buNone/>
@@ -16330,7 +16159,7 @@
                 <a:ea typeface="Calibri" pitchFamily="34" charset="-122"/>
                 <a:cs typeface="Calibri" pitchFamily="34" charset="-120"/>
               </a:rPr>
-              <a:t> the rumour, </a:t>
+              <a:t> plan showed great </a:t>
             </a:r>
             <a:pPr algn="l" indent="0" marL="0">
               <a:buNone/>
@@ -16347,7 +16176,7 @@
                 <a:ea typeface="Calibri" pitchFamily="34" charset="-122"/>
                 <a:cs typeface="Calibri" pitchFamily="34" charset="-120"/>
               </a:rPr>
-              <a:t>improve</a:t>
+              <a:t>improvement</a:t>
             </a:r>
             <a:pPr algn="l" indent="0" marL="0">
               <a:buNone/>
@@ -16361,7 +16190,7 @@
                 <a:ea typeface="Calibri" pitchFamily="34" charset="-122"/>
                 <a:cs typeface="Calibri" pitchFamily="34" charset="-120"/>
               </a:rPr>
-              <a:t> her reputation, and </a:t>
+              <a:t>, but the team still needed to </a:t>
             </a:r>
             <a:pPr algn="l" indent="0" marL="0">
               <a:buNone/>
@@ -16378,7 +16207,7 @@
                 <a:ea typeface="Calibri" pitchFamily="34" charset="-122"/>
                 <a:cs typeface="Calibri" pitchFamily="34" charset="-120"/>
               </a:rPr>
-              <a:t>approve</a:t>
+              <a:t>disprove</a:t>
             </a:r>
             <a:pPr algn="l" indent="0" marL="0">
               <a:buNone/>
@@ -16392,7 +16221,7 @@
                 <a:ea typeface="Calibri" pitchFamily="34" charset="-122"/>
                 <a:cs typeface="Calibri" pitchFamily="34" charset="-120"/>
               </a:rPr>
-              <a:t> the new plan.</a:t>
+              <a:t> the old theory.</a:t>
             </a:r>
             <a:endParaRPr lang="en-US" sz="1800" dirty="0"/>
           </a:p>
@@ -16547,7 +16376,7 @@
                 <a:ea typeface="Trebuchet MS" pitchFamily="34" charset="-122"/>
                 <a:cs typeface="Trebuchet MS" pitchFamily="34" charset="-120"/>
               </a:rPr>
-              <a:t>disprove</a:t>
+              <a:t>approved</a:t>
             </a:r>
             <a:endParaRPr lang="en-US" sz="1400" dirty="0"/>
           </a:p>
@@ -16675,7 +16504,7 @@
                 <a:ea typeface="Trebuchet MS" pitchFamily="34" charset="-122"/>
                 <a:cs typeface="Trebuchet MS" pitchFamily="34" charset="-120"/>
               </a:rPr>
-              <a:t>improve</a:t>
+              <a:t>improvement</a:t>
             </a:r>
             <a:endParaRPr lang="en-US" sz="1400" dirty="0"/>
           </a:p>
@@ -16803,7 +16632,7 @@
                 <a:ea typeface="Trebuchet MS" pitchFamily="34" charset="-122"/>
                 <a:cs typeface="Trebuchet MS" pitchFamily="34" charset="-120"/>
               </a:rPr>
-              <a:t>approve</a:t>
+              <a:t>disprove</a:t>
             </a:r>
             <a:endParaRPr lang="en-US" sz="1400" dirty="0"/>
           </a:p>
@@ -17134,7 +16963,7 @@
                 <a:ea typeface="Calibri" pitchFamily="34" charset="-122"/>
                 <a:cs typeface="Calibri" pitchFamily="34" charset="-120"/>
               </a:rPr>
-              <a:t>Word Labs  •  wordlabs.app  •  Root: 'prove' = to show something is true</a:t>
+              <a:t>Word Labs  •  wordlabs.app  •  Root: 'prove' = to test or show truth</a:t>
             </a:r>
             <a:endParaRPr lang="en-US" sz="800" dirty="0"/>
           </a:p>
@@ -17273,7 +17102,7 @@
                 <a:ea typeface="Trebuchet MS" pitchFamily="34" charset="-122"/>
                 <a:cs typeface="Trebuchet MS" pitchFamily="34" charset="-120"/>
               </a:rPr>
-              <a:t>disprove</a:t>
+              <a:t>approved</a:t>
             </a:r>
             <a:endParaRPr lang="en-US" sz="2800" dirty="0"/>
           </a:p>
@@ -17961,7 +17790,7 @@
                 <a:ea typeface="Calibri" pitchFamily="34" charset="-122"/>
                 <a:cs typeface="Calibri" pitchFamily="34" charset="-120"/>
               </a:rPr>
-              <a:t>Word Labs  •  wordlabs.app  •  Root: 'prove' = to show something is true</a:t>
+              <a:t>Word Labs  •  wordlabs.app  •  Root: 'prove' = to test or show truth</a:t>
             </a:r>
             <a:endParaRPr lang="en-US" sz="800" dirty="0"/>
           </a:p>
@@ -18100,7 +17929,7 @@
                 <a:ea typeface="Trebuchet MS" pitchFamily="34" charset="-122"/>
                 <a:cs typeface="Trebuchet MS" pitchFamily="34" charset="-120"/>
               </a:rPr>
-              <a:t>disprove</a:t>
+              <a:t>approved</a:t>
             </a:r>
             <a:endParaRPr lang="en-US" sz="2800" dirty="0"/>
           </a:p>
@@ -18180,7 +18009,7 @@
         </p:nvSpPr>
         <p:spPr>
           <a:xfrm>
-            <a:off x="2938272" y="2258568"/>
+            <a:off x="2221992" y="2258568"/>
             <a:ext cx="1828800" cy="292608"/>
           </a:xfrm>
           <a:prstGeom prst="rect">
@@ -18214,7 +18043,7 @@
         </p:nvSpPr>
         <p:spPr>
           <a:xfrm>
-            <a:off x="2938272" y="2258568"/>
+            <a:off x="2221992" y="2258568"/>
             <a:ext cx="1828800" cy="292608"/>
           </a:xfrm>
           <a:prstGeom prst="rect">
@@ -18239,7 +18068,7 @@
                 <a:ea typeface="Trebuchet MS" pitchFamily="34" charset="-122"/>
                 <a:cs typeface="Trebuchet MS" pitchFamily="34" charset="-120"/>
               </a:rPr>
-              <a:t>dis</a:t>
+              <a:t>ap</a:t>
             </a:r>
             <a:endParaRPr lang="en-US" sz="1300" dirty="0"/>
           </a:p>
@@ -18253,7 +18082,7 @@
         </p:nvSpPr>
         <p:spPr>
           <a:xfrm>
-            <a:off x="2938272" y="2569464"/>
+            <a:off x="2221992" y="2569464"/>
             <a:ext cx="1828800" cy="201168"/>
           </a:xfrm>
           <a:prstGeom prst="rect">
@@ -18278,7 +18107,7 @@
                 <a:ea typeface="Calibri" pitchFamily="34" charset="-122"/>
                 <a:cs typeface="Calibri" pitchFamily="34" charset="-120"/>
               </a:rPr>
-              <a:t>not, opposite of</a:t>
+              <a:t>to or towards</a:t>
             </a:r>
             <a:endParaRPr lang="en-US" sz="850" dirty="0"/>
           </a:p>
@@ -18286,13 +18115,52 @@
       </p:sp>
       <p:sp>
         <p:nvSpPr>
-          <p:cNvPr id="19" name="Shape 17"/>
-          <p:cNvSpPr/>
-          <p:nvPr/>
-        </p:nvSpPr>
-        <p:spPr>
-          <a:xfrm>
-            <a:off x="5803392" y="2258568"/>
+          <p:cNvPr id="19" name="Text 17"/>
+          <p:cNvSpPr/>
+          <p:nvPr/>
+        </p:nvSpPr>
+        <p:spPr>
+          <a:xfrm>
+            <a:off x="2221992" y="2752344"/>
+            <a:ext cx="1828800" cy="182880"/>
+          </a:xfrm>
+          <a:prstGeom prst="rect">
+            <a:avLst/>
+          </a:prstGeom>
+          <a:noFill/>
+          <a:ln/>
+        </p:spPr>
+        <p:txBody>
+          <a:bodyPr wrap="square" lIns="0" tIns="0" rIns="0" bIns="0" rtlCol="0" anchor="t"/>
+          <a:lstStyle/>
+          <a:p>
+            <a:pPr algn="ctr" indent="0" marL="0">
+              <a:buNone/>
+            </a:pPr>
+            <a:r>
+              <a:rPr lang="en-US" sz="700" i="1" dirty="0">
+                <a:solidFill>
+                  <a:srgbClr val="94A3B8"/>
+                </a:solidFill>
+                <a:latin typeface="Calibri" pitchFamily="34" charset="0"/>
+                <a:ea typeface="Calibri" pitchFamily="34" charset="-122"/>
+                <a:cs typeface="Calibri" pitchFamily="34" charset="-120"/>
+              </a:rPr>
+              <a:t>ad → ap before 'p'</a:t>
+            </a:r>
+            <a:endParaRPr lang="en-US" sz="700" dirty="0"/>
+          </a:p>
+        </p:txBody>
+      </p:sp>
+      <p:sp>
+        <p:nvSpPr>
+          <p:cNvPr id="20" name="Shape 18"/>
+          <p:cNvSpPr/>
+          <p:nvPr/>
+        </p:nvSpPr>
+        <p:spPr>
+          <a:xfrm>
+            <a:off x="4370832" y="2258568"/>
             <a:ext cx="1828800" cy="292608"/>
           </a:xfrm>
           <a:prstGeom prst="rect">
@@ -18320,13 +18188,13 @@
       </p:sp>
       <p:sp>
         <p:nvSpPr>
-          <p:cNvPr id="20" name="Text 18"/>
-          <p:cNvSpPr/>
-          <p:nvPr/>
-        </p:nvSpPr>
-        <p:spPr>
-          <a:xfrm>
-            <a:off x="5803392" y="2258568"/>
+          <p:cNvPr id="21" name="Text 19"/>
+          <p:cNvSpPr/>
+          <p:nvPr/>
+        </p:nvSpPr>
+        <p:spPr>
+          <a:xfrm>
+            <a:off x="4370832" y="2258568"/>
             <a:ext cx="1828800" cy="292608"/>
           </a:xfrm>
           <a:prstGeom prst="rect">
@@ -18359,13 +18227,13 @@
       </p:sp>
       <p:sp>
         <p:nvSpPr>
-          <p:cNvPr id="21" name="Text 19"/>
-          <p:cNvSpPr/>
-          <p:nvPr/>
-        </p:nvSpPr>
-        <p:spPr>
-          <a:xfrm>
-            <a:off x="5803392" y="2569464"/>
+          <p:cNvPr id="22" name="Text 20"/>
+          <p:cNvSpPr/>
+          <p:nvPr/>
+        </p:nvSpPr>
+        <p:spPr>
+          <a:xfrm>
+            <a:off x="4370832" y="2569464"/>
             <a:ext cx="1828800" cy="201168"/>
           </a:xfrm>
           <a:prstGeom prst="rect">
@@ -18390,7 +18258,7 @@
                 <a:ea typeface="Calibri" pitchFamily="34" charset="-122"/>
                 <a:cs typeface="Calibri" pitchFamily="34" charset="-120"/>
               </a:rPr>
-              <a:t>to show is true</a:t>
+              <a:t>to test or show truth</a:t>
             </a:r>
             <a:endParaRPr lang="en-US" sz="850" dirty="0"/>
           </a:p>
@@ -18398,7 +18266,158 @@
       </p:sp>
       <p:sp>
         <p:nvSpPr>
-          <p:cNvPr id="22" name="Shape 20"/>
+          <p:cNvPr id="23" name="Shape 21"/>
+          <p:cNvSpPr/>
+          <p:nvPr/>
+        </p:nvSpPr>
+        <p:spPr>
+          <a:xfrm>
+            <a:off x="6519672" y="2258568"/>
+            <a:ext cx="1828800" cy="292608"/>
+          </a:xfrm>
+          <a:prstGeom prst="rect">
+            <a:avLst>
+              <a:gd name="adj" fmla="val 25000"/>
+            </a:avLst>
+          </a:prstGeom>
+          <a:solidFill>
+            <a:srgbClr val="FCE7F3"/>
+          </a:solidFill>
+          <a:ln w="19050">
+            <a:solidFill>
+              <a:srgbClr val="DB2777"/>
+            </a:solidFill>
+            <a:prstDash val="solid"/>
+          </a:ln>
+          <a:effectLst>
+            <a:outerShdw sx="100000" sy="100000" kx="0" ky="0" algn="bl" rotWithShape="0" blurRad="101600" dist="38100" dir="8100000">
+              <a:srgbClr val="000000">
+                <a:alpha val="12000"/>
+              </a:srgbClr>
+            </a:outerShdw>
+          </a:effectLst>
+        </p:spPr>
+      </p:sp>
+      <p:sp>
+        <p:nvSpPr>
+          <p:cNvPr id="24" name="Text 22"/>
+          <p:cNvSpPr/>
+          <p:nvPr/>
+        </p:nvSpPr>
+        <p:spPr>
+          <a:xfrm>
+            <a:off x="6519672" y="2258568"/>
+            <a:ext cx="1828800" cy="292608"/>
+          </a:xfrm>
+          <a:prstGeom prst="rect">
+            <a:avLst/>
+          </a:prstGeom>
+          <a:noFill/>
+          <a:ln/>
+        </p:spPr>
+        <p:txBody>
+          <a:bodyPr wrap="square" lIns="0" tIns="0" rIns="0" bIns="0" rtlCol="0" anchor="ctr"/>
+          <a:lstStyle/>
+          <a:p>
+            <a:pPr algn="ctr" indent="0" marL="0">
+              <a:buNone/>
+            </a:pPr>
+            <a:r>
+              <a:rPr lang="en-US" sz="1300" b="1" dirty="0">
+                <a:solidFill>
+                  <a:srgbClr val="9D174D"/>
+                </a:solidFill>
+                <a:latin typeface="Trebuchet MS" pitchFamily="34" charset="0"/>
+                <a:ea typeface="Trebuchet MS" pitchFamily="34" charset="-122"/>
+                <a:cs typeface="Trebuchet MS" pitchFamily="34" charset="-120"/>
+              </a:rPr>
+              <a:t>d</a:t>
+            </a:r>
+            <a:endParaRPr lang="en-US" sz="1300" dirty="0"/>
+          </a:p>
+        </p:txBody>
+      </p:sp>
+      <p:sp>
+        <p:nvSpPr>
+          <p:cNvPr id="25" name="Text 23"/>
+          <p:cNvSpPr/>
+          <p:nvPr/>
+        </p:nvSpPr>
+        <p:spPr>
+          <a:xfrm>
+            <a:off x="6519672" y="2569464"/>
+            <a:ext cx="1828800" cy="201168"/>
+          </a:xfrm>
+          <a:prstGeom prst="rect">
+            <a:avLst/>
+          </a:prstGeom>
+          <a:noFill/>
+          <a:ln/>
+        </p:spPr>
+        <p:txBody>
+          <a:bodyPr wrap="square" lIns="0" tIns="0" rIns="0" bIns="0" rtlCol="0" anchor="t"/>
+          <a:lstStyle/>
+          <a:p>
+            <a:pPr algn="ctr" indent="0" marL="0">
+              <a:buNone/>
+            </a:pPr>
+            <a:r>
+              <a:rPr lang="en-US" sz="850" dirty="0">
+                <a:solidFill>
+                  <a:srgbClr val="475569"/>
+                </a:solidFill>
+                <a:latin typeface="Calibri" pitchFamily="34" charset="0"/>
+                <a:ea typeface="Calibri" pitchFamily="34" charset="-122"/>
+                <a:cs typeface="Calibri" pitchFamily="34" charset="-120"/>
+              </a:rPr>
+              <a:t>past tense</a:t>
+            </a:r>
+            <a:endParaRPr lang="en-US" sz="850" dirty="0"/>
+          </a:p>
+        </p:txBody>
+      </p:sp>
+      <p:sp>
+        <p:nvSpPr>
+          <p:cNvPr id="26" name="Text 24"/>
+          <p:cNvSpPr/>
+          <p:nvPr/>
+        </p:nvSpPr>
+        <p:spPr>
+          <a:xfrm>
+            <a:off x="6519672" y="2752344"/>
+            <a:ext cx="1828800" cy="182880"/>
+          </a:xfrm>
+          <a:prstGeom prst="rect">
+            <a:avLst/>
+          </a:prstGeom>
+          <a:noFill/>
+          <a:ln/>
+        </p:spPr>
+        <p:txBody>
+          <a:bodyPr wrap="square" lIns="0" tIns="0" rIns="0" bIns="0" rtlCol="0" anchor="t"/>
+          <a:lstStyle/>
+          <a:p>
+            <a:pPr algn="ctr" indent="0" marL="0">
+              <a:buNone/>
+            </a:pPr>
+            <a:r>
+              <a:rPr lang="en-US" sz="700" i="1" dirty="0">
+                <a:solidFill>
+                  <a:srgbClr val="94A3B8"/>
+                </a:solidFill>
+                <a:latin typeface="Calibri" pitchFamily="34" charset="0"/>
+                <a:ea typeface="Calibri" pitchFamily="34" charset="-122"/>
+                <a:cs typeface="Calibri" pitchFamily="34" charset="-120"/>
+              </a:rPr>
+              <a:t>'e' kept before 'd'</a:t>
+            </a:r>
+            <a:endParaRPr lang="en-US" sz="700" dirty="0"/>
+          </a:p>
+        </p:txBody>
+      </p:sp>
+      <p:sp>
+        <p:nvSpPr>
+          <p:cNvPr id="27" name="Shape 25"/>
           <p:cNvSpPr/>
           <p:nvPr/>
         </p:nvSpPr>
@@ -18425,7 +18444,7 @@
       </p:sp>
       <p:sp>
         <p:nvSpPr>
-          <p:cNvPr id="23" name="Text 21"/>
+          <p:cNvPr id="28" name="Text 26"/>
           <p:cNvSpPr/>
           <p:nvPr/>
         </p:nvSpPr>
@@ -18464,7 +18483,7 @@
       </p:sp>
       <p:sp>
         <p:nvSpPr>
-          <p:cNvPr id="24" name="Shape 22"/>
+          <p:cNvPr id="29" name="Shape 27"/>
           <p:cNvSpPr/>
           <p:nvPr/>
         </p:nvSpPr>
@@ -18491,7 +18510,7 @@
       </p:sp>
       <p:sp>
         <p:nvSpPr>
-          <p:cNvPr id="25" name="Text 23"/>
+          <p:cNvPr id="30" name="Text 28"/>
           <p:cNvSpPr/>
           <p:nvPr/>
         </p:nvSpPr>
@@ -18530,7 +18549,7 @@
       </p:sp>
       <p:sp>
         <p:nvSpPr>
-          <p:cNvPr id="26" name="Shape 24"/>
+          <p:cNvPr id="31" name="Shape 29"/>
           <p:cNvSpPr/>
           <p:nvPr/>
         </p:nvSpPr>
@@ -18557,7 +18576,7 @@
       </p:sp>
       <p:sp>
         <p:nvSpPr>
-          <p:cNvPr id="27" name="Text 25"/>
+          <p:cNvPr id="32" name="Text 30"/>
           <p:cNvSpPr/>
           <p:nvPr/>
         </p:nvSpPr>
@@ -18596,7 +18615,7 @@
       </p:sp>
       <p:sp>
         <p:nvSpPr>
-          <p:cNvPr id="28" name="Shape 26"/>
+          <p:cNvPr id="33" name="Shape 31"/>
           <p:cNvSpPr/>
           <p:nvPr/>
         </p:nvSpPr>
@@ -18623,7 +18642,7 @@
       </p:sp>
       <p:sp>
         <p:nvSpPr>
-          <p:cNvPr id="29" name="Text 27"/>
+          <p:cNvPr id="34" name="Text 32"/>
           <p:cNvSpPr/>
           <p:nvPr/>
         </p:nvSpPr>
@@ -18946,7 +18965,7 @@
                 <a:ea typeface="Calibri" pitchFamily="34" charset="-122"/>
                 <a:cs typeface="Calibri" pitchFamily="34" charset="-120"/>
               </a:rPr>
-              <a:t>Word Labs  •  wordlabs.app  •  Root: 'prove' = to show something is true</a:t>
+              <a:t>Word Labs  •  wordlabs.app  •  Root: 'prove' = to test or show truth</a:t>
             </a:r>
             <a:endParaRPr lang="en-US" sz="800" dirty="0"/>
           </a:p>
@@ -19085,7 +19104,7 @@
                 <a:ea typeface="Trebuchet MS" pitchFamily="34" charset="-122"/>
                 <a:cs typeface="Trebuchet MS" pitchFamily="34" charset="-120"/>
               </a:rPr>
-              <a:t>disprove</a:t>
+              <a:t>approved</a:t>
             </a:r>
             <a:endParaRPr lang="en-US" sz="2800" dirty="0"/>
           </a:p>
@@ -19165,7 +19184,7 @@
         </p:nvSpPr>
         <p:spPr>
           <a:xfrm>
-            <a:off x="2938272" y="2258568"/>
+            <a:off x="2221992" y="2258568"/>
             <a:ext cx="1828800" cy="292608"/>
           </a:xfrm>
           <a:prstGeom prst="rect">
@@ -19199,7 +19218,7 @@
         </p:nvSpPr>
         <p:spPr>
           <a:xfrm>
-            <a:off x="2938272" y="2258568"/>
+            <a:off x="2221992" y="2258568"/>
             <a:ext cx="1828800" cy="292608"/>
           </a:xfrm>
           <a:prstGeom prst="rect">
@@ -19224,7 +19243,7 @@
                 <a:ea typeface="Trebuchet MS" pitchFamily="34" charset="-122"/>
                 <a:cs typeface="Trebuchet MS" pitchFamily="34" charset="-120"/>
               </a:rPr>
-              <a:t>dis</a:t>
+              <a:t>ap</a:t>
             </a:r>
             <a:endParaRPr lang="en-US" sz="1300" dirty="0"/>
           </a:p>
@@ -19238,7 +19257,7 @@
         </p:nvSpPr>
         <p:spPr>
           <a:xfrm>
-            <a:off x="2938272" y="2569464"/>
+            <a:off x="2221992" y="2569464"/>
             <a:ext cx="1828800" cy="201168"/>
           </a:xfrm>
           <a:prstGeom prst="rect">
@@ -19263,7 +19282,7 @@
                 <a:ea typeface="Calibri" pitchFamily="34" charset="-122"/>
                 <a:cs typeface="Calibri" pitchFamily="34" charset="-120"/>
               </a:rPr>
-              <a:t>not, opposite of</a:t>
+              <a:t>to or towards</a:t>
             </a:r>
             <a:endParaRPr lang="en-US" sz="850" dirty="0"/>
           </a:p>
@@ -19271,13 +19290,52 @@
       </p:sp>
       <p:sp>
         <p:nvSpPr>
-          <p:cNvPr id="19" name="Shape 17"/>
-          <p:cNvSpPr/>
-          <p:nvPr/>
-        </p:nvSpPr>
-        <p:spPr>
-          <a:xfrm>
-            <a:off x="5803392" y="2258568"/>
+          <p:cNvPr id="19" name="Text 17"/>
+          <p:cNvSpPr/>
+          <p:nvPr/>
+        </p:nvSpPr>
+        <p:spPr>
+          <a:xfrm>
+            <a:off x="2221992" y="2752344"/>
+            <a:ext cx="1828800" cy="182880"/>
+          </a:xfrm>
+          <a:prstGeom prst="rect">
+            <a:avLst/>
+          </a:prstGeom>
+          <a:noFill/>
+          <a:ln/>
+        </p:spPr>
+        <p:txBody>
+          <a:bodyPr wrap="square" lIns="0" tIns="0" rIns="0" bIns="0" rtlCol="0" anchor="t"/>
+          <a:lstStyle/>
+          <a:p>
+            <a:pPr algn="ctr" indent="0" marL="0">
+              <a:buNone/>
+            </a:pPr>
+            <a:r>
+              <a:rPr lang="en-US" sz="700" i="1" dirty="0">
+                <a:solidFill>
+                  <a:srgbClr val="94A3B8"/>
+                </a:solidFill>
+                <a:latin typeface="Calibri" pitchFamily="34" charset="0"/>
+                <a:ea typeface="Calibri" pitchFamily="34" charset="-122"/>
+                <a:cs typeface="Calibri" pitchFamily="34" charset="-120"/>
+              </a:rPr>
+              <a:t>ad → ap before 'p'</a:t>
+            </a:r>
+            <a:endParaRPr lang="en-US" sz="700" dirty="0"/>
+          </a:p>
+        </p:txBody>
+      </p:sp>
+      <p:sp>
+        <p:nvSpPr>
+          <p:cNvPr id="20" name="Shape 18"/>
+          <p:cNvSpPr/>
+          <p:nvPr/>
+        </p:nvSpPr>
+        <p:spPr>
+          <a:xfrm>
+            <a:off x="4370832" y="2258568"/>
             <a:ext cx="1828800" cy="292608"/>
           </a:xfrm>
           <a:prstGeom prst="rect">
@@ -19305,13 +19363,13 @@
       </p:sp>
       <p:sp>
         <p:nvSpPr>
-          <p:cNvPr id="20" name="Text 18"/>
-          <p:cNvSpPr/>
-          <p:nvPr/>
-        </p:nvSpPr>
-        <p:spPr>
-          <a:xfrm>
-            <a:off x="5803392" y="2258568"/>
+          <p:cNvPr id="21" name="Text 19"/>
+          <p:cNvSpPr/>
+          <p:nvPr/>
+        </p:nvSpPr>
+        <p:spPr>
+          <a:xfrm>
+            <a:off x="4370832" y="2258568"/>
             <a:ext cx="1828800" cy="292608"/>
           </a:xfrm>
           <a:prstGeom prst="rect">
@@ -19344,13 +19402,13 @@
       </p:sp>
       <p:sp>
         <p:nvSpPr>
-          <p:cNvPr id="21" name="Text 19"/>
-          <p:cNvSpPr/>
-          <p:nvPr/>
-        </p:nvSpPr>
-        <p:spPr>
-          <a:xfrm>
-            <a:off x="5803392" y="2569464"/>
+          <p:cNvPr id="22" name="Text 20"/>
+          <p:cNvSpPr/>
+          <p:nvPr/>
+        </p:nvSpPr>
+        <p:spPr>
+          <a:xfrm>
+            <a:off x="4370832" y="2569464"/>
             <a:ext cx="1828800" cy="201168"/>
           </a:xfrm>
           <a:prstGeom prst="rect">
@@ -19375,7 +19433,7 @@
                 <a:ea typeface="Calibri" pitchFamily="34" charset="-122"/>
                 <a:cs typeface="Calibri" pitchFamily="34" charset="-120"/>
               </a:rPr>
-              <a:t>to show is true</a:t>
+              <a:t>to test or show truth</a:t>
             </a:r>
             <a:endParaRPr lang="en-US" sz="850" dirty="0"/>
           </a:p>
@@ -19383,7 +19441,158 @@
       </p:sp>
       <p:sp>
         <p:nvSpPr>
-          <p:cNvPr id="22" name="Shape 20"/>
+          <p:cNvPr id="23" name="Shape 21"/>
+          <p:cNvSpPr/>
+          <p:nvPr/>
+        </p:nvSpPr>
+        <p:spPr>
+          <a:xfrm>
+            <a:off x="6519672" y="2258568"/>
+            <a:ext cx="1828800" cy="292608"/>
+          </a:xfrm>
+          <a:prstGeom prst="rect">
+            <a:avLst>
+              <a:gd name="adj" fmla="val 25000"/>
+            </a:avLst>
+          </a:prstGeom>
+          <a:solidFill>
+            <a:srgbClr val="FCE7F3"/>
+          </a:solidFill>
+          <a:ln w="19050">
+            <a:solidFill>
+              <a:srgbClr val="DB2777"/>
+            </a:solidFill>
+            <a:prstDash val="solid"/>
+          </a:ln>
+          <a:effectLst>
+            <a:outerShdw sx="100000" sy="100000" kx="0" ky="0" algn="bl" rotWithShape="0" blurRad="101600" dist="38100" dir="8100000">
+              <a:srgbClr val="000000">
+                <a:alpha val="12000"/>
+              </a:srgbClr>
+            </a:outerShdw>
+          </a:effectLst>
+        </p:spPr>
+      </p:sp>
+      <p:sp>
+        <p:nvSpPr>
+          <p:cNvPr id="24" name="Text 22"/>
+          <p:cNvSpPr/>
+          <p:nvPr/>
+        </p:nvSpPr>
+        <p:spPr>
+          <a:xfrm>
+            <a:off x="6519672" y="2258568"/>
+            <a:ext cx="1828800" cy="292608"/>
+          </a:xfrm>
+          <a:prstGeom prst="rect">
+            <a:avLst/>
+          </a:prstGeom>
+          <a:noFill/>
+          <a:ln/>
+        </p:spPr>
+        <p:txBody>
+          <a:bodyPr wrap="square" lIns="0" tIns="0" rIns="0" bIns="0" rtlCol="0" anchor="ctr"/>
+          <a:lstStyle/>
+          <a:p>
+            <a:pPr algn="ctr" indent="0" marL="0">
+              <a:buNone/>
+            </a:pPr>
+            <a:r>
+              <a:rPr lang="en-US" sz="1300" b="1" dirty="0">
+                <a:solidFill>
+                  <a:srgbClr val="9D174D"/>
+                </a:solidFill>
+                <a:latin typeface="Trebuchet MS" pitchFamily="34" charset="0"/>
+                <a:ea typeface="Trebuchet MS" pitchFamily="34" charset="-122"/>
+                <a:cs typeface="Trebuchet MS" pitchFamily="34" charset="-120"/>
+              </a:rPr>
+              <a:t>d</a:t>
+            </a:r>
+            <a:endParaRPr lang="en-US" sz="1300" dirty="0"/>
+          </a:p>
+        </p:txBody>
+      </p:sp>
+      <p:sp>
+        <p:nvSpPr>
+          <p:cNvPr id="25" name="Text 23"/>
+          <p:cNvSpPr/>
+          <p:nvPr/>
+        </p:nvSpPr>
+        <p:spPr>
+          <a:xfrm>
+            <a:off x="6519672" y="2569464"/>
+            <a:ext cx="1828800" cy="201168"/>
+          </a:xfrm>
+          <a:prstGeom prst="rect">
+            <a:avLst/>
+          </a:prstGeom>
+          <a:noFill/>
+          <a:ln/>
+        </p:spPr>
+        <p:txBody>
+          <a:bodyPr wrap="square" lIns="0" tIns="0" rIns="0" bIns="0" rtlCol="0" anchor="t"/>
+          <a:lstStyle/>
+          <a:p>
+            <a:pPr algn="ctr" indent="0" marL="0">
+              <a:buNone/>
+            </a:pPr>
+            <a:r>
+              <a:rPr lang="en-US" sz="850" dirty="0">
+                <a:solidFill>
+                  <a:srgbClr val="475569"/>
+                </a:solidFill>
+                <a:latin typeface="Calibri" pitchFamily="34" charset="0"/>
+                <a:ea typeface="Calibri" pitchFamily="34" charset="-122"/>
+                <a:cs typeface="Calibri" pitchFamily="34" charset="-120"/>
+              </a:rPr>
+              <a:t>past tense</a:t>
+            </a:r>
+            <a:endParaRPr lang="en-US" sz="850" dirty="0"/>
+          </a:p>
+        </p:txBody>
+      </p:sp>
+      <p:sp>
+        <p:nvSpPr>
+          <p:cNvPr id="26" name="Text 24"/>
+          <p:cNvSpPr/>
+          <p:nvPr/>
+        </p:nvSpPr>
+        <p:spPr>
+          <a:xfrm>
+            <a:off x="6519672" y="2752344"/>
+            <a:ext cx="1828800" cy="182880"/>
+          </a:xfrm>
+          <a:prstGeom prst="rect">
+            <a:avLst/>
+          </a:prstGeom>
+          <a:noFill/>
+          <a:ln/>
+        </p:spPr>
+        <p:txBody>
+          <a:bodyPr wrap="square" lIns="0" tIns="0" rIns="0" bIns="0" rtlCol="0" anchor="t"/>
+          <a:lstStyle/>
+          <a:p>
+            <a:pPr algn="ctr" indent="0" marL="0">
+              <a:buNone/>
+            </a:pPr>
+            <a:r>
+              <a:rPr lang="en-US" sz="700" i="1" dirty="0">
+                <a:solidFill>
+                  <a:srgbClr val="94A3B8"/>
+                </a:solidFill>
+                <a:latin typeface="Calibri" pitchFamily="34" charset="0"/>
+                <a:ea typeface="Calibri" pitchFamily="34" charset="-122"/>
+                <a:cs typeface="Calibri" pitchFamily="34" charset="-120"/>
+              </a:rPr>
+              <a:t>'e' kept before 'd'</a:t>
+            </a:r>
+            <a:endParaRPr lang="en-US" sz="700" dirty="0"/>
+          </a:p>
+        </p:txBody>
+      </p:sp>
+      <p:sp>
+        <p:nvSpPr>
+          <p:cNvPr id="27" name="Shape 25"/>
           <p:cNvSpPr/>
           <p:nvPr/>
         </p:nvSpPr>
@@ -19410,7 +19619,7 @@
       </p:sp>
       <p:sp>
         <p:nvSpPr>
-          <p:cNvPr id="23" name="Text 21"/>
+          <p:cNvPr id="28" name="Text 26"/>
           <p:cNvSpPr/>
           <p:nvPr/>
         </p:nvSpPr>
@@ -19449,7 +19658,7 @@
       </p:sp>
       <p:sp>
         <p:nvSpPr>
-          <p:cNvPr id="24" name="Shape 22"/>
+          <p:cNvPr id="29" name="Shape 27"/>
           <p:cNvSpPr/>
           <p:nvPr/>
         </p:nvSpPr>
@@ -19476,7 +19685,7 @@
       </p:sp>
       <p:sp>
         <p:nvSpPr>
-          <p:cNvPr id="25" name="Shape 23"/>
+          <p:cNvPr id="30" name="Shape 28"/>
           <p:cNvSpPr/>
           <p:nvPr/>
         </p:nvSpPr>
@@ -19503,7 +19712,7 @@
       </p:sp>
       <p:sp>
         <p:nvSpPr>
-          <p:cNvPr id="26" name="Text 24"/>
+          <p:cNvPr id="31" name="Text 29"/>
           <p:cNvSpPr/>
           <p:nvPr/>
         </p:nvSpPr>
@@ -19534,7 +19743,7 @@
                 <a:ea typeface="Trebuchet MS" pitchFamily="34" charset="-122"/>
                 <a:cs typeface="Trebuchet MS" pitchFamily="34" charset="-120"/>
               </a:rPr>
-              <a:t>dis</a:t>
+              <a:t>ap</a:t>
             </a:r>
             <a:endParaRPr lang="en-US" sz="1400" dirty="0"/>
           </a:p>
@@ -19542,7 +19751,7 @@
       </p:sp>
       <p:sp>
         <p:nvSpPr>
-          <p:cNvPr id="27" name="Text 25"/>
+          <p:cNvPr id="32" name="Text 30"/>
           <p:cNvSpPr/>
           <p:nvPr/>
         </p:nvSpPr>
@@ -19581,7 +19790,7 @@
       </p:sp>
       <p:sp>
         <p:nvSpPr>
-          <p:cNvPr id="28" name="Shape 26"/>
+          <p:cNvPr id="33" name="Shape 31"/>
           <p:cNvSpPr/>
           <p:nvPr/>
         </p:nvSpPr>
@@ -19608,7 +19817,7 @@
       </p:sp>
       <p:sp>
         <p:nvSpPr>
-          <p:cNvPr id="29" name="Text 27"/>
+          <p:cNvPr id="34" name="Text 32"/>
           <p:cNvSpPr/>
           <p:nvPr/>
         </p:nvSpPr>
@@ -19639,7 +19848,7 @@
                 <a:ea typeface="Trebuchet MS" pitchFamily="34" charset="-122"/>
                 <a:cs typeface="Trebuchet MS" pitchFamily="34" charset="-120"/>
               </a:rPr>
-              <a:t>prove</a:t>
+              <a:t>proved</a:t>
             </a:r>
             <a:endParaRPr lang="en-US" sz="1400" dirty="0"/>
           </a:p>
@@ -19647,7 +19856,7 @@
       </p:sp>
       <p:sp>
         <p:nvSpPr>
-          <p:cNvPr id="30" name="Shape 28"/>
+          <p:cNvPr id="35" name="Shape 33"/>
           <p:cNvSpPr/>
           <p:nvPr/>
         </p:nvSpPr>
@@ -19674,7 +19883,7 @@
       </p:sp>
       <p:sp>
         <p:nvSpPr>
-          <p:cNvPr id="31" name="Text 29"/>
+          <p:cNvPr id="36" name="Text 34"/>
           <p:cNvSpPr/>
           <p:nvPr/>
         </p:nvSpPr>
@@ -19713,7 +19922,7 @@
       </p:sp>
       <p:sp>
         <p:nvSpPr>
-          <p:cNvPr id="32" name="Shape 30"/>
+          <p:cNvPr id="37" name="Shape 35"/>
           <p:cNvSpPr/>
           <p:nvPr/>
         </p:nvSpPr>
@@ -19740,7 +19949,7 @@
       </p:sp>
       <p:sp>
         <p:nvSpPr>
-          <p:cNvPr id="33" name="Text 31"/>
+          <p:cNvPr id="38" name="Text 36"/>
           <p:cNvSpPr/>
           <p:nvPr/>
         </p:nvSpPr>
@@ -20063,7 +20272,7 @@
                 <a:ea typeface="Calibri" pitchFamily="34" charset="-122"/>
                 <a:cs typeface="Calibri" pitchFamily="34" charset="-120"/>
               </a:rPr>
-              <a:t>Word Labs  •  wordlabs.app  •  Root: 'prove' = to show something is true</a:t>
+              <a:t>Word Labs  •  wordlabs.app  •  Root: 'prove' = to test or show truth</a:t>
             </a:r>
             <a:endParaRPr lang="en-US" sz="800" dirty="0"/>
           </a:p>
@@ -20202,7 +20411,7 @@
                 <a:ea typeface="Trebuchet MS" pitchFamily="34" charset="-122"/>
                 <a:cs typeface="Trebuchet MS" pitchFamily="34" charset="-120"/>
               </a:rPr>
-              <a:t>disprove</a:t>
+              <a:t>approved</a:t>
             </a:r>
             <a:endParaRPr lang="en-US" sz="2800" dirty="0"/>
           </a:p>
@@ -20282,7 +20491,7 @@
         </p:nvSpPr>
         <p:spPr>
           <a:xfrm>
-            <a:off x="2938272" y="2258568"/>
+            <a:off x="2221992" y="2258568"/>
             <a:ext cx="1828800" cy="292608"/>
           </a:xfrm>
           <a:prstGeom prst="rect">
@@ -20316,7 +20525,7 @@
         </p:nvSpPr>
         <p:spPr>
           <a:xfrm>
-            <a:off x="2938272" y="2258568"/>
+            <a:off x="2221992" y="2258568"/>
             <a:ext cx="1828800" cy="292608"/>
           </a:xfrm>
           <a:prstGeom prst="rect">
@@ -20341,7 +20550,7 @@
                 <a:ea typeface="Trebuchet MS" pitchFamily="34" charset="-122"/>
                 <a:cs typeface="Trebuchet MS" pitchFamily="34" charset="-120"/>
               </a:rPr>
-              <a:t>dis</a:t>
+              <a:t>ap</a:t>
             </a:r>
             <a:endParaRPr lang="en-US" sz="1300" dirty="0"/>
           </a:p>
@@ -20355,7 +20564,7 @@
         </p:nvSpPr>
         <p:spPr>
           <a:xfrm>
-            <a:off x="2938272" y="2569464"/>
+            <a:off x="2221992" y="2569464"/>
             <a:ext cx="1828800" cy="201168"/>
           </a:xfrm>
           <a:prstGeom prst="rect">
@@ -20380,7 +20589,7 @@
                 <a:ea typeface="Calibri" pitchFamily="34" charset="-122"/>
                 <a:cs typeface="Calibri" pitchFamily="34" charset="-120"/>
               </a:rPr>
-              <a:t>not, opposite of</a:t>
+              <a:t>to or towards</a:t>
             </a:r>
             <a:endParaRPr lang="en-US" sz="850" dirty="0"/>
           </a:p>
@@ -20388,13 +20597,52 @@
       </p:sp>
       <p:sp>
         <p:nvSpPr>
-          <p:cNvPr id="19" name="Shape 17"/>
-          <p:cNvSpPr/>
-          <p:nvPr/>
-        </p:nvSpPr>
-        <p:spPr>
-          <a:xfrm>
-            <a:off x="5803392" y="2258568"/>
+          <p:cNvPr id="19" name="Text 17"/>
+          <p:cNvSpPr/>
+          <p:nvPr/>
+        </p:nvSpPr>
+        <p:spPr>
+          <a:xfrm>
+            <a:off x="2221992" y="2752344"/>
+            <a:ext cx="1828800" cy="182880"/>
+          </a:xfrm>
+          <a:prstGeom prst="rect">
+            <a:avLst/>
+          </a:prstGeom>
+          <a:noFill/>
+          <a:ln/>
+        </p:spPr>
+        <p:txBody>
+          <a:bodyPr wrap="square" lIns="0" tIns="0" rIns="0" bIns="0" rtlCol="0" anchor="t"/>
+          <a:lstStyle/>
+          <a:p>
+            <a:pPr algn="ctr" indent="0" marL="0">
+              <a:buNone/>
+            </a:pPr>
+            <a:r>
+              <a:rPr lang="en-US" sz="700" i="1" dirty="0">
+                <a:solidFill>
+                  <a:srgbClr val="94A3B8"/>
+                </a:solidFill>
+                <a:latin typeface="Calibri" pitchFamily="34" charset="0"/>
+                <a:ea typeface="Calibri" pitchFamily="34" charset="-122"/>
+                <a:cs typeface="Calibri" pitchFamily="34" charset="-120"/>
+              </a:rPr>
+              <a:t>ad → ap before 'p'</a:t>
+            </a:r>
+            <a:endParaRPr lang="en-US" sz="700" dirty="0"/>
+          </a:p>
+        </p:txBody>
+      </p:sp>
+      <p:sp>
+        <p:nvSpPr>
+          <p:cNvPr id="20" name="Shape 18"/>
+          <p:cNvSpPr/>
+          <p:nvPr/>
+        </p:nvSpPr>
+        <p:spPr>
+          <a:xfrm>
+            <a:off x="4370832" y="2258568"/>
             <a:ext cx="1828800" cy="292608"/>
           </a:xfrm>
           <a:prstGeom prst="rect">
@@ -20422,13 +20670,13 @@
       </p:sp>
       <p:sp>
         <p:nvSpPr>
-          <p:cNvPr id="20" name="Text 18"/>
-          <p:cNvSpPr/>
-          <p:nvPr/>
-        </p:nvSpPr>
-        <p:spPr>
-          <a:xfrm>
-            <a:off x="5803392" y="2258568"/>
+          <p:cNvPr id="21" name="Text 19"/>
+          <p:cNvSpPr/>
+          <p:nvPr/>
+        </p:nvSpPr>
+        <p:spPr>
+          <a:xfrm>
+            <a:off x="4370832" y="2258568"/>
             <a:ext cx="1828800" cy="292608"/>
           </a:xfrm>
           <a:prstGeom prst="rect">
@@ -20461,13 +20709,13 @@
       </p:sp>
       <p:sp>
         <p:nvSpPr>
-          <p:cNvPr id="21" name="Text 19"/>
-          <p:cNvSpPr/>
-          <p:nvPr/>
-        </p:nvSpPr>
-        <p:spPr>
-          <a:xfrm>
-            <a:off x="5803392" y="2569464"/>
+          <p:cNvPr id="22" name="Text 20"/>
+          <p:cNvSpPr/>
+          <p:nvPr/>
+        </p:nvSpPr>
+        <p:spPr>
+          <a:xfrm>
+            <a:off x="4370832" y="2569464"/>
             <a:ext cx="1828800" cy="201168"/>
           </a:xfrm>
           <a:prstGeom prst="rect">
@@ -20492,7 +20740,7 @@
                 <a:ea typeface="Calibri" pitchFamily="34" charset="-122"/>
                 <a:cs typeface="Calibri" pitchFamily="34" charset="-120"/>
               </a:rPr>
-              <a:t>to show is true</a:t>
+              <a:t>to test or show truth</a:t>
             </a:r>
             <a:endParaRPr lang="en-US" sz="850" dirty="0"/>
           </a:p>
@@ -20500,7 +20748,158 @@
       </p:sp>
       <p:sp>
         <p:nvSpPr>
-          <p:cNvPr id="22" name="Shape 20"/>
+          <p:cNvPr id="23" name="Shape 21"/>
+          <p:cNvSpPr/>
+          <p:nvPr/>
+        </p:nvSpPr>
+        <p:spPr>
+          <a:xfrm>
+            <a:off x="6519672" y="2258568"/>
+            <a:ext cx="1828800" cy="292608"/>
+          </a:xfrm>
+          <a:prstGeom prst="rect">
+            <a:avLst>
+              <a:gd name="adj" fmla="val 25000"/>
+            </a:avLst>
+          </a:prstGeom>
+          <a:solidFill>
+            <a:srgbClr val="FCE7F3"/>
+          </a:solidFill>
+          <a:ln w="19050">
+            <a:solidFill>
+              <a:srgbClr val="DB2777"/>
+            </a:solidFill>
+            <a:prstDash val="solid"/>
+          </a:ln>
+          <a:effectLst>
+            <a:outerShdw sx="100000" sy="100000" kx="0" ky="0" algn="bl" rotWithShape="0" blurRad="101600" dist="38100" dir="8100000">
+              <a:srgbClr val="000000">
+                <a:alpha val="12000"/>
+              </a:srgbClr>
+            </a:outerShdw>
+          </a:effectLst>
+        </p:spPr>
+      </p:sp>
+      <p:sp>
+        <p:nvSpPr>
+          <p:cNvPr id="24" name="Text 22"/>
+          <p:cNvSpPr/>
+          <p:nvPr/>
+        </p:nvSpPr>
+        <p:spPr>
+          <a:xfrm>
+            <a:off x="6519672" y="2258568"/>
+            <a:ext cx="1828800" cy="292608"/>
+          </a:xfrm>
+          <a:prstGeom prst="rect">
+            <a:avLst/>
+          </a:prstGeom>
+          <a:noFill/>
+          <a:ln/>
+        </p:spPr>
+        <p:txBody>
+          <a:bodyPr wrap="square" lIns="0" tIns="0" rIns="0" bIns="0" rtlCol="0" anchor="ctr"/>
+          <a:lstStyle/>
+          <a:p>
+            <a:pPr algn="ctr" indent="0" marL="0">
+              <a:buNone/>
+            </a:pPr>
+            <a:r>
+              <a:rPr lang="en-US" sz="1300" b="1" dirty="0">
+                <a:solidFill>
+                  <a:srgbClr val="9D174D"/>
+                </a:solidFill>
+                <a:latin typeface="Trebuchet MS" pitchFamily="34" charset="0"/>
+                <a:ea typeface="Trebuchet MS" pitchFamily="34" charset="-122"/>
+                <a:cs typeface="Trebuchet MS" pitchFamily="34" charset="-120"/>
+              </a:rPr>
+              <a:t>d</a:t>
+            </a:r>
+            <a:endParaRPr lang="en-US" sz="1300" dirty="0"/>
+          </a:p>
+        </p:txBody>
+      </p:sp>
+      <p:sp>
+        <p:nvSpPr>
+          <p:cNvPr id="25" name="Text 23"/>
+          <p:cNvSpPr/>
+          <p:nvPr/>
+        </p:nvSpPr>
+        <p:spPr>
+          <a:xfrm>
+            <a:off x="6519672" y="2569464"/>
+            <a:ext cx="1828800" cy="201168"/>
+          </a:xfrm>
+          <a:prstGeom prst="rect">
+            <a:avLst/>
+          </a:prstGeom>
+          <a:noFill/>
+          <a:ln/>
+        </p:spPr>
+        <p:txBody>
+          <a:bodyPr wrap="square" lIns="0" tIns="0" rIns="0" bIns="0" rtlCol="0" anchor="t"/>
+          <a:lstStyle/>
+          <a:p>
+            <a:pPr algn="ctr" indent="0" marL="0">
+              <a:buNone/>
+            </a:pPr>
+            <a:r>
+              <a:rPr lang="en-US" sz="850" dirty="0">
+                <a:solidFill>
+                  <a:srgbClr val="475569"/>
+                </a:solidFill>
+                <a:latin typeface="Calibri" pitchFamily="34" charset="0"/>
+                <a:ea typeface="Calibri" pitchFamily="34" charset="-122"/>
+                <a:cs typeface="Calibri" pitchFamily="34" charset="-120"/>
+              </a:rPr>
+              <a:t>past tense</a:t>
+            </a:r>
+            <a:endParaRPr lang="en-US" sz="850" dirty="0"/>
+          </a:p>
+        </p:txBody>
+      </p:sp>
+      <p:sp>
+        <p:nvSpPr>
+          <p:cNvPr id="26" name="Text 24"/>
+          <p:cNvSpPr/>
+          <p:nvPr/>
+        </p:nvSpPr>
+        <p:spPr>
+          <a:xfrm>
+            <a:off x="6519672" y="2752344"/>
+            <a:ext cx="1828800" cy="182880"/>
+          </a:xfrm>
+          <a:prstGeom prst="rect">
+            <a:avLst/>
+          </a:prstGeom>
+          <a:noFill/>
+          <a:ln/>
+        </p:spPr>
+        <p:txBody>
+          <a:bodyPr wrap="square" lIns="0" tIns="0" rIns="0" bIns="0" rtlCol="0" anchor="t"/>
+          <a:lstStyle/>
+          <a:p>
+            <a:pPr algn="ctr" indent="0" marL="0">
+              <a:buNone/>
+            </a:pPr>
+            <a:r>
+              <a:rPr lang="en-US" sz="700" i="1" dirty="0">
+                <a:solidFill>
+                  <a:srgbClr val="94A3B8"/>
+                </a:solidFill>
+                <a:latin typeface="Calibri" pitchFamily="34" charset="0"/>
+                <a:ea typeface="Calibri" pitchFamily="34" charset="-122"/>
+                <a:cs typeface="Calibri" pitchFamily="34" charset="-120"/>
+              </a:rPr>
+              <a:t>'e' kept before 'd'</a:t>
+            </a:r>
+            <a:endParaRPr lang="en-US" sz="700" dirty="0"/>
+          </a:p>
+        </p:txBody>
+      </p:sp>
+      <p:sp>
+        <p:nvSpPr>
+          <p:cNvPr id="27" name="Shape 25"/>
           <p:cNvSpPr/>
           <p:nvPr/>
         </p:nvSpPr>
@@ -20527,7 +20926,7 @@
       </p:sp>
       <p:sp>
         <p:nvSpPr>
-          <p:cNvPr id="23" name="Text 21"/>
+          <p:cNvPr id="28" name="Text 26"/>
           <p:cNvSpPr/>
           <p:nvPr/>
         </p:nvSpPr>
@@ -20566,7 +20965,7 @@
       </p:sp>
       <p:sp>
         <p:nvSpPr>
-          <p:cNvPr id="24" name="Shape 22"/>
+          <p:cNvPr id="29" name="Shape 27"/>
           <p:cNvSpPr/>
           <p:nvPr/>
         </p:nvSpPr>
@@ -20593,7 +20992,7 @@
       </p:sp>
       <p:sp>
         <p:nvSpPr>
-          <p:cNvPr id="25" name="Shape 23"/>
+          <p:cNvPr id="30" name="Shape 28"/>
           <p:cNvSpPr/>
           <p:nvPr/>
         </p:nvSpPr>
@@ -20620,7 +21019,7 @@
       </p:sp>
       <p:sp>
         <p:nvSpPr>
-          <p:cNvPr id="26" name="Text 24"/>
+          <p:cNvPr id="31" name="Text 29"/>
           <p:cNvSpPr/>
           <p:nvPr/>
         </p:nvSpPr>
@@ -20651,7 +21050,7 @@
                 <a:ea typeface="Trebuchet MS" pitchFamily="34" charset="-122"/>
                 <a:cs typeface="Trebuchet MS" pitchFamily="34" charset="-120"/>
               </a:rPr>
-              <a:t>dis</a:t>
+              <a:t>ap</a:t>
             </a:r>
             <a:endParaRPr lang="en-US" sz="1400" dirty="0"/>
           </a:p>
@@ -20659,7 +21058,7 @@
       </p:sp>
       <p:sp>
         <p:nvSpPr>
-          <p:cNvPr id="27" name="Text 25"/>
+          <p:cNvPr id="32" name="Text 30"/>
           <p:cNvSpPr/>
           <p:nvPr/>
         </p:nvSpPr>
@@ -20698,7 +21097,7 @@
       </p:sp>
       <p:sp>
         <p:nvSpPr>
-          <p:cNvPr id="28" name="Shape 26"/>
+          <p:cNvPr id="33" name="Shape 31"/>
           <p:cNvSpPr/>
           <p:nvPr/>
         </p:nvSpPr>
@@ -20725,7 +21124,7 @@
       </p:sp>
       <p:sp>
         <p:nvSpPr>
-          <p:cNvPr id="29" name="Text 27"/>
+          <p:cNvPr id="34" name="Text 32"/>
           <p:cNvSpPr/>
           <p:nvPr/>
         </p:nvSpPr>
@@ -20756,7 +21155,7 @@
                 <a:ea typeface="Trebuchet MS" pitchFamily="34" charset="-122"/>
                 <a:cs typeface="Trebuchet MS" pitchFamily="34" charset="-120"/>
               </a:rPr>
-              <a:t>prove</a:t>
+              <a:t>proved</a:t>
             </a:r>
             <a:endParaRPr lang="en-US" sz="1400" dirty="0"/>
           </a:p>
@@ -20764,7 +21163,7 @@
       </p:sp>
       <p:sp>
         <p:nvSpPr>
-          <p:cNvPr id="30" name="Shape 28"/>
+          <p:cNvPr id="35" name="Shape 33"/>
           <p:cNvSpPr/>
           <p:nvPr/>
         </p:nvSpPr>
@@ -20791,7 +21190,7 @@
       </p:sp>
       <p:sp>
         <p:nvSpPr>
-          <p:cNvPr id="31" name="Text 29"/>
+          <p:cNvPr id="36" name="Text 34"/>
           <p:cNvSpPr/>
           <p:nvPr/>
         </p:nvSpPr>
@@ -20830,7 +21229,7 @@
       </p:sp>
       <p:sp>
         <p:nvSpPr>
-          <p:cNvPr id="32" name="Shape 30"/>
+          <p:cNvPr id="37" name="Shape 35"/>
           <p:cNvSpPr/>
           <p:nvPr/>
         </p:nvSpPr>
@@ -20857,13 +21256,13 @@
       </p:sp>
       <p:sp>
         <p:nvSpPr>
-          <p:cNvPr id="33" name="Shape 31"/>
-          <p:cNvSpPr/>
-          <p:nvPr/>
-        </p:nvSpPr>
-        <p:spPr>
-          <a:xfrm>
-            <a:off x="2124837" y="4169664"/>
+          <p:cNvPr id="38" name="Shape 36"/>
+          <p:cNvSpPr/>
+          <p:nvPr/>
+        </p:nvSpPr>
+        <p:spPr>
+          <a:xfrm>
+            <a:off x="2254649" y="4169664"/>
             <a:ext cx="685800" cy="384048"/>
           </a:xfrm>
           <a:prstGeom prst="rect">
@@ -20884,13 +21283,13 @@
       </p:sp>
       <p:sp>
         <p:nvSpPr>
-          <p:cNvPr id="34" name="Text 32"/>
-          <p:cNvSpPr/>
-          <p:nvPr/>
-        </p:nvSpPr>
-        <p:spPr>
-          <a:xfrm>
-            <a:off x="2124837" y="4169664"/>
+          <p:cNvPr id="39" name="Text 37"/>
+          <p:cNvSpPr/>
+          <p:nvPr/>
+        </p:nvSpPr>
+        <p:spPr>
+          <a:xfrm>
+            <a:off x="2254649" y="4169664"/>
             <a:ext cx="685800" cy="384048"/>
           </a:xfrm>
           <a:prstGeom prst="rect">
@@ -20915,7 +21314,7 @@
                 <a:ea typeface="Trebuchet MS" pitchFamily="34" charset="-122"/>
                 <a:cs typeface="Trebuchet MS" pitchFamily="34" charset="-120"/>
               </a:rPr>
-              <a:t>d</a:t>
+              <a:t>a</a:t>
             </a:r>
             <a:endParaRPr lang="en-US" sz="900" dirty="0"/>
           </a:p>
@@ -20923,13 +21322,13 @@
       </p:sp>
       <p:sp>
         <p:nvSpPr>
-          <p:cNvPr id="35" name="Shape 33"/>
-          <p:cNvSpPr/>
-          <p:nvPr/>
-        </p:nvSpPr>
-        <p:spPr>
-          <a:xfrm>
-            <a:off x="3033522" y="4169664"/>
+          <p:cNvPr id="40" name="Shape 38"/>
+          <p:cNvSpPr/>
+          <p:nvPr/>
+        </p:nvSpPr>
+        <p:spPr>
+          <a:xfrm>
+            <a:off x="3293146" y="4169664"/>
             <a:ext cx="685800" cy="384048"/>
           </a:xfrm>
           <a:prstGeom prst="rect">
@@ -20950,13 +21349,13 @@
       </p:sp>
       <p:sp>
         <p:nvSpPr>
-          <p:cNvPr id="36" name="Text 34"/>
-          <p:cNvSpPr/>
-          <p:nvPr/>
-        </p:nvSpPr>
-        <p:spPr>
-          <a:xfrm>
-            <a:off x="3033522" y="4169664"/>
+          <p:cNvPr id="41" name="Text 39"/>
+          <p:cNvSpPr/>
+          <p:nvPr/>
+        </p:nvSpPr>
+        <p:spPr>
+          <a:xfrm>
+            <a:off x="3293146" y="4169664"/>
             <a:ext cx="685800" cy="384048"/>
           </a:xfrm>
           <a:prstGeom prst="rect">
@@ -20981,7 +21380,7 @@
                 <a:ea typeface="Trebuchet MS" pitchFamily="34" charset="-122"/>
                 <a:cs typeface="Trebuchet MS" pitchFamily="34" charset="-120"/>
               </a:rPr>
-              <a:t>i</a:t>
+              <a:t>pp</a:t>
             </a:r>
             <a:endParaRPr lang="en-US" sz="900" dirty="0"/>
           </a:p>
@@ -20989,13 +21388,52 @@
       </p:sp>
       <p:sp>
         <p:nvSpPr>
-          <p:cNvPr id="37" name="Shape 35"/>
-          <p:cNvSpPr/>
-          <p:nvPr/>
-        </p:nvSpPr>
-        <p:spPr>
-          <a:xfrm>
-            <a:off x="3942207" y="4169664"/>
+          <p:cNvPr id="42" name="Text 40"/>
+          <p:cNvSpPr/>
+          <p:nvPr/>
+        </p:nvSpPr>
+        <p:spPr>
+          <a:xfrm>
+            <a:off x="3293146" y="4572000"/>
+            <a:ext cx="685800" cy="219456"/>
+          </a:xfrm>
+          <a:prstGeom prst="rect">
+            <a:avLst/>
+          </a:prstGeom>
+          <a:noFill/>
+          <a:ln/>
+        </p:spPr>
+        <p:txBody>
+          <a:bodyPr wrap="square" lIns="0" tIns="0" rIns="0" bIns="0" rtlCol="0" anchor="t"/>
+          <a:lstStyle/>
+          <a:p>
+            <a:pPr algn="ctr" indent="0" marL="0">
+              <a:buNone/>
+            </a:pPr>
+            <a:r>
+              <a:rPr lang="en-US" sz="750" i="1" dirty="0">
+                <a:solidFill>
+                  <a:srgbClr val="94A3B8"/>
+                </a:solidFill>
+                <a:latin typeface="Calibri" pitchFamily="34" charset="0"/>
+                <a:ea typeface="Calibri" pitchFamily="34" charset="-122"/>
+                <a:cs typeface="Calibri" pitchFamily="34" charset="-120"/>
+              </a:rPr>
+              <a:t>/p/</a:t>
+            </a:r>
+            <a:endParaRPr lang="en-US" sz="750" dirty="0"/>
+          </a:p>
+        </p:txBody>
+      </p:sp>
+      <p:sp>
+        <p:nvSpPr>
+          <p:cNvPr id="43" name="Shape 41"/>
+          <p:cNvSpPr/>
+          <p:nvPr/>
+        </p:nvSpPr>
+        <p:spPr>
+          <a:xfrm>
+            <a:off x="4331643" y="4169664"/>
             <a:ext cx="685800" cy="384048"/>
           </a:xfrm>
           <a:prstGeom prst="rect">
@@ -21016,13 +21454,13 @@
       </p:sp>
       <p:sp>
         <p:nvSpPr>
-          <p:cNvPr id="38" name="Text 36"/>
-          <p:cNvSpPr/>
-          <p:nvPr/>
-        </p:nvSpPr>
-        <p:spPr>
-          <a:xfrm>
-            <a:off x="3942207" y="4169664"/>
+          <p:cNvPr id="44" name="Text 42"/>
+          <p:cNvSpPr/>
+          <p:nvPr/>
+        </p:nvSpPr>
+        <p:spPr>
+          <a:xfrm>
+            <a:off x="4331643" y="4169664"/>
             <a:ext cx="685800" cy="384048"/>
           </a:xfrm>
           <a:prstGeom prst="rect">
@@ -21047,7 +21485,7 @@
                 <a:ea typeface="Trebuchet MS" pitchFamily="34" charset="-122"/>
                 <a:cs typeface="Trebuchet MS" pitchFamily="34" charset="-120"/>
               </a:rPr>
-              <a:t>s</a:t>
+              <a:t>r</a:t>
             </a:r>
             <a:endParaRPr lang="en-US" sz="900" dirty="0"/>
           </a:p>
@@ -21055,13 +21493,13 @@
       </p:sp>
       <p:sp>
         <p:nvSpPr>
-          <p:cNvPr id="39" name="Shape 37"/>
-          <p:cNvSpPr/>
-          <p:nvPr/>
-        </p:nvSpPr>
-        <p:spPr>
-          <a:xfrm>
-            <a:off x="4850892" y="4169664"/>
+          <p:cNvPr id="45" name="Shape 43"/>
+          <p:cNvSpPr/>
+          <p:nvPr/>
+        </p:nvSpPr>
+        <p:spPr>
+          <a:xfrm>
+            <a:off x="5370141" y="4169664"/>
             <a:ext cx="685800" cy="384048"/>
           </a:xfrm>
           <a:prstGeom prst="rect">
@@ -21082,13 +21520,13 @@
       </p:sp>
       <p:sp>
         <p:nvSpPr>
-          <p:cNvPr id="40" name="Text 38"/>
-          <p:cNvSpPr/>
-          <p:nvPr/>
-        </p:nvSpPr>
-        <p:spPr>
-          <a:xfrm>
-            <a:off x="4850892" y="4169664"/>
+          <p:cNvPr id="46" name="Text 44"/>
+          <p:cNvSpPr/>
+          <p:nvPr/>
+        </p:nvSpPr>
+        <p:spPr>
+          <a:xfrm>
+            <a:off x="5370141" y="4169664"/>
             <a:ext cx="685800" cy="384048"/>
           </a:xfrm>
           <a:prstGeom prst="rect">
@@ -21113,7 +21551,7 @@
                 <a:ea typeface="Trebuchet MS" pitchFamily="34" charset="-122"/>
                 <a:cs typeface="Trebuchet MS" pitchFamily="34" charset="-120"/>
               </a:rPr>
-              <a:t>p</a:t>
+              <a:t>oo</a:t>
             </a:r>
             <a:endParaRPr lang="en-US" sz="900" dirty="0"/>
           </a:p>
@@ -21121,13 +21559,52 @@
       </p:sp>
       <p:sp>
         <p:nvSpPr>
-          <p:cNvPr id="41" name="Shape 39"/>
-          <p:cNvSpPr/>
-          <p:nvPr/>
-        </p:nvSpPr>
-        <p:spPr>
-          <a:xfrm>
-            <a:off x="5759577" y="4169664"/>
+          <p:cNvPr id="47" name="Text 45"/>
+          <p:cNvSpPr/>
+          <p:nvPr/>
+        </p:nvSpPr>
+        <p:spPr>
+          <a:xfrm>
+            <a:off x="5370141" y="4572000"/>
+            <a:ext cx="685800" cy="219456"/>
+          </a:xfrm>
+          <a:prstGeom prst="rect">
+            <a:avLst/>
+          </a:prstGeom>
+          <a:noFill/>
+          <a:ln/>
+        </p:spPr>
+        <p:txBody>
+          <a:bodyPr wrap="square" lIns="0" tIns="0" rIns="0" bIns="0" rtlCol="0" anchor="t"/>
+          <a:lstStyle/>
+          <a:p>
+            <a:pPr algn="ctr" indent="0" marL="0">
+              <a:buNone/>
+            </a:pPr>
+            <a:r>
+              <a:rPr lang="en-US" sz="750" i="1" dirty="0">
+                <a:solidFill>
+                  <a:srgbClr val="94A3B8"/>
+                </a:solidFill>
+                <a:latin typeface="Calibri" pitchFamily="34" charset="0"/>
+                <a:ea typeface="Calibri" pitchFamily="34" charset="-122"/>
+                <a:cs typeface="Calibri" pitchFamily="34" charset="-120"/>
+              </a:rPr>
+              <a:t>/oo/</a:t>
+            </a:r>
+            <a:endParaRPr lang="en-US" sz="750" dirty="0"/>
+          </a:p>
+        </p:txBody>
+      </p:sp>
+      <p:sp>
+        <p:nvSpPr>
+          <p:cNvPr id="48" name="Shape 46"/>
+          <p:cNvSpPr/>
+          <p:nvPr/>
+        </p:nvSpPr>
+        <p:spPr>
+          <a:xfrm>
+            <a:off x="6408638" y="4169664"/>
             <a:ext cx="685800" cy="384048"/>
           </a:xfrm>
           <a:prstGeom prst="rect">
@@ -21148,13 +21625,13 @@
       </p:sp>
       <p:sp>
         <p:nvSpPr>
-          <p:cNvPr id="42" name="Text 40"/>
-          <p:cNvSpPr/>
-          <p:nvPr/>
-        </p:nvSpPr>
-        <p:spPr>
-          <a:xfrm>
-            <a:off x="5759577" y="4169664"/>
+          <p:cNvPr id="49" name="Text 47"/>
+          <p:cNvSpPr/>
+          <p:nvPr/>
+        </p:nvSpPr>
+        <p:spPr>
+          <a:xfrm>
+            <a:off x="6408638" y="4169664"/>
             <a:ext cx="685800" cy="384048"/>
           </a:xfrm>
           <a:prstGeom prst="rect">
@@ -21179,7 +21656,7 @@
                 <a:ea typeface="Trebuchet MS" pitchFamily="34" charset="-122"/>
                 <a:cs typeface="Trebuchet MS" pitchFamily="34" charset="-120"/>
               </a:rPr>
-              <a:t>r</a:t>
+              <a:t>ve</a:t>
             </a:r>
             <a:endParaRPr lang="en-US" sz="900" dirty="0"/>
           </a:p>
@@ -21187,13 +21664,52 @@
       </p:sp>
       <p:sp>
         <p:nvSpPr>
-          <p:cNvPr id="43" name="Shape 41"/>
-          <p:cNvSpPr/>
-          <p:nvPr/>
-        </p:nvSpPr>
-        <p:spPr>
-          <a:xfrm>
-            <a:off x="6668262" y="4169664"/>
+          <p:cNvPr id="50" name="Text 48"/>
+          <p:cNvSpPr/>
+          <p:nvPr/>
+        </p:nvSpPr>
+        <p:spPr>
+          <a:xfrm>
+            <a:off x="6408638" y="4572000"/>
+            <a:ext cx="685800" cy="219456"/>
+          </a:xfrm>
+          <a:prstGeom prst="rect">
+            <a:avLst/>
+          </a:prstGeom>
+          <a:noFill/>
+          <a:ln/>
+        </p:spPr>
+        <p:txBody>
+          <a:bodyPr wrap="square" lIns="0" tIns="0" rIns="0" bIns="0" rtlCol="0" anchor="t"/>
+          <a:lstStyle/>
+          <a:p>
+            <a:pPr algn="ctr" indent="0" marL="0">
+              <a:buNone/>
+            </a:pPr>
+            <a:r>
+              <a:rPr lang="en-US" sz="750" i="1" dirty="0">
+                <a:solidFill>
+                  <a:srgbClr val="94A3B8"/>
+                </a:solidFill>
+                <a:latin typeface="Calibri" pitchFamily="34" charset="0"/>
+                <a:ea typeface="Calibri" pitchFamily="34" charset="-122"/>
+                <a:cs typeface="Calibri" pitchFamily="34" charset="-120"/>
+              </a:rPr>
+              <a:t>/v/</a:t>
+            </a:r>
+            <a:endParaRPr lang="en-US" sz="750" dirty="0"/>
+          </a:p>
+        </p:txBody>
+      </p:sp>
+      <p:sp>
+        <p:nvSpPr>
+          <p:cNvPr id="51" name="Shape 49"/>
+          <p:cNvSpPr/>
+          <p:nvPr/>
+        </p:nvSpPr>
+        <p:spPr>
+          <a:xfrm>
+            <a:off x="7447135" y="4169664"/>
             <a:ext cx="685800" cy="384048"/>
           </a:xfrm>
           <a:prstGeom prst="rect">
@@ -21214,13 +21730,13 @@
       </p:sp>
       <p:sp>
         <p:nvSpPr>
-          <p:cNvPr id="44" name="Text 42"/>
-          <p:cNvSpPr/>
-          <p:nvPr/>
-        </p:nvSpPr>
-        <p:spPr>
-          <a:xfrm>
-            <a:off x="6668262" y="4169664"/>
+          <p:cNvPr id="52" name="Text 50"/>
+          <p:cNvSpPr/>
+          <p:nvPr/>
+        </p:nvSpPr>
+        <p:spPr>
+          <a:xfrm>
+            <a:off x="7447135" y="4169664"/>
             <a:ext cx="685800" cy="384048"/>
           </a:xfrm>
           <a:prstGeom prst="rect">
@@ -21245,153 +21761,9 @@
                 <a:ea typeface="Trebuchet MS" pitchFamily="34" charset="-122"/>
                 <a:cs typeface="Trebuchet MS" pitchFamily="34" charset="-120"/>
               </a:rPr>
-              <a:t>oo</a:t>
+              <a:t>d</a:t>
             </a:r>
             <a:endParaRPr lang="en-US" sz="900" dirty="0"/>
-          </a:p>
-        </p:txBody>
-      </p:sp>
-      <p:sp>
-        <p:nvSpPr>
-          <p:cNvPr id="45" name="Text 43"/>
-          <p:cNvSpPr/>
-          <p:nvPr/>
-        </p:nvSpPr>
-        <p:spPr>
-          <a:xfrm>
-            <a:off x="6668262" y="4572000"/>
-            <a:ext cx="685800" cy="219456"/>
-          </a:xfrm>
-          <a:prstGeom prst="rect">
-            <a:avLst/>
-          </a:prstGeom>
-          <a:noFill/>
-          <a:ln/>
-        </p:spPr>
-        <p:txBody>
-          <a:bodyPr wrap="square" lIns="0" tIns="0" rIns="0" bIns="0" rtlCol="0" anchor="t"/>
-          <a:lstStyle/>
-          <a:p>
-            <a:pPr algn="ctr" indent="0" marL="0">
-              <a:buNone/>
-            </a:pPr>
-            <a:r>
-              <a:rPr lang="en-US" sz="750" i="1" dirty="0">
-                <a:solidFill>
-                  <a:srgbClr val="94A3B8"/>
-                </a:solidFill>
-                <a:latin typeface="Calibri" pitchFamily="34" charset="0"/>
-                <a:ea typeface="Calibri" pitchFamily="34" charset="-122"/>
-                <a:cs typeface="Calibri" pitchFamily="34" charset="-120"/>
-              </a:rPr>
-              <a:t>/oo/</a:t>
-            </a:r>
-            <a:endParaRPr lang="en-US" sz="750" dirty="0"/>
-          </a:p>
-        </p:txBody>
-      </p:sp>
-      <p:sp>
-        <p:nvSpPr>
-          <p:cNvPr id="46" name="Shape 44"/>
-          <p:cNvSpPr/>
-          <p:nvPr/>
-        </p:nvSpPr>
-        <p:spPr>
-          <a:xfrm>
-            <a:off x="7576947" y="4169664"/>
-            <a:ext cx="685800" cy="384048"/>
-          </a:xfrm>
-          <a:prstGeom prst="rect">
-            <a:avLst>
-              <a:gd name="adj" fmla="val 9524"/>
-            </a:avLst>
-          </a:prstGeom>
-          <a:solidFill>
-            <a:srgbClr val="FFFFFF"/>
-          </a:solidFill>
-          <a:ln w="12700">
-            <a:solidFill>
-              <a:srgbClr val="DB2777"/>
-            </a:solidFill>
-            <a:prstDash val="solid"/>
-          </a:ln>
-        </p:spPr>
-      </p:sp>
-      <p:sp>
-        <p:nvSpPr>
-          <p:cNvPr id="47" name="Text 45"/>
-          <p:cNvSpPr/>
-          <p:nvPr/>
-        </p:nvSpPr>
-        <p:spPr>
-          <a:xfrm>
-            <a:off x="7576947" y="4169664"/>
-            <a:ext cx="685800" cy="384048"/>
-          </a:xfrm>
-          <a:prstGeom prst="rect">
-            <a:avLst/>
-          </a:prstGeom>
-          <a:noFill/>
-          <a:ln/>
-        </p:spPr>
-        <p:txBody>
-          <a:bodyPr wrap="square" lIns="0" tIns="0" rIns="0" bIns="0" rtlCol="0" anchor="ctr"/>
-          <a:lstStyle/>
-          <a:p>
-            <a:pPr algn="ctr" indent="0" marL="0">
-              <a:buNone/>
-            </a:pPr>
-            <a:r>
-              <a:rPr lang="en-US" sz="900" b="1" dirty="0">
-                <a:solidFill>
-                  <a:srgbClr val="9D174D"/>
-                </a:solidFill>
-                <a:latin typeface="Trebuchet MS" pitchFamily="34" charset="0"/>
-                <a:ea typeface="Trebuchet MS" pitchFamily="34" charset="-122"/>
-                <a:cs typeface="Trebuchet MS" pitchFamily="34" charset="-120"/>
-              </a:rPr>
-              <a:t>ve</a:t>
-            </a:r>
-            <a:endParaRPr lang="en-US" sz="900" dirty="0"/>
-          </a:p>
-        </p:txBody>
-      </p:sp>
-      <p:sp>
-        <p:nvSpPr>
-          <p:cNvPr id="48" name="Text 46"/>
-          <p:cNvSpPr/>
-          <p:nvPr/>
-        </p:nvSpPr>
-        <p:spPr>
-          <a:xfrm>
-            <a:off x="7576947" y="4572000"/>
-            <a:ext cx="685800" cy="219456"/>
-          </a:xfrm>
-          <a:prstGeom prst="rect">
-            <a:avLst/>
-          </a:prstGeom>
-          <a:noFill/>
-          <a:ln/>
-        </p:spPr>
-        <p:txBody>
-          <a:bodyPr wrap="square" lIns="0" tIns="0" rIns="0" bIns="0" rtlCol="0" anchor="t"/>
-          <a:lstStyle/>
-          <a:p>
-            <a:pPr algn="ctr" indent="0" marL="0">
-              <a:buNone/>
-            </a:pPr>
-            <a:r>
-              <a:rPr lang="en-US" sz="750" i="1" dirty="0">
-                <a:solidFill>
-                  <a:srgbClr val="94A3B8"/>
-                </a:solidFill>
-                <a:latin typeface="Calibri" pitchFamily="34" charset="0"/>
-                <a:ea typeface="Calibri" pitchFamily="34" charset="-122"/>
-                <a:cs typeface="Calibri" pitchFamily="34" charset="-120"/>
-              </a:rPr>
-              <a:t>/v/</a:t>
-            </a:r>
-            <a:endParaRPr lang="en-US" sz="750" dirty="0"/>
           </a:p>
         </p:txBody>
       </p:sp>
@@ -21681,7 +22053,7 @@
                 <a:ea typeface="Calibri" pitchFamily="34" charset="-122"/>
                 <a:cs typeface="Calibri" pitchFamily="34" charset="-120"/>
               </a:rPr>
-              <a:t>Word Labs  •  wordlabs.app  •  Root: 'prove' = to show something is true</a:t>
+              <a:t>Word Labs  •  wordlabs.app  •  Root: 'prove' = to test or show truth</a:t>
             </a:r>
             <a:endParaRPr lang="en-US" sz="800" dirty="0"/>
           </a:p>
@@ -21820,7 +22192,7 @@
                 <a:ea typeface="Trebuchet MS" pitchFamily="34" charset="-122"/>
                 <a:cs typeface="Trebuchet MS" pitchFamily="34" charset="-120"/>
               </a:rPr>
-              <a:t>improve</a:t>
+              <a:t>improvement</a:t>
             </a:r>
             <a:endParaRPr lang="en-US" sz="2800" dirty="0"/>
           </a:p>
@@ -22508,7 +22880,7 @@
                 <a:ea typeface="Calibri" pitchFamily="34" charset="-122"/>
                 <a:cs typeface="Calibri" pitchFamily="34" charset="-120"/>
               </a:rPr>
-              <a:t>Word Labs  •  wordlabs.app  •  Root: 'prove' = to show something is true</a:t>
+              <a:t>Word Labs  •  wordlabs.app  •  Root: 'prove' = to test or show truth</a:t>
             </a:r>
             <a:endParaRPr lang="en-US" sz="800" dirty="0"/>
           </a:p>
@@ -22647,7 +23019,7 @@
                 <a:ea typeface="Trebuchet MS" pitchFamily="34" charset="-122"/>
                 <a:cs typeface="Trebuchet MS" pitchFamily="34" charset="-120"/>
               </a:rPr>
-              <a:t>improve</a:t>
+              <a:t>improvement</a:t>
             </a:r>
             <a:endParaRPr lang="en-US" sz="2800" dirty="0"/>
           </a:p>
@@ -22727,7 +23099,7 @@
         </p:nvSpPr>
         <p:spPr>
           <a:xfrm>
-            <a:off x="2938272" y="2258568"/>
+            <a:off x="2221992" y="2258568"/>
             <a:ext cx="1828800" cy="292608"/>
           </a:xfrm>
           <a:prstGeom prst="rect">
@@ -22761,7 +23133,7 @@
         </p:nvSpPr>
         <p:spPr>
           <a:xfrm>
-            <a:off x="2938272" y="2258568"/>
+            <a:off x="2221992" y="2258568"/>
             <a:ext cx="1828800" cy="292608"/>
           </a:xfrm>
           <a:prstGeom prst="rect">
@@ -22800,7 +23172,7 @@
         </p:nvSpPr>
         <p:spPr>
           <a:xfrm>
-            <a:off x="2938272" y="2569464"/>
+            <a:off x="2221992" y="2569464"/>
             <a:ext cx="1828800" cy="201168"/>
           </a:xfrm>
           <a:prstGeom prst="rect">
@@ -22825,7 +23197,7 @@
                 <a:ea typeface="Calibri" pitchFamily="34" charset="-122"/>
                 <a:cs typeface="Calibri" pitchFamily="34" charset="-120"/>
               </a:rPr>
-              <a:t>into, towards</a:t>
+              <a:t>into or towards</a:t>
             </a:r>
             <a:endParaRPr lang="en-US" sz="850" dirty="0"/>
           </a:p>
@@ -22839,7 +23211,7 @@
         </p:nvSpPr>
         <p:spPr>
           <a:xfrm>
-            <a:off x="5803392" y="2258568"/>
+            <a:off x="4370832" y="2258568"/>
             <a:ext cx="1828800" cy="292608"/>
           </a:xfrm>
           <a:prstGeom prst="rect">
@@ -22873,7 +23245,7 @@
         </p:nvSpPr>
         <p:spPr>
           <a:xfrm>
-            <a:off x="5803392" y="2258568"/>
+            <a:off x="4370832" y="2258568"/>
             <a:ext cx="1828800" cy="292608"/>
           </a:xfrm>
           <a:prstGeom prst="rect">
@@ -22912,7 +23284,7 @@
         </p:nvSpPr>
         <p:spPr>
           <a:xfrm>
-            <a:off x="5803392" y="2569464"/>
+            <a:off x="4370832" y="2569464"/>
             <a:ext cx="1828800" cy="201168"/>
           </a:xfrm>
           <a:prstGeom prst="rect">
@@ -22937,7 +23309,7 @@
                 <a:ea typeface="Calibri" pitchFamily="34" charset="-122"/>
                 <a:cs typeface="Calibri" pitchFamily="34" charset="-120"/>
               </a:rPr>
-              <a:t>to show is true</a:t>
+              <a:t>to test or show truth</a:t>
             </a:r>
             <a:endParaRPr lang="en-US" sz="850" dirty="0"/>
           </a:p>
@@ -22946,6 +23318,118 @@
       <p:sp>
         <p:nvSpPr>
           <p:cNvPr id="22" name="Shape 20"/>
+          <p:cNvSpPr/>
+          <p:nvPr/>
+        </p:nvSpPr>
+        <p:spPr>
+          <a:xfrm>
+            <a:off x="6519672" y="2258568"/>
+            <a:ext cx="1828800" cy="292608"/>
+          </a:xfrm>
+          <a:prstGeom prst="rect">
+            <a:avLst>
+              <a:gd name="adj" fmla="val 25000"/>
+            </a:avLst>
+          </a:prstGeom>
+          <a:solidFill>
+            <a:srgbClr val="FCE7F3"/>
+          </a:solidFill>
+          <a:ln w="19050">
+            <a:solidFill>
+              <a:srgbClr val="DB2777"/>
+            </a:solidFill>
+            <a:prstDash val="solid"/>
+          </a:ln>
+          <a:effectLst>
+            <a:outerShdw sx="100000" sy="100000" kx="0" ky="0" algn="bl" rotWithShape="0" blurRad="101600" dist="38100" dir="8100000">
+              <a:srgbClr val="000000">
+                <a:alpha val="12000"/>
+              </a:srgbClr>
+            </a:outerShdw>
+          </a:effectLst>
+        </p:spPr>
+      </p:sp>
+      <p:sp>
+        <p:nvSpPr>
+          <p:cNvPr id="23" name="Text 21"/>
+          <p:cNvSpPr/>
+          <p:nvPr/>
+        </p:nvSpPr>
+        <p:spPr>
+          <a:xfrm>
+            <a:off x="6519672" y="2258568"/>
+            <a:ext cx="1828800" cy="292608"/>
+          </a:xfrm>
+          <a:prstGeom prst="rect">
+            <a:avLst/>
+          </a:prstGeom>
+          <a:noFill/>
+          <a:ln/>
+        </p:spPr>
+        <p:txBody>
+          <a:bodyPr wrap="square" lIns="0" tIns="0" rIns="0" bIns="0" rtlCol="0" anchor="ctr"/>
+          <a:lstStyle/>
+          <a:p>
+            <a:pPr algn="ctr" indent="0" marL="0">
+              <a:buNone/>
+            </a:pPr>
+            <a:r>
+              <a:rPr lang="en-US" sz="1300" b="1" dirty="0">
+                <a:solidFill>
+                  <a:srgbClr val="9D174D"/>
+                </a:solidFill>
+                <a:latin typeface="Trebuchet MS" pitchFamily="34" charset="0"/>
+                <a:ea typeface="Trebuchet MS" pitchFamily="34" charset="-122"/>
+                <a:cs typeface="Trebuchet MS" pitchFamily="34" charset="-120"/>
+              </a:rPr>
+              <a:t>ment</a:t>
+            </a:r>
+            <a:endParaRPr lang="en-US" sz="1300" dirty="0"/>
+          </a:p>
+        </p:txBody>
+      </p:sp>
+      <p:sp>
+        <p:nvSpPr>
+          <p:cNvPr id="24" name="Text 22"/>
+          <p:cNvSpPr/>
+          <p:nvPr/>
+        </p:nvSpPr>
+        <p:spPr>
+          <a:xfrm>
+            <a:off x="6519672" y="2569464"/>
+            <a:ext cx="1828800" cy="201168"/>
+          </a:xfrm>
+          <a:prstGeom prst="rect">
+            <a:avLst/>
+          </a:prstGeom>
+          <a:noFill/>
+          <a:ln/>
+        </p:spPr>
+        <p:txBody>
+          <a:bodyPr wrap="square" lIns="0" tIns="0" rIns="0" bIns="0" rtlCol="0" anchor="t"/>
+          <a:lstStyle/>
+          <a:p>
+            <a:pPr algn="ctr" indent="0" marL="0">
+              <a:buNone/>
+            </a:pPr>
+            <a:r>
+              <a:rPr lang="en-US" sz="850" dirty="0">
+                <a:solidFill>
+                  <a:srgbClr val="475569"/>
+                </a:solidFill>
+                <a:latin typeface="Calibri" pitchFamily="34" charset="0"/>
+                <a:ea typeface="Calibri" pitchFamily="34" charset="-122"/>
+                <a:cs typeface="Calibri" pitchFamily="34" charset="-120"/>
+              </a:rPr>
+              <a:t>result or action of</a:t>
+            </a:r>
+            <a:endParaRPr lang="en-US" sz="850" dirty="0"/>
+          </a:p>
+        </p:txBody>
+      </p:sp>
+      <p:sp>
+        <p:nvSpPr>
+          <p:cNvPr id="25" name="Shape 23"/>
           <p:cNvSpPr/>
           <p:nvPr/>
         </p:nvSpPr>
@@ -22972,7 +23456,7 @@
       </p:sp>
       <p:sp>
         <p:nvSpPr>
-          <p:cNvPr id="23" name="Text 21"/>
+          <p:cNvPr id="26" name="Text 24"/>
           <p:cNvSpPr/>
           <p:nvPr/>
         </p:nvSpPr>
@@ -23011,7 +23495,7 @@
       </p:sp>
       <p:sp>
         <p:nvSpPr>
-          <p:cNvPr id="24" name="Shape 22"/>
+          <p:cNvPr id="27" name="Shape 25"/>
           <p:cNvSpPr/>
           <p:nvPr/>
         </p:nvSpPr>
@@ -23038,7 +23522,7 @@
       </p:sp>
       <p:sp>
         <p:nvSpPr>
-          <p:cNvPr id="25" name="Text 23"/>
+          <p:cNvPr id="28" name="Text 26"/>
           <p:cNvSpPr/>
           <p:nvPr/>
         </p:nvSpPr>
@@ -23077,7 +23561,7 @@
       </p:sp>
       <p:sp>
         <p:nvSpPr>
-          <p:cNvPr id="26" name="Shape 24"/>
+          <p:cNvPr id="29" name="Shape 27"/>
           <p:cNvSpPr/>
           <p:nvPr/>
         </p:nvSpPr>
@@ -23104,7 +23588,7 @@
       </p:sp>
       <p:sp>
         <p:nvSpPr>
-          <p:cNvPr id="27" name="Text 25"/>
+          <p:cNvPr id="30" name="Text 28"/>
           <p:cNvSpPr/>
           <p:nvPr/>
         </p:nvSpPr>
@@ -23143,7 +23627,7 @@
       </p:sp>
       <p:sp>
         <p:nvSpPr>
-          <p:cNvPr id="28" name="Shape 26"/>
+          <p:cNvPr id="31" name="Shape 29"/>
           <p:cNvSpPr/>
           <p:nvPr/>
         </p:nvSpPr>
@@ -23170,7 +23654,7 @@
       </p:sp>
       <p:sp>
         <p:nvSpPr>
-          <p:cNvPr id="29" name="Text 27"/>
+          <p:cNvPr id="32" name="Text 30"/>
           <p:cNvSpPr/>
           <p:nvPr/>
         </p:nvSpPr>
@@ -23493,7 +23977,7 @@
                 <a:ea typeface="Calibri" pitchFamily="34" charset="-122"/>
                 <a:cs typeface="Calibri" pitchFamily="34" charset="-120"/>
               </a:rPr>
-              <a:t>Word Labs  •  wordlabs.app  •  Root: 'prove' = to show something is true</a:t>
+              <a:t>Word Labs  •  wordlabs.app  •  Root: 'prove' = to test or show truth</a:t>
             </a:r>
             <a:endParaRPr lang="en-US" sz="800" dirty="0"/>
           </a:p>
@@ -23566,7 +24050,7 @@
                 <a:ea typeface="Trebuchet MS" pitchFamily="34" charset="-122"/>
                 <a:cs typeface="Trebuchet MS" pitchFamily="34" charset="-120"/>
               </a:rPr>
-              <a:t>We are learning that the root 'prove' means 'to show something is true'.</a:t>
+              <a:t>We are learning that the root 'prove' means 'to test or show truth'.</a:t>
             </a:r>
             <a:endParaRPr lang="en-US" sz="2000" dirty="0"/>
           </a:p>
@@ -24212,7 +24696,7 @@
                 <a:ea typeface="Calibri" pitchFamily="34" charset="-122"/>
                 <a:cs typeface="Calibri" pitchFamily="34" charset="-120"/>
               </a:rPr>
-              <a:t>Word Labs  •  wordlabs.app  •  Root: 'prove' = to show something is true</a:t>
+              <a:t>Word Labs  •  wordlabs.app  •  Root: 'prove' = to test or show truth</a:t>
             </a:r>
             <a:endParaRPr lang="en-US" sz="800" dirty="0"/>
           </a:p>
@@ -24351,7 +24835,7 @@
                 <a:ea typeface="Trebuchet MS" pitchFamily="34" charset="-122"/>
                 <a:cs typeface="Trebuchet MS" pitchFamily="34" charset="-120"/>
               </a:rPr>
-              <a:t>improve</a:t>
+              <a:t>improvement</a:t>
             </a:r>
             <a:endParaRPr lang="en-US" sz="2800" dirty="0"/>
           </a:p>
@@ -24431,7 +24915,7 @@
         </p:nvSpPr>
         <p:spPr>
           <a:xfrm>
-            <a:off x="2938272" y="2258568"/>
+            <a:off x="2221992" y="2258568"/>
             <a:ext cx="1828800" cy="292608"/>
           </a:xfrm>
           <a:prstGeom prst="rect">
@@ -24465,7 +24949,7 @@
         </p:nvSpPr>
         <p:spPr>
           <a:xfrm>
-            <a:off x="2938272" y="2258568"/>
+            <a:off x="2221992" y="2258568"/>
             <a:ext cx="1828800" cy="292608"/>
           </a:xfrm>
           <a:prstGeom prst="rect">
@@ -24504,7 +24988,7 @@
         </p:nvSpPr>
         <p:spPr>
           <a:xfrm>
-            <a:off x="2938272" y="2569464"/>
+            <a:off x="2221992" y="2569464"/>
             <a:ext cx="1828800" cy="201168"/>
           </a:xfrm>
           <a:prstGeom prst="rect">
@@ -24529,7 +25013,7 @@
                 <a:ea typeface="Calibri" pitchFamily="34" charset="-122"/>
                 <a:cs typeface="Calibri" pitchFamily="34" charset="-120"/>
               </a:rPr>
-              <a:t>into, towards</a:t>
+              <a:t>into or towards</a:t>
             </a:r>
             <a:endParaRPr lang="en-US" sz="850" dirty="0"/>
           </a:p>
@@ -24543,7 +25027,7 @@
         </p:nvSpPr>
         <p:spPr>
           <a:xfrm>
-            <a:off x="5803392" y="2258568"/>
+            <a:off x="4370832" y="2258568"/>
             <a:ext cx="1828800" cy="292608"/>
           </a:xfrm>
           <a:prstGeom prst="rect">
@@ -24577,7 +25061,7 @@
         </p:nvSpPr>
         <p:spPr>
           <a:xfrm>
-            <a:off x="5803392" y="2258568"/>
+            <a:off x="4370832" y="2258568"/>
             <a:ext cx="1828800" cy="292608"/>
           </a:xfrm>
           <a:prstGeom prst="rect">
@@ -24616,7 +25100,7 @@
         </p:nvSpPr>
         <p:spPr>
           <a:xfrm>
-            <a:off x="5803392" y="2569464"/>
+            <a:off x="4370832" y="2569464"/>
             <a:ext cx="1828800" cy="201168"/>
           </a:xfrm>
           <a:prstGeom prst="rect">
@@ -24641,7 +25125,7 @@
                 <a:ea typeface="Calibri" pitchFamily="34" charset="-122"/>
                 <a:cs typeface="Calibri" pitchFamily="34" charset="-120"/>
               </a:rPr>
-              <a:t>to show is true</a:t>
+              <a:t>to test or show truth</a:t>
             </a:r>
             <a:endParaRPr lang="en-US" sz="850" dirty="0"/>
           </a:p>
@@ -24650,6 +25134,118 @@
       <p:sp>
         <p:nvSpPr>
           <p:cNvPr id="22" name="Shape 20"/>
+          <p:cNvSpPr/>
+          <p:nvPr/>
+        </p:nvSpPr>
+        <p:spPr>
+          <a:xfrm>
+            <a:off x="6519672" y="2258568"/>
+            <a:ext cx="1828800" cy="292608"/>
+          </a:xfrm>
+          <a:prstGeom prst="rect">
+            <a:avLst>
+              <a:gd name="adj" fmla="val 25000"/>
+            </a:avLst>
+          </a:prstGeom>
+          <a:solidFill>
+            <a:srgbClr val="FCE7F3"/>
+          </a:solidFill>
+          <a:ln w="19050">
+            <a:solidFill>
+              <a:srgbClr val="DB2777"/>
+            </a:solidFill>
+            <a:prstDash val="solid"/>
+          </a:ln>
+          <a:effectLst>
+            <a:outerShdw sx="100000" sy="100000" kx="0" ky="0" algn="bl" rotWithShape="0" blurRad="101600" dist="38100" dir="8100000">
+              <a:srgbClr val="000000">
+                <a:alpha val="12000"/>
+              </a:srgbClr>
+            </a:outerShdw>
+          </a:effectLst>
+        </p:spPr>
+      </p:sp>
+      <p:sp>
+        <p:nvSpPr>
+          <p:cNvPr id="23" name="Text 21"/>
+          <p:cNvSpPr/>
+          <p:nvPr/>
+        </p:nvSpPr>
+        <p:spPr>
+          <a:xfrm>
+            <a:off x="6519672" y="2258568"/>
+            <a:ext cx="1828800" cy="292608"/>
+          </a:xfrm>
+          <a:prstGeom prst="rect">
+            <a:avLst/>
+          </a:prstGeom>
+          <a:noFill/>
+          <a:ln/>
+        </p:spPr>
+        <p:txBody>
+          <a:bodyPr wrap="square" lIns="0" tIns="0" rIns="0" bIns="0" rtlCol="0" anchor="ctr"/>
+          <a:lstStyle/>
+          <a:p>
+            <a:pPr algn="ctr" indent="0" marL="0">
+              <a:buNone/>
+            </a:pPr>
+            <a:r>
+              <a:rPr lang="en-US" sz="1300" b="1" dirty="0">
+                <a:solidFill>
+                  <a:srgbClr val="9D174D"/>
+                </a:solidFill>
+                <a:latin typeface="Trebuchet MS" pitchFamily="34" charset="0"/>
+                <a:ea typeface="Trebuchet MS" pitchFamily="34" charset="-122"/>
+                <a:cs typeface="Trebuchet MS" pitchFamily="34" charset="-120"/>
+              </a:rPr>
+              <a:t>ment</a:t>
+            </a:r>
+            <a:endParaRPr lang="en-US" sz="1300" dirty="0"/>
+          </a:p>
+        </p:txBody>
+      </p:sp>
+      <p:sp>
+        <p:nvSpPr>
+          <p:cNvPr id="24" name="Text 22"/>
+          <p:cNvSpPr/>
+          <p:nvPr/>
+        </p:nvSpPr>
+        <p:spPr>
+          <a:xfrm>
+            <a:off x="6519672" y="2569464"/>
+            <a:ext cx="1828800" cy="201168"/>
+          </a:xfrm>
+          <a:prstGeom prst="rect">
+            <a:avLst/>
+          </a:prstGeom>
+          <a:noFill/>
+          <a:ln/>
+        </p:spPr>
+        <p:txBody>
+          <a:bodyPr wrap="square" lIns="0" tIns="0" rIns="0" bIns="0" rtlCol="0" anchor="t"/>
+          <a:lstStyle/>
+          <a:p>
+            <a:pPr algn="ctr" indent="0" marL="0">
+              <a:buNone/>
+            </a:pPr>
+            <a:r>
+              <a:rPr lang="en-US" sz="850" dirty="0">
+                <a:solidFill>
+                  <a:srgbClr val="475569"/>
+                </a:solidFill>
+                <a:latin typeface="Calibri" pitchFamily="34" charset="0"/>
+                <a:ea typeface="Calibri" pitchFamily="34" charset="-122"/>
+                <a:cs typeface="Calibri" pitchFamily="34" charset="-120"/>
+              </a:rPr>
+              <a:t>result or action of</a:t>
+            </a:r>
+            <a:endParaRPr lang="en-US" sz="850" dirty="0"/>
+          </a:p>
+        </p:txBody>
+      </p:sp>
+      <p:sp>
+        <p:nvSpPr>
+          <p:cNvPr id="25" name="Shape 23"/>
           <p:cNvSpPr/>
           <p:nvPr/>
         </p:nvSpPr>
@@ -24676,7 +25272,7 @@
       </p:sp>
       <p:sp>
         <p:nvSpPr>
-          <p:cNvPr id="23" name="Text 21"/>
+          <p:cNvPr id="26" name="Text 24"/>
           <p:cNvSpPr/>
           <p:nvPr/>
         </p:nvSpPr>
@@ -24715,7 +25311,7 @@
       </p:sp>
       <p:sp>
         <p:nvSpPr>
-          <p:cNvPr id="24" name="Shape 22"/>
+          <p:cNvPr id="27" name="Shape 25"/>
           <p:cNvSpPr/>
           <p:nvPr/>
         </p:nvSpPr>
@@ -24742,13 +25338,13 @@
       </p:sp>
       <p:sp>
         <p:nvSpPr>
-          <p:cNvPr id="25" name="Shape 23"/>
-          <p:cNvSpPr/>
-          <p:nvPr/>
-        </p:nvSpPr>
-        <p:spPr>
-          <a:xfrm>
-            <a:off x="2999232" y="3364992"/>
+          <p:cNvPr id="28" name="Shape 26"/>
+          <p:cNvSpPr/>
+          <p:nvPr/>
+        </p:nvSpPr>
+        <p:spPr>
+          <a:xfrm>
+            <a:off x="2313432" y="3364992"/>
             <a:ext cx="1645920" cy="475488"/>
           </a:xfrm>
           <a:prstGeom prst="rect">
@@ -24769,13 +25365,13 @@
       </p:sp>
       <p:sp>
         <p:nvSpPr>
-          <p:cNvPr id="26" name="Text 24"/>
-          <p:cNvSpPr/>
-          <p:nvPr/>
-        </p:nvSpPr>
-        <p:spPr>
-          <a:xfrm>
-            <a:off x="2999232" y="3364992"/>
+          <p:cNvPr id="29" name="Text 27"/>
+          <p:cNvSpPr/>
+          <p:nvPr/>
+        </p:nvSpPr>
+        <p:spPr>
+          <a:xfrm>
+            <a:off x="2313432" y="3364992"/>
             <a:ext cx="1645920" cy="475488"/>
           </a:xfrm>
           <a:prstGeom prst="rect">
@@ -24808,14 +25404,14 @@
       </p:sp>
       <p:sp>
         <p:nvSpPr>
-          <p:cNvPr id="27" name="Text 25"/>
-          <p:cNvSpPr/>
-          <p:nvPr/>
-        </p:nvSpPr>
-        <p:spPr>
-          <a:xfrm>
-            <a:off x="4645152" y="3364992"/>
-            <a:ext cx="1097280" cy="475488"/>
+          <p:cNvPr id="30" name="Text 28"/>
+          <p:cNvSpPr/>
+          <p:nvPr/>
+        </p:nvSpPr>
+        <p:spPr>
+          <a:xfrm>
+            <a:off x="3959352" y="3364992"/>
+            <a:ext cx="411480" cy="475488"/>
           </a:xfrm>
           <a:prstGeom prst="rect">
             <a:avLst/>
@@ -24847,13 +25443,13 @@
       </p:sp>
       <p:sp>
         <p:nvSpPr>
-          <p:cNvPr id="28" name="Shape 26"/>
-          <p:cNvSpPr/>
-          <p:nvPr/>
-        </p:nvSpPr>
-        <p:spPr>
-          <a:xfrm>
-            <a:off x="5742432" y="3364992"/>
+          <p:cNvPr id="31" name="Shape 29"/>
+          <p:cNvSpPr/>
+          <p:nvPr/>
+        </p:nvSpPr>
+        <p:spPr>
+          <a:xfrm>
+            <a:off x="4370832" y="3364992"/>
             <a:ext cx="1645920" cy="475488"/>
           </a:xfrm>
           <a:prstGeom prst="rect">
@@ -24874,13 +25470,13 @@
       </p:sp>
       <p:sp>
         <p:nvSpPr>
-          <p:cNvPr id="29" name="Text 27"/>
-          <p:cNvSpPr/>
-          <p:nvPr/>
-        </p:nvSpPr>
-        <p:spPr>
-          <a:xfrm>
-            <a:off x="5742432" y="3364992"/>
+          <p:cNvPr id="32" name="Text 30"/>
+          <p:cNvSpPr/>
+          <p:nvPr/>
+        </p:nvSpPr>
+        <p:spPr>
+          <a:xfrm>
+            <a:off x="4370832" y="3364992"/>
             <a:ext cx="1645920" cy="475488"/>
           </a:xfrm>
           <a:prstGeom prst="rect">
@@ -24913,7 +25509,112 @@
       </p:sp>
       <p:sp>
         <p:nvSpPr>
-          <p:cNvPr id="30" name="Shape 28"/>
+          <p:cNvPr id="33" name="Text 31"/>
+          <p:cNvSpPr/>
+          <p:nvPr/>
+        </p:nvSpPr>
+        <p:spPr>
+          <a:xfrm>
+            <a:off x="6016752" y="3364992"/>
+            <a:ext cx="411480" cy="475488"/>
+          </a:xfrm>
+          <a:prstGeom prst="rect">
+            <a:avLst/>
+          </a:prstGeom>
+          <a:noFill/>
+          <a:ln/>
+        </p:spPr>
+        <p:txBody>
+          <a:bodyPr wrap="square" lIns="0" tIns="0" rIns="0" bIns="0" rtlCol="0" anchor="ctr"/>
+          <a:lstStyle/>
+          <a:p>
+            <a:pPr algn="ctr" indent="0" marL="0">
+              <a:buNone/>
+            </a:pPr>
+            <a:r>
+              <a:rPr lang="en-US" sz="1600" b="1" dirty="0">
+                <a:solidFill>
+                  <a:srgbClr val="0D9488"/>
+                </a:solidFill>
+                <a:latin typeface="Trebuchet MS" pitchFamily="34" charset="0"/>
+                <a:ea typeface="Trebuchet MS" pitchFamily="34" charset="-122"/>
+                <a:cs typeface="Trebuchet MS" pitchFamily="34" charset="-120"/>
+              </a:rPr>
+              <a:t>·</a:t>
+            </a:r>
+            <a:endParaRPr lang="en-US" sz="1600" dirty="0"/>
+          </a:p>
+        </p:txBody>
+      </p:sp>
+      <p:sp>
+        <p:nvSpPr>
+          <p:cNvPr id="34" name="Shape 32"/>
+          <p:cNvSpPr/>
+          <p:nvPr/>
+        </p:nvSpPr>
+        <p:spPr>
+          <a:xfrm>
+            <a:off x="6428232" y="3364992"/>
+            <a:ext cx="1645920" cy="475488"/>
+          </a:xfrm>
+          <a:prstGeom prst="rect">
+            <a:avLst>
+              <a:gd name="adj" fmla="val 9615"/>
+            </a:avLst>
+          </a:prstGeom>
+          <a:solidFill>
+            <a:srgbClr val="FFFFFF"/>
+          </a:solidFill>
+          <a:ln w="12700">
+            <a:solidFill>
+              <a:srgbClr val="0D9488"/>
+            </a:solidFill>
+            <a:prstDash val="solid"/>
+          </a:ln>
+        </p:spPr>
+      </p:sp>
+      <p:sp>
+        <p:nvSpPr>
+          <p:cNvPr id="35" name="Text 33"/>
+          <p:cNvSpPr/>
+          <p:nvPr/>
+        </p:nvSpPr>
+        <p:spPr>
+          <a:xfrm>
+            <a:off x="6428232" y="3364992"/>
+            <a:ext cx="1645920" cy="475488"/>
+          </a:xfrm>
+          <a:prstGeom prst="rect">
+            <a:avLst/>
+          </a:prstGeom>
+          <a:noFill/>
+          <a:ln/>
+        </p:spPr>
+        <p:txBody>
+          <a:bodyPr wrap="square" lIns="0" tIns="0" rIns="0" bIns="0" rtlCol="0" anchor="ctr"/>
+          <a:lstStyle/>
+          <a:p>
+            <a:pPr algn="ctr" indent="0" marL="0">
+              <a:buNone/>
+            </a:pPr>
+            <a:r>
+              <a:rPr lang="en-US" sz="1400" b="1" dirty="0">
+                <a:solidFill>
+                  <a:srgbClr val="0D9488"/>
+                </a:solidFill>
+                <a:latin typeface="Trebuchet MS" pitchFamily="34" charset="0"/>
+                <a:ea typeface="Trebuchet MS" pitchFamily="34" charset="-122"/>
+                <a:cs typeface="Trebuchet MS" pitchFamily="34" charset="-120"/>
+              </a:rPr>
+              <a:t>ment</a:t>
+            </a:r>
+            <a:endParaRPr lang="en-US" sz="1400" dirty="0"/>
+          </a:p>
+        </p:txBody>
+      </p:sp>
+      <p:sp>
+        <p:nvSpPr>
+          <p:cNvPr id="36" name="Shape 34"/>
           <p:cNvSpPr/>
           <p:nvPr/>
         </p:nvSpPr>
@@ -24940,7 +25641,7 @@
       </p:sp>
       <p:sp>
         <p:nvSpPr>
-          <p:cNvPr id="31" name="Text 29"/>
+          <p:cNvPr id="37" name="Text 35"/>
           <p:cNvSpPr/>
           <p:nvPr/>
         </p:nvSpPr>
@@ -24979,7 +25680,7 @@
       </p:sp>
       <p:sp>
         <p:nvSpPr>
-          <p:cNvPr id="32" name="Shape 30"/>
+          <p:cNvPr id="38" name="Shape 36"/>
           <p:cNvSpPr/>
           <p:nvPr/>
         </p:nvSpPr>
@@ -25006,7 +25707,7 @@
       </p:sp>
       <p:sp>
         <p:nvSpPr>
-          <p:cNvPr id="33" name="Text 31"/>
+          <p:cNvPr id="39" name="Text 37"/>
           <p:cNvSpPr/>
           <p:nvPr/>
         </p:nvSpPr>
@@ -25329,7 +26030,7 @@
                 <a:ea typeface="Calibri" pitchFamily="34" charset="-122"/>
                 <a:cs typeface="Calibri" pitchFamily="34" charset="-120"/>
               </a:rPr>
-              <a:t>Word Labs  •  wordlabs.app  •  Root: 'prove' = to show something is true</a:t>
+              <a:t>Word Labs  •  wordlabs.app  •  Root: 'prove' = to test or show truth</a:t>
             </a:r>
             <a:endParaRPr lang="en-US" sz="800" dirty="0"/>
           </a:p>
@@ -25468,7 +26169,7 @@
                 <a:ea typeface="Trebuchet MS" pitchFamily="34" charset="-122"/>
                 <a:cs typeface="Trebuchet MS" pitchFamily="34" charset="-120"/>
               </a:rPr>
-              <a:t>improve</a:t>
+              <a:t>improvement</a:t>
             </a:r>
             <a:endParaRPr lang="en-US" sz="2800" dirty="0"/>
           </a:p>
@@ -25548,7 +26249,7 @@
         </p:nvSpPr>
         <p:spPr>
           <a:xfrm>
-            <a:off x="2938272" y="2258568"/>
+            <a:off x="2221992" y="2258568"/>
             <a:ext cx="1828800" cy="292608"/>
           </a:xfrm>
           <a:prstGeom prst="rect">
@@ -25582,7 +26283,7 @@
         </p:nvSpPr>
         <p:spPr>
           <a:xfrm>
-            <a:off x="2938272" y="2258568"/>
+            <a:off x="2221992" y="2258568"/>
             <a:ext cx="1828800" cy="292608"/>
           </a:xfrm>
           <a:prstGeom prst="rect">
@@ -25621,7 +26322,7 @@
         </p:nvSpPr>
         <p:spPr>
           <a:xfrm>
-            <a:off x="2938272" y="2569464"/>
+            <a:off x="2221992" y="2569464"/>
             <a:ext cx="1828800" cy="201168"/>
           </a:xfrm>
           <a:prstGeom prst="rect">
@@ -25646,7 +26347,7 @@
                 <a:ea typeface="Calibri" pitchFamily="34" charset="-122"/>
                 <a:cs typeface="Calibri" pitchFamily="34" charset="-120"/>
               </a:rPr>
-              <a:t>into, towards</a:t>
+              <a:t>into or towards</a:t>
             </a:r>
             <a:endParaRPr lang="en-US" sz="850" dirty="0"/>
           </a:p>
@@ -25660,7 +26361,7 @@
         </p:nvSpPr>
         <p:spPr>
           <a:xfrm>
-            <a:off x="5803392" y="2258568"/>
+            <a:off x="4370832" y="2258568"/>
             <a:ext cx="1828800" cy="292608"/>
           </a:xfrm>
           <a:prstGeom prst="rect">
@@ -25694,7 +26395,7 @@
         </p:nvSpPr>
         <p:spPr>
           <a:xfrm>
-            <a:off x="5803392" y="2258568"/>
+            <a:off x="4370832" y="2258568"/>
             <a:ext cx="1828800" cy="292608"/>
           </a:xfrm>
           <a:prstGeom prst="rect">
@@ -25733,7 +26434,7 @@
         </p:nvSpPr>
         <p:spPr>
           <a:xfrm>
-            <a:off x="5803392" y="2569464"/>
+            <a:off x="4370832" y="2569464"/>
             <a:ext cx="1828800" cy="201168"/>
           </a:xfrm>
           <a:prstGeom prst="rect">
@@ -25758,7 +26459,7 @@
                 <a:ea typeface="Calibri" pitchFamily="34" charset="-122"/>
                 <a:cs typeface="Calibri" pitchFamily="34" charset="-120"/>
               </a:rPr>
-              <a:t>to show is true</a:t>
+              <a:t>to test or show truth</a:t>
             </a:r>
             <a:endParaRPr lang="en-US" sz="850" dirty="0"/>
           </a:p>
@@ -25767,6 +26468,118 @@
       <p:sp>
         <p:nvSpPr>
           <p:cNvPr id="22" name="Shape 20"/>
+          <p:cNvSpPr/>
+          <p:nvPr/>
+        </p:nvSpPr>
+        <p:spPr>
+          <a:xfrm>
+            <a:off x="6519672" y="2258568"/>
+            <a:ext cx="1828800" cy="292608"/>
+          </a:xfrm>
+          <a:prstGeom prst="rect">
+            <a:avLst>
+              <a:gd name="adj" fmla="val 25000"/>
+            </a:avLst>
+          </a:prstGeom>
+          <a:solidFill>
+            <a:srgbClr val="FCE7F3"/>
+          </a:solidFill>
+          <a:ln w="19050">
+            <a:solidFill>
+              <a:srgbClr val="DB2777"/>
+            </a:solidFill>
+            <a:prstDash val="solid"/>
+          </a:ln>
+          <a:effectLst>
+            <a:outerShdw sx="100000" sy="100000" kx="0" ky="0" algn="bl" rotWithShape="0" blurRad="101600" dist="38100" dir="8100000">
+              <a:srgbClr val="000000">
+                <a:alpha val="12000"/>
+              </a:srgbClr>
+            </a:outerShdw>
+          </a:effectLst>
+        </p:spPr>
+      </p:sp>
+      <p:sp>
+        <p:nvSpPr>
+          <p:cNvPr id="23" name="Text 21"/>
+          <p:cNvSpPr/>
+          <p:nvPr/>
+        </p:nvSpPr>
+        <p:spPr>
+          <a:xfrm>
+            <a:off x="6519672" y="2258568"/>
+            <a:ext cx="1828800" cy="292608"/>
+          </a:xfrm>
+          <a:prstGeom prst="rect">
+            <a:avLst/>
+          </a:prstGeom>
+          <a:noFill/>
+          <a:ln/>
+        </p:spPr>
+        <p:txBody>
+          <a:bodyPr wrap="square" lIns="0" tIns="0" rIns="0" bIns="0" rtlCol="0" anchor="ctr"/>
+          <a:lstStyle/>
+          <a:p>
+            <a:pPr algn="ctr" indent="0" marL="0">
+              <a:buNone/>
+            </a:pPr>
+            <a:r>
+              <a:rPr lang="en-US" sz="1300" b="1" dirty="0">
+                <a:solidFill>
+                  <a:srgbClr val="9D174D"/>
+                </a:solidFill>
+                <a:latin typeface="Trebuchet MS" pitchFamily="34" charset="0"/>
+                <a:ea typeface="Trebuchet MS" pitchFamily="34" charset="-122"/>
+                <a:cs typeface="Trebuchet MS" pitchFamily="34" charset="-120"/>
+              </a:rPr>
+              <a:t>ment</a:t>
+            </a:r>
+            <a:endParaRPr lang="en-US" sz="1300" dirty="0"/>
+          </a:p>
+        </p:txBody>
+      </p:sp>
+      <p:sp>
+        <p:nvSpPr>
+          <p:cNvPr id="24" name="Text 22"/>
+          <p:cNvSpPr/>
+          <p:nvPr/>
+        </p:nvSpPr>
+        <p:spPr>
+          <a:xfrm>
+            <a:off x="6519672" y="2569464"/>
+            <a:ext cx="1828800" cy="201168"/>
+          </a:xfrm>
+          <a:prstGeom prst="rect">
+            <a:avLst/>
+          </a:prstGeom>
+          <a:noFill/>
+          <a:ln/>
+        </p:spPr>
+        <p:txBody>
+          <a:bodyPr wrap="square" lIns="0" tIns="0" rIns="0" bIns="0" rtlCol="0" anchor="t"/>
+          <a:lstStyle/>
+          <a:p>
+            <a:pPr algn="ctr" indent="0" marL="0">
+              <a:buNone/>
+            </a:pPr>
+            <a:r>
+              <a:rPr lang="en-US" sz="850" dirty="0">
+                <a:solidFill>
+                  <a:srgbClr val="475569"/>
+                </a:solidFill>
+                <a:latin typeface="Calibri" pitchFamily="34" charset="0"/>
+                <a:ea typeface="Calibri" pitchFamily="34" charset="-122"/>
+                <a:cs typeface="Calibri" pitchFamily="34" charset="-120"/>
+              </a:rPr>
+              <a:t>result or action of</a:t>
+            </a:r>
+            <a:endParaRPr lang="en-US" sz="850" dirty="0"/>
+          </a:p>
+        </p:txBody>
+      </p:sp>
+      <p:sp>
+        <p:nvSpPr>
+          <p:cNvPr id="25" name="Shape 23"/>
           <p:cNvSpPr/>
           <p:nvPr/>
         </p:nvSpPr>
@@ -25793,7 +26606,7 @@
       </p:sp>
       <p:sp>
         <p:nvSpPr>
-          <p:cNvPr id="23" name="Text 21"/>
+          <p:cNvPr id="26" name="Text 24"/>
           <p:cNvSpPr/>
           <p:nvPr/>
         </p:nvSpPr>
@@ -25832,7 +26645,7 @@
       </p:sp>
       <p:sp>
         <p:nvSpPr>
-          <p:cNvPr id="24" name="Shape 22"/>
+          <p:cNvPr id="27" name="Shape 25"/>
           <p:cNvSpPr/>
           <p:nvPr/>
         </p:nvSpPr>
@@ -25859,13 +26672,13 @@
       </p:sp>
       <p:sp>
         <p:nvSpPr>
-          <p:cNvPr id="25" name="Shape 23"/>
-          <p:cNvSpPr/>
-          <p:nvPr/>
-        </p:nvSpPr>
-        <p:spPr>
-          <a:xfrm>
-            <a:off x="2999232" y="3364992"/>
+          <p:cNvPr id="28" name="Shape 26"/>
+          <p:cNvSpPr/>
+          <p:nvPr/>
+        </p:nvSpPr>
+        <p:spPr>
+          <a:xfrm>
+            <a:off x="2313432" y="3364992"/>
             <a:ext cx="1645920" cy="475488"/>
           </a:xfrm>
           <a:prstGeom prst="rect">
@@ -25886,13 +26699,13 @@
       </p:sp>
       <p:sp>
         <p:nvSpPr>
-          <p:cNvPr id="26" name="Text 24"/>
-          <p:cNvSpPr/>
-          <p:nvPr/>
-        </p:nvSpPr>
-        <p:spPr>
-          <a:xfrm>
-            <a:off x="2999232" y="3364992"/>
+          <p:cNvPr id="29" name="Text 27"/>
+          <p:cNvSpPr/>
+          <p:nvPr/>
+        </p:nvSpPr>
+        <p:spPr>
+          <a:xfrm>
+            <a:off x="2313432" y="3364992"/>
             <a:ext cx="1645920" cy="475488"/>
           </a:xfrm>
           <a:prstGeom prst="rect">
@@ -25925,14 +26738,14 @@
       </p:sp>
       <p:sp>
         <p:nvSpPr>
-          <p:cNvPr id="27" name="Text 25"/>
-          <p:cNvSpPr/>
-          <p:nvPr/>
-        </p:nvSpPr>
-        <p:spPr>
-          <a:xfrm>
-            <a:off x="4645152" y="3364992"/>
-            <a:ext cx="1097280" cy="475488"/>
+          <p:cNvPr id="30" name="Text 28"/>
+          <p:cNvSpPr/>
+          <p:nvPr/>
+        </p:nvSpPr>
+        <p:spPr>
+          <a:xfrm>
+            <a:off x="3959352" y="3364992"/>
+            <a:ext cx="411480" cy="475488"/>
           </a:xfrm>
           <a:prstGeom prst="rect">
             <a:avLst/>
@@ -25964,13 +26777,13 @@
       </p:sp>
       <p:sp>
         <p:nvSpPr>
-          <p:cNvPr id="28" name="Shape 26"/>
-          <p:cNvSpPr/>
-          <p:nvPr/>
-        </p:nvSpPr>
-        <p:spPr>
-          <a:xfrm>
-            <a:off x="5742432" y="3364992"/>
+          <p:cNvPr id="31" name="Shape 29"/>
+          <p:cNvSpPr/>
+          <p:nvPr/>
+        </p:nvSpPr>
+        <p:spPr>
+          <a:xfrm>
+            <a:off x="4370832" y="3364992"/>
             <a:ext cx="1645920" cy="475488"/>
           </a:xfrm>
           <a:prstGeom prst="rect">
@@ -25991,13 +26804,13 @@
       </p:sp>
       <p:sp>
         <p:nvSpPr>
-          <p:cNvPr id="29" name="Text 27"/>
-          <p:cNvSpPr/>
-          <p:nvPr/>
-        </p:nvSpPr>
-        <p:spPr>
-          <a:xfrm>
-            <a:off x="5742432" y="3364992"/>
+          <p:cNvPr id="32" name="Text 30"/>
+          <p:cNvSpPr/>
+          <p:nvPr/>
+        </p:nvSpPr>
+        <p:spPr>
+          <a:xfrm>
+            <a:off x="4370832" y="3364992"/>
             <a:ext cx="1645920" cy="475488"/>
           </a:xfrm>
           <a:prstGeom prst="rect">
@@ -26030,7 +26843,112 @@
       </p:sp>
       <p:sp>
         <p:nvSpPr>
-          <p:cNvPr id="30" name="Shape 28"/>
+          <p:cNvPr id="33" name="Text 31"/>
+          <p:cNvSpPr/>
+          <p:nvPr/>
+        </p:nvSpPr>
+        <p:spPr>
+          <a:xfrm>
+            <a:off x="6016752" y="3364992"/>
+            <a:ext cx="411480" cy="475488"/>
+          </a:xfrm>
+          <a:prstGeom prst="rect">
+            <a:avLst/>
+          </a:prstGeom>
+          <a:noFill/>
+          <a:ln/>
+        </p:spPr>
+        <p:txBody>
+          <a:bodyPr wrap="square" lIns="0" tIns="0" rIns="0" bIns="0" rtlCol="0" anchor="ctr"/>
+          <a:lstStyle/>
+          <a:p>
+            <a:pPr algn="ctr" indent="0" marL="0">
+              <a:buNone/>
+            </a:pPr>
+            <a:r>
+              <a:rPr lang="en-US" sz="1600" b="1" dirty="0">
+                <a:solidFill>
+                  <a:srgbClr val="0D9488"/>
+                </a:solidFill>
+                <a:latin typeface="Trebuchet MS" pitchFamily="34" charset="0"/>
+                <a:ea typeface="Trebuchet MS" pitchFamily="34" charset="-122"/>
+                <a:cs typeface="Trebuchet MS" pitchFamily="34" charset="-120"/>
+              </a:rPr>
+              <a:t>·</a:t>
+            </a:r>
+            <a:endParaRPr lang="en-US" sz="1600" dirty="0"/>
+          </a:p>
+        </p:txBody>
+      </p:sp>
+      <p:sp>
+        <p:nvSpPr>
+          <p:cNvPr id="34" name="Shape 32"/>
+          <p:cNvSpPr/>
+          <p:nvPr/>
+        </p:nvSpPr>
+        <p:spPr>
+          <a:xfrm>
+            <a:off x="6428232" y="3364992"/>
+            <a:ext cx="1645920" cy="475488"/>
+          </a:xfrm>
+          <a:prstGeom prst="rect">
+            <a:avLst>
+              <a:gd name="adj" fmla="val 9615"/>
+            </a:avLst>
+          </a:prstGeom>
+          <a:solidFill>
+            <a:srgbClr val="FFFFFF"/>
+          </a:solidFill>
+          <a:ln w="12700">
+            <a:solidFill>
+              <a:srgbClr val="0D9488"/>
+            </a:solidFill>
+            <a:prstDash val="solid"/>
+          </a:ln>
+        </p:spPr>
+      </p:sp>
+      <p:sp>
+        <p:nvSpPr>
+          <p:cNvPr id="35" name="Text 33"/>
+          <p:cNvSpPr/>
+          <p:nvPr/>
+        </p:nvSpPr>
+        <p:spPr>
+          <a:xfrm>
+            <a:off x="6428232" y="3364992"/>
+            <a:ext cx="1645920" cy="475488"/>
+          </a:xfrm>
+          <a:prstGeom prst="rect">
+            <a:avLst/>
+          </a:prstGeom>
+          <a:noFill/>
+          <a:ln/>
+        </p:spPr>
+        <p:txBody>
+          <a:bodyPr wrap="square" lIns="0" tIns="0" rIns="0" bIns="0" rtlCol="0" anchor="ctr"/>
+          <a:lstStyle/>
+          <a:p>
+            <a:pPr algn="ctr" indent="0" marL="0">
+              <a:buNone/>
+            </a:pPr>
+            <a:r>
+              <a:rPr lang="en-US" sz="1400" b="1" dirty="0">
+                <a:solidFill>
+                  <a:srgbClr val="0D9488"/>
+                </a:solidFill>
+                <a:latin typeface="Trebuchet MS" pitchFamily="34" charset="0"/>
+                <a:ea typeface="Trebuchet MS" pitchFamily="34" charset="-122"/>
+                <a:cs typeface="Trebuchet MS" pitchFamily="34" charset="-120"/>
+              </a:rPr>
+              <a:t>ment</a:t>
+            </a:r>
+            <a:endParaRPr lang="en-US" sz="1400" dirty="0"/>
+          </a:p>
+        </p:txBody>
+      </p:sp>
+      <p:sp>
+        <p:nvSpPr>
+          <p:cNvPr id="36" name="Shape 34"/>
           <p:cNvSpPr/>
           <p:nvPr/>
         </p:nvSpPr>
@@ -26057,7 +26975,7 @@
       </p:sp>
       <p:sp>
         <p:nvSpPr>
-          <p:cNvPr id="31" name="Text 29"/>
+          <p:cNvPr id="37" name="Text 35"/>
           <p:cNvSpPr/>
           <p:nvPr/>
         </p:nvSpPr>
@@ -26096,7 +27014,7 @@
       </p:sp>
       <p:sp>
         <p:nvSpPr>
-          <p:cNvPr id="32" name="Shape 30"/>
+          <p:cNvPr id="38" name="Shape 36"/>
           <p:cNvSpPr/>
           <p:nvPr/>
         </p:nvSpPr>
@@ -26123,14 +27041,14 @@
       </p:sp>
       <p:sp>
         <p:nvSpPr>
-          <p:cNvPr id="33" name="Shape 31"/>
-          <p:cNvSpPr/>
-          <p:nvPr/>
-        </p:nvSpPr>
-        <p:spPr>
-          <a:xfrm>
-            <a:off x="2254649" y="4169664"/>
-            <a:ext cx="685800" cy="384048"/>
+          <p:cNvPr id="39" name="Shape 37"/>
+          <p:cNvSpPr/>
+          <p:nvPr/>
+        </p:nvSpPr>
+        <p:spPr>
+          <a:xfrm>
+            <a:off x="1951330" y="4169664"/>
+            <a:ext cx="676656" cy="384048"/>
           </a:xfrm>
           <a:prstGeom prst="rect">
             <a:avLst>
@@ -26150,14 +27068,14 @@
       </p:sp>
       <p:sp>
         <p:nvSpPr>
-          <p:cNvPr id="34" name="Text 32"/>
-          <p:cNvSpPr/>
-          <p:nvPr/>
-        </p:nvSpPr>
-        <p:spPr>
-          <a:xfrm>
-            <a:off x="2254649" y="4169664"/>
-            <a:ext cx="685800" cy="384048"/>
+          <p:cNvPr id="40" name="Text 38"/>
+          <p:cNvSpPr/>
+          <p:nvPr/>
+        </p:nvSpPr>
+        <p:spPr>
+          <a:xfrm>
+            <a:off x="1951330" y="4169664"/>
+            <a:ext cx="676656" cy="384048"/>
           </a:xfrm>
           <a:prstGeom prst="rect">
             <a:avLst/>
@@ -26189,14 +27107,14 @@
       </p:sp>
       <p:sp>
         <p:nvSpPr>
-          <p:cNvPr id="35" name="Shape 33"/>
-          <p:cNvSpPr/>
-          <p:nvPr/>
-        </p:nvSpPr>
-        <p:spPr>
-          <a:xfrm>
-            <a:off x="3293146" y="4169664"/>
-            <a:ext cx="685800" cy="384048"/>
+          <p:cNvPr id="41" name="Shape 39"/>
+          <p:cNvSpPr/>
+          <p:nvPr/>
+        </p:nvSpPr>
+        <p:spPr>
+          <a:xfrm>
+            <a:off x="2677363" y="4169664"/>
+            <a:ext cx="676656" cy="384048"/>
           </a:xfrm>
           <a:prstGeom prst="rect">
             <a:avLst>
@@ -26216,14 +27134,14 @@
       </p:sp>
       <p:sp>
         <p:nvSpPr>
-          <p:cNvPr id="36" name="Text 34"/>
-          <p:cNvSpPr/>
-          <p:nvPr/>
-        </p:nvSpPr>
-        <p:spPr>
-          <a:xfrm>
-            <a:off x="3293146" y="4169664"/>
-            <a:ext cx="685800" cy="384048"/>
+          <p:cNvPr id="42" name="Text 40"/>
+          <p:cNvSpPr/>
+          <p:nvPr/>
+        </p:nvSpPr>
+        <p:spPr>
+          <a:xfrm>
+            <a:off x="2677363" y="4169664"/>
+            <a:ext cx="676656" cy="384048"/>
           </a:xfrm>
           <a:prstGeom prst="rect">
             <a:avLst/>
@@ -26255,14 +27173,14 @@
       </p:sp>
       <p:sp>
         <p:nvSpPr>
-          <p:cNvPr id="37" name="Shape 35"/>
-          <p:cNvSpPr/>
-          <p:nvPr/>
-        </p:nvSpPr>
-        <p:spPr>
-          <a:xfrm>
-            <a:off x="4331643" y="4169664"/>
-            <a:ext cx="685800" cy="384048"/>
+          <p:cNvPr id="43" name="Shape 41"/>
+          <p:cNvSpPr/>
+          <p:nvPr/>
+        </p:nvSpPr>
+        <p:spPr>
+          <a:xfrm>
+            <a:off x="3403397" y="4169664"/>
+            <a:ext cx="676656" cy="384048"/>
           </a:xfrm>
           <a:prstGeom prst="rect">
             <a:avLst>
@@ -26282,14 +27200,14 @@
       </p:sp>
       <p:sp>
         <p:nvSpPr>
-          <p:cNvPr id="38" name="Text 36"/>
-          <p:cNvSpPr/>
-          <p:nvPr/>
-        </p:nvSpPr>
-        <p:spPr>
-          <a:xfrm>
-            <a:off x="4331643" y="4169664"/>
-            <a:ext cx="685800" cy="384048"/>
+          <p:cNvPr id="44" name="Text 42"/>
+          <p:cNvSpPr/>
+          <p:nvPr/>
+        </p:nvSpPr>
+        <p:spPr>
+          <a:xfrm>
+            <a:off x="3403397" y="4169664"/>
+            <a:ext cx="676656" cy="384048"/>
           </a:xfrm>
           <a:prstGeom prst="rect">
             <a:avLst/>
@@ -26313,7 +27231,7 @@
                 <a:ea typeface="Trebuchet MS" pitchFamily="34" charset="-122"/>
                 <a:cs typeface="Trebuchet MS" pitchFamily="34" charset="-120"/>
               </a:rPr>
-              <a:t>p</a:t>
+              <a:t>pr</a:t>
             </a:r>
             <a:endParaRPr lang="en-US" sz="900" dirty="0"/>
           </a:p>
@@ -26321,14 +27239,14 @@
       </p:sp>
       <p:sp>
         <p:nvSpPr>
-          <p:cNvPr id="39" name="Shape 37"/>
-          <p:cNvSpPr/>
-          <p:nvPr/>
-        </p:nvSpPr>
-        <p:spPr>
-          <a:xfrm>
-            <a:off x="5370141" y="4169664"/>
-            <a:ext cx="685800" cy="384048"/>
+          <p:cNvPr id="45" name="Shape 43"/>
+          <p:cNvSpPr/>
+          <p:nvPr/>
+        </p:nvSpPr>
+        <p:spPr>
+          <a:xfrm>
+            <a:off x="4129430" y="4169664"/>
+            <a:ext cx="676656" cy="384048"/>
           </a:xfrm>
           <a:prstGeom prst="rect">
             <a:avLst>
@@ -26348,14 +27266,14 @@
       </p:sp>
       <p:sp>
         <p:nvSpPr>
-          <p:cNvPr id="40" name="Text 38"/>
-          <p:cNvSpPr/>
-          <p:nvPr/>
-        </p:nvSpPr>
-        <p:spPr>
-          <a:xfrm>
-            <a:off x="5370141" y="4169664"/>
-            <a:ext cx="685800" cy="384048"/>
+          <p:cNvPr id="46" name="Text 44"/>
+          <p:cNvSpPr/>
+          <p:nvPr/>
+        </p:nvSpPr>
+        <p:spPr>
+          <a:xfrm>
+            <a:off x="4129430" y="4169664"/>
+            <a:ext cx="676656" cy="384048"/>
           </a:xfrm>
           <a:prstGeom prst="rect">
             <a:avLst/>
@@ -26379,7 +27297,7 @@
                 <a:ea typeface="Trebuchet MS" pitchFamily="34" charset="-122"/>
                 <a:cs typeface="Trebuchet MS" pitchFamily="34" charset="-120"/>
               </a:rPr>
-              <a:t>r</a:t>
+              <a:t>oo</a:t>
             </a:r>
             <a:endParaRPr lang="en-US" sz="900" dirty="0"/>
           </a:p>
@@ -26387,14 +27305,53 @@
       </p:sp>
       <p:sp>
         <p:nvSpPr>
-          <p:cNvPr id="41" name="Shape 39"/>
-          <p:cNvSpPr/>
-          <p:nvPr/>
-        </p:nvSpPr>
-        <p:spPr>
-          <a:xfrm>
-            <a:off x="6408638" y="4169664"/>
-            <a:ext cx="685800" cy="384048"/>
+          <p:cNvPr id="47" name="Text 45"/>
+          <p:cNvSpPr/>
+          <p:nvPr/>
+        </p:nvSpPr>
+        <p:spPr>
+          <a:xfrm>
+            <a:off x="4129430" y="4572000"/>
+            <a:ext cx="676656" cy="219456"/>
+          </a:xfrm>
+          <a:prstGeom prst="rect">
+            <a:avLst/>
+          </a:prstGeom>
+          <a:noFill/>
+          <a:ln/>
+        </p:spPr>
+        <p:txBody>
+          <a:bodyPr wrap="square" lIns="0" tIns="0" rIns="0" bIns="0" rtlCol="0" anchor="t"/>
+          <a:lstStyle/>
+          <a:p>
+            <a:pPr algn="ctr" indent="0" marL="0">
+              <a:buNone/>
+            </a:pPr>
+            <a:r>
+              <a:rPr lang="en-US" sz="750" i="1" dirty="0">
+                <a:solidFill>
+                  <a:srgbClr val="94A3B8"/>
+                </a:solidFill>
+                <a:latin typeface="Calibri" pitchFamily="34" charset="0"/>
+                <a:ea typeface="Calibri" pitchFamily="34" charset="-122"/>
+                <a:cs typeface="Calibri" pitchFamily="34" charset="-120"/>
+              </a:rPr>
+              <a:t>/oo/</a:t>
+            </a:r>
+            <a:endParaRPr lang="en-US" sz="750" dirty="0"/>
+          </a:p>
+        </p:txBody>
+      </p:sp>
+      <p:sp>
+        <p:nvSpPr>
+          <p:cNvPr id="48" name="Shape 46"/>
+          <p:cNvSpPr/>
+          <p:nvPr/>
+        </p:nvSpPr>
+        <p:spPr>
+          <a:xfrm>
+            <a:off x="4855464" y="4169664"/>
+            <a:ext cx="676656" cy="384048"/>
           </a:xfrm>
           <a:prstGeom prst="rect">
             <a:avLst>
@@ -26414,14 +27371,14 @@
       </p:sp>
       <p:sp>
         <p:nvSpPr>
-          <p:cNvPr id="42" name="Text 40"/>
-          <p:cNvSpPr/>
-          <p:nvPr/>
-        </p:nvSpPr>
-        <p:spPr>
-          <a:xfrm>
-            <a:off x="6408638" y="4169664"/>
-            <a:ext cx="685800" cy="384048"/>
+          <p:cNvPr id="49" name="Text 47"/>
+          <p:cNvSpPr/>
+          <p:nvPr/>
+        </p:nvSpPr>
+        <p:spPr>
+          <a:xfrm>
+            <a:off x="4855464" y="4169664"/>
+            <a:ext cx="676656" cy="384048"/>
           </a:xfrm>
           <a:prstGeom prst="rect">
             <a:avLst/>
@@ -26445,7 +27402,7 @@
                 <a:ea typeface="Trebuchet MS" pitchFamily="34" charset="-122"/>
                 <a:cs typeface="Trebuchet MS" pitchFamily="34" charset="-120"/>
               </a:rPr>
-              <a:t>oo</a:t>
+              <a:t>ve</a:t>
             </a:r>
             <a:endParaRPr lang="en-US" sz="900" dirty="0"/>
           </a:p>
@@ -26453,14 +27410,14 @@
       </p:sp>
       <p:sp>
         <p:nvSpPr>
-          <p:cNvPr id="43" name="Text 41"/>
-          <p:cNvSpPr/>
-          <p:nvPr/>
-        </p:nvSpPr>
-        <p:spPr>
-          <a:xfrm>
-            <a:off x="6408638" y="4572000"/>
-            <a:ext cx="685800" cy="219456"/>
+          <p:cNvPr id="50" name="Text 48"/>
+          <p:cNvSpPr/>
+          <p:nvPr/>
+        </p:nvSpPr>
+        <p:spPr>
+          <a:xfrm>
+            <a:off x="4855464" y="4572000"/>
+            <a:ext cx="676656" cy="219456"/>
           </a:xfrm>
           <a:prstGeom prst="rect">
             <a:avLst/>
@@ -26484,7 +27441,7 @@
                 <a:ea typeface="Calibri" pitchFamily="34" charset="-122"/>
                 <a:cs typeface="Calibri" pitchFamily="34" charset="-120"/>
               </a:rPr>
-              <a:t>/oo/</a:t>
+              <a:t>/v/</a:t>
             </a:r>
             <a:endParaRPr lang="en-US" sz="750" dirty="0"/>
           </a:p>
@@ -26492,14 +27449,14 @@
       </p:sp>
       <p:sp>
         <p:nvSpPr>
-          <p:cNvPr id="44" name="Shape 42"/>
-          <p:cNvSpPr/>
-          <p:nvPr/>
-        </p:nvSpPr>
-        <p:spPr>
-          <a:xfrm>
-            <a:off x="7447135" y="4169664"/>
-            <a:ext cx="685800" cy="384048"/>
+          <p:cNvPr id="51" name="Shape 49"/>
+          <p:cNvSpPr/>
+          <p:nvPr/>
+        </p:nvSpPr>
+        <p:spPr>
+          <a:xfrm>
+            <a:off x="5581498" y="4169664"/>
+            <a:ext cx="676656" cy="384048"/>
           </a:xfrm>
           <a:prstGeom prst="rect">
             <a:avLst>
@@ -26519,14 +27476,14 @@
       </p:sp>
       <p:sp>
         <p:nvSpPr>
-          <p:cNvPr id="45" name="Text 43"/>
-          <p:cNvSpPr/>
-          <p:nvPr/>
-        </p:nvSpPr>
-        <p:spPr>
-          <a:xfrm>
-            <a:off x="7447135" y="4169664"/>
-            <a:ext cx="685800" cy="384048"/>
+          <p:cNvPr id="52" name="Text 50"/>
+          <p:cNvSpPr/>
+          <p:nvPr/>
+        </p:nvSpPr>
+        <p:spPr>
+          <a:xfrm>
+            <a:off x="5581498" y="4169664"/>
+            <a:ext cx="676656" cy="384048"/>
           </a:xfrm>
           <a:prstGeom prst="rect">
             <a:avLst/>
@@ -26550,7 +27507,7 @@
                 <a:ea typeface="Trebuchet MS" pitchFamily="34" charset="-122"/>
                 <a:cs typeface="Trebuchet MS" pitchFamily="34" charset="-120"/>
               </a:rPr>
-              <a:t>ve</a:t>
+              <a:t>m</a:t>
             </a:r>
             <a:endParaRPr lang="en-US" sz="900" dirty="0"/>
           </a:p>
@@ -26558,40 +27515,199 @@
       </p:sp>
       <p:sp>
         <p:nvSpPr>
-          <p:cNvPr id="46" name="Text 44"/>
-          <p:cNvSpPr/>
-          <p:nvPr/>
-        </p:nvSpPr>
-        <p:spPr>
-          <a:xfrm>
-            <a:off x="7447135" y="4572000"/>
-            <a:ext cx="685800" cy="219456"/>
-          </a:xfrm>
-          <a:prstGeom prst="rect">
-            <a:avLst/>
-          </a:prstGeom>
-          <a:noFill/>
-          <a:ln/>
-        </p:spPr>
-        <p:txBody>
-          <a:bodyPr wrap="square" lIns="0" tIns="0" rIns="0" bIns="0" rtlCol="0" anchor="t"/>
-          <a:lstStyle/>
-          <a:p>
-            <a:pPr algn="ctr" indent="0" marL="0">
-              <a:buNone/>
-            </a:pPr>
-            <a:r>
-              <a:rPr lang="en-US" sz="750" i="1" dirty="0">
-                <a:solidFill>
-                  <a:srgbClr val="94A3B8"/>
-                </a:solidFill>
-                <a:latin typeface="Calibri" pitchFamily="34" charset="0"/>
-                <a:ea typeface="Calibri" pitchFamily="34" charset="-122"/>
-                <a:cs typeface="Calibri" pitchFamily="34" charset="-120"/>
-              </a:rPr>
-              <a:t>/v/</a:t>
-            </a:r>
-            <a:endParaRPr lang="en-US" sz="750" dirty="0"/>
+          <p:cNvPr id="53" name="Shape 51"/>
+          <p:cNvSpPr/>
+          <p:nvPr/>
+        </p:nvSpPr>
+        <p:spPr>
+          <a:xfrm>
+            <a:off x="6307531" y="4169664"/>
+            <a:ext cx="676656" cy="384048"/>
+          </a:xfrm>
+          <a:prstGeom prst="rect">
+            <a:avLst>
+              <a:gd name="adj" fmla="val 9524"/>
+            </a:avLst>
+          </a:prstGeom>
+          <a:solidFill>
+            <a:srgbClr val="FFFFFF"/>
+          </a:solidFill>
+          <a:ln w="12700">
+            <a:solidFill>
+              <a:srgbClr val="DB2777"/>
+            </a:solidFill>
+            <a:prstDash val="solid"/>
+          </a:ln>
+        </p:spPr>
+      </p:sp>
+      <p:sp>
+        <p:nvSpPr>
+          <p:cNvPr id="54" name="Text 52"/>
+          <p:cNvSpPr/>
+          <p:nvPr/>
+        </p:nvSpPr>
+        <p:spPr>
+          <a:xfrm>
+            <a:off x="6307531" y="4169664"/>
+            <a:ext cx="676656" cy="384048"/>
+          </a:xfrm>
+          <a:prstGeom prst="rect">
+            <a:avLst/>
+          </a:prstGeom>
+          <a:noFill/>
+          <a:ln/>
+        </p:spPr>
+        <p:txBody>
+          <a:bodyPr wrap="square" lIns="0" tIns="0" rIns="0" bIns="0" rtlCol="0" anchor="ctr"/>
+          <a:lstStyle/>
+          <a:p>
+            <a:pPr algn="ctr" indent="0" marL="0">
+              <a:buNone/>
+            </a:pPr>
+            <a:r>
+              <a:rPr lang="en-US" sz="900" b="1" dirty="0">
+                <a:solidFill>
+                  <a:srgbClr val="9D174D"/>
+                </a:solidFill>
+                <a:latin typeface="Trebuchet MS" pitchFamily="34" charset="0"/>
+                <a:ea typeface="Trebuchet MS" pitchFamily="34" charset="-122"/>
+                <a:cs typeface="Trebuchet MS" pitchFamily="34" charset="-120"/>
+              </a:rPr>
+              <a:t>e</a:t>
+            </a:r>
+            <a:endParaRPr lang="en-US" sz="900" dirty="0"/>
+          </a:p>
+        </p:txBody>
+      </p:sp>
+      <p:sp>
+        <p:nvSpPr>
+          <p:cNvPr id="55" name="Shape 53"/>
+          <p:cNvSpPr/>
+          <p:nvPr/>
+        </p:nvSpPr>
+        <p:spPr>
+          <a:xfrm>
+            <a:off x="7033565" y="4169664"/>
+            <a:ext cx="676656" cy="384048"/>
+          </a:xfrm>
+          <a:prstGeom prst="rect">
+            <a:avLst>
+              <a:gd name="adj" fmla="val 9524"/>
+            </a:avLst>
+          </a:prstGeom>
+          <a:solidFill>
+            <a:srgbClr val="FFFFFF"/>
+          </a:solidFill>
+          <a:ln w="12700">
+            <a:solidFill>
+              <a:srgbClr val="DB2777"/>
+            </a:solidFill>
+            <a:prstDash val="solid"/>
+          </a:ln>
+        </p:spPr>
+      </p:sp>
+      <p:sp>
+        <p:nvSpPr>
+          <p:cNvPr id="56" name="Text 54"/>
+          <p:cNvSpPr/>
+          <p:nvPr/>
+        </p:nvSpPr>
+        <p:spPr>
+          <a:xfrm>
+            <a:off x="7033565" y="4169664"/>
+            <a:ext cx="676656" cy="384048"/>
+          </a:xfrm>
+          <a:prstGeom prst="rect">
+            <a:avLst/>
+          </a:prstGeom>
+          <a:noFill/>
+          <a:ln/>
+        </p:spPr>
+        <p:txBody>
+          <a:bodyPr wrap="square" lIns="0" tIns="0" rIns="0" bIns="0" rtlCol="0" anchor="ctr"/>
+          <a:lstStyle/>
+          <a:p>
+            <a:pPr algn="ctr" indent="0" marL="0">
+              <a:buNone/>
+            </a:pPr>
+            <a:r>
+              <a:rPr lang="en-US" sz="900" b="1" dirty="0">
+                <a:solidFill>
+                  <a:srgbClr val="9D174D"/>
+                </a:solidFill>
+                <a:latin typeface="Trebuchet MS" pitchFamily="34" charset="0"/>
+                <a:ea typeface="Trebuchet MS" pitchFamily="34" charset="-122"/>
+                <a:cs typeface="Trebuchet MS" pitchFamily="34" charset="-120"/>
+              </a:rPr>
+              <a:t>n</a:t>
+            </a:r>
+            <a:endParaRPr lang="en-US" sz="900" dirty="0"/>
+          </a:p>
+        </p:txBody>
+      </p:sp>
+      <p:sp>
+        <p:nvSpPr>
+          <p:cNvPr id="57" name="Shape 55"/>
+          <p:cNvSpPr/>
+          <p:nvPr/>
+        </p:nvSpPr>
+        <p:spPr>
+          <a:xfrm>
+            <a:off x="7759598" y="4169664"/>
+            <a:ext cx="676656" cy="384048"/>
+          </a:xfrm>
+          <a:prstGeom prst="rect">
+            <a:avLst>
+              <a:gd name="adj" fmla="val 9524"/>
+            </a:avLst>
+          </a:prstGeom>
+          <a:solidFill>
+            <a:srgbClr val="FFFFFF"/>
+          </a:solidFill>
+          <a:ln w="12700">
+            <a:solidFill>
+              <a:srgbClr val="DB2777"/>
+            </a:solidFill>
+            <a:prstDash val="solid"/>
+          </a:ln>
+        </p:spPr>
+      </p:sp>
+      <p:sp>
+        <p:nvSpPr>
+          <p:cNvPr id="58" name="Text 56"/>
+          <p:cNvSpPr/>
+          <p:nvPr/>
+        </p:nvSpPr>
+        <p:spPr>
+          <a:xfrm>
+            <a:off x="7759598" y="4169664"/>
+            <a:ext cx="676656" cy="384048"/>
+          </a:xfrm>
+          <a:prstGeom prst="rect">
+            <a:avLst/>
+          </a:prstGeom>
+          <a:noFill/>
+          <a:ln/>
+        </p:spPr>
+        <p:txBody>
+          <a:bodyPr wrap="square" lIns="0" tIns="0" rIns="0" bIns="0" rtlCol="0" anchor="ctr"/>
+          <a:lstStyle/>
+          <a:p>
+            <a:pPr algn="ctr" indent="0" marL="0">
+              <a:buNone/>
+            </a:pPr>
+            <a:r>
+              <a:rPr lang="en-US" sz="900" b="1" dirty="0">
+                <a:solidFill>
+                  <a:srgbClr val="9D174D"/>
+                </a:solidFill>
+                <a:latin typeface="Trebuchet MS" pitchFamily="34" charset="0"/>
+                <a:ea typeface="Trebuchet MS" pitchFamily="34" charset="-122"/>
+                <a:cs typeface="Trebuchet MS" pitchFamily="34" charset="-120"/>
+              </a:rPr>
+              <a:t>t</a:t>
+            </a:r>
+            <a:endParaRPr lang="en-US" sz="900" dirty="0"/>
           </a:p>
         </p:txBody>
       </p:sp>
@@ -26881,7 +27997,7 @@
                 <a:ea typeface="Calibri" pitchFamily="34" charset="-122"/>
                 <a:cs typeface="Calibri" pitchFamily="34" charset="-120"/>
               </a:rPr>
-              <a:t>Word Labs  •  wordlabs.app  •  Root: 'prove' = to show something is true</a:t>
+              <a:t>Word Labs  •  wordlabs.app  •  Root: 'prove' = to test or show truth</a:t>
             </a:r>
             <a:endParaRPr lang="en-US" sz="800" dirty="0"/>
           </a:p>
@@ -27020,7 +28136,7 @@
                 <a:ea typeface="Trebuchet MS" pitchFamily="34" charset="-122"/>
                 <a:cs typeface="Trebuchet MS" pitchFamily="34" charset="-120"/>
               </a:rPr>
-              <a:t>approve</a:t>
+              <a:t>disprove</a:t>
             </a:r>
             <a:endParaRPr lang="en-US" sz="2800" dirty="0"/>
           </a:p>
@@ -27708,7 +28824,7 @@
                 <a:ea typeface="Calibri" pitchFamily="34" charset="-122"/>
                 <a:cs typeface="Calibri" pitchFamily="34" charset="-120"/>
               </a:rPr>
-              <a:t>Word Labs  •  wordlabs.app  •  Root: 'prove' = to show something is true</a:t>
+              <a:t>Word Labs  •  wordlabs.app  •  Root: 'prove' = to test or show truth</a:t>
             </a:r>
             <a:endParaRPr lang="en-US" sz="800" dirty="0"/>
           </a:p>
@@ -27847,7 +28963,7 @@
                 <a:ea typeface="Trebuchet MS" pitchFamily="34" charset="-122"/>
                 <a:cs typeface="Trebuchet MS" pitchFamily="34" charset="-120"/>
               </a:rPr>
-              <a:t>approve</a:t>
+              <a:t>disprove</a:t>
             </a:r>
             <a:endParaRPr lang="en-US" sz="2800" dirty="0"/>
           </a:p>
@@ -27986,7 +29102,7 @@
                 <a:ea typeface="Trebuchet MS" pitchFamily="34" charset="-122"/>
                 <a:cs typeface="Trebuchet MS" pitchFamily="34" charset="-120"/>
               </a:rPr>
-              <a:t>ap</a:t>
+              <a:t>dis</a:t>
             </a:r>
             <a:endParaRPr lang="en-US" sz="1300" dirty="0"/>
           </a:p>
@@ -28025,7 +29141,7 @@
                 <a:ea typeface="Calibri" pitchFamily="34" charset="-122"/>
                 <a:cs typeface="Calibri" pitchFamily="34" charset="-120"/>
               </a:rPr>
-              <a:t>to, towards</a:t>
+              <a:t>not or opposite of</a:t>
             </a:r>
             <a:endParaRPr lang="en-US" sz="850" dirty="0"/>
           </a:p>
@@ -28033,46 +29149,7 @@
       </p:sp>
       <p:sp>
         <p:nvSpPr>
-          <p:cNvPr id="19" name="Text 17"/>
-          <p:cNvSpPr/>
-          <p:nvPr/>
-        </p:nvSpPr>
-        <p:spPr>
-          <a:xfrm>
-            <a:off x="2938272" y="2752344"/>
-            <a:ext cx="1828800" cy="182880"/>
-          </a:xfrm>
-          <a:prstGeom prst="rect">
-            <a:avLst/>
-          </a:prstGeom>
-          <a:noFill/>
-          <a:ln/>
-        </p:spPr>
-        <p:txBody>
-          <a:bodyPr wrap="square" lIns="0" tIns="0" rIns="0" bIns="0" rtlCol="0" anchor="t"/>
-          <a:lstStyle/>
-          <a:p>
-            <a:pPr algn="ctr" indent="0" marL="0">
-              <a:buNone/>
-            </a:pPr>
-            <a:r>
-              <a:rPr lang="en-US" sz="700" i="1" dirty="0">
-                <a:solidFill>
-                  <a:srgbClr val="94A3B8"/>
-                </a:solidFill>
-                <a:latin typeface="Calibri" pitchFamily="34" charset="0"/>
-                <a:ea typeface="Calibri" pitchFamily="34" charset="-122"/>
-                <a:cs typeface="Calibri" pitchFamily="34" charset="-120"/>
-              </a:rPr>
-              <a:t>ad → ap before 'p'</a:t>
-            </a:r>
-            <a:endParaRPr lang="en-US" sz="700" dirty="0"/>
-          </a:p>
-        </p:txBody>
-      </p:sp>
-      <p:sp>
-        <p:nvSpPr>
-          <p:cNvPr id="20" name="Shape 18"/>
+          <p:cNvPr id="19" name="Shape 17"/>
           <p:cNvSpPr/>
           <p:nvPr/>
         </p:nvSpPr>
@@ -28106,7 +29183,7 @@
       </p:sp>
       <p:sp>
         <p:nvSpPr>
-          <p:cNvPr id="21" name="Text 19"/>
+          <p:cNvPr id="20" name="Text 18"/>
           <p:cNvSpPr/>
           <p:nvPr/>
         </p:nvSpPr>
@@ -28145,7 +29222,7 @@
       </p:sp>
       <p:sp>
         <p:nvSpPr>
-          <p:cNvPr id="22" name="Text 20"/>
+          <p:cNvPr id="21" name="Text 19"/>
           <p:cNvSpPr/>
           <p:nvPr/>
         </p:nvSpPr>
@@ -28176,7 +29253,7 @@
                 <a:ea typeface="Calibri" pitchFamily="34" charset="-122"/>
                 <a:cs typeface="Calibri" pitchFamily="34" charset="-120"/>
               </a:rPr>
-              <a:t>to show is true</a:t>
+              <a:t>to test or show truth</a:t>
             </a:r>
             <a:endParaRPr lang="en-US" sz="850" dirty="0"/>
           </a:p>
@@ -28184,7 +29261,7 @@
       </p:sp>
       <p:sp>
         <p:nvSpPr>
-          <p:cNvPr id="23" name="Shape 21"/>
+          <p:cNvPr id="22" name="Shape 20"/>
           <p:cNvSpPr/>
           <p:nvPr/>
         </p:nvSpPr>
@@ -28211,7 +29288,7 @@
       </p:sp>
       <p:sp>
         <p:nvSpPr>
-          <p:cNvPr id="24" name="Text 22"/>
+          <p:cNvPr id="23" name="Text 21"/>
           <p:cNvSpPr/>
           <p:nvPr/>
         </p:nvSpPr>
@@ -28250,7 +29327,7 @@
       </p:sp>
       <p:sp>
         <p:nvSpPr>
-          <p:cNvPr id="25" name="Shape 23"/>
+          <p:cNvPr id="24" name="Shape 22"/>
           <p:cNvSpPr/>
           <p:nvPr/>
         </p:nvSpPr>
@@ -28277,7 +29354,7 @@
       </p:sp>
       <p:sp>
         <p:nvSpPr>
-          <p:cNvPr id="26" name="Text 24"/>
+          <p:cNvPr id="25" name="Text 23"/>
           <p:cNvSpPr/>
           <p:nvPr/>
         </p:nvSpPr>
@@ -28316,7 +29393,7 @@
       </p:sp>
       <p:sp>
         <p:nvSpPr>
-          <p:cNvPr id="27" name="Shape 25"/>
+          <p:cNvPr id="26" name="Shape 24"/>
           <p:cNvSpPr/>
           <p:nvPr/>
         </p:nvSpPr>
@@ -28343,7 +29420,7 @@
       </p:sp>
       <p:sp>
         <p:nvSpPr>
-          <p:cNvPr id="28" name="Text 26"/>
+          <p:cNvPr id="27" name="Text 25"/>
           <p:cNvSpPr/>
           <p:nvPr/>
         </p:nvSpPr>
@@ -28382,7 +29459,7 @@
       </p:sp>
       <p:sp>
         <p:nvSpPr>
-          <p:cNvPr id="29" name="Shape 27"/>
+          <p:cNvPr id="28" name="Shape 26"/>
           <p:cNvSpPr/>
           <p:nvPr/>
         </p:nvSpPr>
@@ -28409,7 +29486,7 @@
       </p:sp>
       <p:sp>
         <p:nvSpPr>
-          <p:cNvPr id="30" name="Text 28"/>
+          <p:cNvPr id="29" name="Text 27"/>
           <p:cNvSpPr/>
           <p:nvPr/>
         </p:nvSpPr>
@@ -28732,7 +29809,7 @@
                 <a:ea typeface="Calibri" pitchFamily="34" charset="-122"/>
                 <a:cs typeface="Calibri" pitchFamily="34" charset="-120"/>
               </a:rPr>
-              <a:t>Word Labs  •  wordlabs.app  •  Root: 'prove' = to show something is true</a:t>
+              <a:t>Word Labs  •  wordlabs.app  •  Root: 'prove' = to test or show truth</a:t>
             </a:r>
             <a:endParaRPr lang="en-US" sz="800" dirty="0"/>
           </a:p>
@@ -28871,7 +29948,7 @@
                 <a:ea typeface="Trebuchet MS" pitchFamily="34" charset="-122"/>
                 <a:cs typeface="Trebuchet MS" pitchFamily="34" charset="-120"/>
               </a:rPr>
-              <a:t>approve</a:t>
+              <a:t>disprove</a:t>
             </a:r>
             <a:endParaRPr lang="en-US" sz="2800" dirty="0"/>
           </a:p>
@@ -29010,7 +30087,7 @@
                 <a:ea typeface="Trebuchet MS" pitchFamily="34" charset="-122"/>
                 <a:cs typeface="Trebuchet MS" pitchFamily="34" charset="-120"/>
               </a:rPr>
-              <a:t>ap</a:t>
+              <a:t>dis</a:t>
             </a:r>
             <a:endParaRPr lang="en-US" sz="1300" dirty="0"/>
           </a:p>
@@ -29049,7 +30126,7 @@
                 <a:ea typeface="Calibri" pitchFamily="34" charset="-122"/>
                 <a:cs typeface="Calibri" pitchFamily="34" charset="-120"/>
               </a:rPr>
-              <a:t>to, towards</a:t>
+              <a:t>not or opposite of</a:t>
             </a:r>
             <a:endParaRPr lang="en-US" sz="850" dirty="0"/>
           </a:p>
@@ -29057,46 +30134,7 @@
       </p:sp>
       <p:sp>
         <p:nvSpPr>
-          <p:cNvPr id="19" name="Text 17"/>
-          <p:cNvSpPr/>
-          <p:nvPr/>
-        </p:nvSpPr>
-        <p:spPr>
-          <a:xfrm>
-            <a:off x="2938272" y="2752344"/>
-            <a:ext cx="1828800" cy="182880"/>
-          </a:xfrm>
-          <a:prstGeom prst="rect">
-            <a:avLst/>
-          </a:prstGeom>
-          <a:noFill/>
-          <a:ln/>
-        </p:spPr>
-        <p:txBody>
-          <a:bodyPr wrap="square" lIns="0" tIns="0" rIns="0" bIns="0" rtlCol="0" anchor="t"/>
-          <a:lstStyle/>
-          <a:p>
-            <a:pPr algn="ctr" indent="0" marL="0">
-              <a:buNone/>
-            </a:pPr>
-            <a:r>
-              <a:rPr lang="en-US" sz="700" i="1" dirty="0">
-                <a:solidFill>
-                  <a:srgbClr val="94A3B8"/>
-                </a:solidFill>
-                <a:latin typeface="Calibri" pitchFamily="34" charset="0"/>
-                <a:ea typeface="Calibri" pitchFamily="34" charset="-122"/>
-                <a:cs typeface="Calibri" pitchFamily="34" charset="-120"/>
-              </a:rPr>
-              <a:t>ad → ap before 'p'</a:t>
-            </a:r>
-            <a:endParaRPr lang="en-US" sz="700" dirty="0"/>
-          </a:p>
-        </p:txBody>
-      </p:sp>
-      <p:sp>
-        <p:nvSpPr>
-          <p:cNvPr id="20" name="Shape 18"/>
+          <p:cNvPr id="19" name="Shape 17"/>
           <p:cNvSpPr/>
           <p:nvPr/>
         </p:nvSpPr>
@@ -29130,7 +30168,7 @@
       </p:sp>
       <p:sp>
         <p:nvSpPr>
-          <p:cNvPr id="21" name="Text 19"/>
+          <p:cNvPr id="20" name="Text 18"/>
           <p:cNvSpPr/>
           <p:nvPr/>
         </p:nvSpPr>
@@ -29169,7 +30207,7 @@
       </p:sp>
       <p:sp>
         <p:nvSpPr>
-          <p:cNvPr id="22" name="Text 20"/>
+          <p:cNvPr id="21" name="Text 19"/>
           <p:cNvSpPr/>
           <p:nvPr/>
         </p:nvSpPr>
@@ -29200,7 +30238,7 @@
                 <a:ea typeface="Calibri" pitchFamily="34" charset="-122"/>
                 <a:cs typeface="Calibri" pitchFamily="34" charset="-120"/>
               </a:rPr>
-              <a:t>to show is true</a:t>
+              <a:t>to test or show truth</a:t>
             </a:r>
             <a:endParaRPr lang="en-US" sz="850" dirty="0"/>
           </a:p>
@@ -29208,7 +30246,7 @@
       </p:sp>
       <p:sp>
         <p:nvSpPr>
-          <p:cNvPr id="23" name="Shape 21"/>
+          <p:cNvPr id="22" name="Shape 20"/>
           <p:cNvSpPr/>
           <p:nvPr/>
         </p:nvSpPr>
@@ -29235,7 +30273,7 @@
       </p:sp>
       <p:sp>
         <p:nvSpPr>
-          <p:cNvPr id="24" name="Text 22"/>
+          <p:cNvPr id="23" name="Text 21"/>
           <p:cNvSpPr/>
           <p:nvPr/>
         </p:nvSpPr>
@@ -29274,7 +30312,7 @@
       </p:sp>
       <p:sp>
         <p:nvSpPr>
-          <p:cNvPr id="25" name="Shape 23"/>
+          <p:cNvPr id="24" name="Shape 22"/>
           <p:cNvSpPr/>
           <p:nvPr/>
         </p:nvSpPr>
@@ -29301,7 +30339,7 @@
       </p:sp>
       <p:sp>
         <p:nvSpPr>
-          <p:cNvPr id="26" name="Shape 24"/>
+          <p:cNvPr id="25" name="Shape 23"/>
           <p:cNvSpPr/>
           <p:nvPr/>
         </p:nvSpPr>
@@ -29328,7 +30366,7 @@
       </p:sp>
       <p:sp>
         <p:nvSpPr>
-          <p:cNvPr id="27" name="Text 25"/>
+          <p:cNvPr id="26" name="Text 24"/>
           <p:cNvSpPr/>
           <p:nvPr/>
         </p:nvSpPr>
@@ -29359,7 +30397,7 @@
                 <a:ea typeface="Trebuchet MS" pitchFamily="34" charset="-122"/>
                 <a:cs typeface="Trebuchet MS" pitchFamily="34" charset="-120"/>
               </a:rPr>
-              <a:t>ap</a:t>
+              <a:t>dis</a:t>
             </a:r>
             <a:endParaRPr lang="en-US" sz="1400" dirty="0"/>
           </a:p>
@@ -29367,7 +30405,7 @@
       </p:sp>
       <p:sp>
         <p:nvSpPr>
-          <p:cNvPr id="28" name="Text 26"/>
+          <p:cNvPr id="27" name="Text 25"/>
           <p:cNvSpPr/>
           <p:nvPr/>
         </p:nvSpPr>
@@ -29406,7 +30444,7 @@
       </p:sp>
       <p:sp>
         <p:nvSpPr>
-          <p:cNvPr id="29" name="Shape 27"/>
+          <p:cNvPr id="28" name="Shape 26"/>
           <p:cNvSpPr/>
           <p:nvPr/>
         </p:nvSpPr>
@@ -29433,7 +30471,7 @@
       </p:sp>
       <p:sp>
         <p:nvSpPr>
-          <p:cNvPr id="30" name="Text 28"/>
+          <p:cNvPr id="29" name="Text 27"/>
           <p:cNvSpPr/>
           <p:nvPr/>
         </p:nvSpPr>
@@ -29472,7 +30510,7 @@
       </p:sp>
       <p:sp>
         <p:nvSpPr>
-          <p:cNvPr id="31" name="Shape 29"/>
+          <p:cNvPr id="30" name="Shape 28"/>
           <p:cNvSpPr/>
           <p:nvPr/>
         </p:nvSpPr>
@@ -29499,7 +30537,7 @@
       </p:sp>
       <p:sp>
         <p:nvSpPr>
-          <p:cNvPr id="32" name="Text 30"/>
+          <p:cNvPr id="31" name="Text 29"/>
           <p:cNvSpPr/>
           <p:nvPr/>
         </p:nvSpPr>
@@ -29538,7 +30576,7 @@
       </p:sp>
       <p:sp>
         <p:nvSpPr>
-          <p:cNvPr id="33" name="Shape 31"/>
+          <p:cNvPr id="32" name="Shape 30"/>
           <p:cNvSpPr/>
           <p:nvPr/>
         </p:nvSpPr>
@@ -29565,7 +30603,7 @@
       </p:sp>
       <p:sp>
         <p:nvSpPr>
-          <p:cNvPr id="34" name="Text 32"/>
+          <p:cNvPr id="33" name="Text 31"/>
           <p:cNvSpPr/>
           <p:nvPr/>
         </p:nvSpPr>
@@ -29888,7 +30926,7 @@
                 <a:ea typeface="Calibri" pitchFamily="34" charset="-122"/>
                 <a:cs typeface="Calibri" pitchFamily="34" charset="-120"/>
               </a:rPr>
-              <a:t>Word Labs  •  wordlabs.app  •  Root: 'prove' = to show something is true</a:t>
+              <a:t>Word Labs  •  wordlabs.app  •  Root: 'prove' = to test or show truth</a:t>
             </a:r>
             <a:endParaRPr lang="en-US" sz="800" dirty="0"/>
           </a:p>
@@ -30027,7 +31065,7 @@
                 <a:ea typeface="Trebuchet MS" pitchFamily="34" charset="-122"/>
                 <a:cs typeface="Trebuchet MS" pitchFamily="34" charset="-120"/>
               </a:rPr>
-              <a:t>approve</a:t>
+              <a:t>disprove</a:t>
             </a:r>
             <a:endParaRPr lang="en-US" sz="2800" dirty="0"/>
           </a:p>
@@ -30166,7 +31204,7 @@
                 <a:ea typeface="Trebuchet MS" pitchFamily="34" charset="-122"/>
                 <a:cs typeface="Trebuchet MS" pitchFamily="34" charset="-120"/>
               </a:rPr>
-              <a:t>ap</a:t>
+              <a:t>dis</a:t>
             </a:r>
             <a:endParaRPr lang="en-US" sz="1300" dirty="0"/>
           </a:p>
@@ -30205,7 +31243,7 @@
                 <a:ea typeface="Calibri" pitchFamily="34" charset="-122"/>
                 <a:cs typeface="Calibri" pitchFamily="34" charset="-120"/>
               </a:rPr>
-              <a:t>to, towards</a:t>
+              <a:t>not or opposite of</a:t>
             </a:r>
             <a:endParaRPr lang="en-US" sz="850" dirty="0"/>
           </a:p>
@@ -30213,46 +31251,7 @@
       </p:sp>
       <p:sp>
         <p:nvSpPr>
-          <p:cNvPr id="19" name="Text 17"/>
-          <p:cNvSpPr/>
-          <p:nvPr/>
-        </p:nvSpPr>
-        <p:spPr>
-          <a:xfrm>
-            <a:off x="2938272" y="2752344"/>
-            <a:ext cx="1828800" cy="182880"/>
-          </a:xfrm>
-          <a:prstGeom prst="rect">
-            <a:avLst/>
-          </a:prstGeom>
-          <a:noFill/>
-          <a:ln/>
-        </p:spPr>
-        <p:txBody>
-          <a:bodyPr wrap="square" lIns="0" tIns="0" rIns="0" bIns="0" rtlCol="0" anchor="t"/>
-          <a:lstStyle/>
-          <a:p>
-            <a:pPr algn="ctr" indent="0" marL="0">
-              <a:buNone/>
-            </a:pPr>
-            <a:r>
-              <a:rPr lang="en-US" sz="700" i="1" dirty="0">
-                <a:solidFill>
-                  <a:srgbClr val="94A3B8"/>
-                </a:solidFill>
-                <a:latin typeface="Calibri" pitchFamily="34" charset="0"/>
-                <a:ea typeface="Calibri" pitchFamily="34" charset="-122"/>
-                <a:cs typeface="Calibri" pitchFamily="34" charset="-120"/>
-              </a:rPr>
-              <a:t>ad → ap before 'p'</a:t>
-            </a:r>
-            <a:endParaRPr lang="en-US" sz="700" dirty="0"/>
-          </a:p>
-        </p:txBody>
-      </p:sp>
-      <p:sp>
-        <p:nvSpPr>
-          <p:cNvPr id="20" name="Shape 18"/>
+          <p:cNvPr id="19" name="Shape 17"/>
           <p:cNvSpPr/>
           <p:nvPr/>
         </p:nvSpPr>
@@ -30286,7 +31285,7 @@
       </p:sp>
       <p:sp>
         <p:nvSpPr>
-          <p:cNvPr id="21" name="Text 19"/>
+          <p:cNvPr id="20" name="Text 18"/>
           <p:cNvSpPr/>
           <p:nvPr/>
         </p:nvSpPr>
@@ -30325,7 +31324,7 @@
       </p:sp>
       <p:sp>
         <p:nvSpPr>
-          <p:cNvPr id="22" name="Text 20"/>
+          <p:cNvPr id="21" name="Text 19"/>
           <p:cNvSpPr/>
           <p:nvPr/>
         </p:nvSpPr>
@@ -30356,7 +31355,7 @@
                 <a:ea typeface="Calibri" pitchFamily="34" charset="-122"/>
                 <a:cs typeface="Calibri" pitchFamily="34" charset="-120"/>
               </a:rPr>
-              <a:t>to show is true</a:t>
+              <a:t>to test or show truth</a:t>
             </a:r>
             <a:endParaRPr lang="en-US" sz="850" dirty="0"/>
           </a:p>
@@ -30364,7 +31363,7 @@
       </p:sp>
       <p:sp>
         <p:nvSpPr>
-          <p:cNvPr id="23" name="Shape 21"/>
+          <p:cNvPr id="22" name="Shape 20"/>
           <p:cNvSpPr/>
           <p:nvPr/>
         </p:nvSpPr>
@@ -30391,7 +31390,7 @@
       </p:sp>
       <p:sp>
         <p:nvSpPr>
-          <p:cNvPr id="24" name="Text 22"/>
+          <p:cNvPr id="23" name="Text 21"/>
           <p:cNvSpPr/>
           <p:nvPr/>
         </p:nvSpPr>
@@ -30430,7 +31429,7 @@
       </p:sp>
       <p:sp>
         <p:nvSpPr>
-          <p:cNvPr id="25" name="Shape 23"/>
+          <p:cNvPr id="24" name="Shape 22"/>
           <p:cNvSpPr/>
           <p:nvPr/>
         </p:nvSpPr>
@@ -30457,7 +31456,7 @@
       </p:sp>
       <p:sp>
         <p:nvSpPr>
-          <p:cNvPr id="26" name="Shape 24"/>
+          <p:cNvPr id="25" name="Shape 23"/>
           <p:cNvSpPr/>
           <p:nvPr/>
         </p:nvSpPr>
@@ -30484,7 +31483,7 @@
       </p:sp>
       <p:sp>
         <p:nvSpPr>
-          <p:cNvPr id="27" name="Text 25"/>
+          <p:cNvPr id="26" name="Text 24"/>
           <p:cNvSpPr/>
           <p:nvPr/>
         </p:nvSpPr>
@@ -30515,7 +31514,7 @@
                 <a:ea typeface="Trebuchet MS" pitchFamily="34" charset="-122"/>
                 <a:cs typeface="Trebuchet MS" pitchFamily="34" charset="-120"/>
               </a:rPr>
-              <a:t>ap</a:t>
+              <a:t>dis</a:t>
             </a:r>
             <a:endParaRPr lang="en-US" sz="1400" dirty="0"/>
           </a:p>
@@ -30523,7 +31522,7 @@
       </p:sp>
       <p:sp>
         <p:nvSpPr>
-          <p:cNvPr id="28" name="Text 26"/>
+          <p:cNvPr id="27" name="Text 25"/>
           <p:cNvSpPr/>
           <p:nvPr/>
         </p:nvSpPr>
@@ -30562,7 +31561,7 @@
       </p:sp>
       <p:sp>
         <p:nvSpPr>
-          <p:cNvPr id="29" name="Shape 27"/>
+          <p:cNvPr id="28" name="Shape 26"/>
           <p:cNvSpPr/>
           <p:nvPr/>
         </p:nvSpPr>
@@ -30589,7 +31588,7 @@
       </p:sp>
       <p:sp>
         <p:nvSpPr>
-          <p:cNvPr id="30" name="Text 28"/>
+          <p:cNvPr id="29" name="Text 27"/>
           <p:cNvSpPr/>
           <p:nvPr/>
         </p:nvSpPr>
@@ -30628,7 +31627,7 @@
       </p:sp>
       <p:sp>
         <p:nvSpPr>
-          <p:cNvPr id="31" name="Shape 29"/>
+          <p:cNvPr id="30" name="Shape 28"/>
           <p:cNvSpPr/>
           <p:nvPr/>
         </p:nvSpPr>
@@ -30655,7 +31654,7 @@
       </p:sp>
       <p:sp>
         <p:nvSpPr>
-          <p:cNvPr id="32" name="Text 30"/>
+          <p:cNvPr id="31" name="Text 29"/>
           <p:cNvSpPr/>
           <p:nvPr/>
         </p:nvSpPr>
@@ -30694,7 +31693,7 @@
       </p:sp>
       <p:sp>
         <p:nvSpPr>
-          <p:cNvPr id="33" name="Shape 31"/>
+          <p:cNvPr id="32" name="Shape 30"/>
           <p:cNvSpPr/>
           <p:nvPr/>
         </p:nvSpPr>
@@ -30721,13 +31720,13 @@
       </p:sp>
       <p:sp>
         <p:nvSpPr>
-          <p:cNvPr id="34" name="Shape 32"/>
-          <p:cNvSpPr/>
-          <p:nvPr/>
-        </p:nvSpPr>
-        <p:spPr>
-          <a:xfrm>
-            <a:off x="2427732" y="4169664"/>
+          <p:cNvPr id="33" name="Shape 31"/>
+          <p:cNvSpPr/>
+          <p:nvPr/>
+        </p:nvSpPr>
+        <p:spPr>
+          <a:xfrm>
+            <a:off x="2254649" y="4169664"/>
             <a:ext cx="685800" cy="384048"/>
           </a:xfrm>
           <a:prstGeom prst="rect">
@@ -30748,13 +31747,13 @@
       </p:sp>
       <p:sp>
         <p:nvSpPr>
-          <p:cNvPr id="35" name="Text 33"/>
-          <p:cNvSpPr/>
-          <p:nvPr/>
-        </p:nvSpPr>
-        <p:spPr>
-          <a:xfrm>
-            <a:off x="2427732" y="4169664"/>
+          <p:cNvPr id="34" name="Text 32"/>
+          <p:cNvSpPr/>
+          <p:nvPr/>
+        </p:nvSpPr>
+        <p:spPr>
+          <a:xfrm>
+            <a:off x="2254649" y="4169664"/>
             <a:ext cx="685800" cy="384048"/>
           </a:xfrm>
           <a:prstGeom prst="rect">
@@ -30779,7 +31778,7 @@
                 <a:ea typeface="Trebuchet MS" pitchFamily="34" charset="-122"/>
                 <a:cs typeface="Trebuchet MS" pitchFamily="34" charset="-120"/>
               </a:rPr>
-              <a:t>a</a:t>
+              <a:t>d</a:t>
             </a:r>
             <a:endParaRPr lang="en-US" sz="900" dirty="0"/>
           </a:p>
@@ -30787,13 +31786,13 @@
       </p:sp>
       <p:sp>
         <p:nvSpPr>
-          <p:cNvPr id="36" name="Shape 34"/>
-          <p:cNvSpPr/>
-          <p:nvPr/>
-        </p:nvSpPr>
-        <p:spPr>
-          <a:xfrm>
-            <a:off x="3639312" y="4169664"/>
+          <p:cNvPr id="35" name="Shape 33"/>
+          <p:cNvSpPr/>
+          <p:nvPr/>
+        </p:nvSpPr>
+        <p:spPr>
+          <a:xfrm>
+            <a:off x="3293146" y="4169664"/>
             <a:ext cx="685800" cy="384048"/>
           </a:xfrm>
           <a:prstGeom prst="rect">
@@ -30814,13 +31813,13 @@
       </p:sp>
       <p:sp>
         <p:nvSpPr>
-          <p:cNvPr id="37" name="Text 35"/>
-          <p:cNvSpPr/>
-          <p:nvPr/>
-        </p:nvSpPr>
-        <p:spPr>
-          <a:xfrm>
-            <a:off x="3639312" y="4169664"/>
+          <p:cNvPr id="36" name="Text 34"/>
+          <p:cNvSpPr/>
+          <p:nvPr/>
+        </p:nvSpPr>
+        <p:spPr>
+          <a:xfrm>
+            <a:off x="3293146" y="4169664"/>
             <a:ext cx="685800" cy="384048"/>
           </a:xfrm>
           <a:prstGeom prst="rect">
@@ -30845,7 +31844,7 @@
                 <a:ea typeface="Trebuchet MS" pitchFamily="34" charset="-122"/>
                 <a:cs typeface="Trebuchet MS" pitchFamily="34" charset="-120"/>
               </a:rPr>
-              <a:t>pp</a:t>
+              <a:t>i</a:t>
             </a:r>
             <a:endParaRPr lang="en-US" sz="900" dirty="0"/>
           </a:p>
@@ -30853,13 +31852,13 @@
       </p:sp>
       <p:sp>
         <p:nvSpPr>
-          <p:cNvPr id="38" name="Shape 36"/>
-          <p:cNvSpPr/>
-          <p:nvPr/>
-        </p:nvSpPr>
-        <p:spPr>
-          <a:xfrm>
-            <a:off x="4850892" y="4169664"/>
+          <p:cNvPr id="37" name="Shape 35"/>
+          <p:cNvSpPr/>
+          <p:nvPr/>
+        </p:nvSpPr>
+        <p:spPr>
+          <a:xfrm>
+            <a:off x="4331643" y="4169664"/>
             <a:ext cx="685800" cy="384048"/>
           </a:xfrm>
           <a:prstGeom prst="rect">
@@ -30880,13 +31879,13 @@
       </p:sp>
       <p:sp>
         <p:nvSpPr>
-          <p:cNvPr id="39" name="Text 37"/>
-          <p:cNvSpPr/>
-          <p:nvPr/>
-        </p:nvSpPr>
-        <p:spPr>
-          <a:xfrm>
-            <a:off x="4850892" y="4169664"/>
+          <p:cNvPr id="38" name="Text 36"/>
+          <p:cNvSpPr/>
+          <p:nvPr/>
+        </p:nvSpPr>
+        <p:spPr>
+          <a:xfrm>
+            <a:off x="4331643" y="4169664"/>
             <a:ext cx="685800" cy="384048"/>
           </a:xfrm>
           <a:prstGeom prst="rect">
@@ -30911,7 +31910,7 @@
                 <a:ea typeface="Trebuchet MS" pitchFamily="34" charset="-122"/>
                 <a:cs typeface="Trebuchet MS" pitchFamily="34" charset="-120"/>
               </a:rPr>
-              <a:t>r</a:t>
+              <a:t>s</a:t>
             </a:r>
             <a:endParaRPr lang="en-US" sz="900" dirty="0"/>
           </a:p>
@@ -30919,13 +31918,13 @@
       </p:sp>
       <p:sp>
         <p:nvSpPr>
-          <p:cNvPr id="40" name="Shape 38"/>
-          <p:cNvSpPr/>
-          <p:nvPr/>
-        </p:nvSpPr>
-        <p:spPr>
-          <a:xfrm>
-            <a:off x="6062472" y="4169664"/>
+          <p:cNvPr id="39" name="Shape 37"/>
+          <p:cNvSpPr/>
+          <p:nvPr/>
+        </p:nvSpPr>
+        <p:spPr>
+          <a:xfrm>
+            <a:off x="5370141" y="4169664"/>
             <a:ext cx="685800" cy="384048"/>
           </a:xfrm>
           <a:prstGeom prst="rect">
@@ -30946,13 +31945,13 @@
       </p:sp>
       <p:sp>
         <p:nvSpPr>
-          <p:cNvPr id="41" name="Text 39"/>
-          <p:cNvSpPr/>
-          <p:nvPr/>
-        </p:nvSpPr>
-        <p:spPr>
-          <a:xfrm>
-            <a:off x="6062472" y="4169664"/>
+          <p:cNvPr id="40" name="Text 38"/>
+          <p:cNvSpPr/>
+          <p:nvPr/>
+        </p:nvSpPr>
+        <p:spPr>
+          <a:xfrm>
+            <a:off x="5370141" y="4169664"/>
             <a:ext cx="685800" cy="384048"/>
           </a:xfrm>
           <a:prstGeom prst="rect">
@@ -30977,6 +31976,72 @@
                 <a:ea typeface="Trebuchet MS" pitchFamily="34" charset="-122"/>
                 <a:cs typeface="Trebuchet MS" pitchFamily="34" charset="-120"/>
               </a:rPr>
+              <a:t>pr</a:t>
+            </a:r>
+            <a:endParaRPr lang="en-US" sz="900" dirty="0"/>
+          </a:p>
+        </p:txBody>
+      </p:sp>
+      <p:sp>
+        <p:nvSpPr>
+          <p:cNvPr id="41" name="Shape 39"/>
+          <p:cNvSpPr/>
+          <p:nvPr/>
+        </p:nvSpPr>
+        <p:spPr>
+          <a:xfrm>
+            <a:off x="6408638" y="4169664"/>
+            <a:ext cx="685800" cy="384048"/>
+          </a:xfrm>
+          <a:prstGeom prst="rect">
+            <a:avLst>
+              <a:gd name="adj" fmla="val 9524"/>
+            </a:avLst>
+          </a:prstGeom>
+          <a:solidFill>
+            <a:srgbClr val="FFFFFF"/>
+          </a:solidFill>
+          <a:ln w="12700">
+            <a:solidFill>
+              <a:srgbClr val="DB2777"/>
+            </a:solidFill>
+            <a:prstDash val="solid"/>
+          </a:ln>
+        </p:spPr>
+      </p:sp>
+      <p:sp>
+        <p:nvSpPr>
+          <p:cNvPr id="42" name="Text 40"/>
+          <p:cNvSpPr/>
+          <p:nvPr/>
+        </p:nvSpPr>
+        <p:spPr>
+          <a:xfrm>
+            <a:off x="6408638" y="4169664"/>
+            <a:ext cx="685800" cy="384048"/>
+          </a:xfrm>
+          <a:prstGeom prst="rect">
+            <a:avLst/>
+          </a:prstGeom>
+          <a:noFill/>
+          <a:ln/>
+        </p:spPr>
+        <p:txBody>
+          <a:bodyPr wrap="square" lIns="0" tIns="0" rIns="0" bIns="0" rtlCol="0" anchor="ctr"/>
+          <a:lstStyle/>
+          <a:p>
+            <a:pPr algn="ctr" indent="0" marL="0">
+              <a:buNone/>
+            </a:pPr>
+            <a:r>
+              <a:rPr lang="en-US" sz="900" b="1" dirty="0">
+                <a:solidFill>
+                  <a:srgbClr val="9D174D"/>
+                </a:solidFill>
+                <a:latin typeface="Trebuchet MS" pitchFamily="34" charset="0"/>
+                <a:ea typeface="Trebuchet MS" pitchFamily="34" charset="-122"/>
+                <a:cs typeface="Trebuchet MS" pitchFamily="34" charset="-120"/>
+              </a:rPr>
               <a:t>oo</a:t>
             </a:r>
             <a:endParaRPr lang="en-US" sz="900" dirty="0"/>
@@ -30985,13 +32050,13 @@
       </p:sp>
       <p:sp>
         <p:nvSpPr>
-          <p:cNvPr id="42" name="Text 40"/>
-          <p:cNvSpPr/>
-          <p:nvPr/>
-        </p:nvSpPr>
-        <p:spPr>
-          <a:xfrm>
-            <a:off x="6062472" y="4572000"/>
+          <p:cNvPr id="43" name="Text 41"/>
+          <p:cNvSpPr/>
+          <p:nvPr/>
+        </p:nvSpPr>
+        <p:spPr>
+          <a:xfrm>
+            <a:off x="6408638" y="4572000"/>
             <a:ext cx="685800" cy="219456"/>
           </a:xfrm>
           <a:prstGeom prst="rect">
@@ -31024,13 +32089,13 @@
       </p:sp>
       <p:sp>
         <p:nvSpPr>
-          <p:cNvPr id="43" name="Shape 41"/>
-          <p:cNvSpPr/>
-          <p:nvPr/>
-        </p:nvSpPr>
-        <p:spPr>
-          <a:xfrm>
-            <a:off x="7274052" y="4169664"/>
+          <p:cNvPr id="44" name="Shape 42"/>
+          <p:cNvSpPr/>
+          <p:nvPr/>
+        </p:nvSpPr>
+        <p:spPr>
+          <a:xfrm>
+            <a:off x="7447135" y="4169664"/>
             <a:ext cx="685800" cy="384048"/>
           </a:xfrm>
           <a:prstGeom prst="rect">
@@ -31051,13 +32116,13 @@
       </p:sp>
       <p:sp>
         <p:nvSpPr>
-          <p:cNvPr id="44" name="Text 42"/>
-          <p:cNvSpPr/>
-          <p:nvPr/>
-        </p:nvSpPr>
-        <p:spPr>
-          <a:xfrm>
-            <a:off x="7274052" y="4169664"/>
+          <p:cNvPr id="45" name="Text 43"/>
+          <p:cNvSpPr/>
+          <p:nvPr/>
+        </p:nvSpPr>
+        <p:spPr>
+          <a:xfrm>
+            <a:off x="7447135" y="4169664"/>
             <a:ext cx="685800" cy="384048"/>
           </a:xfrm>
           <a:prstGeom prst="rect">
@@ -31090,13 +32155,13 @@
       </p:sp>
       <p:sp>
         <p:nvSpPr>
-          <p:cNvPr id="45" name="Text 43"/>
-          <p:cNvSpPr/>
-          <p:nvPr/>
-        </p:nvSpPr>
-        <p:spPr>
-          <a:xfrm>
-            <a:off x="7274052" y="4572000"/>
+          <p:cNvPr id="46" name="Text 44"/>
+          <p:cNvSpPr/>
+          <p:nvPr/>
+        </p:nvSpPr>
+        <p:spPr>
+          <a:xfrm>
+            <a:off x="7447135" y="4572000"/>
             <a:ext cx="685800" cy="219456"/>
           </a:xfrm>
           <a:prstGeom prst="rect">
@@ -31413,7 +32478,7 @@
                 <a:ea typeface="Calibri" pitchFamily="34" charset="-122"/>
                 <a:cs typeface="Calibri" pitchFamily="34" charset="-120"/>
               </a:rPr>
-              <a:t>Word Labs  •  wordlabs.app  •  Root: 'prove' = to show something is true</a:t>
+              <a:t>Word Labs  •  wordlabs.app  •  Root: 'prove' = to test or show truth</a:t>
             </a:r>
             <a:endParaRPr lang="en-US" sz="800" dirty="0"/>
           </a:p>
@@ -32582,7 +33647,7 @@
                 <a:ea typeface="Calibri" pitchFamily="34" charset="-122"/>
                 <a:cs typeface="Calibri" pitchFamily="34" charset="-120"/>
               </a:rPr>
-              <a:t>Word Labs  •  wordlabs.app  •  Root: 'prove' = to show something is true</a:t>
+              <a:t>Word Labs  •  wordlabs.app  •  Root: 'prove' = to test or show truth</a:t>
             </a:r>
             <a:endParaRPr lang="en-US" sz="800" dirty="0"/>
           </a:p>
@@ -33623,7 +34688,7 @@
                 <a:ea typeface="Trebuchet MS" pitchFamily="34" charset="-122"/>
                 <a:cs typeface="Trebuchet MS" pitchFamily="34" charset="-120"/>
               </a:rPr>
-              <a:t>-al</a:t>
+              <a:t>-ment</a:t>
             </a:r>
             <a:endParaRPr lang="en-US" sz="1300" dirty="0"/>
           </a:p>
@@ -33992,7 +35057,7 @@
                 <a:ea typeface="Trebuchet MS" pitchFamily="34" charset="-122"/>
                 <a:cs typeface="Trebuchet MS" pitchFamily="34" charset="-120"/>
               </a:rPr>
-              <a:t>approve</a:t>
+              <a:t>improved</a:t>
             </a:r>
             <a:endParaRPr lang="en-US" sz="1200" dirty="0"/>
           </a:p>
@@ -34058,7 +35123,7 @@
                 <a:ea typeface="Trebuchet MS" pitchFamily="34" charset="-122"/>
                 <a:cs typeface="Trebuchet MS" pitchFamily="34" charset="-120"/>
               </a:rPr>
-              <a:t>disapprove</a:t>
+              <a:t>approve</a:t>
             </a:r>
             <a:endParaRPr lang="en-US" sz="1200" dirty="0"/>
           </a:p>
@@ -34190,7 +35255,7 @@
                 <a:ea typeface="Trebuchet MS" pitchFamily="34" charset="-122"/>
                 <a:cs typeface="Trebuchet MS" pitchFamily="34" charset="-120"/>
               </a:rPr>
-              <a:t>improvable</a:t>
+              <a:t>improvement</a:t>
             </a:r>
             <a:endParaRPr lang="en-US" sz="1200" dirty="0"/>
           </a:p>
@@ -34482,7 +35547,7 @@
                 <a:ea typeface="Calibri" pitchFamily="34" charset="-122"/>
                 <a:cs typeface="Calibri" pitchFamily="34" charset="-120"/>
               </a:rPr>
-              <a:t>Word Labs  •  wordlabs.app  •  Root: 'prove' = to show something is true</a:t>
+              <a:t>Word Labs  •  wordlabs.app  •  Root: 'prove' = to test or show truth</a:t>
             </a:r>
             <a:endParaRPr lang="en-US" sz="800" dirty="0"/>
           </a:p>
@@ -34646,7 +35711,7 @@
                 <a:ea typeface="Calibri" pitchFamily="34" charset="-122"/>
                 <a:cs typeface="Calibri" pitchFamily="34" charset="-120"/>
               </a:rPr>
-              <a:t>The core part of a word carrying its basic meaning. For example, 'prove' means 'to show something is true'.</a:t>
+              <a:t>The core part of a word carrying its basic meaning. For example, 'prove' means 'to test or show truth'.</a:t>
             </a:r>
             <a:endParaRPr lang="en-US" sz="1350" dirty="0"/>
           </a:p>
@@ -35266,7 +36331,7 @@
                 <a:ea typeface="Calibri" pitchFamily="34" charset="-122"/>
                 <a:cs typeface="Calibri" pitchFamily="34" charset="-120"/>
               </a:rPr>
-              <a:t>Word Labs  •  wordlabs.app  •  Root: 'prove' = to show something is true</a:t>
+              <a:t>Word Labs  •  wordlabs.app  •  Root: 'prove' = to test or show truth</a:t>
             </a:r>
             <a:endParaRPr lang="en-US" sz="800" dirty="0"/>
           </a:p>
@@ -35378,7 +36443,7 @@
                 <a:ea typeface="Calibri" pitchFamily="34" charset="-122"/>
                 <a:cs typeface="Calibri" pitchFamily="34" charset="-120"/>
               </a:rPr>
-              <a:t>1.  The root 'prove' comes from the Latin word 'probare', meaning to test or show true.</a:t>
+              <a:t>1.  The word 'disprove' means to agree that something is correct.</a:t>
             </a:r>
             <a:endParaRPr lang="en-US" sz="1300" dirty="0"/>
           </a:p>
@@ -35401,11 +36466,11 @@
             </a:avLst>
           </a:prstGeom>
           <a:solidFill>
-            <a:srgbClr val="DCFCE7"/>
-          </a:solidFill>
-          <a:ln w="12700">
-            <a:solidFill>
-              <a:srgbClr val="16A34A"/>
+            <a:srgbClr val="FEE2E2"/>
+          </a:solidFill>
+          <a:ln w="12700">
+            <a:solidFill>
+              <a:srgbClr val="DC2626"/>
             </a:solidFill>
             <a:prstDash val="solid"/>
           </a:ln>
@@ -35438,13 +36503,13 @@
             <a:r>
               <a:rPr lang="en-US" sz="1100" b="1" dirty="0">
                 <a:solidFill>
-                  <a:srgbClr val="16A34A"/>
+                  <a:srgbClr val="DC2626"/>
                 </a:solidFill>
                 <a:latin typeface="Trebuchet MS" pitchFamily="34" charset="0"/>
                 <a:ea typeface="Trebuchet MS" pitchFamily="34" charset="-122"/>
                 <a:cs typeface="Trebuchet MS" pitchFamily="34" charset="-120"/>
               </a:rPr>
-              <a:t>TRUE</a:t>
+              <a:t>FALSE</a:t>
             </a:r>
             <a:endParaRPr lang="en-US" sz="1100" dirty="0"/>
           </a:p>
@@ -35517,7 +36582,7 @@
                 <a:ea typeface="Calibri" pitchFamily="34" charset="-122"/>
                 <a:cs typeface="Calibri" pitchFamily="34" charset="-120"/>
               </a:rPr>
-              <a:t>2.  The word 'disprove' means to agree that something is correct.</a:t>
+              <a:t>2.  'Approve' means to agree that something is good or acceptable.</a:t>
             </a:r>
             <a:endParaRPr lang="en-US" sz="1300" dirty="0"/>
           </a:p>
@@ -35540,11 +36605,11 @@
             </a:avLst>
           </a:prstGeom>
           <a:solidFill>
-            <a:srgbClr val="FEE2E2"/>
-          </a:solidFill>
-          <a:ln w="12700">
-            <a:solidFill>
-              <a:srgbClr val="DC2626"/>
+            <a:srgbClr val="DCFCE7"/>
+          </a:solidFill>
+          <a:ln w="12700">
+            <a:solidFill>
+              <a:srgbClr val="16A34A"/>
             </a:solidFill>
             <a:prstDash val="solid"/>
           </a:ln>
@@ -35577,13 +36642,13 @@
             <a:r>
               <a:rPr lang="en-US" sz="1100" b="1" dirty="0">
                 <a:solidFill>
-                  <a:srgbClr val="DC2626"/>
+                  <a:srgbClr val="16A34A"/>
                 </a:solidFill>
                 <a:latin typeface="Trebuchet MS" pitchFamily="34" charset="0"/>
                 <a:ea typeface="Trebuchet MS" pitchFamily="34" charset="-122"/>
                 <a:cs typeface="Trebuchet MS" pitchFamily="34" charset="-120"/>
               </a:rPr>
-              <a:t>FALSE</a:t>
+              <a:t>TRUE</a:t>
             </a:r>
             <a:endParaRPr lang="en-US" sz="1100" dirty="0"/>
           </a:p>
@@ -35656,7 +36721,7 @@
                 <a:ea typeface="Calibri" pitchFamily="34" charset="-122"/>
                 <a:cs typeface="Calibri" pitchFamily="34" charset="-120"/>
               </a:rPr>
-              <a:t>3.  The prefix 'im-' in 'improve' means 'into' or 'towards', helping mean to move towards being better.</a:t>
+              <a:t>3.  The suffix '-ment' in 'improvement' means to do again.</a:t>
             </a:r>
             <a:endParaRPr lang="en-US" sz="1300" dirty="0"/>
           </a:p>
@@ -35679,11 +36744,11 @@
             </a:avLst>
           </a:prstGeom>
           <a:solidFill>
-            <a:srgbClr val="DCFCE7"/>
-          </a:solidFill>
-          <a:ln w="12700">
-            <a:solidFill>
-              <a:srgbClr val="16A34A"/>
+            <a:srgbClr val="FEE2E2"/>
+          </a:solidFill>
+          <a:ln w="12700">
+            <a:solidFill>
+              <a:srgbClr val="DC2626"/>
             </a:solidFill>
             <a:prstDash val="solid"/>
           </a:ln>
@@ -35716,13 +36781,13 @@
             <a:r>
               <a:rPr lang="en-US" sz="1100" b="1" dirty="0">
                 <a:solidFill>
-                  <a:srgbClr val="16A34A"/>
+                  <a:srgbClr val="DC2626"/>
                 </a:solidFill>
                 <a:latin typeface="Trebuchet MS" pitchFamily="34" charset="0"/>
                 <a:ea typeface="Trebuchet MS" pitchFamily="34" charset="-122"/>
                 <a:cs typeface="Trebuchet MS" pitchFamily="34" charset="-120"/>
               </a:rPr>
-              <a:t>TRUE</a:t>
+              <a:t>FALSE</a:t>
             </a:r>
             <a:endParaRPr lang="en-US" sz="1100" dirty="0"/>
           </a:p>
@@ -35795,7 +36860,7 @@
                 <a:ea typeface="Calibri" pitchFamily="34" charset="-122"/>
                 <a:cs typeface="Calibri" pitchFamily="34" charset="-120"/>
               </a:rPr>
-              <a:t>4.  The word 'approve' contains the root 'prove'.</a:t>
+              <a:t>4.  The root 'prove' comes from a Latin word meaning to test or show truth.</a:t>
             </a:r>
             <a:endParaRPr lang="en-US" sz="1300" dirty="0"/>
           </a:p>
@@ -35934,7 +36999,7 @@
                 <a:ea typeface="Calibri" pitchFamily="34" charset="-122"/>
                 <a:cs typeface="Calibri" pitchFamily="34" charset="-120"/>
               </a:rPr>
-              <a:t>5.  The suffix '-able' in 'improvable' means 'without'.</a:t>
+              <a:t>5.  The word 'improve' contains the root 'prove'.</a:t>
             </a:r>
             <a:endParaRPr lang="en-US" sz="1300" dirty="0"/>
           </a:p>
@@ -35957,11 +37022,11 @@
             </a:avLst>
           </a:prstGeom>
           <a:solidFill>
-            <a:srgbClr val="FEE2E2"/>
-          </a:solidFill>
-          <a:ln w="12700">
-            <a:solidFill>
-              <a:srgbClr val="DC2626"/>
+            <a:srgbClr val="DCFCE7"/>
+          </a:solidFill>
+          <a:ln w="12700">
+            <a:solidFill>
+              <a:srgbClr val="16A34A"/>
             </a:solidFill>
             <a:prstDash val="solid"/>
           </a:ln>
@@ -35994,13 +37059,13 @@
             <a:r>
               <a:rPr lang="en-US" sz="1100" b="1" dirty="0">
                 <a:solidFill>
-                  <a:srgbClr val="DC2626"/>
+                  <a:srgbClr val="16A34A"/>
                 </a:solidFill>
                 <a:latin typeface="Trebuchet MS" pitchFamily="34" charset="0"/>
                 <a:ea typeface="Trebuchet MS" pitchFamily="34" charset="-122"/>
                 <a:cs typeface="Trebuchet MS" pitchFamily="34" charset="-120"/>
               </a:rPr>
-              <a:t>FALSE</a:t>
+              <a:t>TRUE</a:t>
             </a:r>
             <a:endParaRPr lang="en-US" sz="1100" dirty="0"/>
           </a:p>
@@ -36292,7 +37357,7 @@
                 <a:ea typeface="Calibri" pitchFamily="34" charset="-122"/>
                 <a:cs typeface="Calibri" pitchFamily="34" charset="-120"/>
               </a:rPr>
-              <a:t>Word Labs  •  wordlabs.app  •  Root: 'prove' = to show something is true</a:t>
+              <a:t>Word Labs  •  wordlabs.app  •  Root: 'prove' = to test or show truth</a:t>
             </a:r>
             <a:endParaRPr lang="en-US" sz="800" dirty="0"/>
           </a:p>
@@ -36429,7 +37494,7 @@
                 <a:ea typeface="Trebuchet MS" pitchFamily="34" charset="-122"/>
                 <a:cs typeface="Trebuchet MS" pitchFamily="34" charset="-120"/>
               </a:rPr>
-              <a:t>to show something is true</a:t>
+              <a:t>to test or show truth</a:t>
             </a:r>
             <a:endParaRPr lang="en-US" sz="2000" dirty="0"/>
           </a:p>
@@ -36837,7 +37902,7 @@
                 <a:ea typeface="Trebuchet MS" pitchFamily="34" charset="-122"/>
                 <a:cs typeface="Trebuchet MS" pitchFamily="34" charset="-120"/>
               </a:rPr>
-              <a:t>approve</a:t>
+              <a:t>improved</a:t>
             </a:r>
             <a:endParaRPr lang="en-US" sz="1300" dirty="0"/>
           </a:p>
@@ -36903,7 +37968,7 @@
                 <a:ea typeface="Trebuchet MS" pitchFamily="34" charset="-122"/>
                 <a:cs typeface="Trebuchet MS" pitchFamily="34" charset="-120"/>
               </a:rPr>
-              <a:t>disapprove</a:t>
+              <a:t>approve</a:t>
             </a:r>
             <a:endParaRPr lang="en-US" sz="1300" dirty="0"/>
           </a:p>
@@ -37261,7 +38326,7 @@
                 <a:ea typeface="Calibri" pitchFamily="34" charset="-122"/>
                 <a:cs typeface="Calibri" pitchFamily="34" charset="-120"/>
               </a:rPr>
-              <a:t>Word Labs  •  wordlabs.app  •  Root: 'prove' = to show something is true</a:t>
+              <a:t>Word Labs  •  wordlabs.app  •  Root: 'prove' = to test or show truth</a:t>
             </a:r>
             <a:endParaRPr lang="en-US" sz="800" dirty="0"/>
           </a:p>
@@ -38302,7 +39367,7 @@
                 <a:ea typeface="Trebuchet MS" pitchFamily="34" charset="-122"/>
                 <a:cs typeface="Trebuchet MS" pitchFamily="34" charset="-120"/>
               </a:rPr>
-              <a:t>-al</a:t>
+              <a:t>-ment</a:t>
             </a:r>
             <a:endParaRPr lang="en-US" sz="1300" dirty="0"/>
           </a:p>
@@ -39035,7 +40100,7 @@
                 <a:ea typeface="Calibri" pitchFamily="34" charset="-122"/>
                 <a:cs typeface="Calibri" pitchFamily="34" charset="-120"/>
               </a:rPr>
-              <a:t>Word Labs  •  wordlabs.app  •  Root: 'prove' = to show something is true</a:t>
+              <a:t>Word Labs  •  wordlabs.app  •  Root: 'prove' = to test or show truth</a:t>
             </a:r>
             <a:endParaRPr lang="en-US" sz="800" dirty="0"/>
           </a:p>
@@ -39213,7 +40278,7 @@
                 <a:ea typeface="Calibri" pitchFamily="34" charset="-122"/>
                 <a:cs typeface="Calibri" pitchFamily="34" charset="-120"/>
               </a:rPr>
-              <a:t>Something that has been shown to be true.</a:t>
+              <a:t>Something that has already been shown to be true.</a:t>
             </a:r>
             <a:endParaRPr lang="en-US" sz="1200" dirty="0"/>
           </a:p>
@@ -39352,7 +40417,7 @@
                 <a:ea typeface="Calibri" pitchFamily="34" charset="-122"/>
                 <a:cs typeface="Calibri" pitchFamily="34" charset="-120"/>
               </a:rPr>
-              <a:t>To agree that something is good or acceptable.</a:t>
+              <a:t>Made better; something that has been made better than before.</a:t>
             </a:r>
             <a:endParaRPr lang="en-US" sz="1200" dirty="0"/>
           </a:p>
@@ -39491,7 +40556,7 @@
                 <a:ea typeface="Calibri" pitchFamily="34" charset="-122"/>
                 <a:cs typeface="Calibri" pitchFamily="34" charset="-120"/>
               </a:rPr>
-              <a:t>To show that something is true using facts or evidence.</a:t>
+              <a:t>To show that something is true by giving evidence or reasons.</a:t>
             </a:r>
             <a:endParaRPr lang="en-US" sz="1200" dirty="0"/>
           </a:p>
@@ -39630,7 +40695,7 @@
                 <a:ea typeface="Calibri" pitchFamily="34" charset="-122"/>
                 <a:cs typeface="Calibri" pitchFamily="34" charset="-120"/>
               </a:rPr>
-              <a:t>To think that something is wrong or not acceptable.</a:t>
+              <a:t>To agree that something is good or acceptable.</a:t>
             </a:r>
             <a:endParaRPr lang="en-US" sz="1200" dirty="0"/>
           </a:p>
@@ -39703,7 +40768,7 @@
                 <a:ea typeface="Trebuchet MS" pitchFamily="34" charset="-122"/>
                 <a:cs typeface="Trebuchet MS" pitchFamily="34" charset="-120"/>
               </a:rPr>
-              <a:t>approve</a:t>
+              <a:t>improved</a:t>
             </a:r>
             <a:endParaRPr lang="en-US" sz="1200" dirty="0"/>
           </a:p>
@@ -39769,7 +40834,7 @@
                 <a:ea typeface="Calibri" pitchFamily="34" charset="-122"/>
                 <a:cs typeface="Calibri" pitchFamily="34" charset="-120"/>
               </a:rPr>
-              <a:t>To show that something is not true.</a:t>
+              <a:t>To show that something is not true or incorrect.</a:t>
             </a:r>
             <a:endParaRPr lang="en-US" sz="1200" dirty="0"/>
           </a:p>
@@ -39842,7 +40907,7 @@
                 <a:ea typeface="Trebuchet MS" pitchFamily="34" charset="-122"/>
                 <a:cs typeface="Trebuchet MS" pitchFamily="34" charset="-120"/>
               </a:rPr>
-              <a:t>disapprove</a:t>
+              <a:t>approve</a:t>
             </a:r>
             <a:endParaRPr lang="en-US" sz="1200" dirty="0"/>
           </a:p>
@@ -40047,7 +41112,7 @@
                 <a:ea typeface="Calibri" pitchFamily="34" charset="-122"/>
                 <a:cs typeface="Calibri" pitchFamily="34" charset="-120"/>
               </a:rPr>
-              <a:t>Already showed that something was true.</a:t>
+              <a:t>Showed that something was true in the past.</a:t>
             </a:r>
             <a:endParaRPr lang="en-US" sz="1200" dirty="0"/>
           </a:p>
@@ -40339,7 +41404,7 @@
                 <a:ea typeface="Calibri" pitchFamily="34" charset="-122"/>
                 <a:cs typeface="Calibri" pitchFamily="34" charset="-120"/>
               </a:rPr>
-              <a:t>Word Labs  •  wordlabs.app  •  Root: 'prove' = to show something is true</a:t>
+              <a:t>Word Labs  •  wordlabs.app  •  Root: 'prove' = to test or show truth</a:t>
             </a:r>
             <a:endParaRPr lang="en-US" sz="800" dirty="0"/>
           </a:p>
@@ -40542,7 +41607,7 @@
                 <a:ea typeface="Calibri" pitchFamily="34" charset="-122"/>
                 <a:cs typeface="Calibri" pitchFamily="34" charset="-120"/>
               </a:rPr>
-              <a:t>The scientist worked hard to prove her theory was correct by doing lots of experiments.</a:t>
+              <a:t>Scientists need to improve their experiments before they can prove their theory is correct.</a:t>
             </a:r>
             <a:endParaRPr lang="en-US" sz="1500" dirty="0"/>
           </a:p>
@@ -40706,7 +41771,7 @@
                 <a:ea typeface="Calibri" pitchFamily="34" charset="-122"/>
                 <a:cs typeface="Calibri" pitchFamily="34" charset="-120"/>
               </a:rPr>
-              <a:t>After practising every day, Maya could see she was starting to improve her handwriting.</a:t>
+              <a:t>The teacher asked the student to prove her answer by showing all of her working out.</a:t>
             </a:r>
             <a:endParaRPr lang="en-US" sz="1500" dirty="0"/>
           </a:p>
@@ -40870,7 +41935,7 @@
                 <a:ea typeface="Calibri" pitchFamily="34" charset="-122"/>
                 <a:cs typeface="Calibri" pitchFamily="34" charset="-120"/>
               </a:rPr>
-              <a:t>The teacher did not approve of the students talking during the test.</a:t>
+              <a:t>The new evidence helped to disprove what everyone had believed for many years.</a:t>
             </a:r>
             <a:endParaRPr lang="en-US" sz="1500" dirty="0"/>
           </a:p>

--- a/output/wordlabs-prove-3day.pptx
+++ b/output/wordlabs-prove-3day.pptx
@@ -14382,11 +14382,11 @@
         <p:spPr>
           <a:xfrm>
             <a:off x="1874520" y="4096512"/>
-            <a:ext cx="6903720" cy="804672"/>
+            <a:ext cx="6903720" cy="658368"/>
           </a:xfrm>
           <a:prstGeom prst="rect">
             <a:avLst>
-              <a:gd name="adj" fmla="val 6818"/>
+              <a:gd name="adj" fmla="val 8333"/>
             </a:avLst>
           </a:prstGeom>
           <a:solidFill>
@@ -14408,12 +14408,12 @@
         </p:nvSpPr>
         <p:spPr>
           <a:xfrm>
-            <a:off x="2427732" y="4169664"/>
-            <a:ext cx="685800" cy="384048"/>
+            <a:off x="2124837" y="4169664"/>
+            <a:ext cx="685800" cy="475488"/>
           </a:xfrm>
           <a:prstGeom prst="rect">
             <a:avLst>
-              <a:gd name="adj" fmla="val 9524"/>
+              <a:gd name="adj" fmla="val 7692"/>
             </a:avLst>
           </a:prstGeom>
           <a:solidFill>
@@ -14435,8 +14435,8 @@
         </p:nvSpPr>
         <p:spPr>
           <a:xfrm>
-            <a:off x="2427732" y="4169664"/>
-            <a:ext cx="685800" cy="384048"/>
+            <a:off x="2124837" y="4169664"/>
+            <a:ext cx="685800" cy="475488"/>
           </a:xfrm>
           <a:prstGeom prst="rect">
             <a:avLst/>
@@ -14474,12 +14474,12 @@
         </p:nvSpPr>
         <p:spPr>
           <a:xfrm>
-            <a:off x="3639312" y="4169664"/>
-            <a:ext cx="685800" cy="384048"/>
+            <a:off x="3033522" y="4169664"/>
+            <a:ext cx="685800" cy="475488"/>
           </a:xfrm>
           <a:prstGeom prst="rect">
             <a:avLst>
-              <a:gd name="adj" fmla="val 9524"/>
+              <a:gd name="adj" fmla="val 7692"/>
             </a:avLst>
           </a:prstGeom>
           <a:solidFill>
@@ -14501,8 +14501,8 @@
         </p:nvSpPr>
         <p:spPr>
           <a:xfrm>
-            <a:off x="3639312" y="4169664"/>
-            <a:ext cx="685800" cy="384048"/>
+            <a:off x="3033522" y="4169664"/>
+            <a:ext cx="685800" cy="475488"/>
           </a:xfrm>
           <a:prstGeom prst="rect">
             <a:avLst/>
@@ -14540,12 +14540,12 @@
         </p:nvSpPr>
         <p:spPr>
           <a:xfrm>
-            <a:off x="4850892" y="4169664"/>
-            <a:ext cx="685800" cy="384048"/>
+            <a:off x="3942207" y="4169664"/>
+            <a:ext cx="685800" cy="475488"/>
           </a:xfrm>
           <a:prstGeom prst="rect">
             <a:avLst>
-              <a:gd name="adj" fmla="val 9524"/>
+              <a:gd name="adj" fmla="val 7692"/>
             </a:avLst>
           </a:prstGeom>
           <a:solidFill>
@@ -14567,8 +14567,8 @@
         </p:nvSpPr>
         <p:spPr>
           <a:xfrm>
-            <a:off x="4850892" y="4169664"/>
-            <a:ext cx="685800" cy="384048"/>
+            <a:off x="3942207" y="4169664"/>
+            <a:ext cx="685800" cy="475488"/>
           </a:xfrm>
           <a:prstGeom prst="rect">
             <a:avLst/>
@@ -14592,7 +14592,7 @@
                 <a:ea typeface="Trebuchet MS" pitchFamily="34" charset="-122"/>
                 <a:cs typeface="Trebuchet MS" pitchFamily="34" charset="-120"/>
               </a:rPr>
-              <a:t>pr</a:t>
+              <a:t>p</a:t>
             </a:r>
             <a:endParaRPr lang="en-US" sz="900" dirty="0"/>
           </a:p>
@@ -14606,12 +14606,12 @@
         </p:nvSpPr>
         <p:spPr>
           <a:xfrm>
-            <a:off x="6062472" y="4169664"/>
-            <a:ext cx="685800" cy="384048"/>
+            <a:off x="4850892" y="4169664"/>
+            <a:ext cx="685800" cy="475488"/>
           </a:xfrm>
           <a:prstGeom prst="rect">
             <a:avLst>
-              <a:gd name="adj" fmla="val 9524"/>
+              <a:gd name="adj" fmla="val 7692"/>
             </a:avLst>
           </a:prstGeom>
           <a:solidFill>
@@ -14633,8 +14633,8 @@
         </p:nvSpPr>
         <p:spPr>
           <a:xfrm>
-            <a:off x="6062472" y="4169664"/>
-            <a:ext cx="685800" cy="384048"/>
+            <a:off x="4850892" y="4169664"/>
+            <a:ext cx="685800" cy="475488"/>
           </a:xfrm>
           <a:prstGeom prst="rect">
             <a:avLst/>
@@ -14658,7 +14658,7 @@
                 <a:ea typeface="Trebuchet MS" pitchFamily="34" charset="-122"/>
                 <a:cs typeface="Trebuchet MS" pitchFamily="34" charset="-120"/>
               </a:rPr>
-              <a:t>oo</a:t>
+              <a:t>r</a:t>
             </a:r>
             <a:endParaRPr lang="en-US" sz="900" dirty="0"/>
           </a:p>
@@ -14666,57 +14666,18 @@
       </p:sp>
       <p:sp>
         <p:nvSpPr>
-          <p:cNvPr id="41" name="Text 39"/>
-          <p:cNvSpPr/>
-          <p:nvPr/>
-        </p:nvSpPr>
-        <p:spPr>
-          <a:xfrm>
-            <a:off x="6062472" y="4572000"/>
-            <a:ext cx="685800" cy="219456"/>
-          </a:xfrm>
-          <a:prstGeom prst="rect">
-            <a:avLst/>
-          </a:prstGeom>
-          <a:noFill/>
-          <a:ln/>
-        </p:spPr>
-        <p:txBody>
-          <a:bodyPr wrap="square" lIns="0" tIns="0" rIns="0" bIns="0" rtlCol="0" anchor="t"/>
-          <a:lstStyle/>
-          <a:p>
-            <a:pPr algn="ctr" indent="0" marL="0">
-              <a:buNone/>
-            </a:pPr>
-            <a:r>
-              <a:rPr lang="en-US" sz="750" i="1" dirty="0">
-                <a:solidFill>
-                  <a:srgbClr val="94A3B8"/>
-                </a:solidFill>
-                <a:latin typeface="Calibri" pitchFamily="34" charset="0"/>
-                <a:ea typeface="Calibri" pitchFamily="34" charset="-122"/>
-                <a:cs typeface="Calibri" pitchFamily="34" charset="-120"/>
-              </a:rPr>
-              <a:t>/oo/</a:t>
-            </a:r>
-            <a:endParaRPr lang="en-US" sz="750" dirty="0"/>
-          </a:p>
-        </p:txBody>
-      </p:sp>
-      <p:sp>
-        <p:nvSpPr>
-          <p:cNvPr id="42" name="Shape 40"/>
-          <p:cNvSpPr/>
-          <p:nvPr/>
-        </p:nvSpPr>
-        <p:spPr>
-          <a:xfrm>
-            <a:off x="7274052" y="4169664"/>
-            <a:ext cx="685800" cy="384048"/>
+          <p:cNvPr id="41" name="Shape 39"/>
+          <p:cNvSpPr/>
+          <p:nvPr/>
+        </p:nvSpPr>
+        <p:spPr>
+          <a:xfrm>
+            <a:off x="5759577" y="4169664"/>
+            <a:ext cx="685800" cy="475488"/>
           </a:xfrm>
           <a:prstGeom prst="rect">
             <a:avLst>
-              <a:gd name="adj" fmla="val 9524"/>
+              <a:gd name="adj" fmla="val 7692"/>
             </a:avLst>
           </a:prstGeom>
           <a:solidFill>
@@ -14732,14 +14693,14 @@
       </p:sp>
       <p:sp>
         <p:nvSpPr>
-          <p:cNvPr id="43" name="Text 41"/>
-          <p:cNvSpPr/>
-          <p:nvPr/>
-        </p:nvSpPr>
-        <p:spPr>
-          <a:xfrm>
-            <a:off x="7274052" y="4169664"/>
-            <a:ext cx="685800" cy="384048"/>
+          <p:cNvPr id="42" name="Text 40"/>
+          <p:cNvSpPr/>
+          <p:nvPr/>
+        </p:nvSpPr>
+        <p:spPr>
+          <a:xfrm>
+            <a:off x="5759577" y="4169664"/>
+            <a:ext cx="685800" cy="475488"/>
           </a:xfrm>
           <a:prstGeom prst="rect">
             <a:avLst/>
@@ -14763,7 +14724,7 @@
                 <a:ea typeface="Trebuchet MS" pitchFamily="34" charset="-122"/>
                 <a:cs typeface="Trebuchet MS" pitchFamily="34" charset="-120"/>
               </a:rPr>
-              <a:t>ve</a:t>
+              <a:t>o</a:t>
             </a:r>
             <a:endParaRPr lang="en-US" sz="900" dirty="0"/>
           </a:p>
@@ -14771,40 +14732,133 @@
       </p:sp>
       <p:sp>
         <p:nvSpPr>
+          <p:cNvPr id="43" name="Shape 41"/>
+          <p:cNvSpPr/>
+          <p:nvPr/>
+        </p:nvSpPr>
+        <p:spPr>
+          <a:xfrm>
+            <a:off x="6668262" y="4169664"/>
+            <a:ext cx="685800" cy="475488"/>
+          </a:xfrm>
+          <a:prstGeom prst="rect">
+            <a:avLst>
+              <a:gd name="adj" fmla="val 7692"/>
+            </a:avLst>
+          </a:prstGeom>
+          <a:solidFill>
+            <a:srgbClr val="FFFFFF"/>
+          </a:solidFill>
+          <a:ln w="12700">
+            <a:solidFill>
+              <a:srgbClr val="DB2777"/>
+            </a:solidFill>
+            <a:prstDash val="solid"/>
+          </a:ln>
+        </p:spPr>
+      </p:sp>
+      <p:sp>
+        <p:nvSpPr>
           <p:cNvPr id="44" name="Text 42"/>
           <p:cNvSpPr/>
           <p:nvPr/>
         </p:nvSpPr>
         <p:spPr>
           <a:xfrm>
-            <a:off x="7274052" y="4572000"/>
-            <a:ext cx="685800" cy="219456"/>
-          </a:xfrm>
-          <a:prstGeom prst="rect">
-            <a:avLst/>
-          </a:prstGeom>
-          <a:noFill/>
-          <a:ln/>
-        </p:spPr>
-        <p:txBody>
-          <a:bodyPr wrap="square" lIns="0" tIns="0" rIns="0" bIns="0" rtlCol="0" anchor="t"/>
-          <a:lstStyle/>
-          <a:p>
-            <a:pPr algn="ctr" indent="0" marL="0">
-              <a:buNone/>
-            </a:pPr>
-            <a:r>
-              <a:rPr lang="en-US" sz="750" i="1" dirty="0">
-                <a:solidFill>
-                  <a:srgbClr val="94A3B8"/>
-                </a:solidFill>
-                <a:latin typeface="Calibri" pitchFamily="34" charset="0"/>
-                <a:ea typeface="Calibri" pitchFamily="34" charset="-122"/>
-                <a:cs typeface="Calibri" pitchFamily="34" charset="-120"/>
-              </a:rPr>
-              <a:t>/v/</a:t>
-            </a:r>
-            <a:endParaRPr lang="en-US" sz="750" dirty="0"/>
+            <a:off x="6668262" y="4169664"/>
+            <a:ext cx="685800" cy="475488"/>
+          </a:xfrm>
+          <a:prstGeom prst="rect">
+            <a:avLst/>
+          </a:prstGeom>
+          <a:noFill/>
+          <a:ln/>
+        </p:spPr>
+        <p:txBody>
+          <a:bodyPr wrap="square" lIns="0" tIns="0" rIns="0" bIns="0" rtlCol="0" anchor="ctr"/>
+          <a:lstStyle/>
+          <a:p>
+            <a:pPr algn="ctr" indent="0" marL="0">
+              <a:buNone/>
+            </a:pPr>
+            <a:r>
+              <a:rPr lang="en-US" sz="900" b="1" dirty="0">
+                <a:solidFill>
+                  <a:srgbClr val="9D174D"/>
+                </a:solidFill>
+                <a:latin typeface="Trebuchet MS" pitchFamily="34" charset="0"/>
+                <a:ea typeface="Trebuchet MS" pitchFamily="34" charset="-122"/>
+                <a:cs typeface="Trebuchet MS" pitchFamily="34" charset="-120"/>
+              </a:rPr>
+              <a:t>v</a:t>
+            </a:r>
+            <a:endParaRPr lang="en-US" sz="900" dirty="0"/>
+          </a:p>
+        </p:txBody>
+      </p:sp>
+      <p:sp>
+        <p:nvSpPr>
+          <p:cNvPr id="45" name="Shape 43"/>
+          <p:cNvSpPr/>
+          <p:nvPr/>
+        </p:nvSpPr>
+        <p:spPr>
+          <a:xfrm>
+            <a:off x="7576947" y="4169664"/>
+            <a:ext cx="685800" cy="475488"/>
+          </a:xfrm>
+          <a:prstGeom prst="rect">
+            <a:avLst>
+              <a:gd name="adj" fmla="val 7692"/>
+            </a:avLst>
+          </a:prstGeom>
+          <a:solidFill>
+            <a:srgbClr val="FFFFFF"/>
+          </a:solidFill>
+          <a:ln w="12700">
+            <a:solidFill>
+              <a:srgbClr val="DB2777"/>
+            </a:solidFill>
+            <a:prstDash val="solid"/>
+          </a:ln>
+        </p:spPr>
+      </p:sp>
+      <p:sp>
+        <p:nvSpPr>
+          <p:cNvPr id="46" name="Text 44"/>
+          <p:cNvSpPr/>
+          <p:nvPr/>
+        </p:nvSpPr>
+        <p:spPr>
+          <a:xfrm>
+            <a:off x="7576947" y="4169664"/>
+            <a:ext cx="685800" cy="475488"/>
+          </a:xfrm>
+          <a:prstGeom prst="rect">
+            <a:avLst/>
+          </a:prstGeom>
+          <a:noFill/>
+          <a:ln/>
+        </p:spPr>
+        <p:txBody>
+          <a:bodyPr wrap="square" lIns="0" tIns="0" rIns="0" bIns="0" rtlCol="0" anchor="ctr"/>
+          <a:lstStyle/>
+          <a:p>
+            <a:pPr algn="ctr" indent="0" marL="0">
+              <a:buNone/>
+            </a:pPr>
+            <a:r>
+              <a:rPr lang="en-US" sz="900" b="1" dirty="0">
+                <a:solidFill>
+                  <a:srgbClr val="9D174D"/>
+                </a:solidFill>
+                <a:latin typeface="Trebuchet MS" pitchFamily="34" charset="0"/>
+                <a:ea typeface="Trebuchet MS" pitchFamily="34" charset="-122"/>
+                <a:cs typeface="Trebuchet MS" pitchFamily="34" charset="-120"/>
+              </a:rPr>
+              <a:t>e</a:t>
+            </a:r>
+            <a:endParaRPr lang="en-US" sz="900" dirty="0"/>
           </a:p>
         </p:txBody>
       </p:sp>
@@ -21236,11 +21290,11 @@
         <p:spPr>
           <a:xfrm>
             <a:off x="1874520" y="4096512"/>
-            <a:ext cx="6903720" cy="804672"/>
+            <a:ext cx="6903720" cy="658368"/>
           </a:xfrm>
           <a:prstGeom prst="rect">
             <a:avLst>
-              <a:gd name="adj" fmla="val 6818"/>
+              <a:gd name="adj" fmla="val 8333"/>
             </a:avLst>
           </a:prstGeom>
           <a:solidFill>
@@ -21262,12 +21316,12 @@
         </p:nvSpPr>
         <p:spPr>
           <a:xfrm>
-            <a:off x="2254649" y="4169664"/>
-            <a:ext cx="685800" cy="384048"/>
+            <a:off x="2124837" y="4169664"/>
+            <a:ext cx="685800" cy="475488"/>
           </a:xfrm>
           <a:prstGeom prst="rect">
             <a:avLst>
-              <a:gd name="adj" fmla="val 9524"/>
+              <a:gd name="adj" fmla="val 7692"/>
             </a:avLst>
           </a:prstGeom>
           <a:solidFill>
@@ -21289,8 +21343,8 @@
         </p:nvSpPr>
         <p:spPr>
           <a:xfrm>
-            <a:off x="2254649" y="4169664"/>
-            <a:ext cx="685800" cy="384048"/>
+            <a:off x="2124837" y="4169664"/>
+            <a:ext cx="685800" cy="475488"/>
           </a:xfrm>
           <a:prstGeom prst="rect">
             <a:avLst/>
@@ -21328,12 +21382,12 @@
         </p:nvSpPr>
         <p:spPr>
           <a:xfrm>
-            <a:off x="3293146" y="4169664"/>
-            <a:ext cx="685800" cy="384048"/>
+            <a:off x="3033522" y="4169664"/>
+            <a:ext cx="685800" cy="475488"/>
           </a:xfrm>
           <a:prstGeom prst="rect">
             <a:avLst>
-              <a:gd name="adj" fmla="val 9524"/>
+              <a:gd name="adj" fmla="val 7692"/>
             </a:avLst>
           </a:prstGeom>
           <a:solidFill>
@@ -21355,8 +21409,8 @@
         </p:nvSpPr>
         <p:spPr>
           <a:xfrm>
-            <a:off x="3293146" y="4169664"/>
-            <a:ext cx="685800" cy="384048"/>
+            <a:off x="3033522" y="4169664"/>
+            <a:ext cx="685800" cy="475488"/>
           </a:xfrm>
           <a:prstGeom prst="rect">
             <a:avLst/>
@@ -21388,57 +21442,18 @@
       </p:sp>
       <p:sp>
         <p:nvSpPr>
-          <p:cNvPr id="42" name="Text 40"/>
-          <p:cNvSpPr/>
-          <p:nvPr/>
-        </p:nvSpPr>
-        <p:spPr>
-          <a:xfrm>
-            <a:off x="3293146" y="4572000"/>
-            <a:ext cx="685800" cy="219456"/>
-          </a:xfrm>
-          <a:prstGeom prst="rect">
-            <a:avLst/>
-          </a:prstGeom>
-          <a:noFill/>
-          <a:ln/>
-        </p:spPr>
-        <p:txBody>
-          <a:bodyPr wrap="square" lIns="0" tIns="0" rIns="0" bIns="0" rtlCol="0" anchor="t"/>
-          <a:lstStyle/>
-          <a:p>
-            <a:pPr algn="ctr" indent="0" marL="0">
-              <a:buNone/>
-            </a:pPr>
-            <a:r>
-              <a:rPr lang="en-US" sz="750" i="1" dirty="0">
-                <a:solidFill>
-                  <a:srgbClr val="94A3B8"/>
-                </a:solidFill>
-                <a:latin typeface="Calibri" pitchFamily="34" charset="0"/>
-                <a:ea typeface="Calibri" pitchFamily="34" charset="-122"/>
-                <a:cs typeface="Calibri" pitchFamily="34" charset="-120"/>
-              </a:rPr>
-              <a:t>/p/</a:t>
-            </a:r>
-            <a:endParaRPr lang="en-US" sz="750" dirty="0"/>
-          </a:p>
-        </p:txBody>
-      </p:sp>
-      <p:sp>
-        <p:nvSpPr>
-          <p:cNvPr id="43" name="Shape 41"/>
-          <p:cNvSpPr/>
-          <p:nvPr/>
-        </p:nvSpPr>
-        <p:spPr>
-          <a:xfrm>
-            <a:off x="4331643" y="4169664"/>
-            <a:ext cx="685800" cy="384048"/>
+          <p:cNvPr id="42" name="Shape 40"/>
+          <p:cNvSpPr/>
+          <p:nvPr/>
+        </p:nvSpPr>
+        <p:spPr>
+          <a:xfrm>
+            <a:off x="3942207" y="4169664"/>
+            <a:ext cx="685800" cy="475488"/>
           </a:xfrm>
           <a:prstGeom prst="rect">
             <a:avLst>
-              <a:gd name="adj" fmla="val 9524"/>
+              <a:gd name="adj" fmla="val 7692"/>
             </a:avLst>
           </a:prstGeom>
           <a:solidFill>
@@ -21454,14 +21469,14 @@
       </p:sp>
       <p:sp>
         <p:nvSpPr>
-          <p:cNvPr id="44" name="Text 42"/>
-          <p:cNvSpPr/>
-          <p:nvPr/>
-        </p:nvSpPr>
-        <p:spPr>
-          <a:xfrm>
-            <a:off x="4331643" y="4169664"/>
-            <a:ext cx="685800" cy="384048"/>
+          <p:cNvPr id="43" name="Text 41"/>
+          <p:cNvSpPr/>
+          <p:nvPr/>
+        </p:nvSpPr>
+        <p:spPr>
+          <a:xfrm>
+            <a:off x="3942207" y="4169664"/>
+            <a:ext cx="685800" cy="475488"/>
           </a:xfrm>
           <a:prstGeom prst="rect">
             <a:avLst/>
@@ -21493,18 +21508,18 @@
       </p:sp>
       <p:sp>
         <p:nvSpPr>
-          <p:cNvPr id="45" name="Shape 43"/>
-          <p:cNvSpPr/>
-          <p:nvPr/>
-        </p:nvSpPr>
-        <p:spPr>
-          <a:xfrm>
-            <a:off x="5370141" y="4169664"/>
-            <a:ext cx="685800" cy="384048"/>
+          <p:cNvPr id="44" name="Shape 42"/>
+          <p:cNvSpPr/>
+          <p:nvPr/>
+        </p:nvSpPr>
+        <p:spPr>
+          <a:xfrm>
+            <a:off x="4850892" y="4169664"/>
+            <a:ext cx="685800" cy="475488"/>
           </a:xfrm>
           <a:prstGeom prst="rect">
             <a:avLst>
-              <a:gd name="adj" fmla="val 9524"/>
+              <a:gd name="adj" fmla="val 7692"/>
             </a:avLst>
           </a:prstGeom>
           <a:solidFill>
@@ -21520,14 +21535,14 @@
       </p:sp>
       <p:sp>
         <p:nvSpPr>
-          <p:cNvPr id="46" name="Text 44"/>
-          <p:cNvSpPr/>
-          <p:nvPr/>
-        </p:nvSpPr>
-        <p:spPr>
-          <a:xfrm>
-            <a:off x="5370141" y="4169664"/>
-            <a:ext cx="685800" cy="384048"/>
+          <p:cNvPr id="45" name="Text 43"/>
+          <p:cNvSpPr/>
+          <p:nvPr/>
+        </p:nvSpPr>
+        <p:spPr>
+          <a:xfrm>
+            <a:off x="4850892" y="4169664"/>
+            <a:ext cx="685800" cy="475488"/>
           </a:xfrm>
           <a:prstGeom prst="rect">
             <a:avLst/>
@@ -21551,7 +21566,7 @@
                 <a:ea typeface="Trebuchet MS" pitchFamily="34" charset="-122"/>
                 <a:cs typeface="Trebuchet MS" pitchFamily="34" charset="-120"/>
               </a:rPr>
-              <a:t>oo</a:t>
+              <a:t>o</a:t>
             </a:r>
             <a:endParaRPr lang="en-US" sz="900" dirty="0"/>
           </a:p>
@@ -21559,80 +21574,41 @@
       </p:sp>
       <p:sp>
         <p:nvSpPr>
+          <p:cNvPr id="46" name="Shape 44"/>
+          <p:cNvSpPr/>
+          <p:nvPr/>
+        </p:nvSpPr>
+        <p:spPr>
+          <a:xfrm>
+            <a:off x="5759577" y="4169664"/>
+            <a:ext cx="685800" cy="475488"/>
+          </a:xfrm>
+          <a:prstGeom prst="rect">
+            <a:avLst>
+              <a:gd name="adj" fmla="val 7692"/>
+            </a:avLst>
+          </a:prstGeom>
+          <a:solidFill>
+            <a:srgbClr val="FFFFFF"/>
+          </a:solidFill>
+          <a:ln w="12700">
+            <a:solidFill>
+              <a:srgbClr val="DB2777"/>
+            </a:solidFill>
+            <a:prstDash val="solid"/>
+          </a:ln>
+        </p:spPr>
+      </p:sp>
+      <p:sp>
+        <p:nvSpPr>
           <p:cNvPr id="47" name="Text 45"/>
           <p:cNvSpPr/>
           <p:nvPr/>
         </p:nvSpPr>
         <p:spPr>
           <a:xfrm>
-            <a:off x="5370141" y="4572000"/>
-            <a:ext cx="685800" cy="219456"/>
-          </a:xfrm>
-          <a:prstGeom prst="rect">
-            <a:avLst/>
-          </a:prstGeom>
-          <a:noFill/>
-          <a:ln/>
-        </p:spPr>
-        <p:txBody>
-          <a:bodyPr wrap="square" lIns="0" tIns="0" rIns="0" bIns="0" rtlCol="0" anchor="t"/>
-          <a:lstStyle/>
-          <a:p>
-            <a:pPr algn="ctr" indent="0" marL="0">
-              <a:buNone/>
-            </a:pPr>
-            <a:r>
-              <a:rPr lang="en-US" sz="750" i="1" dirty="0">
-                <a:solidFill>
-                  <a:srgbClr val="94A3B8"/>
-                </a:solidFill>
-                <a:latin typeface="Calibri" pitchFamily="34" charset="0"/>
-                <a:ea typeface="Calibri" pitchFamily="34" charset="-122"/>
-                <a:cs typeface="Calibri" pitchFamily="34" charset="-120"/>
-              </a:rPr>
-              <a:t>/oo/</a:t>
-            </a:r>
-            <a:endParaRPr lang="en-US" sz="750" dirty="0"/>
-          </a:p>
-        </p:txBody>
-      </p:sp>
-      <p:sp>
-        <p:nvSpPr>
-          <p:cNvPr id="48" name="Shape 46"/>
-          <p:cNvSpPr/>
-          <p:nvPr/>
-        </p:nvSpPr>
-        <p:spPr>
-          <a:xfrm>
-            <a:off x="6408638" y="4169664"/>
-            <a:ext cx="685800" cy="384048"/>
-          </a:xfrm>
-          <a:prstGeom prst="rect">
-            <a:avLst>
-              <a:gd name="adj" fmla="val 9524"/>
-            </a:avLst>
-          </a:prstGeom>
-          <a:solidFill>
-            <a:srgbClr val="FFFFFF"/>
-          </a:solidFill>
-          <a:ln w="12700">
-            <a:solidFill>
-              <a:srgbClr val="DB2777"/>
-            </a:solidFill>
-            <a:prstDash val="solid"/>
-          </a:ln>
-        </p:spPr>
-      </p:sp>
-      <p:sp>
-        <p:nvSpPr>
-          <p:cNvPr id="49" name="Text 47"/>
-          <p:cNvSpPr/>
-          <p:nvPr/>
-        </p:nvSpPr>
-        <p:spPr>
-          <a:xfrm>
-            <a:off x="6408638" y="4169664"/>
-            <a:ext cx="685800" cy="384048"/>
+            <a:off x="5759577" y="4169664"/>
+            <a:ext cx="685800" cy="475488"/>
           </a:xfrm>
           <a:prstGeom prst="rect">
             <a:avLst/>
@@ -21656,7 +21632,7 @@
                 <a:ea typeface="Trebuchet MS" pitchFamily="34" charset="-122"/>
                 <a:cs typeface="Trebuchet MS" pitchFamily="34" charset="-120"/>
               </a:rPr>
-              <a:t>ve</a:t>
+              <a:t>v</a:t>
             </a:r>
             <a:endParaRPr lang="en-US" sz="900" dirty="0"/>
           </a:p>
@@ -21664,57 +21640,18 @@
       </p:sp>
       <p:sp>
         <p:nvSpPr>
-          <p:cNvPr id="50" name="Text 48"/>
-          <p:cNvSpPr/>
-          <p:nvPr/>
-        </p:nvSpPr>
-        <p:spPr>
-          <a:xfrm>
-            <a:off x="6408638" y="4572000"/>
-            <a:ext cx="685800" cy="219456"/>
-          </a:xfrm>
-          <a:prstGeom prst="rect">
-            <a:avLst/>
-          </a:prstGeom>
-          <a:noFill/>
-          <a:ln/>
-        </p:spPr>
-        <p:txBody>
-          <a:bodyPr wrap="square" lIns="0" tIns="0" rIns="0" bIns="0" rtlCol="0" anchor="t"/>
-          <a:lstStyle/>
-          <a:p>
-            <a:pPr algn="ctr" indent="0" marL="0">
-              <a:buNone/>
-            </a:pPr>
-            <a:r>
-              <a:rPr lang="en-US" sz="750" i="1" dirty="0">
-                <a:solidFill>
-                  <a:srgbClr val="94A3B8"/>
-                </a:solidFill>
-                <a:latin typeface="Calibri" pitchFamily="34" charset="0"/>
-                <a:ea typeface="Calibri" pitchFamily="34" charset="-122"/>
-                <a:cs typeface="Calibri" pitchFamily="34" charset="-120"/>
-              </a:rPr>
-              <a:t>/v/</a:t>
-            </a:r>
-            <a:endParaRPr lang="en-US" sz="750" dirty="0"/>
-          </a:p>
-        </p:txBody>
-      </p:sp>
-      <p:sp>
-        <p:nvSpPr>
-          <p:cNvPr id="51" name="Shape 49"/>
-          <p:cNvSpPr/>
-          <p:nvPr/>
-        </p:nvSpPr>
-        <p:spPr>
-          <a:xfrm>
-            <a:off x="7447135" y="4169664"/>
-            <a:ext cx="685800" cy="384048"/>
+          <p:cNvPr id="48" name="Shape 46"/>
+          <p:cNvSpPr/>
+          <p:nvPr/>
+        </p:nvSpPr>
+        <p:spPr>
+          <a:xfrm>
+            <a:off x="6668262" y="4169664"/>
+            <a:ext cx="685800" cy="475488"/>
           </a:xfrm>
           <a:prstGeom prst="rect">
             <a:avLst>
-              <a:gd name="adj" fmla="val 9524"/>
+              <a:gd name="adj" fmla="val 7692"/>
             </a:avLst>
           </a:prstGeom>
           <a:solidFill>
@@ -21730,14 +21667,80 @@
       </p:sp>
       <p:sp>
         <p:nvSpPr>
-          <p:cNvPr id="52" name="Text 50"/>
-          <p:cNvSpPr/>
-          <p:nvPr/>
-        </p:nvSpPr>
-        <p:spPr>
-          <a:xfrm>
-            <a:off x="7447135" y="4169664"/>
-            <a:ext cx="685800" cy="384048"/>
+          <p:cNvPr id="49" name="Text 47"/>
+          <p:cNvSpPr/>
+          <p:nvPr/>
+        </p:nvSpPr>
+        <p:spPr>
+          <a:xfrm>
+            <a:off x="6668262" y="4169664"/>
+            <a:ext cx="685800" cy="475488"/>
+          </a:xfrm>
+          <a:prstGeom prst="rect">
+            <a:avLst/>
+          </a:prstGeom>
+          <a:noFill/>
+          <a:ln/>
+        </p:spPr>
+        <p:txBody>
+          <a:bodyPr wrap="square" lIns="0" tIns="0" rIns="0" bIns="0" rtlCol="0" anchor="ctr"/>
+          <a:lstStyle/>
+          <a:p>
+            <a:pPr algn="ctr" indent="0" marL="0">
+              <a:buNone/>
+            </a:pPr>
+            <a:r>
+              <a:rPr lang="en-US" sz="900" b="1" dirty="0">
+                <a:solidFill>
+                  <a:srgbClr val="9D174D"/>
+                </a:solidFill>
+                <a:latin typeface="Trebuchet MS" pitchFamily="34" charset="0"/>
+                <a:ea typeface="Trebuchet MS" pitchFamily="34" charset="-122"/>
+                <a:cs typeface="Trebuchet MS" pitchFamily="34" charset="-120"/>
+              </a:rPr>
+              <a:t>e</a:t>
+            </a:r>
+            <a:endParaRPr lang="en-US" sz="900" dirty="0"/>
+          </a:p>
+        </p:txBody>
+      </p:sp>
+      <p:sp>
+        <p:nvSpPr>
+          <p:cNvPr id="50" name="Shape 48"/>
+          <p:cNvSpPr/>
+          <p:nvPr/>
+        </p:nvSpPr>
+        <p:spPr>
+          <a:xfrm>
+            <a:off x="7576947" y="4169664"/>
+            <a:ext cx="685800" cy="475488"/>
+          </a:xfrm>
+          <a:prstGeom prst="rect">
+            <a:avLst>
+              <a:gd name="adj" fmla="val 7692"/>
+            </a:avLst>
+          </a:prstGeom>
+          <a:solidFill>
+            <a:srgbClr val="FFFFFF"/>
+          </a:solidFill>
+          <a:ln w="12700">
+            <a:solidFill>
+              <a:srgbClr val="DB2777"/>
+            </a:solidFill>
+            <a:prstDash val="solid"/>
+          </a:ln>
+        </p:spPr>
+      </p:sp>
+      <p:sp>
+        <p:nvSpPr>
+          <p:cNvPr id="51" name="Text 49"/>
+          <p:cNvSpPr/>
+          <p:nvPr/>
+        </p:nvSpPr>
+        <p:spPr>
+          <a:xfrm>
+            <a:off x="7576947" y="4169664"/>
+            <a:ext cx="685800" cy="475488"/>
           </a:xfrm>
           <a:prstGeom prst="rect">
             <a:avLst/>
@@ -27021,11 +27024,11 @@
         <p:spPr>
           <a:xfrm>
             <a:off x="1874520" y="4096512"/>
-            <a:ext cx="6903720" cy="804672"/>
+            <a:ext cx="6903720" cy="658368"/>
           </a:xfrm>
           <a:prstGeom prst="rect">
             <a:avLst>
-              <a:gd name="adj" fmla="val 6818"/>
+              <a:gd name="adj" fmla="val 8333"/>
             </a:avLst>
           </a:prstGeom>
           <a:solidFill>
@@ -27047,12 +27050,12 @@
         </p:nvSpPr>
         <p:spPr>
           <a:xfrm>
-            <a:off x="1951330" y="4169664"/>
-            <a:ext cx="676656" cy="384048"/>
+            <a:off x="1952244" y="4169664"/>
+            <a:ext cx="543652" cy="475488"/>
           </a:xfrm>
           <a:prstGeom prst="rect">
             <a:avLst>
-              <a:gd name="adj" fmla="val 9524"/>
+              <a:gd name="adj" fmla="val 7692"/>
             </a:avLst>
           </a:prstGeom>
           <a:solidFill>
@@ -27074,8 +27077,8 @@
         </p:nvSpPr>
         <p:spPr>
           <a:xfrm>
-            <a:off x="1951330" y="4169664"/>
-            <a:ext cx="676656" cy="384048"/>
+            <a:off x="1952244" y="4169664"/>
+            <a:ext cx="543652" cy="475488"/>
           </a:xfrm>
           <a:prstGeom prst="rect">
             <a:avLst/>
@@ -27113,12 +27116,12 @@
         </p:nvSpPr>
         <p:spPr>
           <a:xfrm>
-            <a:off x="2677363" y="4169664"/>
-            <a:ext cx="676656" cy="384048"/>
+            <a:off x="2546188" y="4169664"/>
+            <a:ext cx="543652" cy="475488"/>
           </a:xfrm>
           <a:prstGeom prst="rect">
             <a:avLst>
-              <a:gd name="adj" fmla="val 9524"/>
+              <a:gd name="adj" fmla="val 7692"/>
             </a:avLst>
           </a:prstGeom>
           <a:solidFill>
@@ -27140,8 +27143,8 @@
         </p:nvSpPr>
         <p:spPr>
           <a:xfrm>
-            <a:off x="2677363" y="4169664"/>
-            <a:ext cx="676656" cy="384048"/>
+            <a:off x="2546188" y="4169664"/>
+            <a:ext cx="543652" cy="475488"/>
           </a:xfrm>
           <a:prstGeom prst="rect">
             <a:avLst/>
@@ -27179,12 +27182,12 @@
         </p:nvSpPr>
         <p:spPr>
           <a:xfrm>
-            <a:off x="3403397" y="4169664"/>
-            <a:ext cx="676656" cy="384048"/>
+            <a:off x="3140133" y="4169664"/>
+            <a:ext cx="543652" cy="475488"/>
           </a:xfrm>
           <a:prstGeom prst="rect">
             <a:avLst>
-              <a:gd name="adj" fmla="val 9524"/>
+              <a:gd name="adj" fmla="val 7692"/>
             </a:avLst>
           </a:prstGeom>
           <a:solidFill>
@@ -27206,8 +27209,8 @@
         </p:nvSpPr>
         <p:spPr>
           <a:xfrm>
-            <a:off x="3403397" y="4169664"/>
-            <a:ext cx="676656" cy="384048"/>
+            <a:off x="3140133" y="4169664"/>
+            <a:ext cx="543652" cy="475488"/>
           </a:xfrm>
           <a:prstGeom prst="rect">
             <a:avLst/>
@@ -27231,7 +27234,7 @@
                 <a:ea typeface="Trebuchet MS" pitchFamily="34" charset="-122"/>
                 <a:cs typeface="Trebuchet MS" pitchFamily="34" charset="-120"/>
               </a:rPr>
-              <a:t>pr</a:t>
+              <a:t>p</a:t>
             </a:r>
             <a:endParaRPr lang="en-US" sz="900" dirty="0"/>
           </a:p>
@@ -27245,12 +27248,12 @@
         </p:nvSpPr>
         <p:spPr>
           <a:xfrm>
-            <a:off x="4129430" y="4169664"/>
-            <a:ext cx="676656" cy="384048"/>
+            <a:off x="3734077" y="4169664"/>
+            <a:ext cx="543652" cy="475488"/>
           </a:xfrm>
           <a:prstGeom prst="rect">
             <a:avLst>
-              <a:gd name="adj" fmla="val 9524"/>
+              <a:gd name="adj" fmla="val 7692"/>
             </a:avLst>
           </a:prstGeom>
           <a:solidFill>
@@ -27272,8 +27275,8 @@
         </p:nvSpPr>
         <p:spPr>
           <a:xfrm>
-            <a:off x="4129430" y="4169664"/>
-            <a:ext cx="676656" cy="384048"/>
+            <a:off x="3734077" y="4169664"/>
+            <a:ext cx="543652" cy="475488"/>
           </a:xfrm>
           <a:prstGeom prst="rect">
             <a:avLst/>
@@ -27297,7 +27300,7 @@
                 <a:ea typeface="Trebuchet MS" pitchFamily="34" charset="-122"/>
                 <a:cs typeface="Trebuchet MS" pitchFamily="34" charset="-120"/>
               </a:rPr>
-              <a:t>oo</a:t>
+              <a:t>r</a:t>
             </a:r>
             <a:endParaRPr lang="en-US" sz="900" dirty="0"/>
           </a:p>
@@ -27305,57 +27308,18 @@
       </p:sp>
       <p:sp>
         <p:nvSpPr>
-          <p:cNvPr id="47" name="Text 45"/>
-          <p:cNvSpPr/>
-          <p:nvPr/>
-        </p:nvSpPr>
-        <p:spPr>
-          <a:xfrm>
-            <a:off x="4129430" y="4572000"/>
-            <a:ext cx="676656" cy="219456"/>
-          </a:xfrm>
-          <a:prstGeom prst="rect">
-            <a:avLst/>
-          </a:prstGeom>
-          <a:noFill/>
-          <a:ln/>
-        </p:spPr>
-        <p:txBody>
-          <a:bodyPr wrap="square" lIns="0" tIns="0" rIns="0" bIns="0" rtlCol="0" anchor="t"/>
-          <a:lstStyle/>
-          <a:p>
-            <a:pPr algn="ctr" indent="0" marL="0">
-              <a:buNone/>
-            </a:pPr>
-            <a:r>
-              <a:rPr lang="en-US" sz="750" i="1" dirty="0">
-                <a:solidFill>
-                  <a:srgbClr val="94A3B8"/>
-                </a:solidFill>
-                <a:latin typeface="Calibri" pitchFamily="34" charset="0"/>
-                <a:ea typeface="Calibri" pitchFamily="34" charset="-122"/>
-                <a:cs typeface="Calibri" pitchFamily="34" charset="-120"/>
-              </a:rPr>
-              <a:t>/oo/</a:t>
-            </a:r>
-            <a:endParaRPr lang="en-US" sz="750" dirty="0"/>
-          </a:p>
-        </p:txBody>
-      </p:sp>
-      <p:sp>
-        <p:nvSpPr>
-          <p:cNvPr id="48" name="Shape 46"/>
-          <p:cNvSpPr/>
-          <p:nvPr/>
-        </p:nvSpPr>
-        <p:spPr>
-          <a:xfrm>
-            <a:off x="4855464" y="4169664"/>
-            <a:ext cx="676656" cy="384048"/>
+          <p:cNvPr id="47" name="Shape 45"/>
+          <p:cNvSpPr/>
+          <p:nvPr/>
+        </p:nvSpPr>
+        <p:spPr>
+          <a:xfrm>
+            <a:off x="4328021" y="4169664"/>
+            <a:ext cx="543652" cy="475488"/>
           </a:xfrm>
           <a:prstGeom prst="rect">
             <a:avLst>
-              <a:gd name="adj" fmla="val 9524"/>
+              <a:gd name="adj" fmla="val 7692"/>
             </a:avLst>
           </a:prstGeom>
           <a:solidFill>
@@ -27371,14 +27335,14 @@
       </p:sp>
       <p:sp>
         <p:nvSpPr>
-          <p:cNvPr id="49" name="Text 47"/>
-          <p:cNvSpPr/>
-          <p:nvPr/>
-        </p:nvSpPr>
-        <p:spPr>
-          <a:xfrm>
-            <a:off x="4855464" y="4169664"/>
-            <a:ext cx="676656" cy="384048"/>
+          <p:cNvPr id="48" name="Text 46"/>
+          <p:cNvSpPr/>
+          <p:nvPr/>
+        </p:nvSpPr>
+        <p:spPr>
+          <a:xfrm>
+            <a:off x="4328021" y="4169664"/>
+            <a:ext cx="543652" cy="475488"/>
           </a:xfrm>
           <a:prstGeom prst="rect">
             <a:avLst/>
@@ -27402,7 +27366,7 @@
                 <a:ea typeface="Trebuchet MS" pitchFamily="34" charset="-122"/>
                 <a:cs typeface="Trebuchet MS" pitchFamily="34" charset="-120"/>
               </a:rPr>
-              <a:t>ve</a:t>
+              <a:t>o</a:t>
             </a:r>
             <a:endParaRPr lang="en-US" sz="900" dirty="0"/>
           </a:p>
@@ -27410,80 +27374,41 @@
       </p:sp>
       <p:sp>
         <p:nvSpPr>
+          <p:cNvPr id="49" name="Shape 47"/>
+          <p:cNvSpPr/>
+          <p:nvPr/>
+        </p:nvSpPr>
+        <p:spPr>
+          <a:xfrm>
+            <a:off x="4921966" y="4169664"/>
+            <a:ext cx="543652" cy="475488"/>
+          </a:xfrm>
+          <a:prstGeom prst="rect">
+            <a:avLst>
+              <a:gd name="adj" fmla="val 7692"/>
+            </a:avLst>
+          </a:prstGeom>
+          <a:solidFill>
+            <a:srgbClr val="FFFFFF"/>
+          </a:solidFill>
+          <a:ln w="12700">
+            <a:solidFill>
+              <a:srgbClr val="DB2777"/>
+            </a:solidFill>
+            <a:prstDash val="solid"/>
+          </a:ln>
+        </p:spPr>
+      </p:sp>
+      <p:sp>
+        <p:nvSpPr>
           <p:cNvPr id="50" name="Text 48"/>
           <p:cNvSpPr/>
           <p:nvPr/>
         </p:nvSpPr>
         <p:spPr>
           <a:xfrm>
-            <a:off x="4855464" y="4572000"/>
-            <a:ext cx="676656" cy="219456"/>
-          </a:xfrm>
-          <a:prstGeom prst="rect">
-            <a:avLst/>
-          </a:prstGeom>
-          <a:noFill/>
-          <a:ln/>
-        </p:spPr>
-        <p:txBody>
-          <a:bodyPr wrap="square" lIns="0" tIns="0" rIns="0" bIns="0" rtlCol="0" anchor="t"/>
-          <a:lstStyle/>
-          <a:p>
-            <a:pPr algn="ctr" indent="0" marL="0">
-              <a:buNone/>
-            </a:pPr>
-            <a:r>
-              <a:rPr lang="en-US" sz="750" i="1" dirty="0">
-                <a:solidFill>
-                  <a:srgbClr val="94A3B8"/>
-                </a:solidFill>
-                <a:latin typeface="Calibri" pitchFamily="34" charset="0"/>
-                <a:ea typeface="Calibri" pitchFamily="34" charset="-122"/>
-                <a:cs typeface="Calibri" pitchFamily="34" charset="-120"/>
-              </a:rPr>
-              <a:t>/v/</a:t>
-            </a:r>
-            <a:endParaRPr lang="en-US" sz="750" dirty="0"/>
-          </a:p>
-        </p:txBody>
-      </p:sp>
-      <p:sp>
-        <p:nvSpPr>
-          <p:cNvPr id="51" name="Shape 49"/>
-          <p:cNvSpPr/>
-          <p:nvPr/>
-        </p:nvSpPr>
-        <p:spPr>
-          <a:xfrm>
-            <a:off x="5581498" y="4169664"/>
-            <a:ext cx="676656" cy="384048"/>
-          </a:xfrm>
-          <a:prstGeom prst="rect">
-            <a:avLst>
-              <a:gd name="adj" fmla="val 9524"/>
-            </a:avLst>
-          </a:prstGeom>
-          <a:solidFill>
-            <a:srgbClr val="FFFFFF"/>
-          </a:solidFill>
-          <a:ln w="12700">
-            <a:solidFill>
-              <a:srgbClr val="DB2777"/>
-            </a:solidFill>
-            <a:prstDash val="solid"/>
-          </a:ln>
-        </p:spPr>
-      </p:sp>
-      <p:sp>
-        <p:nvSpPr>
-          <p:cNvPr id="52" name="Text 50"/>
-          <p:cNvSpPr/>
-          <p:nvPr/>
-        </p:nvSpPr>
-        <p:spPr>
-          <a:xfrm>
-            <a:off x="5581498" y="4169664"/>
-            <a:ext cx="676656" cy="384048"/>
+            <a:off x="4921966" y="4169664"/>
+            <a:ext cx="543652" cy="475488"/>
           </a:xfrm>
           <a:prstGeom prst="rect">
             <a:avLst/>
@@ -27507,7 +27432,7 @@
                 <a:ea typeface="Trebuchet MS" pitchFamily="34" charset="-122"/>
                 <a:cs typeface="Trebuchet MS" pitchFamily="34" charset="-120"/>
               </a:rPr>
-              <a:t>m</a:t>
+              <a:t>v</a:t>
             </a:r>
             <a:endParaRPr lang="en-US" sz="900" dirty="0"/>
           </a:p>
@@ -27515,18 +27440,18 @@
       </p:sp>
       <p:sp>
         <p:nvSpPr>
-          <p:cNvPr id="53" name="Shape 51"/>
-          <p:cNvSpPr/>
-          <p:nvPr/>
-        </p:nvSpPr>
-        <p:spPr>
-          <a:xfrm>
-            <a:off x="6307531" y="4169664"/>
-            <a:ext cx="676656" cy="384048"/>
+          <p:cNvPr id="51" name="Shape 49"/>
+          <p:cNvSpPr/>
+          <p:nvPr/>
+        </p:nvSpPr>
+        <p:spPr>
+          <a:xfrm>
+            <a:off x="5515910" y="4169664"/>
+            <a:ext cx="543652" cy="475488"/>
           </a:xfrm>
           <a:prstGeom prst="rect">
             <a:avLst>
-              <a:gd name="adj" fmla="val 9524"/>
+              <a:gd name="adj" fmla="val 7692"/>
             </a:avLst>
           </a:prstGeom>
           <a:solidFill>
@@ -27542,14 +27467,14 @@
       </p:sp>
       <p:sp>
         <p:nvSpPr>
-          <p:cNvPr id="54" name="Text 52"/>
-          <p:cNvSpPr/>
-          <p:nvPr/>
-        </p:nvSpPr>
-        <p:spPr>
-          <a:xfrm>
-            <a:off x="6307531" y="4169664"/>
-            <a:ext cx="676656" cy="384048"/>
+          <p:cNvPr id="52" name="Text 50"/>
+          <p:cNvSpPr/>
+          <p:nvPr/>
+        </p:nvSpPr>
+        <p:spPr>
+          <a:xfrm>
+            <a:off x="5515910" y="4169664"/>
+            <a:ext cx="543652" cy="475488"/>
           </a:xfrm>
           <a:prstGeom prst="rect">
             <a:avLst/>
@@ -27581,18 +27506,18 @@
       </p:sp>
       <p:sp>
         <p:nvSpPr>
-          <p:cNvPr id="55" name="Shape 53"/>
-          <p:cNvSpPr/>
-          <p:nvPr/>
-        </p:nvSpPr>
-        <p:spPr>
-          <a:xfrm>
-            <a:off x="7033565" y="4169664"/>
-            <a:ext cx="676656" cy="384048"/>
+          <p:cNvPr id="53" name="Shape 51"/>
+          <p:cNvSpPr/>
+          <p:nvPr/>
+        </p:nvSpPr>
+        <p:spPr>
+          <a:xfrm>
+            <a:off x="6109855" y="4169664"/>
+            <a:ext cx="543652" cy="475488"/>
           </a:xfrm>
           <a:prstGeom prst="rect">
             <a:avLst>
-              <a:gd name="adj" fmla="val 9524"/>
+              <a:gd name="adj" fmla="val 7692"/>
             </a:avLst>
           </a:prstGeom>
           <a:solidFill>
@@ -27608,14 +27533,14 @@
       </p:sp>
       <p:sp>
         <p:nvSpPr>
-          <p:cNvPr id="56" name="Text 54"/>
-          <p:cNvSpPr/>
-          <p:nvPr/>
-        </p:nvSpPr>
-        <p:spPr>
-          <a:xfrm>
-            <a:off x="7033565" y="4169664"/>
-            <a:ext cx="676656" cy="384048"/>
+          <p:cNvPr id="54" name="Text 52"/>
+          <p:cNvSpPr/>
+          <p:nvPr/>
+        </p:nvSpPr>
+        <p:spPr>
+          <a:xfrm>
+            <a:off x="6109855" y="4169664"/>
+            <a:ext cx="543652" cy="475488"/>
           </a:xfrm>
           <a:prstGeom prst="rect">
             <a:avLst/>
@@ -27639,6 +27564,138 @@
                 <a:ea typeface="Trebuchet MS" pitchFamily="34" charset="-122"/>
                 <a:cs typeface="Trebuchet MS" pitchFamily="34" charset="-120"/>
               </a:rPr>
+              <a:t>m</a:t>
+            </a:r>
+            <a:endParaRPr lang="en-US" sz="900" dirty="0"/>
+          </a:p>
+        </p:txBody>
+      </p:sp>
+      <p:sp>
+        <p:nvSpPr>
+          <p:cNvPr id="55" name="Shape 53"/>
+          <p:cNvSpPr/>
+          <p:nvPr/>
+        </p:nvSpPr>
+        <p:spPr>
+          <a:xfrm>
+            <a:off x="6703799" y="4169664"/>
+            <a:ext cx="543652" cy="475488"/>
+          </a:xfrm>
+          <a:prstGeom prst="rect">
+            <a:avLst>
+              <a:gd name="adj" fmla="val 7692"/>
+            </a:avLst>
+          </a:prstGeom>
+          <a:solidFill>
+            <a:srgbClr val="FFFFFF"/>
+          </a:solidFill>
+          <a:ln w="12700">
+            <a:solidFill>
+              <a:srgbClr val="DB2777"/>
+            </a:solidFill>
+            <a:prstDash val="solid"/>
+          </a:ln>
+        </p:spPr>
+      </p:sp>
+      <p:sp>
+        <p:nvSpPr>
+          <p:cNvPr id="56" name="Text 54"/>
+          <p:cNvSpPr/>
+          <p:nvPr/>
+        </p:nvSpPr>
+        <p:spPr>
+          <a:xfrm>
+            <a:off x="6703799" y="4169664"/>
+            <a:ext cx="543652" cy="475488"/>
+          </a:xfrm>
+          <a:prstGeom prst="rect">
+            <a:avLst/>
+          </a:prstGeom>
+          <a:noFill/>
+          <a:ln/>
+        </p:spPr>
+        <p:txBody>
+          <a:bodyPr wrap="square" lIns="0" tIns="0" rIns="0" bIns="0" rtlCol="0" anchor="ctr"/>
+          <a:lstStyle/>
+          <a:p>
+            <a:pPr algn="ctr" indent="0" marL="0">
+              <a:buNone/>
+            </a:pPr>
+            <a:r>
+              <a:rPr lang="en-US" sz="900" b="1" dirty="0">
+                <a:solidFill>
+                  <a:srgbClr val="9D174D"/>
+                </a:solidFill>
+                <a:latin typeface="Trebuchet MS" pitchFamily="34" charset="0"/>
+                <a:ea typeface="Trebuchet MS" pitchFamily="34" charset="-122"/>
+                <a:cs typeface="Trebuchet MS" pitchFamily="34" charset="-120"/>
+              </a:rPr>
+              <a:t>e</a:t>
+            </a:r>
+            <a:endParaRPr lang="en-US" sz="900" dirty="0"/>
+          </a:p>
+        </p:txBody>
+      </p:sp>
+      <p:sp>
+        <p:nvSpPr>
+          <p:cNvPr id="57" name="Shape 55"/>
+          <p:cNvSpPr/>
+          <p:nvPr/>
+        </p:nvSpPr>
+        <p:spPr>
+          <a:xfrm>
+            <a:off x="7297743" y="4169664"/>
+            <a:ext cx="543652" cy="475488"/>
+          </a:xfrm>
+          <a:prstGeom prst="rect">
+            <a:avLst>
+              <a:gd name="adj" fmla="val 7692"/>
+            </a:avLst>
+          </a:prstGeom>
+          <a:solidFill>
+            <a:srgbClr val="FFFFFF"/>
+          </a:solidFill>
+          <a:ln w="12700">
+            <a:solidFill>
+              <a:srgbClr val="DB2777"/>
+            </a:solidFill>
+            <a:prstDash val="solid"/>
+          </a:ln>
+        </p:spPr>
+      </p:sp>
+      <p:sp>
+        <p:nvSpPr>
+          <p:cNvPr id="58" name="Text 56"/>
+          <p:cNvSpPr/>
+          <p:nvPr/>
+        </p:nvSpPr>
+        <p:spPr>
+          <a:xfrm>
+            <a:off x="7297743" y="4169664"/>
+            <a:ext cx="543652" cy="475488"/>
+          </a:xfrm>
+          <a:prstGeom prst="rect">
+            <a:avLst/>
+          </a:prstGeom>
+          <a:noFill/>
+          <a:ln/>
+        </p:spPr>
+        <p:txBody>
+          <a:bodyPr wrap="square" lIns="0" tIns="0" rIns="0" bIns="0" rtlCol="0" anchor="ctr"/>
+          <a:lstStyle/>
+          <a:p>
+            <a:pPr algn="ctr" indent="0" marL="0">
+              <a:buNone/>
+            </a:pPr>
+            <a:r>
+              <a:rPr lang="en-US" sz="900" b="1" dirty="0">
+                <a:solidFill>
+                  <a:srgbClr val="9D174D"/>
+                </a:solidFill>
+                <a:latin typeface="Trebuchet MS" pitchFamily="34" charset="0"/>
+                <a:ea typeface="Trebuchet MS" pitchFamily="34" charset="-122"/>
+                <a:cs typeface="Trebuchet MS" pitchFamily="34" charset="-120"/>
+              </a:rPr>
               <a:t>n</a:t>
             </a:r>
             <a:endParaRPr lang="en-US" sz="900" dirty="0"/>
@@ -27647,18 +27704,18 @@
       </p:sp>
       <p:sp>
         <p:nvSpPr>
-          <p:cNvPr id="57" name="Shape 55"/>
-          <p:cNvSpPr/>
-          <p:nvPr/>
-        </p:nvSpPr>
-        <p:spPr>
-          <a:xfrm>
-            <a:off x="7759598" y="4169664"/>
-            <a:ext cx="676656" cy="384048"/>
+          <p:cNvPr id="59" name="Shape 57"/>
+          <p:cNvSpPr/>
+          <p:nvPr/>
+        </p:nvSpPr>
+        <p:spPr>
+          <a:xfrm>
+            <a:off x="7891688" y="4169664"/>
+            <a:ext cx="543652" cy="475488"/>
           </a:xfrm>
           <a:prstGeom prst="rect">
             <a:avLst>
-              <a:gd name="adj" fmla="val 9524"/>
+              <a:gd name="adj" fmla="val 7692"/>
             </a:avLst>
           </a:prstGeom>
           <a:solidFill>
@@ -27674,14 +27731,14 @@
       </p:sp>
       <p:sp>
         <p:nvSpPr>
-          <p:cNvPr id="58" name="Text 56"/>
-          <p:cNvSpPr/>
-          <p:nvPr/>
-        </p:nvSpPr>
-        <p:spPr>
-          <a:xfrm>
-            <a:off x="7759598" y="4169664"/>
-            <a:ext cx="676656" cy="384048"/>
+          <p:cNvPr id="60" name="Text 58"/>
+          <p:cNvSpPr/>
+          <p:nvPr/>
+        </p:nvSpPr>
+        <p:spPr>
+          <a:xfrm>
+            <a:off x="7891688" y="4169664"/>
+            <a:ext cx="543652" cy="475488"/>
           </a:xfrm>
           <a:prstGeom prst="rect">
             <a:avLst/>
@@ -31700,11 +31757,11 @@
         <p:spPr>
           <a:xfrm>
             <a:off x="1874520" y="4096512"/>
-            <a:ext cx="6903720" cy="804672"/>
+            <a:ext cx="6903720" cy="658368"/>
           </a:xfrm>
           <a:prstGeom prst="rect">
             <a:avLst>
-              <a:gd name="adj" fmla="val 6818"/>
+              <a:gd name="adj" fmla="val 8333"/>
             </a:avLst>
           </a:prstGeom>
           <a:solidFill>
@@ -31726,12 +31783,12 @@
         </p:nvSpPr>
         <p:spPr>
           <a:xfrm>
-            <a:off x="2254649" y="4169664"/>
-            <a:ext cx="685800" cy="384048"/>
+            <a:off x="2023872" y="4169664"/>
+            <a:ext cx="685800" cy="475488"/>
           </a:xfrm>
           <a:prstGeom prst="rect">
             <a:avLst>
-              <a:gd name="adj" fmla="val 9524"/>
+              <a:gd name="adj" fmla="val 7692"/>
             </a:avLst>
           </a:prstGeom>
           <a:solidFill>
@@ -31753,8 +31810,8 @@
         </p:nvSpPr>
         <p:spPr>
           <a:xfrm>
-            <a:off x="2254649" y="4169664"/>
-            <a:ext cx="685800" cy="384048"/>
+            <a:off x="2023872" y="4169664"/>
+            <a:ext cx="685800" cy="475488"/>
           </a:xfrm>
           <a:prstGeom prst="rect">
             <a:avLst/>
@@ -31792,12 +31849,12 @@
         </p:nvSpPr>
         <p:spPr>
           <a:xfrm>
-            <a:off x="3293146" y="4169664"/>
-            <a:ext cx="685800" cy="384048"/>
+            <a:off x="2831592" y="4169664"/>
+            <a:ext cx="685800" cy="475488"/>
           </a:xfrm>
           <a:prstGeom prst="rect">
             <a:avLst>
-              <a:gd name="adj" fmla="val 9524"/>
+              <a:gd name="adj" fmla="val 7692"/>
             </a:avLst>
           </a:prstGeom>
           <a:solidFill>
@@ -31819,8 +31876,8 @@
         </p:nvSpPr>
         <p:spPr>
           <a:xfrm>
-            <a:off x="3293146" y="4169664"/>
-            <a:ext cx="685800" cy="384048"/>
+            <a:off x="2831592" y="4169664"/>
+            <a:ext cx="685800" cy="475488"/>
           </a:xfrm>
           <a:prstGeom prst="rect">
             <a:avLst/>
@@ -31858,12 +31915,12 @@
         </p:nvSpPr>
         <p:spPr>
           <a:xfrm>
-            <a:off x="4331643" y="4169664"/>
-            <a:ext cx="685800" cy="384048"/>
+            <a:off x="3639312" y="4169664"/>
+            <a:ext cx="685800" cy="475488"/>
           </a:xfrm>
           <a:prstGeom prst="rect">
             <a:avLst>
-              <a:gd name="adj" fmla="val 9524"/>
+              <a:gd name="adj" fmla="val 7692"/>
             </a:avLst>
           </a:prstGeom>
           <a:solidFill>
@@ -31885,8 +31942,8 @@
         </p:nvSpPr>
         <p:spPr>
           <a:xfrm>
-            <a:off x="4331643" y="4169664"/>
-            <a:ext cx="685800" cy="384048"/>
+            <a:off x="3639312" y="4169664"/>
+            <a:ext cx="685800" cy="475488"/>
           </a:xfrm>
           <a:prstGeom prst="rect">
             <a:avLst/>
@@ -31924,12 +31981,12 @@
         </p:nvSpPr>
         <p:spPr>
           <a:xfrm>
-            <a:off x="5370141" y="4169664"/>
-            <a:ext cx="685800" cy="384048"/>
+            <a:off x="4447032" y="4169664"/>
+            <a:ext cx="685800" cy="475488"/>
           </a:xfrm>
           <a:prstGeom prst="rect">
             <a:avLst>
-              <a:gd name="adj" fmla="val 9524"/>
+              <a:gd name="adj" fmla="val 7692"/>
             </a:avLst>
           </a:prstGeom>
           <a:solidFill>
@@ -31951,8 +32008,8 @@
         </p:nvSpPr>
         <p:spPr>
           <a:xfrm>
-            <a:off x="5370141" y="4169664"/>
-            <a:ext cx="685800" cy="384048"/>
+            <a:off x="4447032" y="4169664"/>
+            <a:ext cx="685800" cy="475488"/>
           </a:xfrm>
           <a:prstGeom prst="rect">
             <a:avLst/>
@@ -31976,7 +32033,7 @@
                 <a:ea typeface="Trebuchet MS" pitchFamily="34" charset="-122"/>
                 <a:cs typeface="Trebuchet MS" pitchFamily="34" charset="-120"/>
               </a:rPr>
-              <a:t>pr</a:t>
+              <a:t>p</a:t>
             </a:r>
             <a:endParaRPr lang="en-US" sz="900" dirty="0"/>
           </a:p>
@@ -31990,12 +32047,12 @@
         </p:nvSpPr>
         <p:spPr>
           <a:xfrm>
-            <a:off x="6408638" y="4169664"/>
-            <a:ext cx="685800" cy="384048"/>
+            <a:off x="5254752" y="4169664"/>
+            <a:ext cx="685800" cy="475488"/>
           </a:xfrm>
           <a:prstGeom prst="rect">
             <a:avLst>
-              <a:gd name="adj" fmla="val 9524"/>
+              <a:gd name="adj" fmla="val 7692"/>
             </a:avLst>
           </a:prstGeom>
           <a:solidFill>
@@ -32017,8 +32074,8 @@
         </p:nvSpPr>
         <p:spPr>
           <a:xfrm>
-            <a:off x="6408638" y="4169664"/>
-            <a:ext cx="685800" cy="384048"/>
+            <a:off x="5254752" y="4169664"/>
+            <a:ext cx="685800" cy="475488"/>
           </a:xfrm>
           <a:prstGeom prst="rect">
             <a:avLst/>
@@ -32042,7 +32099,7 @@
                 <a:ea typeface="Trebuchet MS" pitchFamily="34" charset="-122"/>
                 <a:cs typeface="Trebuchet MS" pitchFamily="34" charset="-120"/>
               </a:rPr>
-              <a:t>oo</a:t>
+              <a:t>r</a:t>
             </a:r>
             <a:endParaRPr lang="en-US" sz="900" dirty="0"/>
           </a:p>
@@ -32050,57 +32107,18 @@
       </p:sp>
       <p:sp>
         <p:nvSpPr>
-          <p:cNvPr id="43" name="Text 41"/>
-          <p:cNvSpPr/>
-          <p:nvPr/>
-        </p:nvSpPr>
-        <p:spPr>
-          <a:xfrm>
-            <a:off x="6408638" y="4572000"/>
-            <a:ext cx="685800" cy="219456"/>
-          </a:xfrm>
-          <a:prstGeom prst="rect">
-            <a:avLst/>
-          </a:prstGeom>
-          <a:noFill/>
-          <a:ln/>
-        </p:spPr>
-        <p:txBody>
-          <a:bodyPr wrap="square" lIns="0" tIns="0" rIns="0" bIns="0" rtlCol="0" anchor="t"/>
-          <a:lstStyle/>
-          <a:p>
-            <a:pPr algn="ctr" indent="0" marL="0">
-              <a:buNone/>
-            </a:pPr>
-            <a:r>
-              <a:rPr lang="en-US" sz="750" i="1" dirty="0">
-                <a:solidFill>
-                  <a:srgbClr val="94A3B8"/>
-                </a:solidFill>
-                <a:latin typeface="Calibri" pitchFamily="34" charset="0"/>
-                <a:ea typeface="Calibri" pitchFamily="34" charset="-122"/>
-                <a:cs typeface="Calibri" pitchFamily="34" charset="-120"/>
-              </a:rPr>
-              <a:t>/oo/</a:t>
-            </a:r>
-            <a:endParaRPr lang="en-US" sz="750" dirty="0"/>
-          </a:p>
-        </p:txBody>
-      </p:sp>
-      <p:sp>
-        <p:nvSpPr>
-          <p:cNvPr id="44" name="Shape 42"/>
-          <p:cNvSpPr/>
-          <p:nvPr/>
-        </p:nvSpPr>
-        <p:spPr>
-          <a:xfrm>
-            <a:off x="7447135" y="4169664"/>
-            <a:ext cx="685800" cy="384048"/>
+          <p:cNvPr id="43" name="Shape 41"/>
+          <p:cNvSpPr/>
+          <p:nvPr/>
+        </p:nvSpPr>
+        <p:spPr>
+          <a:xfrm>
+            <a:off x="6062472" y="4169664"/>
+            <a:ext cx="685800" cy="475488"/>
           </a:xfrm>
           <a:prstGeom prst="rect">
             <a:avLst>
-              <a:gd name="adj" fmla="val 9524"/>
+              <a:gd name="adj" fmla="val 7692"/>
             </a:avLst>
           </a:prstGeom>
           <a:solidFill>
@@ -32116,14 +32134,14 @@
       </p:sp>
       <p:sp>
         <p:nvSpPr>
-          <p:cNvPr id="45" name="Text 43"/>
-          <p:cNvSpPr/>
-          <p:nvPr/>
-        </p:nvSpPr>
-        <p:spPr>
-          <a:xfrm>
-            <a:off x="7447135" y="4169664"/>
-            <a:ext cx="685800" cy="384048"/>
+          <p:cNvPr id="44" name="Text 42"/>
+          <p:cNvSpPr/>
+          <p:nvPr/>
+        </p:nvSpPr>
+        <p:spPr>
+          <a:xfrm>
+            <a:off x="6062472" y="4169664"/>
+            <a:ext cx="685800" cy="475488"/>
           </a:xfrm>
           <a:prstGeom prst="rect">
             <a:avLst/>
@@ -32147,7 +32165,7 @@
                 <a:ea typeface="Trebuchet MS" pitchFamily="34" charset="-122"/>
                 <a:cs typeface="Trebuchet MS" pitchFamily="34" charset="-120"/>
               </a:rPr>
-              <a:t>ve</a:t>
+              <a:t>o</a:t>
             </a:r>
             <a:endParaRPr lang="en-US" sz="900" dirty="0"/>
           </a:p>
@@ -32155,40 +32173,133 @@
       </p:sp>
       <p:sp>
         <p:nvSpPr>
+          <p:cNvPr id="45" name="Shape 43"/>
+          <p:cNvSpPr/>
+          <p:nvPr/>
+        </p:nvSpPr>
+        <p:spPr>
+          <a:xfrm>
+            <a:off x="6870192" y="4169664"/>
+            <a:ext cx="685800" cy="475488"/>
+          </a:xfrm>
+          <a:prstGeom prst="rect">
+            <a:avLst>
+              <a:gd name="adj" fmla="val 7692"/>
+            </a:avLst>
+          </a:prstGeom>
+          <a:solidFill>
+            <a:srgbClr val="FFFFFF"/>
+          </a:solidFill>
+          <a:ln w="12700">
+            <a:solidFill>
+              <a:srgbClr val="DB2777"/>
+            </a:solidFill>
+            <a:prstDash val="solid"/>
+          </a:ln>
+        </p:spPr>
+      </p:sp>
+      <p:sp>
+        <p:nvSpPr>
           <p:cNvPr id="46" name="Text 44"/>
           <p:cNvSpPr/>
           <p:nvPr/>
         </p:nvSpPr>
         <p:spPr>
           <a:xfrm>
-            <a:off x="7447135" y="4572000"/>
-            <a:ext cx="685800" cy="219456"/>
-          </a:xfrm>
-          <a:prstGeom prst="rect">
-            <a:avLst/>
-          </a:prstGeom>
-          <a:noFill/>
-          <a:ln/>
-        </p:spPr>
-        <p:txBody>
-          <a:bodyPr wrap="square" lIns="0" tIns="0" rIns="0" bIns="0" rtlCol="0" anchor="t"/>
-          <a:lstStyle/>
-          <a:p>
-            <a:pPr algn="ctr" indent="0" marL="0">
-              <a:buNone/>
-            </a:pPr>
-            <a:r>
-              <a:rPr lang="en-US" sz="750" i="1" dirty="0">
-                <a:solidFill>
-                  <a:srgbClr val="94A3B8"/>
-                </a:solidFill>
-                <a:latin typeface="Calibri" pitchFamily="34" charset="0"/>
-                <a:ea typeface="Calibri" pitchFamily="34" charset="-122"/>
-                <a:cs typeface="Calibri" pitchFamily="34" charset="-120"/>
-              </a:rPr>
-              <a:t>/v/</a:t>
-            </a:r>
-            <a:endParaRPr lang="en-US" sz="750" dirty="0"/>
+            <a:off x="6870192" y="4169664"/>
+            <a:ext cx="685800" cy="475488"/>
+          </a:xfrm>
+          <a:prstGeom prst="rect">
+            <a:avLst/>
+          </a:prstGeom>
+          <a:noFill/>
+          <a:ln/>
+        </p:spPr>
+        <p:txBody>
+          <a:bodyPr wrap="square" lIns="0" tIns="0" rIns="0" bIns="0" rtlCol="0" anchor="ctr"/>
+          <a:lstStyle/>
+          <a:p>
+            <a:pPr algn="ctr" indent="0" marL="0">
+              <a:buNone/>
+            </a:pPr>
+            <a:r>
+              <a:rPr lang="en-US" sz="900" b="1" dirty="0">
+                <a:solidFill>
+                  <a:srgbClr val="9D174D"/>
+                </a:solidFill>
+                <a:latin typeface="Trebuchet MS" pitchFamily="34" charset="0"/>
+                <a:ea typeface="Trebuchet MS" pitchFamily="34" charset="-122"/>
+                <a:cs typeface="Trebuchet MS" pitchFamily="34" charset="-120"/>
+              </a:rPr>
+              <a:t>v</a:t>
+            </a:r>
+            <a:endParaRPr lang="en-US" sz="900" dirty="0"/>
+          </a:p>
+        </p:txBody>
+      </p:sp>
+      <p:sp>
+        <p:nvSpPr>
+          <p:cNvPr id="47" name="Shape 45"/>
+          <p:cNvSpPr/>
+          <p:nvPr/>
+        </p:nvSpPr>
+        <p:spPr>
+          <a:xfrm>
+            <a:off x="7677912" y="4169664"/>
+            <a:ext cx="685800" cy="475488"/>
+          </a:xfrm>
+          <a:prstGeom prst="rect">
+            <a:avLst>
+              <a:gd name="adj" fmla="val 7692"/>
+            </a:avLst>
+          </a:prstGeom>
+          <a:solidFill>
+            <a:srgbClr val="FFFFFF"/>
+          </a:solidFill>
+          <a:ln w="12700">
+            <a:solidFill>
+              <a:srgbClr val="DB2777"/>
+            </a:solidFill>
+            <a:prstDash val="solid"/>
+          </a:ln>
+        </p:spPr>
+      </p:sp>
+      <p:sp>
+        <p:nvSpPr>
+          <p:cNvPr id="48" name="Text 46"/>
+          <p:cNvSpPr/>
+          <p:nvPr/>
+        </p:nvSpPr>
+        <p:spPr>
+          <a:xfrm>
+            <a:off x="7677912" y="4169664"/>
+            <a:ext cx="685800" cy="475488"/>
+          </a:xfrm>
+          <a:prstGeom prst="rect">
+            <a:avLst/>
+          </a:prstGeom>
+          <a:noFill/>
+          <a:ln/>
+        </p:spPr>
+        <p:txBody>
+          <a:bodyPr wrap="square" lIns="0" tIns="0" rIns="0" bIns="0" rtlCol="0" anchor="ctr"/>
+          <a:lstStyle/>
+          <a:p>
+            <a:pPr algn="ctr" indent="0" marL="0">
+              <a:buNone/>
+            </a:pPr>
+            <a:r>
+              <a:rPr lang="en-US" sz="900" b="1" dirty="0">
+                <a:solidFill>
+                  <a:srgbClr val="9D174D"/>
+                </a:solidFill>
+                <a:latin typeface="Trebuchet MS" pitchFamily="34" charset="0"/>
+                <a:ea typeface="Trebuchet MS" pitchFamily="34" charset="-122"/>
+                <a:cs typeface="Trebuchet MS" pitchFamily="34" charset="-120"/>
+              </a:rPr>
+              <a:t>e</a:t>
+            </a:r>
+            <a:endParaRPr lang="en-US" sz="900" dirty="0"/>
           </a:p>
         </p:txBody>
       </p:sp>
@@ -36443,7 +36554,7 @@
                 <a:ea typeface="Calibri" pitchFamily="34" charset="-122"/>
                 <a:cs typeface="Calibri" pitchFamily="34" charset="-120"/>
               </a:rPr>
-              <a:t>1.  The word 'disprove' means to agree that something is correct.</a:t>
+              <a:t>1.  The suffix '-ment' in 'improvement' means to do again.</a:t>
             </a:r>
             <a:endParaRPr lang="en-US" sz="1300" dirty="0"/>
           </a:p>
@@ -36721,7 +36832,7 @@
                 <a:ea typeface="Calibri" pitchFamily="34" charset="-122"/>
                 <a:cs typeface="Calibri" pitchFamily="34" charset="-120"/>
               </a:rPr>
-              <a:t>3.  The suffix '-ment' in 'improvement' means to do again.</a:t>
+              <a:t>3.  The root 'prove' comes from a Latin word meaning to test or show truth.</a:t>
             </a:r>
             <a:endParaRPr lang="en-US" sz="1300" dirty="0"/>
           </a:p>
@@ -36744,11 +36855,11 @@
             </a:avLst>
           </a:prstGeom>
           <a:solidFill>
-            <a:srgbClr val="FEE2E2"/>
-          </a:solidFill>
-          <a:ln w="12700">
-            <a:solidFill>
-              <a:srgbClr val="DC2626"/>
+            <a:srgbClr val="DCFCE7"/>
+          </a:solidFill>
+          <a:ln w="12700">
+            <a:solidFill>
+              <a:srgbClr val="16A34A"/>
             </a:solidFill>
             <a:prstDash val="solid"/>
           </a:ln>
@@ -36781,13 +36892,13 @@
             <a:r>
               <a:rPr lang="en-US" sz="1100" b="1" dirty="0">
                 <a:solidFill>
-                  <a:srgbClr val="DC2626"/>
+                  <a:srgbClr val="16A34A"/>
                 </a:solidFill>
                 <a:latin typeface="Trebuchet MS" pitchFamily="34" charset="0"/>
                 <a:ea typeface="Trebuchet MS" pitchFamily="34" charset="-122"/>
                 <a:cs typeface="Trebuchet MS" pitchFamily="34" charset="-120"/>
               </a:rPr>
-              <a:t>FALSE</a:t>
+              <a:t>TRUE</a:t>
             </a:r>
             <a:endParaRPr lang="en-US" sz="1100" dirty="0"/>
           </a:p>
@@ -36860,7 +36971,7 @@
                 <a:ea typeface="Calibri" pitchFamily="34" charset="-122"/>
                 <a:cs typeface="Calibri" pitchFamily="34" charset="-120"/>
               </a:rPr>
-              <a:t>4.  The root 'prove' comes from a Latin word meaning to test or show truth.</a:t>
+              <a:t>4.  The word 'disprove' means to agree that something is correct.</a:t>
             </a:r>
             <a:endParaRPr lang="en-US" sz="1300" dirty="0"/>
           </a:p>
@@ -36883,11 +36994,11 @@
             </a:avLst>
           </a:prstGeom>
           <a:solidFill>
-            <a:srgbClr val="DCFCE7"/>
-          </a:solidFill>
-          <a:ln w="12700">
-            <a:solidFill>
-              <a:srgbClr val="16A34A"/>
+            <a:srgbClr val="FEE2E2"/>
+          </a:solidFill>
+          <a:ln w="12700">
+            <a:solidFill>
+              <a:srgbClr val="DC2626"/>
             </a:solidFill>
             <a:prstDash val="solid"/>
           </a:ln>
@@ -36920,13 +37031,13 @@
             <a:r>
               <a:rPr lang="en-US" sz="1100" b="1" dirty="0">
                 <a:solidFill>
-                  <a:srgbClr val="16A34A"/>
+                  <a:srgbClr val="DC2626"/>
                 </a:solidFill>
                 <a:latin typeface="Trebuchet MS" pitchFamily="34" charset="0"/>
                 <a:ea typeface="Trebuchet MS" pitchFamily="34" charset="-122"/>
                 <a:cs typeface="Trebuchet MS" pitchFamily="34" charset="-120"/>
               </a:rPr>
-              <a:t>TRUE</a:t>
+              <a:t>FALSE</a:t>
             </a:r>
             <a:endParaRPr lang="en-US" sz="1100" dirty="0"/>
           </a:p>
